--- a/source/Instructor Week 4 Grams_Updated/Instructor Week 4 Grams_Updated.pptx
+++ b/source/Instructor Week 4 Grams_Updated/Instructor Week 4 Grams_Updated.pptx
@@ -3143,11 +3143,11 @@
       </p:sp>
       <p:sp>
         <p:nvSpPr>
-          <p:cNvPr id="3" name="Rounded Rectangle 2"/>
+          <p:cNvPr id="3" name="Rounded Rectangle 2">
+            <a:hlinkClick r:id="rId2"/>
+          </p:cNvPr>
           <p:cNvSpPr/>
-          <p:nvPr>
-            <a:hlinkClick r:id="rId2"/>
-          </p:nvPr>
+          <p:nvPr/>
         </p:nvSpPr>
         <p:spPr>
           <a:xfrm>
@@ -3229,11 +3229,11 @@
       </p:sp>
       <p:sp>
         <p:nvSpPr>
-          <p:cNvPr id="5" name="Rounded Rectangle 4"/>
+          <p:cNvPr id="5" name="Rounded Rectangle 4">
+            <a:hlinkClick r:id="rId4"/>
+          </p:cNvPr>
           <p:cNvSpPr/>
-          <p:nvPr>
-            <a:hlinkClick r:id="rId4"/>
-          </p:nvPr>
+          <p:nvPr/>
         </p:nvSpPr>
         <p:spPr>
           <a:xfrm>
@@ -3323,11 +3323,11 @@
       </p:sp>
       <p:sp>
         <p:nvSpPr>
-          <p:cNvPr id="7" name="Rounded Rectangle 6"/>
+          <p:cNvPr id="7" name="Rounded Rectangle 6">
+            <a:hlinkClick r:id="rId7"/>
+          </p:cNvPr>
           <p:cNvSpPr/>
-          <p:nvPr>
-            <a:hlinkClick r:id="rId7"/>
-          </p:nvPr>
+          <p:nvPr/>
         </p:nvSpPr>
         <p:spPr>
           <a:xfrm>
@@ -3409,11 +3409,11 @@
       </p:sp>
       <p:sp>
         <p:nvSpPr>
-          <p:cNvPr id="9" name="Rounded Rectangle 8"/>
+          <p:cNvPr id="9" name="Rounded Rectangle 8">
+            <a:hlinkClick r:id="rId9"/>
+          </p:cNvPr>
           <p:cNvSpPr/>
-          <p:nvPr>
-            <a:hlinkClick r:id="rId9"/>
-          </p:nvPr>
+          <p:nvPr/>
         </p:nvSpPr>
         <p:spPr>
           <a:xfrm>
@@ -3503,11 +3503,11 @@
       </p:sp>
       <p:sp>
         <p:nvSpPr>
-          <p:cNvPr id="11" name="Rounded Rectangle 10"/>
+          <p:cNvPr id="11" name="Rounded Rectangle 10">
+            <a:hlinkClick r:id="rId12"/>
+          </p:cNvPr>
           <p:cNvSpPr/>
-          <p:nvPr>
-            <a:hlinkClick r:id="rId12"/>
-          </p:nvPr>
+          <p:nvPr/>
         </p:nvSpPr>
         <p:spPr>
           <a:xfrm>
@@ -3589,11 +3589,11 @@
       </p:sp>
       <p:sp>
         <p:nvSpPr>
-          <p:cNvPr id="13" name="Rounded Rectangle 12"/>
+          <p:cNvPr id="13" name="Rounded Rectangle 12">
+            <a:hlinkClick r:id="rId14"/>
+          </p:cNvPr>
           <p:cNvSpPr/>
-          <p:nvPr>
-            <a:hlinkClick r:id="rId14"/>
-          </p:nvPr>
+          <p:nvPr/>
         </p:nvSpPr>
         <p:spPr>
           <a:xfrm>
@@ -3675,11 +3675,11 @@
       </p:sp>
       <p:sp>
         <p:nvSpPr>
-          <p:cNvPr id="15" name="Rounded Rectangle 14"/>
+          <p:cNvPr id="15" name="Rounded Rectangle 14">
+            <a:hlinkClick r:id="rId16"/>
+          </p:cNvPr>
           <p:cNvSpPr/>
-          <p:nvPr>
-            <a:hlinkClick r:id="rId16"/>
-          </p:nvPr>
+          <p:nvPr/>
         </p:nvSpPr>
         <p:spPr>
           <a:xfrm>
@@ -3761,11 +3761,11 @@
       </p:sp>
       <p:sp>
         <p:nvSpPr>
-          <p:cNvPr id="17" name="Rounded Rectangle 16"/>
+          <p:cNvPr id="17" name="Rounded Rectangle 16">
+            <a:hlinkClick r:id="rId18"/>
+          </p:cNvPr>
           <p:cNvSpPr/>
-          <p:nvPr>
-            <a:hlinkClick r:id="rId18"/>
-          </p:nvPr>
+          <p:nvPr/>
         </p:nvSpPr>
         <p:spPr>
           <a:xfrm>
@@ -3847,11 +3847,11 @@
       </p:sp>
       <p:sp>
         <p:nvSpPr>
-          <p:cNvPr id="19" name="Rounded Rectangle 18"/>
+          <p:cNvPr id="19" name="Rounded Rectangle 18">
+            <a:hlinkClick r:id="rId20"/>
+          </p:cNvPr>
           <p:cNvSpPr/>
-          <p:nvPr>
-            <a:hlinkClick r:id="rId20"/>
-          </p:nvPr>
+          <p:nvPr/>
         </p:nvSpPr>
         <p:spPr>
           <a:xfrm>
@@ -3941,11 +3941,11 @@
       </p:sp>
       <p:sp>
         <p:nvSpPr>
-          <p:cNvPr id="21" name="Rounded Rectangle 20"/>
+          <p:cNvPr id="21" name="Rounded Rectangle 20">
+            <a:hlinkClick r:id="rId23"/>
+          </p:cNvPr>
           <p:cNvSpPr/>
-          <p:nvPr>
-            <a:hlinkClick r:id="rId23"/>
-          </p:nvPr>
+          <p:nvPr/>
         </p:nvSpPr>
         <p:spPr>
           <a:xfrm>
@@ -4051,11 +4051,11 @@
       </p:sp>
       <p:sp>
         <p:nvSpPr>
-          <p:cNvPr id="23" name="Rounded Rectangle 22"/>
+          <p:cNvPr id="23" name="Rounded Rectangle 22">
+            <a:hlinkClick r:id="rId28"/>
+          </p:cNvPr>
           <p:cNvSpPr/>
-          <p:nvPr>
-            <a:hlinkClick r:id="rId28"/>
-          </p:nvPr>
+          <p:nvPr/>
         </p:nvSpPr>
         <p:spPr>
           <a:xfrm>
@@ -4145,11 +4145,11 @@
       </p:sp>
       <p:sp>
         <p:nvSpPr>
-          <p:cNvPr id="25" name="Rounded Rectangle 24"/>
+          <p:cNvPr id="25" name="Rounded Rectangle 24">
+            <a:hlinkClick r:id="rId31"/>
+          </p:cNvPr>
           <p:cNvSpPr/>
-          <p:nvPr>
-            <a:hlinkClick r:id="rId31"/>
-          </p:nvPr>
+          <p:nvPr/>
         </p:nvSpPr>
         <p:spPr>
           <a:xfrm>
@@ -4239,11 +4239,11 @@
       </p:sp>
       <p:sp>
         <p:nvSpPr>
-          <p:cNvPr id="27" name="Rounded Rectangle 26"/>
+          <p:cNvPr id="27" name="Rounded Rectangle 26">
+            <a:hlinkClick r:id="rId34"/>
+          </p:cNvPr>
           <p:cNvSpPr/>
-          <p:nvPr>
-            <a:hlinkClick r:id="rId34"/>
-          </p:nvPr>
+          <p:nvPr/>
         </p:nvSpPr>
         <p:spPr>
           <a:xfrm>
@@ -4333,11 +4333,11 @@
       </p:sp>
       <p:sp>
         <p:nvSpPr>
-          <p:cNvPr id="29" name="Rounded Rectangle 28"/>
+          <p:cNvPr id="29" name="Rounded Rectangle 28">
+            <a:hlinkClick r:id="rId37"/>
+          </p:cNvPr>
           <p:cNvSpPr/>
-          <p:nvPr>
-            <a:hlinkClick r:id="rId37"/>
-          </p:nvPr>
+          <p:nvPr/>
         </p:nvSpPr>
         <p:spPr>
           <a:xfrm>
@@ -4427,11 +4427,11 @@
       </p:sp>
       <p:sp>
         <p:nvSpPr>
-          <p:cNvPr id="31" name="Rounded Rectangle 30"/>
+          <p:cNvPr id="31" name="Rounded Rectangle 30">
+            <a:hlinkClick r:id="rId40"/>
+          </p:cNvPr>
           <p:cNvSpPr/>
-          <p:nvPr>
-            <a:hlinkClick r:id="rId40"/>
-          </p:nvPr>
+          <p:nvPr/>
         </p:nvSpPr>
         <p:spPr>
           <a:xfrm>
@@ -4590,11 +4590,11 @@
       </p:sp>
       <p:sp>
         <p:nvSpPr>
-          <p:cNvPr id="3" name="Rounded Rectangle 2"/>
+          <p:cNvPr id="3" name="Rounded Rectangle 2">
+            <a:hlinkClick r:id="rId2"/>
+          </p:cNvPr>
           <p:cNvSpPr/>
-          <p:nvPr>
-            <a:hlinkClick r:id="rId2"/>
-          </p:nvPr>
+          <p:nvPr/>
         </p:nvSpPr>
         <p:spPr>
           <a:xfrm>
@@ -4700,11 +4700,11 @@
       </p:sp>
       <p:sp>
         <p:nvSpPr>
-          <p:cNvPr id="5" name="Rounded Rectangle 4"/>
+          <p:cNvPr id="5" name="Rounded Rectangle 4">
+            <a:hlinkClick r:id="rId7"/>
+          </p:cNvPr>
           <p:cNvSpPr/>
-          <p:nvPr>
-            <a:hlinkClick r:id="rId7"/>
-          </p:nvPr>
+          <p:nvPr/>
         </p:nvSpPr>
         <p:spPr>
           <a:xfrm>
@@ -4810,11 +4810,11 @@
       </p:sp>
       <p:sp>
         <p:nvSpPr>
-          <p:cNvPr id="7" name="Rounded Rectangle 6"/>
+          <p:cNvPr id="7" name="Rounded Rectangle 6">
+            <a:hlinkClick r:id="rId12"/>
+          </p:cNvPr>
           <p:cNvSpPr/>
-          <p:nvPr>
-            <a:hlinkClick r:id="rId12"/>
-          </p:nvPr>
+          <p:nvPr/>
         </p:nvSpPr>
         <p:spPr>
           <a:xfrm>
@@ -4920,11 +4920,11 @@
       </p:sp>
       <p:sp>
         <p:nvSpPr>
-          <p:cNvPr id="9" name="Rounded Rectangle 8"/>
+          <p:cNvPr id="9" name="Rounded Rectangle 8">
+            <a:hlinkClick r:id="rId17"/>
+          </p:cNvPr>
           <p:cNvSpPr/>
-          <p:nvPr>
-            <a:hlinkClick r:id="rId17"/>
-          </p:nvPr>
+          <p:nvPr/>
         </p:nvSpPr>
         <p:spPr>
           <a:xfrm>
@@ -5030,11 +5030,11 @@
       </p:sp>
       <p:sp>
         <p:nvSpPr>
-          <p:cNvPr id="11" name="Rounded Rectangle 10"/>
+          <p:cNvPr id="11" name="Rounded Rectangle 10">
+            <a:hlinkClick r:id="rId22"/>
+          </p:cNvPr>
           <p:cNvSpPr/>
-          <p:nvPr>
-            <a:hlinkClick r:id="rId22"/>
-          </p:nvPr>
+          <p:nvPr/>
         </p:nvSpPr>
         <p:spPr>
           <a:xfrm>
@@ -5132,11 +5132,11 @@
       </p:sp>
       <p:sp>
         <p:nvSpPr>
-          <p:cNvPr id="13" name="Rounded Rectangle 12"/>
+          <p:cNvPr id="13" name="Rounded Rectangle 12">
+            <a:hlinkClick r:id="rId26"/>
+          </p:cNvPr>
           <p:cNvSpPr/>
-          <p:nvPr>
-            <a:hlinkClick r:id="rId26"/>
-          </p:nvPr>
+          <p:nvPr/>
         </p:nvSpPr>
         <p:spPr>
           <a:xfrm>
@@ -5234,11 +5234,11 @@
       </p:sp>
       <p:sp>
         <p:nvSpPr>
-          <p:cNvPr id="15" name="Rounded Rectangle 14"/>
+          <p:cNvPr id="15" name="Rounded Rectangle 14">
+            <a:hlinkClick r:id="rId30"/>
+          </p:cNvPr>
           <p:cNvSpPr/>
-          <p:nvPr>
-            <a:hlinkClick r:id="rId30"/>
-          </p:nvPr>
+          <p:nvPr/>
         </p:nvSpPr>
         <p:spPr>
           <a:xfrm>
@@ -5344,11 +5344,11 @@
       </p:sp>
       <p:sp>
         <p:nvSpPr>
-          <p:cNvPr id="17" name="Rounded Rectangle 16"/>
+          <p:cNvPr id="17" name="Rounded Rectangle 16">
+            <a:hlinkClick r:id="rId35"/>
+          </p:cNvPr>
           <p:cNvSpPr/>
-          <p:nvPr>
-            <a:hlinkClick r:id="rId35"/>
-          </p:nvPr>
+          <p:nvPr/>
         </p:nvSpPr>
         <p:spPr>
           <a:xfrm>
@@ -5446,11 +5446,11 @@
       </p:sp>
       <p:sp>
         <p:nvSpPr>
-          <p:cNvPr id="19" name="Rounded Rectangle 18"/>
+          <p:cNvPr id="19" name="Rounded Rectangle 18">
+            <a:hlinkClick r:id="rId39"/>
+          </p:cNvPr>
           <p:cNvSpPr/>
-          <p:nvPr>
-            <a:hlinkClick r:id="rId39"/>
-          </p:nvPr>
+          <p:nvPr/>
         </p:nvSpPr>
         <p:spPr>
           <a:xfrm>
@@ -5556,11 +5556,11 @@
       </p:sp>
       <p:sp>
         <p:nvSpPr>
-          <p:cNvPr id="21" name="Rounded Rectangle 20"/>
+          <p:cNvPr id="21" name="Rounded Rectangle 20">
+            <a:hlinkClick r:id="rId44"/>
+          </p:cNvPr>
           <p:cNvSpPr/>
-          <p:nvPr>
-            <a:hlinkClick r:id="rId44"/>
-          </p:nvPr>
+          <p:nvPr/>
         </p:nvSpPr>
         <p:spPr>
           <a:xfrm>
@@ -5666,11 +5666,11 @@
       </p:sp>
       <p:sp>
         <p:nvSpPr>
-          <p:cNvPr id="23" name="Rounded Rectangle 22"/>
+          <p:cNvPr id="23" name="Rounded Rectangle 22">
+            <a:hlinkClick r:id="rId49"/>
+          </p:cNvPr>
           <p:cNvSpPr/>
-          <p:nvPr>
-            <a:hlinkClick r:id="rId49"/>
-          </p:nvPr>
+          <p:nvPr/>
         </p:nvSpPr>
         <p:spPr>
           <a:xfrm>
@@ -5760,11 +5760,11 @@
       </p:sp>
       <p:sp>
         <p:nvSpPr>
-          <p:cNvPr id="25" name="Rounded Rectangle 24"/>
+          <p:cNvPr id="25" name="Rounded Rectangle 24">
+            <a:hlinkClick r:id="rId52"/>
+          </p:cNvPr>
           <p:cNvSpPr/>
-          <p:nvPr>
-            <a:hlinkClick r:id="rId52"/>
-          </p:nvPr>
+          <p:nvPr/>
         </p:nvSpPr>
         <p:spPr>
           <a:xfrm>
@@ -5862,11 +5862,11 @@
       </p:sp>
       <p:sp>
         <p:nvSpPr>
-          <p:cNvPr id="27" name="Rounded Rectangle 26"/>
+          <p:cNvPr id="27" name="Rounded Rectangle 26">
+            <a:hlinkClick r:id="rId56"/>
+          </p:cNvPr>
           <p:cNvSpPr/>
-          <p:nvPr>
-            <a:hlinkClick r:id="rId56"/>
-          </p:nvPr>
+          <p:nvPr/>
         </p:nvSpPr>
         <p:spPr>
           <a:xfrm>
@@ -5956,11 +5956,11 @@
       </p:sp>
       <p:sp>
         <p:nvSpPr>
-          <p:cNvPr id="29" name="Rounded Rectangle 28"/>
+          <p:cNvPr id="29" name="Rounded Rectangle 28">
+            <a:hlinkClick r:id="rId59"/>
+          </p:cNvPr>
           <p:cNvSpPr/>
-          <p:nvPr>
-            <a:hlinkClick r:id="rId59"/>
-          </p:nvPr>
+          <p:nvPr/>
         </p:nvSpPr>
         <p:spPr>
           <a:xfrm>
@@ -6066,11 +6066,11 @@
       </p:sp>
       <p:sp>
         <p:nvSpPr>
-          <p:cNvPr id="31" name="Rounded Rectangle 30"/>
+          <p:cNvPr id="31" name="Rounded Rectangle 30">
+            <a:hlinkClick r:id="rId64"/>
+          </p:cNvPr>
           <p:cNvSpPr/>
-          <p:nvPr>
-            <a:hlinkClick r:id="rId64"/>
-          </p:nvPr>
+          <p:nvPr/>
         </p:nvSpPr>
         <p:spPr>
           <a:xfrm>
@@ -6237,11 +6237,11 @@
       </p:sp>
       <p:sp>
         <p:nvSpPr>
-          <p:cNvPr id="3" name="Rounded Rectangle 2"/>
+          <p:cNvPr id="3" name="Rounded Rectangle 2">
+            <a:hlinkClick r:id="rId2"/>
+          </p:cNvPr>
           <p:cNvSpPr/>
-          <p:nvPr>
-            <a:hlinkClick r:id="rId2"/>
-          </p:nvPr>
+          <p:nvPr/>
         </p:nvSpPr>
         <p:spPr>
           <a:xfrm>
@@ -6347,11 +6347,11 @@
       </p:sp>
       <p:sp>
         <p:nvSpPr>
-          <p:cNvPr id="5" name="Rounded Rectangle 4"/>
+          <p:cNvPr id="5" name="Rounded Rectangle 4">
+            <a:hlinkClick r:id="rId7"/>
+          </p:cNvPr>
           <p:cNvSpPr/>
-          <p:nvPr>
-            <a:hlinkClick r:id="rId7"/>
-          </p:nvPr>
+          <p:nvPr/>
         </p:nvSpPr>
         <p:spPr>
           <a:xfrm>
@@ -6457,11 +6457,11 @@
       </p:sp>
       <p:sp>
         <p:nvSpPr>
-          <p:cNvPr id="7" name="Rounded Rectangle 6"/>
+          <p:cNvPr id="7" name="Rounded Rectangle 6">
+            <a:hlinkClick r:id="rId12"/>
+          </p:cNvPr>
           <p:cNvSpPr/>
-          <p:nvPr>
-            <a:hlinkClick r:id="rId12"/>
-          </p:nvPr>
+          <p:nvPr/>
         </p:nvSpPr>
         <p:spPr>
           <a:xfrm>
@@ -6543,11 +6543,11 @@
       </p:sp>
       <p:sp>
         <p:nvSpPr>
-          <p:cNvPr id="9" name="Rounded Rectangle 8"/>
+          <p:cNvPr id="9" name="Rounded Rectangle 8">
+            <a:hlinkClick r:id="rId14"/>
+          </p:cNvPr>
           <p:cNvSpPr/>
-          <p:nvPr>
-            <a:hlinkClick r:id="rId14"/>
-          </p:nvPr>
+          <p:nvPr/>
         </p:nvSpPr>
         <p:spPr>
           <a:xfrm>
@@ -6653,11 +6653,11 @@
       </p:sp>
       <p:sp>
         <p:nvSpPr>
-          <p:cNvPr id="11" name="Rounded Rectangle 10"/>
+          <p:cNvPr id="11" name="Rounded Rectangle 10">
+            <a:hlinkClick r:id="rId19"/>
+          </p:cNvPr>
           <p:cNvSpPr/>
-          <p:nvPr>
-            <a:hlinkClick r:id="rId19"/>
-          </p:nvPr>
+          <p:nvPr/>
         </p:nvSpPr>
         <p:spPr>
           <a:xfrm>

--- a/source/Instructor Week 4 Grams_Updated/Instructor Week 4 Grams_Updated.pptx
+++ b/source/Instructor Week 4 Grams_Updated/Instructor Week 4 Grams_Updated.pptx
@@ -8,6 +8,8 @@
     <p:sldId id="256" r:id="rId7"/>
     <p:sldId id="257" r:id="rId8"/>
     <p:sldId id="258" r:id="rId9"/>
+    <p:sldId id="259" r:id="rId10"/>
+    <p:sldId id="260" r:id="rId11"/>
   </p:sldIdLst>
   <p:sldSz cx="12188952" cy="6858000" type="screen4x3"/>
   <p:notesSz cx="6858000" cy="9144000"/>
@@ -3092,120 +3094,48 @@
       <p:grpSpPr/>
       <p:sp>
         <p:nvSpPr>
-          <p:cNvPr id="2" name="Rectangle 1"/>
-          <p:cNvSpPr/>
+          <p:cNvPr id="2" name="TextBox 1"/>
+          <p:cNvSpPr txBox="1"/>
           <p:nvPr/>
         </p:nvSpPr>
         <p:spPr>
           <a:xfrm>
-            <a:off x="0" y="0"/>
-            <a:ext cx="12188952" cy="548640"/>
+            <a:off x="914400" y="2377440"/>
+            <a:ext cx="10360152" cy="1280160"/>
           </a:xfrm>
           <a:prstGeom prst="rect">
             <a:avLst/>
           </a:prstGeom>
-          <a:solidFill>
-            <a:srgbClr val="1F3A5F"/>
-          </a:solidFill>
-          <a:ln>
-            <a:noFill/>
-          </a:ln>
-        </p:spPr>
-        <p:style>
-          <a:lnRef idx="1">
-            <a:schemeClr val="accent1"/>
-          </a:lnRef>
-          <a:fillRef idx="3">
-            <a:schemeClr val="accent1"/>
-          </a:fillRef>
-          <a:effectRef idx="2">
-            <a:schemeClr val="accent1"/>
-          </a:effectRef>
-          <a:fontRef idx="minor">
-            <a:schemeClr val="lt1"/>
-          </a:fontRef>
-        </p:style>
-        <p:txBody>
-          <a:bodyPr rtlCol="0" anchor="ctr" lIns="182880" rIns="182880"/>
+          <a:noFill/>
+        </p:spPr>
+        <p:txBody>
+          <a:bodyPr wrap="square">
+            <a:spAutoFit/>
+          </a:bodyPr>
           <a:lstStyle/>
           <a:p>
             <a:pPr algn="ctr"/>
             <a:r>
-              <a:rPr sz="2000" b="1">
-                <a:solidFill>
-                  <a:srgbClr val="FFFFFF"/>
-                </a:solidFill>
-              </a:rPr>
-              <a:t>Instructor Week 4 Grams_Updated — Page 1 of 3</a:t>
-            </a:r>
-          </a:p>
-        </p:txBody>
-      </p:sp>
-      <p:sp>
-        <p:nvSpPr>
-          <p:cNvPr id="3" name="Rounded Rectangle 2"/>
-          <p:cNvSpPr/>
-          <p:nvPr>
-            <a:hlinkClick r:id="rId2"/>
-          </p:nvPr>
-        </p:nvSpPr>
-        <p:spPr>
-          <a:xfrm>
-            <a:off x="365760" y="731520"/>
-            <a:ext cx="2200046" cy="365760"/>
-          </a:xfrm>
-          <a:prstGeom prst="roundRect">
-            <a:avLst/>
-          </a:prstGeom>
-          <a:solidFill>
-            <a:srgbClr val="E8EEF7"/>
-          </a:solidFill>
-          <a:ln>
-            <a:solidFill>
-              <a:srgbClr val="1F3A5F"/>
-            </a:solidFill>
-          </a:ln>
-        </p:spPr>
-        <p:style>
-          <a:lnRef idx="1">
-            <a:schemeClr val="accent1"/>
-          </a:lnRef>
-          <a:fillRef idx="3">
-            <a:schemeClr val="accent1"/>
-          </a:fillRef>
-          <a:effectRef idx="2">
-            <a:schemeClr val="accent1"/>
-          </a:effectRef>
-          <a:fontRef idx="minor">
-            <a:schemeClr val="lt1"/>
-          </a:fontRef>
-        </p:style>
-        <p:txBody>
-          <a:bodyPr rtlCol="0" anchor="ctr" lIns="45720" rIns="45720"/>
-          <a:lstStyle/>
-          <a:p>
-            <a:pPr algn="ctr"/>
-            <a:r>
-              <a:rPr sz="900">
+              <a:rPr sz="4000" b="1">
                 <a:solidFill>
                   <a:srgbClr val="1F3A5F"/>
                 </a:solidFill>
               </a:rPr>
-              <a:t>Gram 1: FR A-wing, Category 3, Hoth</a:t>
-            </a:r>
-          </a:p>
-        </p:txBody>
-      </p:sp>
-      <p:sp>
-        <p:nvSpPr>
-          <p:cNvPr id="4" name="TextBox 3"/>
+              <a:t>Welcome to Instructor Week 4 Grams_Updated</a:t>
+            </a:r>
+          </a:p>
+        </p:txBody>
+      </p:sp>
+      <p:sp>
+        <p:nvSpPr>
+          <p:cNvPr id="3" name="TextBox 2"/>
           <p:cNvSpPr txBox="1"/>
           <p:nvPr/>
         </p:nvSpPr>
         <p:spPr>
           <a:xfrm>
-            <a:off x="365760" y="1115568"/>
-            <a:ext cx="2200046" cy="1447800"/>
+            <a:off x="914400" y="3840480"/>
+            <a:ext cx="10360152" cy="731520"/>
           </a:xfrm>
           <a:prstGeom prst="rect">
             <a:avLst/>
@@ -3213,1308 +3143,19 @@
           <a:noFill/>
         </p:spPr>
         <p:txBody>
-          <a:bodyPr wrap="square">
+          <a:bodyPr wrap="none">
             <a:spAutoFit/>
           </a:bodyPr>
           <a:lstStyle/>
           <a:p>
-            <a:r>
-              <a:rPr sz="800">
-                <a:hlinkClick r:id="rId3"/>
-              </a:rPr>
-              <a:t>Lofar 1</a:t>
-            </a:r>
-          </a:p>
-        </p:txBody>
-      </p:sp>
-      <p:sp>
-        <p:nvSpPr>
-          <p:cNvPr id="5" name="Rounded Rectangle 4"/>
-          <p:cNvSpPr/>
-          <p:nvPr>
-            <a:hlinkClick r:id="rId4"/>
-          </p:nvPr>
-        </p:nvSpPr>
-        <p:spPr>
-          <a:xfrm>
-            <a:off x="2657246" y="731520"/>
-            <a:ext cx="2200046" cy="365760"/>
-          </a:xfrm>
-          <a:prstGeom prst="roundRect">
-            <a:avLst/>
-          </a:prstGeom>
-          <a:solidFill>
-            <a:srgbClr val="E8EEF7"/>
-          </a:solidFill>
-          <a:ln>
-            <a:solidFill>
-              <a:srgbClr val="1F3A5F"/>
-            </a:solidFill>
-          </a:ln>
-        </p:spPr>
-        <p:style>
-          <a:lnRef idx="1">
-            <a:schemeClr val="accent1"/>
-          </a:lnRef>
-          <a:fillRef idx="3">
-            <a:schemeClr val="accent1"/>
-          </a:fillRef>
-          <a:effectRef idx="2">
-            <a:schemeClr val="accent1"/>
-          </a:effectRef>
-          <a:fontRef idx="minor">
-            <a:schemeClr val="lt1"/>
-          </a:fontRef>
-        </p:style>
-        <p:txBody>
-          <a:bodyPr rtlCol="0" anchor="ctr" lIns="45720" rIns="45720"/>
-          <a:lstStyle/>
-          <a:p>
             <a:pPr algn="ctr"/>
             <a:r>
-              <a:rPr sz="900">
+              <a:rPr sz="2400">
                 <a:solidFill>
                   <a:srgbClr val="1F3A5F"/>
                 </a:solidFill>
               </a:rPr>
-              <a:t>Gram 2: FR Imperial-class, Category 3, Romulus</a:t>
-            </a:r>
-          </a:p>
-        </p:txBody>
-      </p:sp>
-      <p:sp>
-        <p:nvSpPr>
-          <p:cNvPr id="6" name="TextBox 5"/>
-          <p:cNvSpPr txBox="1"/>
-          <p:nvPr/>
-        </p:nvSpPr>
-        <p:spPr>
-          <a:xfrm>
-            <a:off x="2657246" y="1115568"/>
-            <a:ext cx="2200046" cy="1447800"/>
-          </a:xfrm>
-          <a:prstGeom prst="rect">
-            <a:avLst/>
-          </a:prstGeom>
-          <a:noFill/>
-        </p:spPr>
-        <p:txBody>
-          <a:bodyPr wrap="square">
-            <a:spAutoFit/>
-          </a:bodyPr>
-          <a:lstStyle/>
-          <a:p>
-            <a:r>
-              <a:rPr sz="800">
-                <a:hlinkClick r:id="rId5"/>
-              </a:rPr>
-              <a:t>Lofar 1</a:t>
-            </a:r>
-          </a:p>
-          <a:p>
-            <a:r>
-              <a:rPr sz="800">
-                <a:hlinkClick r:id="rId6"/>
-              </a:rPr>
-              <a:t>Lofar 2</a:t>
-            </a:r>
-          </a:p>
-        </p:txBody>
-      </p:sp>
-      <p:sp>
-        <p:nvSpPr>
-          <p:cNvPr id="7" name="Rounded Rectangle 6"/>
-          <p:cNvSpPr/>
-          <p:nvPr>
-            <a:hlinkClick r:id="rId7"/>
-          </p:nvPr>
-        </p:nvSpPr>
-        <p:spPr>
-          <a:xfrm>
-            <a:off x="4948732" y="731520"/>
-            <a:ext cx="2200046" cy="365760"/>
-          </a:xfrm>
-          <a:prstGeom prst="roundRect">
-            <a:avLst/>
-          </a:prstGeom>
-          <a:solidFill>
-            <a:srgbClr val="E8EEF7"/>
-          </a:solidFill>
-          <a:ln>
-            <a:solidFill>
-              <a:srgbClr val="1F3A5F"/>
-            </a:solidFill>
-          </a:ln>
-        </p:spPr>
-        <p:style>
-          <a:lnRef idx="1">
-            <a:schemeClr val="accent1"/>
-          </a:lnRef>
-          <a:fillRef idx="3">
-            <a:schemeClr val="accent1"/>
-          </a:fillRef>
-          <a:effectRef idx="2">
-            <a:schemeClr val="accent1"/>
-          </a:effectRef>
-          <a:fontRef idx="minor">
-            <a:schemeClr val="lt1"/>
-          </a:fontRef>
-        </p:style>
-        <p:txBody>
-          <a:bodyPr rtlCol="0" anchor="ctr" lIns="45720" rIns="45720"/>
-          <a:lstStyle/>
-          <a:p>
-            <a:pPr algn="ctr"/>
-            <a:r>
-              <a:rPr sz="900">
-                <a:solidFill>
-                  <a:srgbClr val="1F3A5F"/>
-                </a:solidFill>
-              </a:rPr>
-              <a:t>Gram 3: FR Reliant, Category 1, Coruscant</a:t>
-            </a:r>
-          </a:p>
-        </p:txBody>
-      </p:sp>
-      <p:sp>
-        <p:nvSpPr>
-          <p:cNvPr id="8" name="TextBox 7"/>
-          <p:cNvSpPr txBox="1"/>
-          <p:nvPr/>
-        </p:nvSpPr>
-        <p:spPr>
-          <a:xfrm>
-            <a:off x="4948732" y="1115568"/>
-            <a:ext cx="2200046" cy="1447800"/>
-          </a:xfrm>
-          <a:prstGeom prst="rect">
-            <a:avLst/>
-          </a:prstGeom>
-          <a:noFill/>
-        </p:spPr>
-        <p:txBody>
-          <a:bodyPr wrap="square">
-            <a:spAutoFit/>
-          </a:bodyPr>
-          <a:lstStyle/>
-          <a:p>
-            <a:r>
-              <a:rPr sz="800">
-                <a:hlinkClick r:id="rId8"/>
-              </a:rPr>
-              <a:t>Lofar 1</a:t>
-            </a:r>
-          </a:p>
-        </p:txBody>
-      </p:sp>
-      <p:sp>
-        <p:nvSpPr>
-          <p:cNvPr id="9" name="Rounded Rectangle 8"/>
-          <p:cNvSpPr/>
-          <p:nvPr>
-            <a:hlinkClick r:id="rId9"/>
-          </p:nvPr>
-        </p:nvSpPr>
-        <p:spPr>
-          <a:xfrm>
-            <a:off x="7240219" y="731520"/>
-            <a:ext cx="2200046" cy="365760"/>
-          </a:xfrm>
-          <a:prstGeom prst="roundRect">
-            <a:avLst/>
-          </a:prstGeom>
-          <a:solidFill>
-            <a:srgbClr val="E8EEF7"/>
-          </a:solidFill>
-          <a:ln>
-            <a:solidFill>
-              <a:srgbClr val="1F3A5F"/>
-            </a:solidFill>
-          </a:ln>
-        </p:spPr>
-        <p:style>
-          <a:lnRef idx="1">
-            <a:schemeClr val="accent1"/>
-          </a:lnRef>
-          <a:fillRef idx="3">
-            <a:schemeClr val="accent1"/>
-          </a:fillRef>
-          <a:effectRef idx="2">
-            <a:schemeClr val="accent1"/>
-          </a:effectRef>
-          <a:fontRef idx="minor">
-            <a:schemeClr val="lt1"/>
-          </a:fontRef>
-        </p:style>
-        <p:txBody>
-          <a:bodyPr rtlCol="0" anchor="ctr" lIns="45720" rIns="45720"/>
-          <a:lstStyle/>
-          <a:p>
-            <a:pPr algn="ctr"/>
-            <a:r>
-              <a:rPr sz="900">
-                <a:solidFill>
-                  <a:srgbClr val="1F3A5F"/>
-                </a:solidFill>
-              </a:rPr>
-              <a:t>Gram 4: FR Y-wing, Category 4, Caprica</a:t>
-            </a:r>
-          </a:p>
-        </p:txBody>
-      </p:sp>
-      <p:sp>
-        <p:nvSpPr>
-          <p:cNvPr id="10" name="TextBox 9"/>
-          <p:cNvSpPr txBox="1"/>
-          <p:nvPr/>
-        </p:nvSpPr>
-        <p:spPr>
-          <a:xfrm>
-            <a:off x="7240219" y="1115568"/>
-            <a:ext cx="2200046" cy="1447800"/>
-          </a:xfrm>
-          <a:prstGeom prst="rect">
-            <a:avLst/>
-          </a:prstGeom>
-          <a:noFill/>
-        </p:spPr>
-        <p:txBody>
-          <a:bodyPr wrap="square">
-            <a:spAutoFit/>
-          </a:bodyPr>
-          <a:lstStyle/>
-          <a:p>
-            <a:r>
-              <a:rPr sz="800">
-                <a:hlinkClick r:id="rId10"/>
-              </a:rPr>
-              <a:t>Lofar 1</a:t>
-            </a:r>
-          </a:p>
-          <a:p>
-            <a:r>
-              <a:rPr sz="800">
-                <a:hlinkClick r:id="rId11"/>
-              </a:rPr>
-              <a:t>Lofar 2</a:t>
-            </a:r>
-          </a:p>
-        </p:txBody>
-      </p:sp>
-      <p:sp>
-        <p:nvSpPr>
-          <p:cNvPr id="11" name="Rounded Rectangle 10"/>
-          <p:cNvSpPr/>
-          <p:nvPr>
-            <a:hlinkClick r:id="rId12"/>
-          </p:nvPr>
-        </p:nvSpPr>
-        <p:spPr>
-          <a:xfrm>
-            <a:off x="9531705" y="731520"/>
-            <a:ext cx="2200046" cy="365760"/>
-          </a:xfrm>
-          <a:prstGeom prst="roundRect">
-            <a:avLst/>
-          </a:prstGeom>
-          <a:solidFill>
-            <a:srgbClr val="E8EEF7"/>
-          </a:solidFill>
-          <a:ln>
-            <a:solidFill>
-              <a:srgbClr val="1F3A5F"/>
-            </a:solidFill>
-          </a:ln>
-        </p:spPr>
-        <p:style>
-          <a:lnRef idx="1">
-            <a:schemeClr val="accent1"/>
-          </a:lnRef>
-          <a:fillRef idx="3">
-            <a:schemeClr val="accent1"/>
-          </a:fillRef>
-          <a:effectRef idx="2">
-            <a:schemeClr val="accent1"/>
-          </a:effectRef>
-          <a:fontRef idx="minor">
-            <a:schemeClr val="lt1"/>
-          </a:fontRef>
-        </p:style>
-        <p:txBody>
-          <a:bodyPr rtlCol="0" anchor="ctr" lIns="45720" rIns="45720"/>
-          <a:lstStyle/>
-          <a:p>
-            <a:pPr algn="ctr"/>
-            <a:r>
-              <a:rPr sz="900">
-                <a:solidFill>
-                  <a:srgbClr val="1F3A5F"/>
-                </a:solidFill>
-              </a:rPr>
-              <a:t>Gram 5: FR Excelsior, Category 2, Risa</a:t>
-            </a:r>
-          </a:p>
-        </p:txBody>
-      </p:sp>
-      <p:sp>
-        <p:nvSpPr>
-          <p:cNvPr id="12" name="TextBox 11"/>
-          <p:cNvSpPr txBox="1"/>
-          <p:nvPr/>
-        </p:nvSpPr>
-        <p:spPr>
-          <a:xfrm>
-            <a:off x="9531705" y="1115568"/>
-            <a:ext cx="2200046" cy="1447800"/>
-          </a:xfrm>
-          <a:prstGeom prst="rect">
-            <a:avLst/>
-          </a:prstGeom>
-          <a:noFill/>
-        </p:spPr>
-        <p:txBody>
-          <a:bodyPr wrap="square">
-            <a:spAutoFit/>
-          </a:bodyPr>
-          <a:lstStyle/>
-          <a:p>
-            <a:r>
-              <a:rPr sz="800">
-                <a:hlinkClick r:id="rId13"/>
-              </a:rPr>
-              <a:t>Lofar 1</a:t>
-            </a:r>
-          </a:p>
-        </p:txBody>
-      </p:sp>
-      <p:sp>
-        <p:nvSpPr>
-          <p:cNvPr id="13" name="Rounded Rectangle 12"/>
-          <p:cNvSpPr/>
-          <p:nvPr>
-            <a:hlinkClick r:id="rId14"/>
-          </p:nvPr>
-        </p:nvSpPr>
-        <p:spPr>
-          <a:xfrm>
-            <a:off x="365760" y="2682240"/>
-            <a:ext cx="2200046" cy="365760"/>
-          </a:xfrm>
-          <a:prstGeom prst="roundRect">
-            <a:avLst/>
-          </a:prstGeom>
-          <a:solidFill>
-            <a:srgbClr val="E8EEF7"/>
-          </a:solidFill>
-          <a:ln>
-            <a:solidFill>
-              <a:srgbClr val="1F3A5F"/>
-            </a:solidFill>
-          </a:ln>
-        </p:spPr>
-        <p:style>
-          <a:lnRef idx="1">
-            <a:schemeClr val="accent1"/>
-          </a:lnRef>
-          <a:fillRef idx="3">
-            <a:schemeClr val="accent1"/>
-          </a:fillRef>
-          <a:effectRef idx="2">
-            <a:schemeClr val="accent1"/>
-          </a:effectRef>
-          <a:fontRef idx="minor">
-            <a:schemeClr val="lt1"/>
-          </a:fontRef>
-        </p:style>
-        <p:txBody>
-          <a:bodyPr rtlCol="0" anchor="ctr" lIns="45720" rIns="45720"/>
-          <a:lstStyle/>
-          <a:p>
-            <a:pPr algn="ctr"/>
-            <a:r>
-              <a:rPr sz="900">
-                <a:solidFill>
-                  <a:srgbClr val="1F3A5F"/>
-                </a:solidFill>
-              </a:rPr>
-              <a:t>Gram 6: FR Venator-class, Category 2, Caprica</a:t>
-            </a:r>
-          </a:p>
-        </p:txBody>
-      </p:sp>
-      <p:sp>
-        <p:nvSpPr>
-          <p:cNvPr id="14" name="TextBox 13"/>
-          <p:cNvSpPr txBox="1"/>
-          <p:nvPr/>
-        </p:nvSpPr>
-        <p:spPr>
-          <a:xfrm>
-            <a:off x="365760" y="3066288"/>
-            <a:ext cx="2200046" cy="1447800"/>
-          </a:xfrm>
-          <a:prstGeom prst="rect">
-            <a:avLst/>
-          </a:prstGeom>
-          <a:noFill/>
-        </p:spPr>
-        <p:txBody>
-          <a:bodyPr wrap="square">
-            <a:spAutoFit/>
-          </a:bodyPr>
-          <a:lstStyle/>
-          <a:p>
-            <a:r>
-              <a:rPr sz="800">
-                <a:hlinkClick r:id="rId15"/>
-              </a:rPr>
-              <a:t>Lofar 1</a:t>
-            </a:r>
-          </a:p>
-        </p:txBody>
-      </p:sp>
-      <p:sp>
-        <p:nvSpPr>
-          <p:cNvPr id="15" name="Rounded Rectangle 14"/>
-          <p:cNvSpPr/>
-          <p:nvPr>
-            <a:hlinkClick r:id="rId16"/>
-          </p:nvPr>
-        </p:nvSpPr>
-        <p:spPr>
-          <a:xfrm>
-            <a:off x="2657246" y="2682240"/>
-            <a:ext cx="2200046" cy="365760"/>
-          </a:xfrm>
-          <a:prstGeom prst="roundRect">
-            <a:avLst/>
-          </a:prstGeom>
-          <a:solidFill>
-            <a:srgbClr val="E8EEF7"/>
-          </a:solidFill>
-          <a:ln>
-            <a:solidFill>
-              <a:srgbClr val="1F3A5F"/>
-            </a:solidFill>
-          </a:ln>
-        </p:spPr>
-        <p:style>
-          <a:lnRef idx="1">
-            <a:schemeClr val="accent1"/>
-          </a:lnRef>
-          <a:fillRef idx="3">
-            <a:schemeClr val="accent1"/>
-          </a:fillRef>
-          <a:effectRef idx="2">
-            <a:schemeClr val="accent1"/>
-          </a:effectRef>
-          <a:fontRef idx="minor">
-            <a:schemeClr val="lt1"/>
-          </a:fontRef>
-        </p:style>
-        <p:txBody>
-          <a:bodyPr rtlCol="0" anchor="ctr" lIns="45720" rIns="45720"/>
-          <a:lstStyle/>
-          <a:p>
-            <a:pPr algn="ctr"/>
-            <a:r>
-              <a:rPr sz="900">
-                <a:solidFill>
-                  <a:srgbClr val="1F3A5F"/>
-                </a:solidFill>
-              </a:rPr>
-              <a:t>Gram 7: FR Galaxy-class, Category 1, Kobol</a:t>
-            </a:r>
-          </a:p>
-        </p:txBody>
-      </p:sp>
-      <p:sp>
-        <p:nvSpPr>
-          <p:cNvPr id="16" name="TextBox 15"/>
-          <p:cNvSpPr txBox="1"/>
-          <p:nvPr/>
-        </p:nvSpPr>
-        <p:spPr>
-          <a:xfrm>
-            <a:off x="2657246" y="3066288"/>
-            <a:ext cx="2200046" cy="1447800"/>
-          </a:xfrm>
-          <a:prstGeom prst="rect">
-            <a:avLst/>
-          </a:prstGeom>
-          <a:noFill/>
-        </p:spPr>
-        <p:txBody>
-          <a:bodyPr wrap="square">
-            <a:spAutoFit/>
-          </a:bodyPr>
-          <a:lstStyle/>
-          <a:p>
-            <a:r>
-              <a:rPr sz="800">
-                <a:hlinkClick r:id="rId17"/>
-              </a:rPr>
-              <a:t>Lofar 1</a:t>
-            </a:r>
-          </a:p>
-        </p:txBody>
-      </p:sp>
-      <p:sp>
-        <p:nvSpPr>
-          <p:cNvPr id="17" name="Rounded Rectangle 16"/>
-          <p:cNvSpPr/>
-          <p:nvPr>
-            <a:hlinkClick r:id="rId18"/>
-          </p:nvPr>
-        </p:nvSpPr>
-        <p:spPr>
-          <a:xfrm>
-            <a:off x="4948732" y="2682240"/>
-            <a:ext cx="2200046" cy="365760"/>
-          </a:xfrm>
-          <a:prstGeom prst="roundRect">
-            <a:avLst/>
-          </a:prstGeom>
-          <a:solidFill>
-            <a:srgbClr val="E8EEF7"/>
-          </a:solidFill>
-          <a:ln>
-            <a:solidFill>
-              <a:srgbClr val="1F3A5F"/>
-            </a:solidFill>
-          </a:ln>
-        </p:spPr>
-        <p:style>
-          <a:lnRef idx="1">
-            <a:schemeClr val="accent1"/>
-          </a:lnRef>
-          <a:fillRef idx="3">
-            <a:schemeClr val="accent1"/>
-          </a:fillRef>
-          <a:effectRef idx="2">
-            <a:schemeClr val="accent1"/>
-          </a:effectRef>
-          <a:fontRef idx="minor">
-            <a:schemeClr val="lt1"/>
-          </a:fontRef>
-        </p:style>
-        <p:txBody>
-          <a:bodyPr rtlCol="0" anchor="ctr" lIns="45720" rIns="45720"/>
-          <a:lstStyle/>
-          <a:p>
-            <a:pPr algn="ctr"/>
-            <a:r>
-              <a:rPr sz="900">
-                <a:solidFill>
-                  <a:srgbClr val="1F3A5F"/>
-                </a:solidFill>
-              </a:rPr>
-              <a:t>Gram 8: FR Tantive IV, Category 2, Romulus</a:t>
-            </a:r>
-          </a:p>
-        </p:txBody>
-      </p:sp>
-      <p:sp>
-        <p:nvSpPr>
-          <p:cNvPr id="18" name="TextBox 17"/>
-          <p:cNvSpPr txBox="1"/>
-          <p:nvPr/>
-        </p:nvSpPr>
-        <p:spPr>
-          <a:xfrm>
-            <a:off x="4948732" y="3066288"/>
-            <a:ext cx="2200046" cy="1447800"/>
-          </a:xfrm>
-          <a:prstGeom prst="rect">
-            <a:avLst/>
-          </a:prstGeom>
-          <a:noFill/>
-        </p:spPr>
-        <p:txBody>
-          <a:bodyPr wrap="square">
-            <a:spAutoFit/>
-          </a:bodyPr>
-          <a:lstStyle/>
-          <a:p>
-            <a:r>
-              <a:rPr sz="800">
-                <a:hlinkClick r:id="rId19"/>
-              </a:rPr>
-              <a:t>Lofar 1</a:t>
-            </a:r>
-          </a:p>
-        </p:txBody>
-      </p:sp>
-      <p:sp>
-        <p:nvSpPr>
-          <p:cNvPr id="19" name="Rounded Rectangle 18"/>
-          <p:cNvSpPr/>
-          <p:nvPr>
-            <a:hlinkClick r:id="rId20"/>
-          </p:nvPr>
-        </p:nvSpPr>
-        <p:spPr>
-          <a:xfrm>
-            <a:off x="7240219" y="2682240"/>
-            <a:ext cx="2200046" cy="365760"/>
-          </a:xfrm>
-          <a:prstGeom prst="roundRect">
-            <a:avLst/>
-          </a:prstGeom>
-          <a:solidFill>
-            <a:srgbClr val="E8EEF7"/>
-          </a:solidFill>
-          <a:ln>
-            <a:solidFill>
-              <a:srgbClr val="1F3A5F"/>
-            </a:solidFill>
-          </a:ln>
-        </p:spPr>
-        <p:style>
-          <a:lnRef idx="1">
-            <a:schemeClr val="accent1"/>
-          </a:lnRef>
-          <a:fillRef idx="3">
-            <a:schemeClr val="accent1"/>
-          </a:fillRef>
-          <a:effectRef idx="2">
-            <a:schemeClr val="accent1"/>
-          </a:effectRef>
-          <a:fontRef idx="minor">
-            <a:schemeClr val="lt1"/>
-          </a:fontRef>
-        </p:style>
-        <p:txBody>
-          <a:bodyPr rtlCol="0" anchor="ctr" lIns="45720" rIns="45720"/>
-          <a:lstStyle/>
-          <a:p>
-            <a:pPr algn="ctr"/>
-            <a:r>
-              <a:rPr sz="900">
-                <a:solidFill>
-                  <a:srgbClr val="1F3A5F"/>
-                </a:solidFill>
-              </a:rPr>
-              <a:t>Gram 10: FR Discovery, Category 3, Naboo</a:t>
-            </a:r>
-          </a:p>
-        </p:txBody>
-      </p:sp>
-      <p:sp>
-        <p:nvSpPr>
-          <p:cNvPr id="20" name="TextBox 19"/>
-          <p:cNvSpPr txBox="1"/>
-          <p:nvPr/>
-        </p:nvSpPr>
-        <p:spPr>
-          <a:xfrm>
-            <a:off x="7240219" y="3066288"/>
-            <a:ext cx="2200046" cy="1447800"/>
-          </a:xfrm>
-          <a:prstGeom prst="rect">
-            <a:avLst/>
-          </a:prstGeom>
-          <a:noFill/>
-        </p:spPr>
-        <p:txBody>
-          <a:bodyPr wrap="square">
-            <a:spAutoFit/>
-          </a:bodyPr>
-          <a:lstStyle/>
-          <a:p>
-            <a:r>
-              <a:rPr sz="800">
-                <a:hlinkClick r:id="rId21"/>
-              </a:rPr>
-              <a:t>Lofar 1</a:t>
-            </a:r>
-          </a:p>
-          <a:p>
-            <a:r>
-              <a:rPr sz="800">
-                <a:hlinkClick r:id="rId22"/>
-              </a:rPr>
-              <a:t>Lofar 2</a:t>
-            </a:r>
-          </a:p>
-        </p:txBody>
-      </p:sp>
-      <p:sp>
-        <p:nvSpPr>
-          <p:cNvPr id="21" name="Rounded Rectangle 20"/>
-          <p:cNvSpPr/>
-          <p:nvPr>
-            <a:hlinkClick r:id="rId23"/>
-          </p:nvPr>
-        </p:nvSpPr>
-        <p:spPr>
-          <a:xfrm>
-            <a:off x="9531705" y="2682240"/>
-            <a:ext cx="2200046" cy="365760"/>
-          </a:xfrm>
-          <a:prstGeom prst="roundRect">
-            <a:avLst/>
-          </a:prstGeom>
-          <a:solidFill>
-            <a:srgbClr val="E8EEF7"/>
-          </a:solidFill>
-          <a:ln>
-            <a:solidFill>
-              <a:srgbClr val="1F3A5F"/>
-            </a:solidFill>
-          </a:ln>
-        </p:spPr>
-        <p:style>
-          <a:lnRef idx="1">
-            <a:schemeClr val="accent1"/>
-          </a:lnRef>
-          <a:fillRef idx="3">
-            <a:schemeClr val="accent1"/>
-          </a:fillRef>
-          <a:effectRef idx="2">
-            <a:schemeClr val="accent1"/>
-          </a:effectRef>
-          <a:fontRef idx="minor">
-            <a:schemeClr val="lt1"/>
-          </a:fontRef>
-        </p:style>
-        <p:txBody>
-          <a:bodyPr rtlCol="0" anchor="ctr" lIns="45720" rIns="45720"/>
-          <a:lstStyle/>
-          <a:p>
-            <a:pPr algn="ctr"/>
-            <a:r>
-              <a:rPr sz="900">
-                <a:solidFill>
-                  <a:srgbClr val="1F3A5F"/>
-                </a:solidFill>
-              </a:rPr>
-              <a:t>Gram 11: FR Constitution-class, Category 2, Dank</a:t>
-            </a:r>
-          </a:p>
-        </p:txBody>
-      </p:sp>
-      <p:sp>
-        <p:nvSpPr>
-          <p:cNvPr id="22" name="TextBox 21"/>
-          <p:cNvSpPr txBox="1"/>
-          <p:nvPr/>
-        </p:nvSpPr>
-        <p:spPr>
-          <a:xfrm>
-            <a:off x="9531705" y="3066288"/>
-            <a:ext cx="2200046" cy="1447800"/>
-          </a:xfrm>
-          <a:prstGeom prst="rect">
-            <a:avLst/>
-          </a:prstGeom>
-          <a:noFill/>
-        </p:spPr>
-        <p:txBody>
-          <a:bodyPr wrap="square">
-            <a:spAutoFit/>
-          </a:bodyPr>
-          <a:lstStyle/>
-          <a:p>
-            <a:r>
-              <a:rPr sz="800">
-                <a:hlinkClick r:id="rId24"/>
-              </a:rPr>
-              <a:t>Lofar 1</a:t>
-            </a:r>
-          </a:p>
-          <a:p>
-            <a:r>
-              <a:rPr sz="800">
-                <a:hlinkClick r:id="rId25"/>
-              </a:rPr>
-              <a:t>Lofar 2</a:t>
-            </a:r>
-          </a:p>
-          <a:p>
-            <a:r>
-              <a:rPr sz="800">
-                <a:hlinkClick r:id="rId26"/>
-              </a:rPr>
-              <a:t>Lofar 3</a:t>
-            </a:r>
-          </a:p>
-          <a:p>
-            <a:r>
-              <a:rPr sz="800">
-                <a:hlinkClick r:id="rId27"/>
-              </a:rPr>
-              <a:t>Lofar 4</a:t>
-            </a:r>
-          </a:p>
-        </p:txBody>
-      </p:sp>
-      <p:sp>
-        <p:nvSpPr>
-          <p:cNvPr id="23" name="Rounded Rectangle 22"/>
-          <p:cNvSpPr/>
-          <p:nvPr>
-            <a:hlinkClick r:id="rId28"/>
-          </p:nvPr>
-        </p:nvSpPr>
-        <p:spPr>
-          <a:xfrm>
-            <a:off x="365760" y="4632960"/>
-            <a:ext cx="2200046" cy="365760"/>
-          </a:xfrm>
-          <a:prstGeom prst="roundRect">
-            <a:avLst/>
-          </a:prstGeom>
-          <a:solidFill>
-            <a:srgbClr val="E8EEF7"/>
-          </a:solidFill>
-          <a:ln>
-            <a:solidFill>
-              <a:srgbClr val="1F3A5F"/>
-            </a:solidFill>
-          </a:ln>
-        </p:spPr>
-        <p:style>
-          <a:lnRef idx="1">
-            <a:schemeClr val="accent1"/>
-          </a:lnRef>
-          <a:fillRef idx="3">
-            <a:schemeClr val="accent1"/>
-          </a:fillRef>
-          <a:effectRef idx="2">
-            <a:schemeClr val="accent1"/>
-          </a:effectRef>
-          <a:fontRef idx="minor">
-            <a:schemeClr val="lt1"/>
-          </a:fontRef>
-        </p:style>
-        <p:txBody>
-          <a:bodyPr rtlCol="0" anchor="ctr" lIns="45720" rIns="45720"/>
-          <a:lstStyle/>
-          <a:p>
-            <a:pPr algn="ctr"/>
-            <a:r>
-              <a:rPr sz="900">
-                <a:solidFill>
-                  <a:srgbClr val="1F3A5F"/>
-                </a:solidFill>
-              </a:rPr>
-              <a:t>Gram 12: FR TIE Bomber, Category 3, Vulcan</a:t>
-            </a:r>
-          </a:p>
-        </p:txBody>
-      </p:sp>
-      <p:sp>
-        <p:nvSpPr>
-          <p:cNvPr id="24" name="TextBox 23"/>
-          <p:cNvSpPr txBox="1"/>
-          <p:nvPr/>
-        </p:nvSpPr>
-        <p:spPr>
-          <a:xfrm>
-            <a:off x="365760" y="5017008"/>
-            <a:ext cx="2200046" cy="1447800"/>
-          </a:xfrm>
-          <a:prstGeom prst="rect">
-            <a:avLst/>
-          </a:prstGeom>
-          <a:noFill/>
-        </p:spPr>
-        <p:txBody>
-          <a:bodyPr wrap="square">
-            <a:spAutoFit/>
-          </a:bodyPr>
-          <a:lstStyle/>
-          <a:p>
-            <a:r>
-              <a:rPr sz="800">
-                <a:hlinkClick r:id="rId29"/>
-              </a:rPr>
-              <a:t>Lofar 1</a:t>
-            </a:r>
-          </a:p>
-          <a:p>
-            <a:r>
-              <a:rPr sz="800">
-                <a:hlinkClick r:id="rId30"/>
-              </a:rPr>
-              <a:t>Lofar 2</a:t>
-            </a:r>
-          </a:p>
-        </p:txBody>
-      </p:sp>
-      <p:sp>
-        <p:nvSpPr>
-          <p:cNvPr id="25" name="Rounded Rectangle 24"/>
-          <p:cNvSpPr/>
-          <p:nvPr>
-            <a:hlinkClick r:id="rId31"/>
-          </p:nvPr>
-        </p:nvSpPr>
-        <p:spPr>
-          <a:xfrm>
-            <a:off x="2657246" y="4632960"/>
-            <a:ext cx="2200046" cy="365760"/>
-          </a:xfrm>
-          <a:prstGeom prst="roundRect">
-            <a:avLst/>
-          </a:prstGeom>
-          <a:solidFill>
-            <a:srgbClr val="E8EEF7"/>
-          </a:solidFill>
-          <a:ln>
-            <a:solidFill>
-              <a:srgbClr val="1F3A5F"/>
-            </a:solidFill>
-          </a:ln>
-        </p:spPr>
-        <p:style>
-          <a:lnRef idx="1">
-            <a:schemeClr val="accent1"/>
-          </a:lnRef>
-          <a:fillRef idx="3">
-            <a:schemeClr val="accent1"/>
-          </a:fillRef>
-          <a:effectRef idx="2">
-            <a:schemeClr val="accent1"/>
-          </a:effectRef>
-          <a:fontRef idx="minor">
-            <a:schemeClr val="lt1"/>
-          </a:fontRef>
-        </p:style>
-        <p:txBody>
-          <a:bodyPr rtlCol="0" anchor="ctr" lIns="45720" rIns="45720"/>
-          <a:lstStyle/>
-          <a:p>
-            <a:pPr algn="ctr"/>
-            <a:r>
-              <a:rPr sz="900">
-                <a:solidFill>
-                  <a:srgbClr val="1F3A5F"/>
-                </a:solidFill>
-              </a:rPr>
-              <a:t>Gram 13: FR B-wing, Category 4, Coruscant</a:t>
-            </a:r>
-          </a:p>
-        </p:txBody>
-      </p:sp>
-      <p:sp>
-        <p:nvSpPr>
-          <p:cNvPr id="26" name="TextBox 25"/>
-          <p:cNvSpPr txBox="1"/>
-          <p:nvPr/>
-        </p:nvSpPr>
-        <p:spPr>
-          <a:xfrm>
-            <a:off x="2657246" y="5017008"/>
-            <a:ext cx="2200046" cy="1447800"/>
-          </a:xfrm>
-          <a:prstGeom prst="rect">
-            <a:avLst/>
-          </a:prstGeom>
-          <a:noFill/>
-        </p:spPr>
-        <p:txBody>
-          <a:bodyPr wrap="square">
-            <a:spAutoFit/>
-          </a:bodyPr>
-          <a:lstStyle/>
-          <a:p>
-            <a:r>
-              <a:rPr sz="800">
-                <a:hlinkClick r:id="rId32"/>
-              </a:rPr>
-              <a:t>Lofar 1</a:t>
-            </a:r>
-          </a:p>
-          <a:p>
-            <a:r>
-              <a:rPr sz="800">
-                <a:hlinkClick r:id="rId33"/>
-              </a:rPr>
-              <a:t>Lofar 2</a:t>
-            </a:r>
-          </a:p>
-        </p:txBody>
-      </p:sp>
-      <p:sp>
-        <p:nvSpPr>
-          <p:cNvPr id="27" name="Rounded Rectangle 26"/>
-          <p:cNvSpPr/>
-          <p:nvPr>
-            <a:hlinkClick r:id="rId34"/>
-          </p:nvPr>
-        </p:nvSpPr>
-        <p:spPr>
-          <a:xfrm>
-            <a:off x="4948732" y="4632960"/>
-            <a:ext cx="2200046" cy="365760"/>
-          </a:xfrm>
-          <a:prstGeom prst="roundRect">
-            <a:avLst/>
-          </a:prstGeom>
-          <a:solidFill>
-            <a:srgbClr val="E8EEF7"/>
-          </a:solidFill>
-          <a:ln>
-            <a:solidFill>
-              <a:srgbClr val="1F3A5F"/>
-            </a:solidFill>
-          </a:ln>
-        </p:spPr>
-        <p:style>
-          <a:lnRef idx="1">
-            <a:schemeClr val="accent1"/>
-          </a:lnRef>
-          <a:fillRef idx="3">
-            <a:schemeClr val="accent1"/>
-          </a:fillRef>
-          <a:effectRef idx="2">
-            <a:schemeClr val="accent1"/>
-          </a:effectRef>
-          <a:fontRef idx="minor">
-            <a:schemeClr val="lt1"/>
-          </a:fontRef>
-        </p:style>
-        <p:txBody>
-          <a:bodyPr rtlCol="0" anchor="ctr" lIns="45720" rIns="45720"/>
-          <a:lstStyle/>
-          <a:p>
-            <a:pPr algn="ctr"/>
-            <a:r>
-              <a:rPr sz="900">
-                <a:solidFill>
-                  <a:srgbClr val="1F3A5F"/>
-                </a:solidFill>
-              </a:rPr>
-              <a:t>Gram 14: FR Tantive IV, Category 4, Kronos</a:t>
-            </a:r>
-          </a:p>
-        </p:txBody>
-      </p:sp>
-      <p:sp>
-        <p:nvSpPr>
-          <p:cNvPr id="28" name="TextBox 27"/>
-          <p:cNvSpPr txBox="1"/>
-          <p:nvPr/>
-        </p:nvSpPr>
-        <p:spPr>
-          <a:xfrm>
-            <a:off x="4948732" y="5017008"/>
-            <a:ext cx="2200046" cy="1447800"/>
-          </a:xfrm>
-          <a:prstGeom prst="rect">
-            <a:avLst/>
-          </a:prstGeom>
-          <a:noFill/>
-        </p:spPr>
-        <p:txBody>
-          <a:bodyPr wrap="square">
-            <a:spAutoFit/>
-          </a:bodyPr>
-          <a:lstStyle/>
-          <a:p>
-            <a:r>
-              <a:rPr sz="800">
-                <a:hlinkClick r:id="rId35"/>
-              </a:rPr>
-              <a:t>Lofar 1</a:t>
-            </a:r>
-          </a:p>
-          <a:p>
-            <a:r>
-              <a:rPr sz="800">
-                <a:hlinkClick r:id="rId36"/>
-              </a:rPr>
-              <a:t>Lofar 2</a:t>
-            </a:r>
-          </a:p>
-        </p:txBody>
-      </p:sp>
-      <p:sp>
-        <p:nvSpPr>
-          <p:cNvPr id="29" name="Rounded Rectangle 28"/>
-          <p:cNvSpPr/>
-          <p:nvPr>
-            <a:hlinkClick r:id="rId37"/>
-          </p:nvPr>
-        </p:nvSpPr>
-        <p:spPr>
-          <a:xfrm>
-            <a:off x="7240219" y="4632960"/>
-            <a:ext cx="2200046" cy="365760"/>
-          </a:xfrm>
-          <a:prstGeom prst="roundRect">
-            <a:avLst/>
-          </a:prstGeom>
-          <a:solidFill>
-            <a:srgbClr val="E8EEF7"/>
-          </a:solidFill>
-          <a:ln>
-            <a:solidFill>
-              <a:srgbClr val="1F3A5F"/>
-            </a:solidFill>
-          </a:ln>
-        </p:spPr>
-        <p:style>
-          <a:lnRef idx="1">
-            <a:schemeClr val="accent1"/>
-          </a:lnRef>
-          <a:fillRef idx="3">
-            <a:schemeClr val="accent1"/>
-          </a:fillRef>
-          <a:effectRef idx="2">
-            <a:schemeClr val="accent1"/>
-          </a:effectRef>
-          <a:fontRef idx="minor">
-            <a:schemeClr val="lt1"/>
-          </a:fontRef>
-        </p:style>
-        <p:txBody>
-          <a:bodyPr rtlCol="0" anchor="ctr" lIns="45720" rIns="45720"/>
-          <a:lstStyle/>
-          <a:p>
-            <a:pPr algn="ctr"/>
-            <a:r>
-              <a:rPr sz="900">
-                <a:solidFill>
-                  <a:srgbClr val="1F3A5F"/>
-                </a:solidFill>
-              </a:rPr>
-              <a:t>Gram 15: Acclamator-class contact bearing 308, codename Kronos</a:t>
-            </a:r>
-          </a:p>
-        </p:txBody>
-      </p:sp>
-      <p:sp>
-        <p:nvSpPr>
-          <p:cNvPr id="30" name="TextBox 29"/>
-          <p:cNvSpPr txBox="1"/>
-          <p:nvPr/>
-        </p:nvSpPr>
-        <p:spPr>
-          <a:xfrm>
-            <a:off x="7240219" y="5017008"/>
-            <a:ext cx="2200046" cy="1447800"/>
-          </a:xfrm>
-          <a:prstGeom prst="rect">
-            <a:avLst/>
-          </a:prstGeom>
-          <a:noFill/>
-        </p:spPr>
-        <p:txBody>
-          <a:bodyPr wrap="square">
-            <a:spAutoFit/>
-          </a:bodyPr>
-          <a:lstStyle/>
-          <a:p>
-            <a:r>
-              <a:rPr sz="800">
-                <a:hlinkClick r:id="rId38"/>
-              </a:rPr>
-              <a:t>Lofar 1</a:t>
-            </a:r>
-          </a:p>
-          <a:p>
-            <a:r>
-              <a:rPr sz="800">
-                <a:hlinkClick r:id="rId39"/>
-              </a:rPr>
-              <a:t>Lofar 2</a:t>
-            </a:r>
-          </a:p>
-        </p:txBody>
-      </p:sp>
-      <p:sp>
-        <p:nvSpPr>
-          <p:cNvPr id="31" name="Rounded Rectangle 30"/>
-          <p:cNvSpPr/>
-          <p:nvPr>
-            <a:hlinkClick r:id="rId40"/>
-          </p:nvPr>
-        </p:nvSpPr>
-        <p:spPr>
-          <a:xfrm>
-            <a:off x="9531705" y="4632960"/>
-            <a:ext cx="2200046" cy="365760"/>
-          </a:xfrm>
-          <a:prstGeom prst="roundRect">
-            <a:avLst/>
-          </a:prstGeom>
-          <a:solidFill>
-            <a:srgbClr val="E8EEF7"/>
-          </a:solidFill>
-          <a:ln>
-            <a:solidFill>
-              <a:srgbClr val="1F3A5F"/>
-            </a:solidFill>
-          </a:ln>
-        </p:spPr>
-        <p:style>
-          <a:lnRef idx="1">
-            <a:schemeClr val="accent1"/>
-          </a:lnRef>
-          <a:fillRef idx="3">
-            <a:schemeClr val="accent1"/>
-          </a:fillRef>
-          <a:effectRef idx="2">
-            <a:schemeClr val="accent1"/>
-          </a:effectRef>
-          <a:fontRef idx="minor">
-            <a:schemeClr val="lt1"/>
-          </a:fontRef>
-        </p:style>
-        <p:txBody>
-          <a:bodyPr rtlCol="0" anchor="ctr" lIns="45720" rIns="45720"/>
-          <a:lstStyle/>
-          <a:p>
-            <a:pPr algn="ctr"/>
-            <a:r>
-              <a:rPr sz="900">
-                <a:solidFill>
-                  <a:srgbClr val="1F3A5F"/>
-                </a:solidFill>
-              </a:rPr>
-              <a:t>Gram 17: FR Imperial-class, Category 3, Hoth</a:t>
-            </a:r>
-          </a:p>
-        </p:txBody>
-      </p:sp>
-      <p:sp>
-        <p:nvSpPr>
-          <p:cNvPr id="32" name="TextBox 31"/>
-          <p:cNvSpPr txBox="1"/>
-          <p:nvPr/>
-        </p:nvSpPr>
-        <p:spPr>
-          <a:xfrm>
-            <a:off x="9531705" y="5017008"/>
-            <a:ext cx="2200046" cy="1447800"/>
-          </a:xfrm>
-          <a:prstGeom prst="rect">
-            <a:avLst/>
-          </a:prstGeom>
-          <a:noFill/>
-        </p:spPr>
-        <p:txBody>
-          <a:bodyPr wrap="square">
-            <a:spAutoFit/>
-          </a:bodyPr>
-          <a:lstStyle/>
-          <a:p>
-            <a:r>
-              <a:rPr sz="800">
-                <a:hlinkClick r:id="rId41"/>
-              </a:rPr>
-              <a:t>Lofar 1</a:t>
-            </a:r>
-          </a:p>
-          <a:p>
-            <a:r>
-              <a:rPr sz="800">
-                <a:hlinkClick r:id="rId42"/>
-              </a:rPr>
-              <a:t>Lofar 2</a:t>
+              <a:t>Instructor Version</a:t>
             </a:r>
           </a:p>
         </p:txBody>
@@ -4583,7 +3224,7 @@
                   <a:srgbClr val="FFFFFF"/>
                 </a:solidFill>
               </a:rPr>
-              <a:t>Instructor Week 4 Grams_Updated — Page 2 of 3</a:t>
+              <a:t>Instructor Week 4 Grams_Updated — Page 1 of 3</a:t>
             </a:r>
           </a:p>
         </p:txBody>
@@ -4638,7 +3279,7 @@
                   <a:srgbClr val="1F3A5F"/>
                 </a:solidFill>
               </a:rPr>
-              <a:t>Gram 18: FR Venator-class, Category 3, Tantive</a:t>
+              <a:t>Gram 1: FR A-wing, Category 3, Hoth</a:t>
             </a:r>
           </a:p>
         </p:txBody>
@@ -4672,30 +3313,6 @@
               <a:t>Lofar 1</a:t>
             </a:r>
           </a:p>
-          <a:p>
-            <a:r>
-              <a:rPr sz="800">
-                <a:hlinkClick r:id="rId4"/>
-              </a:rPr>
-              <a:t>Lofar 2</a:t>
-            </a:r>
-          </a:p>
-          <a:p>
-            <a:r>
-              <a:rPr sz="800">
-                <a:hlinkClick r:id="rId5"/>
-              </a:rPr>
-              <a:t>Lofar 3</a:t>
-            </a:r>
-          </a:p>
-          <a:p>
-            <a:r>
-              <a:rPr sz="800">
-                <a:hlinkClick r:id="rId6"/>
-              </a:rPr>
-              <a:t>Lofar 4</a:t>
-            </a:r>
-          </a:p>
         </p:txBody>
       </p:sp>
       <p:sp>
@@ -4703,7 +3320,7 @@
           <p:cNvPr id="5" name="Rounded Rectangle 4"/>
           <p:cNvSpPr/>
           <p:nvPr>
-            <a:hlinkClick r:id="rId7"/>
+            <a:hlinkClick r:id="rId4"/>
           </p:nvPr>
         </p:nvSpPr>
         <p:spPr>
@@ -4748,7 +3365,7 @@
                   <a:srgbClr val="1F3A5F"/>
                 </a:solidFill>
               </a:rPr>
-              <a:t>Gram 20: FR Discovery, Category 3, Naboo</a:t>
+              <a:t>Gram 2: FR Imperial-class, Category 3, Romulus</a:t>
             </a:r>
           </a:p>
         </p:txBody>
@@ -4777,7 +3394,7 @@
           <a:p>
             <a:r>
               <a:rPr sz="800">
-                <a:hlinkClick r:id="rId8"/>
+                <a:hlinkClick r:id="rId5"/>
               </a:rPr>
               <a:t>Lofar 1</a:t>
             </a:r>
@@ -4785,25 +3402,9 @@
           <a:p>
             <a:r>
               <a:rPr sz="800">
-                <a:hlinkClick r:id="rId9"/>
+                <a:hlinkClick r:id="rId6"/>
               </a:rPr>
               <a:t>Lofar 2</a:t>
-            </a:r>
-          </a:p>
-          <a:p>
-            <a:r>
-              <a:rPr sz="800">
-                <a:hlinkClick r:id="rId10"/>
-              </a:rPr>
-              <a:t>Lofar 3</a:t>
-            </a:r>
-          </a:p>
-          <a:p>
-            <a:r>
-              <a:rPr sz="800">
-                <a:hlinkClick r:id="rId11"/>
-              </a:rPr>
-              <a:t>Lofar 4</a:t>
             </a:r>
           </a:p>
         </p:txBody>
@@ -4813,7 +3414,7 @@
           <p:cNvPr id="7" name="Rounded Rectangle 6"/>
           <p:cNvSpPr/>
           <p:nvPr>
-            <a:hlinkClick r:id="rId12"/>
+            <a:hlinkClick r:id="rId7"/>
           </p:nvPr>
         </p:nvSpPr>
         <p:spPr>
@@ -4858,7 +3459,7 @@
                   <a:srgbClr val="1F3A5F"/>
                 </a:solidFill>
               </a:rPr>
-              <a:t>Gram 21: FR A-wing, Category 3, Betazed</a:t>
+              <a:t>Gram 3: FR Reliant, Category 1, Coruscant</a:t>
             </a:r>
           </a:p>
         </p:txBody>
@@ -4887,33 +3488,9 @@
           <a:p>
             <a:r>
               <a:rPr sz="800">
-                <a:hlinkClick r:id="rId13"/>
+                <a:hlinkClick r:id="rId8"/>
               </a:rPr>
               <a:t>Lofar 1</a:t>
-            </a:r>
-          </a:p>
-          <a:p>
-            <a:r>
-              <a:rPr sz="800">
-                <a:hlinkClick r:id="rId14"/>
-              </a:rPr>
-              <a:t>Lofar 2</a:t>
-            </a:r>
-          </a:p>
-          <a:p>
-            <a:r>
-              <a:rPr sz="800">
-                <a:hlinkClick r:id="rId15"/>
-              </a:rPr>
-              <a:t>Lofar 3</a:t>
-            </a:r>
-          </a:p>
-          <a:p>
-            <a:r>
-              <a:rPr sz="800">
-                <a:hlinkClick r:id="rId16"/>
-              </a:rPr>
-              <a:t>Lofar 4</a:t>
             </a:r>
           </a:p>
         </p:txBody>
@@ -4923,7 +3500,7 @@
           <p:cNvPr id="9" name="Rounded Rectangle 8"/>
           <p:cNvSpPr/>
           <p:nvPr>
-            <a:hlinkClick r:id="rId17"/>
+            <a:hlinkClick r:id="rId9"/>
           </p:nvPr>
         </p:nvSpPr>
         <p:spPr>
@@ -4968,7 +3545,7 @@
                   <a:srgbClr val="1F3A5F"/>
                 </a:solidFill>
               </a:rPr>
-              <a:t>Gram 22: FR Prometheus, Category 3, Risa</a:t>
+              <a:t>Gram 4: FR Y-wing, Category 4, Caprica</a:t>
             </a:r>
           </a:p>
         </p:txBody>
@@ -4997,7 +3574,7 @@
           <a:p>
             <a:r>
               <a:rPr sz="800">
-                <a:hlinkClick r:id="rId18"/>
+                <a:hlinkClick r:id="rId10"/>
               </a:rPr>
               <a:t>Lofar 1</a:t>
             </a:r>
@@ -5005,25 +3582,9 @@
           <a:p>
             <a:r>
               <a:rPr sz="800">
-                <a:hlinkClick r:id="rId19"/>
+                <a:hlinkClick r:id="rId11"/>
               </a:rPr>
               <a:t>Lofar 2</a:t>
-            </a:r>
-          </a:p>
-          <a:p>
-            <a:r>
-              <a:rPr sz="800">
-                <a:hlinkClick r:id="rId20"/>
-              </a:rPr>
-              <a:t>Lofar 3</a:t>
-            </a:r>
-          </a:p>
-          <a:p>
-            <a:r>
-              <a:rPr sz="800">
-                <a:hlinkClick r:id="rId21"/>
-              </a:rPr>
-              <a:t>Lofar 4</a:t>
             </a:r>
           </a:p>
         </p:txBody>
@@ -5033,7 +3594,7 @@
           <p:cNvPr id="11" name="Rounded Rectangle 10"/>
           <p:cNvSpPr/>
           <p:nvPr>
-            <a:hlinkClick r:id="rId22"/>
+            <a:hlinkClick r:id="rId12"/>
           </p:nvPr>
         </p:nvSpPr>
         <p:spPr>
@@ -5078,7 +3639,7 @@
                   <a:srgbClr val="1F3A5F"/>
                 </a:solidFill>
               </a:rPr>
-              <a:t>Gram 23: FR Mon Calamari Cruiser, Category 4, Gandalf</a:t>
+              <a:t>Gram 5: FR Excelsior, Category 2, Risa</a:t>
             </a:r>
           </a:p>
         </p:txBody>
@@ -5107,25 +3668,9 @@
           <a:p>
             <a:r>
               <a:rPr sz="800">
-                <a:hlinkClick r:id="rId23"/>
+                <a:hlinkClick r:id="rId13"/>
               </a:rPr>
               <a:t>Lofar 1</a:t>
-            </a:r>
-          </a:p>
-          <a:p>
-            <a:r>
-              <a:rPr sz="800">
-                <a:hlinkClick r:id="rId24"/>
-              </a:rPr>
-              <a:t>Lofar 2</a:t>
-            </a:r>
-          </a:p>
-          <a:p>
-            <a:r>
-              <a:rPr sz="800">
-                <a:hlinkClick r:id="rId25"/>
-              </a:rPr>
-              <a:t>Lofar 3</a:t>
             </a:r>
           </a:p>
         </p:txBody>
@@ -5135,7 +3680,7 @@
           <p:cNvPr id="13" name="Rounded Rectangle 12"/>
           <p:cNvSpPr/>
           <p:nvPr>
-            <a:hlinkClick r:id="rId26"/>
+            <a:hlinkClick r:id="rId14"/>
           </p:nvPr>
         </p:nvSpPr>
         <p:spPr>
@@ -5180,7 +3725,7 @@
                   <a:srgbClr val="1F3A5F"/>
                 </a:solidFill>
               </a:rPr>
-              <a:t>Gram 25: Mon Calamari Cruiser contact bearing 109, codename Kronos</a:t>
+              <a:t>Gram 6: FR Venator-class, Category 2, Caprica</a:t>
             </a:r>
           </a:p>
         </p:txBody>
@@ -5209,25 +3754,9 @@
           <a:p>
             <a:r>
               <a:rPr sz="800">
-                <a:hlinkClick r:id="rId27"/>
+                <a:hlinkClick r:id="rId15"/>
               </a:rPr>
               <a:t>Lofar 1</a:t>
-            </a:r>
-          </a:p>
-          <a:p>
-            <a:r>
-              <a:rPr sz="800">
-                <a:hlinkClick r:id="rId28"/>
-              </a:rPr>
-              <a:t>Lofar 2</a:t>
-            </a:r>
-          </a:p>
-          <a:p>
-            <a:r>
-              <a:rPr sz="800">
-                <a:hlinkClick r:id="rId29"/>
-              </a:rPr>
-              <a:t>Lofar 3</a:t>
             </a:r>
           </a:p>
         </p:txBody>
@@ -5237,7 +3766,7 @@
           <p:cNvPr id="15" name="Rounded Rectangle 14"/>
           <p:cNvSpPr/>
           <p:nvPr>
-            <a:hlinkClick r:id="rId30"/>
+            <a:hlinkClick r:id="rId16"/>
           </p:nvPr>
         </p:nvSpPr>
         <p:spPr>
@@ -5282,7 +3811,7 @@
                   <a:srgbClr val="1F3A5F"/>
                 </a:solidFill>
               </a:rPr>
-              <a:t>Gram 26: TIE Fighter contact bearing 031, codename Risa</a:t>
+              <a:t>Gram 7: FR Galaxy-class, Category 1, Kobol</a:t>
             </a:r>
           </a:p>
         </p:txBody>
@@ -5311,33 +3840,9 @@
           <a:p>
             <a:r>
               <a:rPr sz="800">
-                <a:hlinkClick r:id="rId31"/>
+                <a:hlinkClick r:id="rId17"/>
               </a:rPr>
               <a:t>Lofar 1</a:t>
-            </a:r>
-          </a:p>
-          <a:p>
-            <a:r>
-              <a:rPr sz="800">
-                <a:hlinkClick r:id="rId32"/>
-              </a:rPr>
-              <a:t>Lofar 2</a:t>
-            </a:r>
-          </a:p>
-          <a:p>
-            <a:r>
-              <a:rPr sz="800">
-                <a:hlinkClick r:id="rId33"/>
-              </a:rPr>
-              <a:t>Lofar 3</a:t>
-            </a:r>
-          </a:p>
-          <a:p>
-            <a:r>
-              <a:rPr sz="800">
-                <a:hlinkClick r:id="rId34"/>
-              </a:rPr>
-              <a:t>Lofar 4</a:t>
             </a:r>
           </a:p>
         </p:txBody>
@@ -5347,7 +3852,7 @@
           <p:cNvPr id="17" name="Rounded Rectangle 16"/>
           <p:cNvSpPr/>
           <p:nvPr>
-            <a:hlinkClick r:id="rId35"/>
+            <a:hlinkClick r:id="rId18"/>
           </p:nvPr>
         </p:nvSpPr>
         <p:spPr>
@@ -5392,7 +3897,7 @@
                   <a:srgbClr val="1F3A5F"/>
                 </a:solidFill>
               </a:rPr>
-              <a:t>Gram 27: FR A-wing, Category 1, Coruscant</a:t>
+              <a:t>Gram 8: FR Tantive IV, Category 2, Romulus</a:t>
             </a:r>
           </a:p>
         </p:txBody>
@@ -5421,25 +3926,9 @@
           <a:p>
             <a:r>
               <a:rPr sz="800">
-                <a:hlinkClick r:id="rId36"/>
+                <a:hlinkClick r:id="rId19"/>
               </a:rPr>
               <a:t>Lofar 1</a:t>
-            </a:r>
-          </a:p>
-          <a:p>
-            <a:r>
-              <a:rPr sz="800">
-                <a:hlinkClick r:id="rId37"/>
-              </a:rPr>
-              <a:t>Lofar 2</a:t>
-            </a:r>
-          </a:p>
-          <a:p>
-            <a:r>
-              <a:rPr sz="800">
-                <a:hlinkClick r:id="rId38"/>
-              </a:rPr>
-              <a:t>Lofar 3</a:t>
             </a:r>
           </a:p>
         </p:txBody>
@@ -5449,7 +3938,7 @@
           <p:cNvPr id="19" name="Rounded Rectangle 18"/>
           <p:cNvSpPr/>
           <p:nvPr>
-            <a:hlinkClick r:id="rId39"/>
+            <a:hlinkClick r:id="rId20"/>
           </p:nvPr>
         </p:nvSpPr>
         <p:spPr>
@@ -5494,7 +3983,7 @@
                   <a:srgbClr val="1F3A5F"/>
                 </a:solidFill>
               </a:rPr>
-              <a:t>Gram 28: FR Constitution-class, Category 1, Kobol</a:t>
+              <a:t>Gram 10: FR Discovery, Category 3, Naboo</a:t>
             </a:r>
           </a:p>
         </p:txBody>
@@ -5523,7 +4012,7 @@
           <a:p>
             <a:r>
               <a:rPr sz="800">
-                <a:hlinkClick r:id="rId40"/>
+                <a:hlinkClick r:id="rId21"/>
               </a:rPr>
               <a:t>Lofar 1</a:t>
             </a:r>
@@ -5531,25 +4020,9 @@
           <a:p>
             <a:r>
               <a:rPr sz="800">
-                <a:hlinkClick r:id="rId41"/>
+                <a:hlinkClick r:id="rId22"/>
               </a:rPr>
               <a:t>Lofar 2</a:t>
-            </a:r>
-          </a:p>
-          <a:p>
-            <a:r>
-              <a:rPr sz="800">
-                <a:hlinkClick r:id="rId42"/>
-              </a:rPr>
-              <a:t>Lofar 3</a:t>
-            </a:r>
-          </a:p>
-          <a:p>
-            <a:r>
-              <a:rPr sz="800">
-                <a:hlinkClick r:id="rId43"/>
-              </a:rPr>
-              <a:t>Lofar 4</a:t>
             </a:r>
           </a:p>
         </p:txBody>
@@ -5559,7 +4032,7 @@
           <p:cNvPr id="21" name="Rounded Rectangle 20"/>
           <p:cNvSpPr/>
           <p:nvPr>
-            <a:hlinkClick r:id="rId44"/>
+            <a:hlinkClick r:id="rId23"/>
           </p:nvPr>
         </p:nvSpPr>
         <p:spPr>
@@ -5604,7 +4077,7 @@
                   <a:srgbClr val="1F3A5F"/>
                 </a:solidFill>
               </a:rPr>
-              <a:t>Gram 29: FR Ghost, Category 4, Coruscant</a:t>
+              <a:t>Gram 11: FR Constitution-class, Category 2, Dank</a:t>
             </a:r>
           </a:p>
         </p:txBody>
@@ -5633,7 +4106,7 @@
           <a:p>
             <a:r>
               <a:rPr sz="800">
-                <a:hlinkClick r:id="rId45"/>
+                <a:hlinkClick r:id="rId24"/>
               </a:rPr>
               <a:t>Lofar 1</a:t>
             </a:r>
@@ -5641,7 +4114,7 @@
           <a:p>
             <a:r>
               <a:rPr sz="800">
-                <a:hlinkClick r:id="rId46"/>
+                <a:hlinkClick r:id="rId25"/>
               </a:rPr>
               <a:t>Lofar 2</a:t>
             </a:r>
@@ -5649,7 +4122,7 @@
           <a:p>
             <a:r>
               <a:rPr sz="800">
-                <a:hlinkClick r:id="rId47"/>
+                <a:hlinkClick r:id="rId26"/>
               </a:rPr>
               <a:t>Lofar 3</a:t>
             </a:r>
@@ -5657,7 +4130,7 @@
           <a:p>
             <a:r>
               <a:rPr sz="800">
-                <a:hlinkClick r:id="rId48"/>
+                <a:hlinkClick r:id="rId27"/>
               </a:rPr>
               <a:t>Lofar 4</a:t>
             </a:r>
@@ -5669,7 +4142,7 @@
           <p:cNvPr id="23" name="Rounded Rectangle 22"/>
           <p:cNvSpPr/>
           <p:nvPr>
-            <a:hlinkClick r:id="rId49"/>
+            <a:hlinkClick r:id="rId28"/>
           </p:nvPr>
         </p:nvSpPr>
         <p:spPr>
@@ -5714,7 +4187,7 @@
                   <a:srgbClr val="1F3A5F"/>
                 </a:solidFill>
               </a:rPr>
-              <a:t>Gram 30: FR Prometheus, Category 2, Tatooine</a:t>
+              <a:t>Gram 12: FR TIE Bomber, Category 3, Vulcan</a:t>
             </a:r>
           </a:p>
         </p:txBody>
@@ -5743,7 +4216,7 @@
           <a:p>
             <a:r>
               <a:rPr sz="800">
-                <a:hlinkClick r:id="rId50"/>
+                <a:hlinkClick r:id="rId29"/>
               </a:rPr>
               <a:t>Lofar 1</a:t>
             </a:r>
@@ -5751,7 +4224,7 @@
           <a:p>
             <a:r>
               <a:rPr sz="800">
-                <a:hlinkClick r:id="rId51"/>
+                <a:hlinkClick r:id="rId30"/>
               </a:rPr>
               <a:t>Lofar 2</a:t>
             </a:r>
@@ -5763,7 +4236,7 @@
           <p:cNvPr id="25" name="Rounded Rectangle 24"/>
           <p:cNvSpPr/>
           <p:nvPr>
-            <a:hlinkClick r:id="rId52"/>
+            <a:hlinkClick r:id="rId31"/>
           </p:nvPr>
         </p:nvSpPr>
         <p:spPr>
@@ -5808,7 +4281,7 @@
                   <a:srgbClr val="1F3A5F"/>
                 </a:solidFill>
               </a:rPr>
-              <a:t>Gram 31: FR Devastator, Category 3, Gandalf</a:t>
+              <a:t>Gram 13: FR B-wing, Category 4, Coruscant</a:t>
             </a:r>
           </a:p>
         </p:txBody>
@@ -5837,7 +4310,7 @@
           <a:p>
             <a:r>
               <a:rPr sz="800">
-                <a:hlinkClick r:id="rId53"/>
+                <a:hlinkClick r:id="rId32"/>
               </a:rPr>
               <a:t>Lofar 1</a:t>
             </a:r>
@@ -5845,17 +4318,9 @@
           <a:p>
             <a:r>
               <a:rPr sz="800">
-                <a:hlinkClick r:id="rId54"/>
+                <a:hlinkClick r:id="rId33"/>
               </a:rPr>
               <a:t>Lofar 2</a:t>
-            </a:r>
-          </a:p>
-          <a:p>
-            <a:r>
-              <a:rPr sz="800">
-                <a:hlinkClick r:id="rId55"/>
-              </a:rPr>
-              <a:t>Lofar 3</a:t>
             </a:r>
           </a:p>
         </p:txBody>
@@ -5865,7 +4330,7 @@
           <p:cNvPr id="27" name="Rounded Rectangle 26"/>
           <p:cNvSpPr/>
           <p:nvPr>
-            <a:hlinkClick r:id="rId56"/>
+            <a:hlinkClick r:id="rId34"/>
           </p:nvPr>
         </p:nvSpPr>
         <p:spPr>
@@ -5910,7 +4375,7 @@
                   <a:srgbClr val="1F3A5F"/>
                 </a:solidFill>
               </a:rPr>
-              <a:t>Gram 32: FR Akira-class, Category 3, Bajor</a:t>
+              <a:t>Gram 14: FR Tantive IV, Category 4, Kronos</a:t>
             </a:r>
           </a:p>
         </p:txBody>
@@ -5939,7 +4404,7 @@
           <a:p>
             <a:r>
               <a:rPr sz="800">
-                <a:hlinkClick r:id="rId57"/>
+                <a:hlinkClick r:id="rId35"/>
               </a:rPr>
               <a:t>Lofar 1</a:t>
             </a:r>
@@ -5947,7 +4412,7 @@
           <a:p>
             <a:r>
               <a:rPr sz="800">
-                <a:hlinkClick r:id="rId58"/>
+                <a:hlinkClick r:id="rId36"/>
               </a:rPr>
               <a:t>Lofar 2</a:t>
             </a:r>
@@ -5959,7 +4424,7 @@
           <p:cNvPr id="29" name="Rounded Rectangle 28"/>
           <p:cNvSpPr/>
           <p:nvPr>
-            <a:hlinkClick r:id="rId59"/>
+            <a:hlinkClick r:id="rId37"/>
           </p:nvPr>
         </p:nvSpPr>
         <p:spPr>
@@ -6004,7 +4469,7 @@
                   <a:srgbClr val="1F3A5F"/>
                 </a:solidFill>
               </a:rPr>
-              <a:t>Gram 33: Reliant contact bearing 201, codename Kobol</a:t>
+              <a:t>Gram 15: Acclamator-class contact bearing 308, codename Kronos</a:t>
             </a:r>
           </a:p>
         </p:txBody>
@@ -6033,7 +4498,7 @@
           <a:p>
             <a:r>
               <a:rPr sz="800">
-                <a:hlinkClick r:id="rId60"/>
+                <a:hlinkClick r:id="rId38"/>
               </a:rPr>
               <a:t>Lofar 1</a:t>
             </a:r>
@@ -6041,25 +4506,9 @@
           <a:p>
             <a:r>
               <a:rPr sz="800">
-                <a:hlinkClick r:id="rId61"/>
+                <a:hlinkClick r:id="rId39"/>
               </a:rPr>
               <a:t>Lofar 2</a:t>
-            </a:r>
-          </a:p>
-          <a:p>
-            <a:r>
-              <a:rPr sz="800">
-                <a:hlinkClick r:id="rId62"/>
-              </a:rPr>
-              <a:t>Lofar 3</a:t>
-            </a:r>
-          </a:p>
-          <a:p>
-            <a:r>
-              <a:rPr sz="800">
-                <a:hlinkClick r:id="rId63"/>
-              </a:rPr>
-              <a:t>Lofar 4</a:t>
             </a:r>
           </a:p>
         </p:txBody>
@@ -6069,7 +4518,7 @@
           <p:cNvPr id="31" name="Rounded Rectangle 30"/>
           <p:cNvSpPr/>
           <p:nvPr>
-            <a:hlinkClick r:id="rId64"/>
+            <a:hlinkClick r:id="rId40"/>
           </p:nvPr>
         </p:nvSpPr>
         <p:spPr>
@@ -6114,7 +4563,7 @@
                   <a:srgbClr val="1F3A5F"/>
                 </a:solidFill>
               </a:rPr>
-              <a:t>Gram 34: FR Imperial-class, Category 4, Mustafar</a:t>
+              <a:t>Gram 17: FR Imperial-class, Category 3, Hoth</a:t>
             </a:r>
           </a:p>
         </p:txBody>
@@ -6143,7 +4592,7 @@
           <a:p>
             <a:r>
               <a:rPr sz="800">
-                <a:hlinkClick r:id="rId65"/>
+                <a:hlinkClick r:id="rId41"/>
               </a:rPr>
               <a:t>Lofar 1</a:t>
             </a:r>
@@ -6151,17 +4600,9 @@
           <a:p>
             <a:r>
               <a:rPr sz="800">
-                <a:hlinkClick r:id="rId66"/>
+                <a:hlinkClick r:id="rId42"/>
               </a:rPr>
               <a:t>Lofar 2</a:t>
-            </a:r>
-          </a:p>
-          <a:p>
-            <a:r>
-              <a:rPr sz="800">
-                <a:hlinkClick r:id="rId67"/>
-              </a:rPr>
-              <a:t>Lofar 3</a:t>
             </a:r>
           </a:p>
         </p:txBody>
@@ -6230,7 +4671,7 @@
                   <a:srgbClr val="FFFFFF"/>
                 </a:solidFill>
               </a:rPr>
-              <a:t>Instructor Week 4 Grams_Updated — Page 3 of 3</a:t>
+              <a:t>Instructor Week 4 Grams_Updated — Page 2 of 3</a:t>
             </a:r>
           </a:p>
         </p:txBody>
@@ -6285,7 +4726,7 @@
                   <a:srgbClr val="1F3A5F"/>
                 </a:solidFill>
               </a:rPr>
-              <a:t>Gram 36: FR Defiant-class, Category 2, Defiant</a:t>
+              <a:t>Gram 18: FR Venator-class, Category 3, Tantive</a:t>
             </a:r>
           </a:p>
         </p:txBody>
@@ -6395,7 +4836,7 @@
                   <a:srgbClr val="1F3A5F"/>
                 </a:solidFill>
               </a:rPr>
-              <a:t>Gram 37: B-wing contact bearing 123, codename Hoth</a:t>
+              <a:t>Gram 20: FR Discovery, Category 3, Naboo</a:t>
             </a:r>
           </a:p>
         </p:txBody>
@@ -6505,7 +4946,7 @@
                   <a:srgbClr val="1F3A5F"/>
                 </a:solidFill>
               </a:rPr>
-              <a:t>Gram 38: FR Outrider, Category 1, Endor</a:t>
+              <a:t>Gram 21: FR A-wing, Category 3, Betazed</a:t>
             </a:r>
           </a:p>
         </p:txBody>
@@ -6539,6 +4980,30 @@
               <a:t>Lofar 1</a:t>
             </a:r>
           </a:p>
+          <a:p>
+            <a:r>
+              <a:rPr sz="800">
+                <a:hlinkClick r:id="rId14"/>
+              </a:rPr>
+              <a:t>Lofar 2</a:t>
+            </a:r>
+          </a:p>
+          <a:p>
+            <a:r>
+              <a:rPr sz="800">
+                <a:hlinkClick r:id="rId15"/>
+              </a:rPr>
+              <a:t>Lofar 3</a:t>
+            </a:r>
+          </a:p>
+          <a:p>
+            <a:r>
+              <a:rPr sz="800">
+                <a:hlinkClick r:id="rId16"/>
+              </a:rPr>
+              <a:t>Lofar 4</a:t>
+            </a:r>
+          </a:p>
         </p:txBody>
       </p:sp>
       <p:sp>
@@ -6546,7 +5011,7 @@
           <p:cNvPr id="9" name="Rounded Rectangle 8"/>
           <p:cNvSpPr/>
           <p:nvPr>
-            <a:hlinkClick r:id="rId14"/>
+            <a:hlinkClick r:id="rId17"/>
           </p:nvPr>
         </p:nvSpPr>
         <p:spPr>
@@ -6591,7 +5056,7 @@
                   <a:srgbClr val="1F3A5F"/>
                 </a:solidFill>
               </a:rPr>
-              <a:t>Gram 41: X-wing contact bearing 106, codename Tantive</a:t>
+              <a:t>Gram 22: FR Prometheus, Category 3, Risa</a:t>
             </a:r>
           </a:p>
         </p:txBody>
@@ -6620,7 +5085,7 @@
           <a:p>
             <a:r>
               <a:rPr sz="800">
-                <a:hlinkClick r:id="rId15"/>
+                <a:hlinkClick r:id="rId18"/>
               </a:rPr>
               <a:t>Lofar 1</a:t>
             </a:r>
@@ -6628,7 +5093,7 @@
           <a:p>
             <a:r>
               <a:rPr sz="800">
-                <a:hlinkClick r:id="rId16"/>
+                <a:hlinkClick r:id="rId19"/>
               </a:rPr>
               <a:t>Lofar 2</a:t>
             </a:r>
@@ -6636,7 +5101,7 @@
           <a:p>
             <a:r>
               <a:rPr sz="800">
-                <a:hlinkClick r:id="rId17"/>
+                <a:hlinkClick r:id="rId20"/>
               </a:rPr>
               <a:t>Lofar 3</a:t>
             </a:r>
@@ -6644,7 +5109,7 @@
           <a:p>
             <a:r>
               <a:rPr sz="800">
-                <a:hlinkClick r:id="rId18"/>
+                <a:hlinkClick r:id="rId21"/>
               </a:rPr>
               <a:t>Lofar 4</a:t>
             </a:r>
@@ -6656,7 +5121,7 @@
           <p:cNvPr id="11" name="Rounded Rectangle 10"/>
           <p:cNvSpPr/>
           <p:nvPr>
-            <a:hlinkClick r:id="rId19"/>
+            <a:hlinkClick r:id="rId22"/>
           </p:nvPr>
         </p:nvSpPr>
         <p:spPr>
@@ -6701,7 +5166,7 @@
                   <a:srgbClr val="1F3A5F"/>
                 </a:solidFill>
               </a:rPr>
-              <a:t>Gram 42: FR Prometheus, Category 2, Coruscant</a:t>
+              <a:t>Gram 23: FR Mon Calamari Cruiser, Category 4, Gandalf</a:t>
             </a:r>
           </a:p>
         </p:txBody>
@@ -6730,6 +5195,1629 @@
           <a:p>
             <a:r>
               <a:rPr sz="800">
+                <a:hlinkClick r:id="rId23"/>
+              </a:rPr>
+              <a:t>Lofar 1</a:t>
+            </a:r>
+          </a:p>
+          <a:p>
+            <a:r>
+              <a:rPr sz="800">
+                <a:hlinkClick r:id="rId24"/>
+              </a:rPr>
+              <a:t>Lofar 2</a:t>
+            </a:r>
+          </a:p>
+          <a:p>
+            <a:r>
+              <a:rPr sz="800">
+                <a:hlinkClick r:id="rId25"/>
+              </a:rPr>
+              <a:t>Lofar 3</a:t>
+            </a:r>
+          </a:p>
+        </p:txBody>
+      </p:sp>
+      <p:sp>
+        <p:nvSpPr>
+          <p:cNvPr id="13" name="Rounded Rectangle 12"/>
+          <p:cNvSpPr/>
+          <p:nvPr>
+            <a:hlinkClick r:id="rId26"/>
+          </p:nvPr>
+        </p:nvSpPr>
+        <p:spPr>
+          <a:xfrm>
+            <a:off x="365760" y="2682240"/>
+            <a:ext cx="2200046" cy="365760"/>
+          </a:xfrm>
+          <a:prstGeom prst="roundRect">
+            <a:avLst/>
+          </a:prstGeom>
+          <a:solidFill>
+            <a:srgbClr val="E8EEF7"/>
+          </a:solidFill>
+          <a:ln>
+            <a:solidFill>
+              <a:srgbClr val="1F3A5F"/>
+            </a:solidFill>
+          </a:ln>
+        </p:spPr>
+        <p:style>
+          <a:lnRef idx="1">
+            <a:schemeClr val="accent1"/>
+          </a:lnRef>
+          <a:fillRef idx="3">
+            <a:schemeClr val="accent1"/>
+          </a:fillRef>
+          <a:effectRef idx="2">
+            <a:schemeClr val="accent1"/>
+          </a:effectRef>
+          <a:fontRef idx="minor">
+            <a:schemeClr val="lt1"/>
+          </a:fontRef>
+        </p:style>
+        <p:txBody>
+          <a:bodyPr rtlCol="0" anchor="ctr" lIns="45720" rIns="45720"/>
+          <a:lstStyle/>
+          <a:p>
+            <a:pPr algn="ctr"/>
+            <a:r>
+              <a:rPr sz="900">
+                <a:solidFill>
+                  <a:srgbClr val="1F3A5F"/>
+                </a:solidFill>
+              </a:rPr>
+              <a:t>Gram 25: Mon Calamari Cruiser contact bearing 109, codename Kronos</a:t>
+            </a:r>
+          </a:p>
+        </p:txBody>
+      </p:sp>
+      <p:sp>
+        <p:nvSpPr>
+          <p:cNvPr id="14" name="TextBox 13"/>
+          <p:cNvSpPr txBox="1"/>
+          <p:nvPr/>
+        </p:nvSpPr>
+        <p:spPr>
+          <a:xfrm>
+            <a:off x="365760" y="3066288"/>
+            <a:ext cx="2200046" cy="1447800"/>
+          </a:xfrm>
+          <a:prstGeom prst="rect">
+            <a:avLst/>
+          </a:prstGeom>
+          <a:noFill/>
+        </p:spPr>
+        <p:txBody>
+          <a:bodyPr wrap="square">
+            <a:spAutoFit/>
+          </a:bodyPr>
+          <a:lstStyle/>
+          <a:p>
+            <a:r>
+              <a:rPr sz="800">
+                <a:hlinkClick r:id="rId27"/>
+              </a:rPr>
+              <a:t>Lofar 1</a:t>
+            </a:r>
+          </a:p>
+          <a:p>
+            <a:r>
+              <a:rPr sz="800">
+                <a:hlinkClick r:id="rId28"/>
+              </a:rPr>
+              <a:t>Lofar 2</a:t>
+            </a:r>
+          </a:p>
+          <a:p>
+            <a:r>
+              <a:rPr sz="800">
+                <a:hlinkClick r:id="rId29"/>
+              </a:rPr>
+              <a:t>Lofar 3</a:t>
+            </a:r>
+          </a:p>
+        </p:txBody>
+      </p:sp>
+      <p:sp>
+        <p:nvSpPr>
+          <p:cNvPr id="15" name="Rounded Rectangle 14"/>
+          <p:cNvSpPr/>
+          <p:nvPr>
+            <a:hlinkClick r:id="rId30"/>
+          </p:nvPr>
+        </p:nvSpPr>
+        <p:spPr>
+          <a:xfrm>
+            <a:off x="2657246" y="2682240"/>
+            <a:ext cx="2200046" cy="365760"/>
+          </a:xfrm>
+          <a:prstGeom prst="roundRect">
+            <a:avLst/>
+          </a:prstGeom>
+          <a:solidFill>
+            <a:srgbClr val="E8EEF7"/>
+          </a:solidFill>
+          <a:ln>
+            <a:solidFill>
+              <a:srgbClr val="1F3A5F"/>
+            </a:solidFill>
+          </a:ln>
+        </p:spPr>
+        <p:style>
+          <a:lnRef idx="1">
+            <a:schemeClr val="accent1"/>
+          </a:lnRef>
+          <a:fillRef idx="3">
+            <a:schemeClr val="accent1"/>
+          </a:fillRef>
+          <a:effectRef idx="2">
+            <a:schemeClr val="accent1"/>
+          </a:effectRef>
+          <a:fontRef idx="minor">
+            <a:schemeClr val="lt1"/>
+          </a:fontRef>
+        </p:style>
+        <p:txBody>
+          <a:bodyPr rtlCol="0" anchor="ctr" lIns="45720" rIns="45720"/>
+          <a:lstStyle/>
+          <a:p>
+            <a:pPr algn="ctr"/>
+            <a:r>
+              <a:rPr sz="900">
+                <a:solidFill>
+                  <a:srgbClr val="1F3A5F"/>
+                </a:solidFill>
+              </a:rPr>
+              <a:t>Gram 26: TIE Fighter contact bearing 031, codename Risa</a:t>
+            </a:r>
+          </a:p>
+        </p:txBody>
+      </p:sp>
+      <p:sp>
+        <p:nvSpPr>
+          <p:cNvPr id="16" name="TextBox 15"/>
+          <p:cNvSpPr txBox="1"/>
+          <p:nvPr/>
+        </p:nvSpPr>
+        <p:spPr>
+          <a:xfrm>
+            <a:off x="2657246" y="3066288"/>
+            <a:ext cx="2200046" cy="1447800"/>
+          </a:xfrm>
+          <a:prstGeom prst="rect">
+            <a:avLst/>
+          </a:prstGeom>
+          <a:noFill/>
+        </p:spPr>
+        <p:txBody>
+          <a:bodyPr wrap="square">
+            <a:spAutoFit/>
+          </a:bodyPr>
+          <a:lstStyle/>
+          <a:p>
+            <a:r>
+              <a:rPr sz="800">
+                <a:hlinkClick r:id="rId31"/>
+              </a:rPr>
+              <a:t>Lofar 1</a:t>
+            </a:r>
+          </a:p>
+          <a:p>
+            <a:r>
+              <a:rPr sz="800">
+                <a:hlinkClick r:id="rId32"/>
+              </a:rPr>
+              <a:t>Lofar 2</a:t>
+            </a:r>
+          </a:p>
+          <a:p>
+            <a:r>
+              <a:rPr sz="800">
+                <a:hlinkClick r:id="rId33"/>
+              </a:rPr>
+              <a:t>Lofar 3</a:t>
+            </a:r>
+          </a:p>
+          <a:p>
+            <a:r>
+              <a:rPr sz="800">
+                <a:hlinkClick r:id="rId34"/>
+              </a:rPr>
+              <a:t>Lofar 4</a:t>
+            </a:r>
+          </a:p>
+        </p:txBody>
+      </p:sp>
+      <p:sp>
+        <p:nvSpPr>
+          <p:cNvPr id="17" name="Rounded Rectangle 16"/>
+          <p:cNvSpPr/>
+          <p:nvPr>
+            <a:hlinkClick r:id="rId35"/>
+          </p:nvPr>
+        </p:nvSpPr>
+        <p:spPr>
+          <a:xfrm>
+            <a:off x="4948732" y="2682240"/>
+            <a:ext cx="2200046" cy="365760"/>
+          </a:xfrm>
+          <a:prstGeom prst="roundRect">
+            <a:avLst/>
+          </a:prstGeom>
+          <a:solidFill>
+            <a:srgbClr val="E8EEF7"/>
+          </a:solidFill>
+          <a:ln>
+            <a:solidFill>
+              <a:srgbClr val="1F3A5F"/>
+            </a:solidFill>
+          </a:ln>
+        </p:spPr>
+        <p:style>
+          <a:lnRef idx="1">
+            <a:schemeClr val="accent1"/>
+          </a:lnRef>
+          <a:fillRef idx="3">
+            <a:schemeClr val="accent1"/>
+          </a:fillRef>
+          <a:effectRef idx="2">
+            <a:schemeClr val="accent1"/>
+          </a:effectRef>
+          <a:fontRef idx="minor">
+            <a:schemeClr val="lt1"/>
+          </a:fontRef>
+        </p:style>
+        <p:txBody>
+          <a:bodyPr rtlCol="0" anchor="ctr" lIns="45720" rIns="45720"/>
+          <a:lstStyle/>
+          <a:p>
+            <a:pPr algn="ctr"/>
+            <a:r>
+              <a:rPr sz="900">
+                <a:solidFill>
+                  <a:srgbClr val="1F3A5F"/>
+                </a:solidFill>
+              </a:rPr>
+              <a:t>Gram 27: FR A-wing, Category 1, Coruscant</a:t>
+            </a:r>
+          </a:p>
+        </p:txBody>
+      </p:sp>
+      <p:sp>
+        <p:nvSpPr>
+          <p:cNvPr id="18" name="TextBox 17"/>
+          <p:cNvSpPr txBox="1"/>
+          <p:nvPr/>
+        </p:nvSpPr>
+        <p:spPr>
+          <a:xfrm>
+            <a:off x="4948732" y="3066288"/>
+            <a:ext cx="2200046" cy="1447800"/>
+          </a:xfrm>
+          <a:prstGeom prst="rect">
+            <a:avLst/>
+          </a:prstGeom>
+          <a:noFill/>
+        </p:spPr>
+        <p:txBody>
+          <a:bodyPr wrap="square">
+            <a:spAutoFit/>
+          </a:bodyPr>
+          <a:lstStyle/>
+          <a:p>
+            <a:r>
+              <a:rPr sz="800">
+                <a:hlinkClick r:id="rId36"/>
+              </a:rPr>
+              <a:t>Lofar 1</a:t>
+            </a:r>
+          </a:p>
+          <a:p>
+            <a:r>
+              <a:rPr sz="800">
+                <a:hlinkClick r:id="rId37"/>
+              </a:rPr>
+              <a:t>Lofar 2</a:t>
+            </a:r>
+          </a:p>
+          <a:p>
+            <a:r>
+              <a:rPr sz="800">
+                <a:hlinkClick r:id="rId38"/>
+              </a:rPr>
+              <a:t>Lofar 3</a:t>
+            </a:r>
+          </a:p>
+        </p:txBody>
+      </p:sp>
+      <p:sp>
+        <p:nvSpPr>
+          <p:cNvPr id="19" name="Rounded Rectangle 18"/>
+          <p:cNvSpPr/>
+          <p:nvPr>
+            <a:hlinkClick r:id="rId39"/>
+          </p:nvPr>
+        </p:nvSpPr>
+        <p:spPr>
+          <a:xfrm>
+            <a:off x="7240219" y="2682240"/>
+            <a:ext cx="2200046" cy="365760"/>
+          </a:xfrm>
+          <a:prstGeom prst="roundRect">
+            <a:avLst/>
+          </a:prstGeom>
+          <a:solidFill>
+            <a:srgbClr val="E8EEF7"/>
+          </a:solidFill>
+          <a:ln>
+            <a:solidFill>
+              <a:srgbClr val="1F3A5F"/>
+            </a:solidFill>
+          </a:ln>
+        </p:spPr>
+        <p:style>
+          <a:lnRef idx="1">
+            <a:schemeClr val="accent1"/>
+          </a:lnRef>
+          <a:fillRef idx="3">
+            <a:schemeClr val="accent1"/>
+          </a:fillRef>
+          <a:effectRef idx="2">
+            <a:schemeClr val="accent1"/>
+          </a:effectRef>
+          <a:fontRef idx="minor">
+            <a:schemeClr val="lt1"/>
+          </a:fontRef>
+        </p:style>
+        <p:txBody>
+          <a:bodyPr rtlCol="0" anchor="ctr" lIns="45720" rIns="45720"/>
+          <a:lstStyle/>
+          <a:p>
+            <a:pPr algn="ctr"/>
+            <a:r>
+              <a:rPr sz="900">
+                <a:solidFill>
+                  <a:srgbClr val="1F3A5F"/>
+                </a:solidFill>
+              </a:rPr>
+              <a:t>Gram 28: FR Constitution-class, Category 1, Kobol</a:t>
+            </a:r>
+          </a:p>
+        </p:txBody>
+      </p:sp>
+      <p:sp>
+        <p:nvSpPr>
+          <p:cNvPr id="20" name="TextBox 19"/>
+          <p:cNvSpPr txBox="1"/>
+          <p:nvPr/>
+        </p:nvSpPr>
+        <p:spPr>
+          <a:xfrm>
+            <a:off x="7240219" y="3066288"/>
+            <a:ext cx="2200046" cy="1447800"/>
+          </a:xfrm>
+          <a:prstGeom prst="rect">
+            <a:avLst/>
+          </a:prstGeom>
+          <a:noFill/>
+        </p:spPr>
+        <p:txBody>
+          <a:bodyPr wrap="square">
+            <a:spAutoFit/>
+          </a:bodyPr>
+          <a:lstStyle/>
+          <a:p>
+            <a:r>
+              <a:rPr sz="800">
+                <a:hlinkClick r:id="rId40"/>
+              </a:rPr>
+              <a:t>Lofar 1</a:t>
+            </a:r>
+          </a:p>
+          <a:p>
+            <a:r>
+              <a:rPr sz="800">
+                <a:hlinkClick r:id="rId41"/>
+              </a:rPr>
+              <a:t>Lofar 2</a:t>
+            </a:r>
+          </a:p>
+          <a:p>
+            <a:r>
+              <a:rPr sz="800">
+                <a:hlinkClick r:id="rId42"/>
+              </a:rPr>
+              <a:t>Lofar 3</a:t>
+            </a:r>
+          </a:p>
+          <a:p>
+            <a:r>
+              <a:rPr sz="800">
+                <a:hlinkClick r:id="rId43"/>
+              </a:rPr>
+              <a:t>Lofar 4</a:t>
+            </a:r>
+          </a:p>
+        </p:txBody>
+      </p:sp>
+      <p:sp>
+        <p:nvSpPr>
+          <p:cNvPr id="21" name="Rounded Rectangle 20"/>
+          <p:cNvSpPr/>
+          <p:nvPr>
+            <a:hlinkClick r:id="rId44"/>
+          </p:nvPr>
+        </p:nvSpPr>
+        <p:spPr>
+          <a:xfrm>
+            <a:off x="9531705" y="2682240"/>
+            <a:ext cx="2200046" cy="365760"/>
+          </a:xfrm>
+          <a:prstGeom prst="roundRect">
+            <a:avLst/>
+          </a:prstGeom>
+          <a:solidFill>
+            <a:srgbClr val="E8EEF7"/>
+          </a:solidFill>
+          <a:ln>
+            <a:solidFill>
+              <a:srgbClr val="1F3A5F"/>
+            </a:solidFill>
+          </a:ln>
+        </p:spPr>
+        <p:style>
+          <a:lnRef idx="1">
+            <a:schemeClr val="accent1"/>
+          </a:lnRef>
+          <a:fillRef idx="3">
+            <a:schemeClr val="accent1"/>
+          </a:fillRef>
+          <a:effectRef idx="2">
+            <a:schemeClr val="accent1"/>
+          </a:effectRef>
+          <a:fontRef idx="minor">
+            <a:schemeClr val="lt1"/>
+          </a:fontRef>
+        </p:style>
+        <p:txBody>
+          <a:bodyPr rtlCol="0" anchor="ctr" lIns="45720" rIns="45720"/>
+          <a:lstStyle/>
+          <a:p>
+            <a:pPr algn="ctr"/>
+            <a:r>
+              <a:rPr sz="900">
+                <a:solidFill>
+                  <a:srgbClr val="1F3A5F"/>
+                </a:solidFill>
+              </a:rPr>
+              <a:t>Gram 29: FR Ghost, Category 4, Coruscant</a:t>
+            </a:r>
+          </a:p>
+        </p:txBody>
+      </p:sp>
+      <p:sp>
+        <p:nvSpPr>
+          <p:cNvPr id="22" name="TextBox 21"/>
+          <p:cNvSpPr txBox="1"/>
+          <p:nvPr/>
+        </p:nvSpPr>
+        <p:spPr>
+          <a:xfrm>
+            <a:off x="9531705" y="3066288"/>
+            <a:ext cx="2200046" cy="1447800"/>
+          </a:xfrm>
+          <a:prstGeom prst="rect">
+            <a:avLst/>
+          </a:prstGeom>
+          <a:noFill/>
+        </p:spPr>
+        <p:txBody>
+          <a:bodyPr wrap="square">
+            <a:spAutoFit/>
+          </a:bodyPr>
+          <a:lstStyle/>
+          <a:p>
+            <a:r>
+              <a:rPr sz="800">
+                <a:hlinkClick r:id="rId45"/>
+              </a:rPr>
+              <a:t>Lofar 1</a:t>
+            </a:r>
+          </a:p>
+          <a:p>
+            <a:r>
+              <a:rPr sz="800">
+                <a:hlinkClick r:id="rId46"/>
+              </a:rPr>
+              <a:t>Lofar 2</a:t>
+            </a:r>
+          </a:p>
+          <a:p>
+            <a:r>
+              <a:rPr sz="800">
+                <a:hlinkClick r:id="rId47"/>
+              </a:rPr>
+              <a:t>Lofar 3</a:t>
+            </a:r>
+          </a:p>
+          <a:p>
+            <a:r>
+              <a:rPr sz="800">
+                <a:hlinkClick r:id="rId48"/>
+              </a:rPr>
+              <a:t>Lofar 4</a:t>
+            </a:r>
+          </a:p>
+        </p:txBody>
+      </p:sp>
+      <p:sp>
+        <p:nvSpPr>
+          <p:cNvPr id="23" name="Rounded Rectangle 22"/>
+          <p:cNvSpPr/>
+          <p:nvPr>
+            <a:hlinkClick r:id="rId49"/>
+          </p:nvPr>
+        </p:nvSpPr>
+        <p:spPr>
+          <a:xfrm>
+            <a:off x="365760" y="4632960"/>
+            <a:ext cx="2200046" cy="365760"/>
+          </a:xfrm>
+          <a:prstGeom prst="roundRect">
+            <a:avLst/>
+          </a:prstGeom>
+          <a:solidFill>
+            <a:srgbClr val="E8EEF7"/>
+          </a:solidFill>
+          <a:ln>
+            <a:solidFill>
+              <a:srgbClr val="1F3A5F"/>
+            </a:solidFill>
+          </a:ln>
+        </p:spPr>
+        <p:style>
+          <a:lnRef idx="1">
+            <a:schemeClr val="accent1"/>
+          </a:lnRef>
+          <a:fillRef idx="3">
+            <a:schemeClr val="accent1"/>
+          </a:fillRef>
+          <a:effectRef idx="2">
+            <a:schemeClr val="accent1"/>
+          </a:effectRef>
+          <a:fontRef idx="minor">
+            <a:schemeClr val="lt1"/>
+          </a:fontRef>
+        </p:style>
+        <p:txBody>
+          <a:bodyPr rtlCol="0" anchor="ctr" lIns="45720" rIns="45720"/>
+          <a:lstStyle/>
+          <a:p>
+            <a:pPr algn="ctr"/>
+            <a:r>
+              <a:rPr sz="900">
+                <a:solidFill>
+                  <a:srgbClr val="1F3A5F"/>
+                </a:solidFill>
+              </a:rPr>
+              <a:t>Gram 30: FR Prometheus, Category 2, Tatooine</a:t>
+            </a:r>
+          </a:p>
+        </p:txBody>
+      </p:sp>
+      <p:sp>
+        <p:nvSpPr>
+          <p:cNvPr id="24" name="TextBox 23"/>
+          <p:cNvSpPr txBox="1"/>
+          <p:nvPr/>
+        </p:nvSpPr>
+        <p:spPr>
+          <a:xfrm>
+            <a:off x="365760" y="5017008"/>
+            <a:ext cx="2200046" cy="1447800"/>
+          </a:xfrm>
+          <a:prstGeom prst="rect">
+            <a:avLst/>
+          </a:prstGeom>
+          <a:noFill/>
+        </p:spPr>
+        <p:txBody>
+          <a:bodyPr wrap="square">
+            <a:spAutoFit/>
+          </a:bodyPr>
+          <a:lstStyle/>
+          <a:p>
+            <a:r>
+              <a:rPr sz="800">
+                <a:hlinkClick r:id="rId50"/>
+              </a:rPr>
+              <a:t>Lofar 1</a:t>
+            </a:r>
+          </a:p>
+          <a:p>
+            <a:r>
+              <a:rPr sz="800">
+                <a:hlinkClick r:id="rId51"/>
+              </a:rPr>
+              <a:t>Lofar 2</a:t>
+            </a:r>
+          </a:p>
+        </p:txBody>
+      </p:sp>
+      <p:sp>
+        <p:nvSpPr>
+          <p:cNvPr id="25" name="Rounded Rectangle 24"/>
+          <p:cNvSpPr/>
+          <p:nvPr>
+            <a:hlinkClick r:id="rId52"/>
+          </p:nvPr>
+        </p:nvSpPr>
+        <p:spPr>
+          <a:xfrm>
+            <a:off x="2657246" y="4632960"/>
+            <a:ext cx="2200046" cy="365760"/>
+          </a:xfrm>
+          <a:prstGeom prst="roundRect">
+            <a:avLst/>
+          </a:prstGeom>
+          <a:solidFill>
+            <a:srgbClr val="E8EEF7"/>
+          </a:solidFill>
+          <a:ln>
+            <a:solidFill>
+              <a:srgbClr val="1F3A5F"/>
+            </a:solidFill>
+          </a:ln>
+        </p:spPr>
+        <p:style>
+          <a:lnRef idx="1">
+            <a:schemeClr val="accent1"/>
+          </a:lnRef>
+          <a:fillRef idx="3">
+            <a:schemeClr val="accent1"/>
+          </a:fillRef>
+          <a:effectRef idx="2">
+            <a:schemeClr val="accent1"/>
+          </a:effectRef>
+          <a:fontRef idx="minor">
+            <a:schemeClr val="lt1"/>
+          </a:fontRef>
+        </p:style>
+        <p:txBody>
+          <a:bodyPr rtlCol="0" anchor="ctr" lIns="45720" rIns="45720"/>
+          <a:lstStyle/>
+          <a:p>
+            <a:pPr algn="ctr"/>
+            <a:r>
+              <a:rPr sz="900">
+                <a:solidFill>
+                  <a:srgbClr val="1F3A5F"/>
+                </a:solidFill>
+              </a:rPr>
+              <a:t>Gram 31: FR Devastator, Category 3, Gandalf</a:t>
+            </a:r>
+          </a:p>
+        </p:txBody>
+      </p:sp>
+      <p:sp>
+        <p:nvSpPr>
+          <p:cNvPr id="26" name="TextBox 25"/>
+          <p:cNvSpPr txBox="1"/>
+          <p:nvPr/>
+        </p:nvSpPr>
+        <p:spPr>
+          <a:xfrm>
+            <a:off x="2657246" y="5017008"/>
+            <a:ext cx="2200046" cy="1447800"/>
+          </a:xfrm>
+          <a:prstGeom prst="rect">
+            <a:avLst/>
+          </a:prstGeom>
+          <a:noFill/>
+        </p:spPr>
+        <p:txBody>
+          <a:bodyPr wrap="square">
+            <a:spAutoFit/>
+          </a:bodyPr>
+          <a:lstStyle/>
+          <a:p>
+            <a:r>
+              <a:rPr sz="800">
+                <a:hlinkClick r:id="rId53"/>
+              </a:rPr>
+              <a:t>Lofar 1</a:t>
+            </a:r>
+          </a:p>
+          <a:p>
+            <a:r>
+              <a:rPr sz="800">
+                <a:hlinkClick r:id="rId54"/>
+              </a:rPr>
+              <a:t>Lofar 2</a:t>
+            </a:r>
+          </a:p>
+          <a:p>
+            <a:r>
+              <a:rPr sz="800">
+                <a:hlinkClick r:id="rId55"/>
+              </a:rPr>
+              <a:t>Lofar 3</a:t>
+            </a:r>
+          </a:p>
+        </p:txBody>
+      </p:sp>
+      <p:sp>
+        <p:nvSpPr>
+          <p:cNvPr id="27" name="Rounded Rectangle 26"/>
+          <p:cNvSpPr/>
+          <p:nvPr>
+            <a:hlinkClick r:id="rId56"/>
+          </p:nvPr>
+        </p:nvSpPr>
+        <p:spPr>
+          <a:xfrm>
+            <a:off x="4948732" y="4632960"/>
+            <a:ext cx="2200046" cy="365760"/>
+          </a:xfrm>
+          <a:prstGeom prst="roundRect">
+            <a:avLst/>
+          </a:prstGeom>
+          <a:solidFill>
+            <a:srgbClr val="E8EEF7"/>
+          </a:solidFill>
+          <a:ln>
+            <a:solidFill>
+              <a:srgbClr val="1F3A5F"/>
+            </a:solidFill>
+          </a:ln>
+        </p:spPr>
+        <p:style>
+          <a:lnRef idx="1">
+            <a:schemeClr val="accent1"/>
+          </a:lnRef>
+          <a:fillRef idx="3">
+            <a:schemeClr val="accent1"/>
+          </a:fillRef>
+          <a:effectRef idx="2">
+            <a:schemeClr val="accent1"/>
+          </a:effectRef>
+          <a:fontRef idx="minor">
+            <a:schemeClr val="lt1"/>
+          </a:fontRef>
+        </p:style>
+        <p:txBody>
+          <a:bodyPr rtlCol="0" anchor="ctr" lIns="45720" rIns="45720"/>
+          <a:lstStyle/>
+          <a:p>
+            <a:pPr algn="ctr"/>
+            <a:r>
+              <a:rPr sz="900">
+                <a:solidFill>
+                  <a:srgbClr val="1F3A5F"/>
+                </a:solidFill>
+              </a:rPr>
+              <a:t>Gram 32: FR Akira-class, Category 3, Bajor</a:t>
+            </a:r>
+          </a:p>
+        </p:txBody>
+      </p:sp>
+      <p:sp>
+        <p:nvSpPr>
+          <p:cNvPr id="28" name="TextBox 27"/>
+          <p:cNvSpPr txBox="1"/>
+          <p:nvPr/>
+        </p:nvSpPr>
+        <p:spPr>
+          <a:xfrm>
+            <a:off x="4948732" y="5017008"/>
+            <a:ext cx="2200046" cy="1447800"/>
+          </a:xfrm>
+          <a:prstGeom prst="rect">
+            <a:avLst/>
+          </a:prstGeom>
+          <a:noFill/>
+        </p:spPr>
+        <p:txBody>
+          <a:bodyPr wrap="square">
+            <a:spAutoFit/>
+          </a:bodyPr>
+          <a:lstStyle/>
+          <a:p>
+            <a:r>
+              <a:rPr sz="800">
+                <a:hlinkClick r:id="rId57"/>
+              </a:rPr>
+              <a:t>Lofar 1</a:t>
+            </a:r>
+          </a:p>
+          <a:p>
+            <a:r>
+              <a:rPr sz="800">
+                <a:hlinkClick r:id="rId58"/>
+              </a:rPr>
+              <a:t>Lofar 2</a:t>
+            </a:r>
+          </a:p>
+        </p:txBody>
+      </p:sp>
+      <p:sp>
+        <p:nvSpPr>
+          <p:cNvPr id="29" name="Rounded Rectangle 28"/>
+          <p:cNvSpPr/>
+          <p:nvPr>
+            <a:hlinkClick r:id="rId59"/>
+          </p:nvPr>
+        </p:nvSpPr>
+        <p:spPr>
+          <a:xfrm>
+            <a:off x="7240219" y="4632960"/>
+            <a:ext cx="2200046" cy="365760"/>
+          </a:xfrm>
+          <a:prstGeom prst="roundRect">
+            <a:avLst/>
+          </a:prstGeom>
+          <a:solidFill>
+            <a:srgbClr val="E8EEF7"/>
+          </a:solidFill>
+          <a:ln>
+            <a:solidFill>
+              <a:srgbClr val="1F3A5F"/>
+            </a:solidFill>
+          </a:ln>
+        </p:spPr>
+        <p:style>
+          <a:lnRef idx="1">
+            <a:schemeClr val="accent1"/>
+          </a:lnRef>
+          <a:fillRef idx="3">
+            <a:schemeClr val="accent1"/>
+          </a:fillRef>
+          <a:effectRef idx="2">
+            <a:schemeClr val="accent1"/>
+          </a:effectRef>
+          <a:fontRef idx="minor">
+            <a:schemeClr val="lt1"/>
+          </a:fontRef>
+        </p:style>
+        <p:txBody>
+          <a:bodyPr rtlCol="0" anchor="ctr" lIns="45720" rIns="45720"/>
+          <a:lstStyle/>
+          <a:p>
+            <a:pPr algn="ctr"/>
+            <a:r>
+              <a:rPr sz="900">
+                <a:solidFill>
+                  <a:srgbClr val="1F3A5F"/>
+                </a:solidFill>
+              </a:rPr>
+              <a:t>Gram 33: Reliant contact bearing 201, codename Kobol</a:t>
+            </a:r>
+          </a:p>
+        </p:txBody>
+      </p:sp>
+      <p:sp>
+        <p:nvSpPr>
+          <p:cNvPr id="30" name="TextBox 29"/>
+          <p:cNvSpPr txBox="1"/>
+          <p:nvPr/>
+        </p:nvSpPr>
+        <p:spPr>
+          <a:xfrm>
+            <a:off x="7240219" y="5017008"/>
+            <a:ext cx="2200046" cy="1447800"/>
+          </a:xfrm>
+          <a:prstGeom prst="rect">
+            <a:avLst/>
+          </a:prstGeom>
+          <a:noFill/>
+        </p:spPr>
+        <p:txBody>
+          <a:bodyPr wrap="square">
+            <a:spAutoFit/>
+          </a:bodyPr>
+          <a:lstStyle/>
+          <a:p>
+            <a:r>
+              <a:rPr sz="800">
+                <a:hlinkClick r:id="rId60"/>
+              </a:rPr>
+              <a:t>Lofar 1</a:t>
+            </a:r>
+          </a:p>
+          <a:p>
+            <a:r>
+              <a:rPr sz="800">
+                <a:hlinkClick r:id="rId61"/>
+              </a:rPr>
+              <a:t>Lofar 2</a:t>
+            </a:r>
+          </a:p>
+          <a:p>
+            <a:r>
+              <a:rPr sz="800">
+                <a:hlinkClick r:id="rId62"/>
+              </a:rPr>
+              <a:t>Lofar 3</a:t>
+            </a:r>
+          </a:p>
+          <a:p>
+            <a:r>
+              <a:rPr sz="800">
+                <a:hlinkClick r:id="rId63"/>
+              </a:rPr>
+              <a:t>Lofar 4</a:t>
+            </a:r>
+          </a:p>
+        </p:txBody>
+      </p:sp>
+      <p:sp>
+        <p:nvSpPr>
+          <p:cNvPr id="31" name="Rounded Rectangle 30"/>
+          <p:cNvSpPr/>
+          <p:nvPr>
+            <a:hlinkClick r:id="rId64"/>
+          </p:nvPr>
+        </p:nvSpPr>
+        <p:spPr>
+          <a:xfrm>
+            <a:off x="9531705" y="4632960"/>
+            <a:ext cx="2200046" cy="365760"/>
+          </a:xfrm>
+          <a:prstGeom prst="roundRect">
+            <a:avLst/>
+          </a:prstGeom>
+          <a:solidFill>
+            <a:srgbClr val="E8EEF7"/>
+          </a:solidFill>
+          <a:ln>
+            <a:solidFill>
+              <a:srgbClr val="1F3A5F"/>
+            </a:solidFill>
+          </a:ln>
+        </p:spPr>
+        <p:style>
+          <a:lnRef idx="1">
+            <a:schemeClr val="accent1"/>
+          </a:lnRef>
+          <a:fillRef idx="3">
+            <a:schemeClr val="accent1"/>
+          </a:fillRef>
+          <a:effectRef idx="2">
+            <a:schemeClr val="accent1"/>
+          </a:effectRef>
+          <a:fontRef idx="minor">
+            <a:schemeClr val="lt1"/>
+          </a:fontRef>
+        </p:style>
+        <p:txBody>
+          <a:bodyPr rtlCol="0" anchor="ctr" lIns="45720" rIns="45720"/>
+          <a:lstStyle/>
+          <a:p>
+            <a:pPr algn="ctr"/>
+            <a:r>
+              <a:rPr sz="900">
+                <a:solidFill>
+                  <a:srgbClr val="1F3A5F"/>
+                </a:solidFill>
+              </a:rPr>
+              <a:t>Gram 34: FR Imperial-class, Category 4, Mustafar</a:t>
+            </a:r>
+          </a:p>
+        </p:txBody>
+      </p:sp>
+      <p:sp>
+        <p:nvSpPr>
+          <p:cNvPr id="32" name="TextBox 31"/>
+          <p:cNvSpPr txBox="1"/>
+          <p:nvPr/>
+        </p:nvSpPr>
+        <p:spPr>
+          <a:xfrm>
+            <a:off x="9531705" y="5017008"/>
+            <a:ext cx="2200046" cy="1447800"/>
+          </a:xfrm>
+          <a:prstGeom prst="rect">
+            <a:avLst/>
+          </a:prstGeom>
+          <a:noFill/>
+        </p:spPr>
+        <p:txBody>
+          <a:bodyPr wrap="square">
+            <a:spAutoFit/>
+          </a:bodyPr>
+          <a:lstStyle/>
+          <a:p>
+            <a:r>
+              <a:rPr sz="800">
+                <a:hlinkClick r:id="rId65"/>
+              </a:rPr>
+              <a:t>Lofar 1</a:t>
+            </a:r>
+          </a:p>
+          <a:p>
+            <a:r>
+              <a:rPr sz="800">
+                <a:hlinkClick r:id="rId66"/>
+              </a:rPr>
+              <a:t>Lofar 2</a:t>
+            </a:r>
+          </a:p>
+          <a:p>
+            <a:r>
+              <a:rPr sz="800">
+                <a:hlinkClick r:id="rId67"/>
+              </a:rPr>
+              <a:t>Lofar 3</a:t>
+            </a:r>
+          </a:p>
+        </p:txBody>
+      </p:sp>
+    </p:spTree>
+  </p:cSld>
+  <p:clrMapOvr>
+    <a:masterClrMapping/>
+  </p:clrMapOvr>
+</p:sld>
+</file>
+
+<file path=ppt/slides/slide4.xml><?xml version="1.0" encoding="utf-8"?>
+<p:sld xmlns:a="http://schemas.openxmlformats.org/drawingml/2006/main" xmlns:p="http://schemas.openxmlformats.org/presentationml/2006/main" xmlns:r="http://schemas.openxmlformats.org/officeDocument/2006/relationships">
+  <p:cSld>
+    <p:spTree>
+      <p:nvGrpSpPr>
+        <p:cNvPr id="1" name=""/>
+        <p:cNvGrpSpPr/>
+        <p:nvPr/>
+      </p:nvGrpSpPr>
+      <p:grpSpPr/>
+      <p:sp>
+        <p:nvSpPr>
+          <p:cNvPr id="2" name="Rectangle 1"/>
+          <p:cNvSpPr/>
+          <p:nvPr/>
+        </p:nvSpPr>
+        <p:spPr>
+          <a:xfrm>
+            <a:off x="0" y="0"/>
+            <a:ext cx="12188952" cy="548640"/>
+          </a:xfrm>
+          <a:prstGeom prst="rect">
+            <a:avLst/>
+          </a:prstGeom>
+          <a:solidFill>
+            <a:srgbClr val="1F3A5F"/>
+          </a:solidFill>
+          <a:ln>
+            <a:noFill/>
+          </a:ln>
+        </p:spPr>
+        <p:style>
+          <a:lnRef idx="1">
+            <a:schemeClr val="accent1"/>
+          </a:lnRef>
+          <a:fillRef idx="3">
+            <a:schemeClr val="accent1"/>
+          </a:fillRef>
+          <a:effectRef idx="2">
+            <a:schemeClr val="accent1"/>
+          </a:effectRef>
+          <a:fontRef idx="minor">
+            <a:schemeClr val="lt1"/>
+          </a:fontRef>
+        </p:style>
+        <p:txBody>
+          <a:bodyPr rtlCol="0" anchor="ctr" lIns="182880" rIns="182880"/>
+          <a:lstStyle/>
+          <a:p>
+            <a:pPr algn="ctr"/>
+            <a:r>
+              <a:rPr sz="2000" b="1">
+                <a:solidFill>
+                  <a:srgbClr val="FFFFFF"/>
+                </a:solidFill>
+              </a:rPr>
+              <a:t>Instructor Week 4 Grams_Updated — Page 3 of 3</a:t>
+            </a:r>
+          </a:p>
+        </p:txBody>
+      </p:sp>
+      <p:sp>
+        <p:nvSpPr>
+          <p:cNvPr id="3" name="Rounded Rectangle 2"/>
+          <p:cNvSpPr/>
+          <p:nvPr>
+            <a:hlinkClick r:id="rId2"/>
+          </p:nvPr>
+        </p:nvSpPr>
+        <p:spPr>
+          <a:xfrm>
+            <a:off x="365760" y="731520"/>
+            <a:ext cx="2200046" cy="365760"/>
+          </a:xfrm>
+          <a:prstGeom prst="roundRect">
+            <a:avLst/>
+          </a:prstGeom>
+          <a:solidFill>
+            <a:srgbClr val="E8EEF7"/>
+          </a:solidFill>
+          <a:ln>
+            <a:solidFill>
+              <a:srgbClr val="1F3A5F"/>
+            </a:solidFill>
+          </a:ln>
+        </p:spPr>
+        <p:style>
+          <a:lnRef idx="1">
+            <a:schemeClr val="accent1"/>
+          </a:lnRef>
+          <a:fillRef idx="3">
+            <a:schemeClr val="accent1"/>
+          </a:fillRef>
+          <a:effectRef idx="2">
+            <a:schemeClr val="accent1"/>
+          </a:effectRef>
+          <a:fontRef idx="minor">
+            <a:schemeClr val="lt1"/>
+          </a:fontRef>
+        </p:style>
+        <p:txBody>
+          <a:bodyPr rtlCol="0" anchor="ctr" lIns="45720" rIns="45720"/>
+          <a:lstStyle/>
+          <a:p>
+            <a:pPr algn="ctr"/>
+            <a:r>
+              <a:rPr sz="900">
+                <a:solidFill>
+                  <a:srgbClr val="1F3A5F"/>
+                </a:solidFill>
+              </a:rPr>
+              <a:t>Gram 36: FR Defiant-class, Category 2, Defiant</a:t>
+            </a:r>
+          </a:p>
+        </p:txBody>
+      </p:sp>
+      <p:sp>
+        <p:nvSpPr>
+          <p:cNvPr id="4" name="TextBox 3"/>
+          <p:cNvSpPr txBox="1"/>
+          <p:nvPr/>
+        </p:nvSpPr>
+        <p:spPr>
+          <a:xfrm>
+            <a:off x="365760" y="1115568"/>
+            <a:ext cx="2200046" cy="1447800"/>
+          </a:xfrm>
+          <a:prstGeom prst="rect">
+            <a:avLst/>
+          </a:prstGeom>
+          <a:noFill/>
+        </p:spPr>
+        <p:txBody>
+          <a:bodyPr wrap="square">
+            <a:spAutoFit/>
+          </a:bodyPr>
+          <a:lstStyle/>
+          <a:p>
+            <a:r>
+              <a:rPr sz="800">
+                <a:hlinkClick r:id="rId3"/>
+              </a:rPr>
+              <a:t>Lofar 1</a:t>
+            </a:r>
+          </a:p>
+          <a:p>
+            <a:r>
+              <a:rPr sz="800">
+                <a:hlinkClick r:id="rId4"/>
+              </a:rPr>
+              <a:t>Lofar 2</a:t>
+            </a:r>
+          </a:p>
+          <a:p>
+            <a:r>
+              <a:rPr sz="800">
+                <a:hlinkClick r:id="rId5"/>
+              </a:rPr>
+              <a:t>Lofar 3</a:t>
+            </a:r>
+          </a:p>
+          <a:p>
+            <a:r>
+              <a:rPr sz="800">
+                <a:hlinkClick r:id="rId6"/>
+              </a:rPr>
+              <a:t>Lofar 4</a:t>
+            </a:r>
+          </a:p>
+        </p:txBody>
+      </p:sp>
+      <p:sp>
+        <p:nvSpPr>
+          <p:cNvPr id="5" name="Rounded Rectangle 4"/>
+          <p:cNvSpPr/>
+          <p:nvPr>
+            <a:hlinkClick r:id="rId7"/>
+          </p:nvPr>
+        </p:nvSpPr>
+        <p:spPr>
+          <a:xfrm>
+            <a:off x="2657246" y="731520"/>
+            <a:ext cx="2200046" cy="365760"/>
+          </a:xfrm>
+          <a:prstGeom prst="roundRect">
+            <a:avLst/>
+          </a:prstGeom>
+          <a:solidFill>
+            <a:srgbClr val="E8EEF7"/>
+          </a:solidFill>
+          <a:ln>
+            <a:solidFill>
+              <a:srgbClr val="1F3A5F"/>
+            </a:solidFill>
+          </a:ln>
+        </p:spPr>
+        <p:style>
+          <a:lnRef idx="1">
+            <a:schemeClr val="accent1"/>
+          </a:lnRef>
+          <a:fillRef idx="3">
+            <a:schemeClr val="accent1"/>
+          </a:fillRef>
+          <a:effectRef idx="2">
+            <a:schemeClr val="accent1"/>
+          </a:effectRef>
+          <a:fontRef idx="minor">
+            <a:schemeClr val="lt1"/>
+          </a:fontRef>
+        </p:style>
+        <p:txBody>
+          <a:bodyPr rtlCol="0" anchor="ctr" lIns="45720" rIns="45720"/>
+          <a:lstStyle/>
+          <a:p>
+            <a:pPr algn="ctr"/>
+            <a:r>
+              <a:rPr sz="900">
+                <a:solidFill>
+                  <a:srgbClr val="1F3A5F"/>
+                </a:solidFill>
+              </a:rPr>
+              <a:t>Gram 37: B-wing contact bearing 123, codename Hoth</a:t>
+            </a:r>
+          </a:p>
+        </p:txBody>
+      </p:sp>
+      <p:sp>
+        <p:nvSpPr>
+          <p:cNvPr id="6" name="TextBox 5"/>
+          <p:cNvSpPr txBox="1"/>
+          <p:nvPr/>
+        </p:nvSpPr>
+        <p:spPr>
+          <a:xfrm>
+            <a:off x="2657246" y="1115568"/>
+            <a:ext cx="2200046" cy="1447800"/>
+          </a:xfrm>
+          <a:prstGeom prst="rect">
+            <a:avLst/>
+          </a:prstGeom>
+          <a:noFill/>
+        </p:spPr>
+        <p:txBody>
+          <a:bodyPr wrap="square">
+            <a:spAutoFit/>
+          </a:bodyPr>
+          <a:lstStyle/>
+          <a:p>
+            <a:r>
+              <a:rPr sz="800">
+                <a:hlinkClick r:id="rId8"/>
+              </a:rPr>
+              <a:t>Lofar 1</a:t>
+            </a:r>
+          </a:p>
+          <a:p>
+            <a:r>
+              <a:rPr sz="800">
+                <a:hlinkClick r:id="rId9"/>
+              </a:rPr>
+              <a:t>Lofar 2</a:t>
+            </a:r>
+          </a:p>
+          <a:p>
+            <a:r>
+              <a:rPr sz="800">
+                <a:hlinkClick r:id="rId10"/>
+              </a:rPr>
+              <a:t>Lofar 3</a:t>
+            </a:r>
+          </a:p>
+          <a:p>
+            <a:r>
+              <a:rPr sz="800">
+                <a:hlinkClick r:id="rId11"/>
+              </a:rPr>
+              <a:t>Lofar 4</a:t>
+            </a:r>
+          </a:p>
+        </p:txBody>
+      </p:sp>
+      <p:sp>
+        <p:nvSpPr>
+          <p:cNvPr id="7" name="Rounded Rectangle 6"/>
+          <p:cNvSpPr/>
+          <p:nvPr>
+            <a:hlinkClick r:id="rId12"/>
+          </p:nvPr>
+        </p:nvSpPr>
+        <p:spPr>
+          <a:xfrm>
+            <a:off x="4948732" y="731520"/>
+            <a:ext cx="2200046" cy="365760"/>
+          </a:xfrm>
+          <a:prstGeom prst="roundRect">
+            <a:avLst/>
+          </a:prstGeom>
+          <a:solidFill>
+            <a:srgbClr val="E8EEF7"/>
+          </a:solidFill>
+          <a:ln>
+            <a:solidFill>
+              <a:srgbClr val="1F3A5F"/>
+            </a:solidFill>
+          </a:ln>
+        </p:spPr>
+        <p:style>
+          <a:lnRef idx="1">
+            <a:schemeClr val="accent1"/>
+          </a:lnRef>
+          <a:fillRef idx="3">
+            <a:schemeClr val="accent1"/>
+          </a:fillRef>
+          <a:effectRef idx="2">
+            <a:schemeClr val="accent1"/>
+          </a:effectRef>
+          <a:fontRef idx="minor">
+            <a:schemeClr val="lt1"/>
+          </a:fontRef>
+        </p:style>
+        <p:txBody>
+          <a:bodyPr rtlCol="0" anchor="ctr" lIns="45720" rIns="45720"/>
+          <a:lstStyle/>
+          <a:p>
+            <a:pPr algn="ctr"/>
+            <a:r>
+              <a:rPr sz="900">
+                <a:solidFill>
+                  <a:srgbClr val="1F3A5F"/>
+                </a:solidFill>
+              </a:rPr>
+              <a:t>Gram 38: FR Outrider, Category 1, Endor</a:t>
+            </a:r>
+          </a:p>
+        </p:txBody>
+      </p:sp>
+      <p:sp>
+        <p:nvSpPr>
+          <p:cNvPr id="8" name="TextBox 7"/>
+          <p:cNvSpPr txBox="1"/>
+          <p:nvPr/>
+        </p:nvSpPr>
+        <p:spPr>
+          <a:xfrm>
+            <a:off x="4948732" y="1115568"/>
+            <a:ext cx="2200046" cy="1447800"/>
+          </a:xfrm>
+          <a:prstGeom prst="rect">
+            <a:avLst/>
+          </a:prstGeom>
+          <a:noFill/>
+        </p:spPr>
+        <p:txBody>
+          <a:bodyPr wrap="square">
+            <a:spAutoFit/>
+          </a:bodyPr>
+          <a:lstStyle/>
+          <a:p>
+            <a:r>
+              <a:rPr sz="800">
+                <a:hlinkClick r:id="rId13"/>
+              </a:rPr>
+              <a:t>Lofar 1</a:t>
+            </a:r>
+          </a:p>
+        </p:txBody>
+      </p:sp>
+      <p:sp>
+        <p:nvSpPr>
+          <p:cNvPr id="9" name="Rounded Rectangle 8"/>
+          <p:cNvSpPr/>
+          <p:nvPr>
+            <a:hlinkClick r:id="rId14"/>
+          </p:nvPr>
+        </p:nvSpPr>
+        <p:spPr>
+          <a:xfrm>
+            <a:off x="7240219" y="731520"/>
+            <a:ext cx="2200046" cy="365760"/>
+          </a:xfrm>
+          <a:prstGeom prst="roundRect">
+            <a:avLst/>
+          </a:prstGeom>
+          <a:solidFill>
+            <a:srgbClr val="E8EEF7"/>
+          </a:solidFill>
+          <a:ln>
+            <a:solidFill>
+              <a:srgbClr val="1F3A5F"/>
+            </a:solidFill>
+          </a:ln>
+        </p:spPr>
+        <p:style>
+          <a:lnRef idx="1">
+            <a:schemeClr val="accent1"/>
+          </a:lnRef>
+          <a:fillRef idx="3">
+            <a:schemeClr val="accent1"/>
+          </a:fillRef>
+          <a:effectRef idx="2">
+            <a:schemeClr val="accent1"/>
+          </a:effectRef>
+          <a:fontRef idx="minor">
+            <a:schemeClr val="lt1"/>
+          </a:fontRef>
+        </p:style>
+        <p:txBody>
+          <a:bodyPr rtlCol="0" anchor="ctr" lIns="45720" rIns="45720"/>
+          <a:lstStyle/>
+          <a:p>
+            <a:pPr algn="ctr"/>
+            <a:r>
+              <a:rPr sz="900">
+                <a:solidFill>
+                  <a:srgbClr val="1F3A5F"/>
+                </a:solidFill>
+              </a:rPr>
+              <a:t>Gram 41: X-wing contact bearing 106, codename Tantive</a:t>
+            </a:r>
+          </a:p>
+        </p:txBody>
+      </p:sp>
+      <p:sp>
+        <p:nvSpPr>
+          <p:cNvPr id="10" name="TextBox 9"/>
+          <p:cNvSpPr txBox="1"/>
+          <p:nvPr/>
+        </p:nvSpPr>
+        <p:spPr>
+          <a:xfrm>
+            <a:off x="7240219" y="1115568"/>
+            <a:ext cx="2200046" cy="1447800"/>
+          </a:xfrm>
+          <a:prstGeom prst="rect">
+            <a:avLst/>
+          </a:prstGeom>
+          <a:noFill/>
+        </p:spPr>
+        <p:txBody>
+          <a:bodyPr wrap="square">
+            <a:spAutoFit/>
+          </a:bodyPr>
+          <a:lstStyle/>
+          <a:p>
+            <a:r>
+              <a:rPr sz="800">
+                <a:hlinkClick r:id="rId15"/>
+              </a:rPr>
+              <a:t>Lofar 1</a:t>
+            </a:r>
+          </a:p>
+          <a:p>
+            <a:r>
+              <a:rPr sz="800">
+                <a:hlinkClick r:id="rId16"/>
+              </a:rPr>
+              <a:t>Lofar 2</a:t>
+            </a:r>
+          </a:p>
+          <a:p>
+            <a:r>
+              <a:rPr sz="800">
+                <a:hlinkClick r:id="rId17"/>
+              </a:rPr>
+              <a:t>Lofar 3</a:t>
+            </a:r>
+          </a:p>
+          <a:p>
+            <a:r>
+              <a:rPr sz="800">
+                <a:hlinkClick r:id="rId18"/>
+              </a:rPr>
+              <a:t>Lofar 4</a:t>
+            </a:r>
+          </a:p>
+        </p:txBody>
+      </p:sp>
+      <p:sp>
+        <p:nvSpPr>
+          <p:cNvPr id="11" name="Rounded Rectangle 10"/>
+          <p:cNvSpPr/>
+          <p:nvPr>
+            <a:hlinkClick r:id="rId19"/>
+          </p:nvPr>
+        </p:nvSpPr>
+        <p:spPr>
+          <a:xfrm>
+            <a:off x="9531705" y="731520"/>
+            <a:ext cx="2200046" cy="365760"/>
+          </a:xfrm>
+          <a:prstGeom prst="roundRect">
+            <a:avLst/>
+          </a:prstGeom>
+          <a:solidFill>
+            <a:srgbClr val="E8EEF7"/>
+          </a:solidFill>
+          <a:ln>
+            <a:solidFill>
+              <a:srgbClr val="1F3A5F"/>
+            </a:solidFill>
+          </a:ln>
+        </p:spPr>
+        <p:style>
+          <a:lnRef idx="1">
+            <a:schemeClr val="accent1"/>
+          </a:lnRef>
+          <a:fillRef idx="3">
+            <a:schemeClr val="accent1"/>
+          </a:fillRef>
+          <a:effectRef idx="2">
+            <a:schemeClr val="accent1"/>
+          </a:effectRef>
+          <a:fontRef idx="minor">
+            <a:schemeClr val="lt1"/>
+          </a:fontRef>
+        </p:style>
+        <p:txBody>
+          <a:bodyPr rtlCol="0" anchor="ctr" lIns="45720" rIns="45720"/>
+          <a:lstStyle/>
+          <a:p>
+            <a:pPr algn="ctr"/>
+            <a:r>
+              <a:rPr sz="900">
+                <a:solidFill>
+                  <a:srgbClr val="1F3A5F"/>
+                </a:solidFill>
+              </a:rPr>
+              <a:t>Gram 42: FR Prometheus, Category 2, Coruscant</a:t>
+            </a:r>
+          </a:p>
+        </p:txBody>
+      </p:sp>
+      <p:sp>
+        <p:nvSpPr>
+          <p:cNvPr id="12" name="TextBox 11"/>
+          <p:cNvSpPr txBox="1"/>
+          <p:nvPr/>
+        </p:nvSpPr>
+        <p:spPr>
+          <a:xfrm>
+            <a:off x="9531705" y="1115568"/>
+            <a:ext cx="2200046" cy="1447800"/>
+          </a:xfrm>
+          <a:prstGeom prst="rect">
+            <a:avLst/>
+          </a:prstGeom>
+          <a:noFill/>
+        </p:spPr>
+        <p:txBody>
+          <a:bodyPr wrap="square">
+            <a:spAutoFit/>
+          </a:bodyPr>
+          <a:lstStyle/>
+          <a:p>
+            <a:r>
+              <a:rPr sz="800">
                 <a:hlinkClick r:id="rId20"/>
               </a:rPr>
               <a:t>Lofar 1</a:t>
@@ -6749,6 +6837,92 @@
                 <a:hlinkClick r:id="rId22"/>
               </a:rPr>
               <a:t>Lofar 3</a:t>
+            </a:r>
+          </a:p>
+        </p:txBody>
+      </p:sp>
+    </p:spTree>
+  </p:cSld>
+  <p:clrMapOvr>
+    <a:masterClrMapping/>
+  </p:clrMapOvr>
+</p:sld>
+</file>
+
+<file path=ppt/slides/slide5.xml><?xml version="1.0" encoding="utf-8"?>
+<p:sld xmlns:a="http://schemas.openxmlformats.org/drawingml/2006/main" xmlns:p="http://schemas.openxmlformats.org/presentationml/2006/main" xmlns:r="http://schemas.openxmlformats.org/officeDocument/2006/relationships">
+  <p:cSld>
+    <p:spTree>
+      <p:nvGrpSpPr>
+        <p:cNvPr id="1" name=""/>
+        <p:cNvGrpSpPr/>
+        <p:nvPr/>
+      </p:nvGrpSpPr>
+      <p:grpSpPr/>
+      <p:sp>
+        <p:nvSpPr>
+          <p:cNvPr id="2" name="TextBox 1"/>
+          <p:cNvSpPr txBox="1"/>
+          <p:nvPr/>
+        </p:nvSpPr>
+        <p:spPr>
+          <a:xfrm>
+            <a:off x="914400" y="2377440"/>
+            <a:ext cx="10360152" cy="1280160"/>
+          </a:xfrm>
+          <a:prstGeom prst="rect">
+            <a:avLst/>
+          </a:prstGeom>
+          <a:noFill/>
+        </p:spPr>
+        <p:txBody>
+          <a:bodyPr wrap="square">
+            <a:spAutoFit/>
+          </a:bodyPr>
+          <a:lstStyle/>
+          <a:p>
+            <a:pPr algn="ctr"/>
+            <a:r>
+              <a:rPr sz="4000" b="1">
+                <a:solidFill>
+                  <a:srgbClr val="1F3A5F"/>
+                </a:solidFill>
+              </a:rPr>
+              <a:t>End of Instructor Week 4 Grams_Updated</a:t>
+            </a:r>
+          </a:p>
+        </p:txBody>
+      </p:sp>
+      <p:sp>
+        <p:nvSpPr>
+          <p:cNvPr id="3" name="TextBox 2"/>
+          <p:cNvSpPr txBox="1"/>
+          <p:nvPr/>
+        </p:nvSpPr>
+        <p:spPr>
+          <a:xfrm>
+            <a:off x="914400" y="3840480"/>
+            <a:ext cx="10360152" cy="731520"/>
+          </a:xfrm>
+          <a:prstGeom prst="rect">
+            <a:avLst/>
+          </a:prstGeom>
+          <a:noFill/>
+        </p:spPr>
+        <p:txBody>
+          <a:bodyPr wrap="none">
+            <a:spAutoFit/>
+          </a:bodyPr>
+          <a:lstStyle/>
+          <a:p>
+            <a:pPr algn="ctr"/>
+            <a:r>
+              <a:rPr sz="2400">
+                <a:solidFill>
+                  <a:srgbClr val="1F3A5F"/>
+                </a:solidFill>
+              </a:rPr>
+              <a:t>Instructor Version</a:t>
             </a:r>
           </a:p>
         </p:txBody>

--- a/source/Instructor Week 4 Grams_Updated/Instructor Week 4 Grams_Updated.pptx
+++ b/source/Instructor Week 4 Grams_Updated/Instructor Week 4 Grams_Updated.pptx
@@ -8,8 +8,6 @@
     <p:sldId id="256" r:id="rId7"/>
     <p:sldId id="257" r:id="rId8"/>
     <p:sldId id="258" r:id="rId9"/>
-    <p:sldId id="259" r:id="rId10"/>
-    <p:sldId id="260" r:id="rId11"/>
   </p:sldIdLst>
   <p:sldSz cx="12188952" cy="6858000" type="screen4x3"/>
   <p:notesSz cx="6858000" cy="9144000"/>
@@ -3094,14 +3092,120 @@
       <p:grpSpPr/>
       <p:sp>
         <p:nvSpPr>
-          <p:cNvPr id="2" name="TextBox 1"/>
+          <p:cNvPr id="2" name="Rectangle 1"/>
+          <p:cNvSpPr/>
+          <p:nvPr/>
+        </p:nvSpPr>
+        <p:spPr>
+          <a:xfrm>
+            <a:off x="0" y="0"/>
+            <a:ext cx="12188952" cy="548640"/>
+          </a:xfrm>
+          <a:prstGeom prst="rect">
+            <a:avLst/>
+          </a:prstGeom>
+          <a:solidFill>
+            <a:srgbClr val="1F3A5F"/>
+          </a:solidFill>
+          <a:ln>
+            <a:noFill/>
+          </a:ln>
+        </p:spPr>
+        <p:style>
+          <a:lnRef idx="1">
+            <a:schemeClr val="accent1"/>
+          </a:lnRef>
+          <a:fillRef idx="3">
+            <a:schemeClr val="accent1"/>
+          </a:fillRef>
+          <a:effectRef idx="2">
+            <a:schemeClr val="accent1"/>
+          </a:effectRef>
+          <a:fontRef idx="minor">
+            <a:schemeClr val="lt1"/>
+          </a:fontRef>
+        </p:style>
+        <p:txBody>
+          <a:bodyPr rtlCol="0" anchor="ctr" lIns="182880" rIns="182880"/>
+          <a:lstStyle/>
+          <a:p>
+            <a:pPr algn="ctr"/>
+            <a:r>
+              <a:rPr sz="2000" b="1">
+                <a:solidFill>
+                  <a:srgbClr val="FFFFFF"/>
+                </a:solidFill>
+              </a:rPr>
+              <a:t>Instructor Week 4 Grams_Updated — Page 1 of 3</a:t>
+            </a:r>
+          </a:p>
+        </p:txBody>
+      </p:sp>
+      <p:sp>
+        <p:nvSpPr>
+          <p:cNvPr id="3" name="Rounded Rectangle 2">
+            <a:hlinkClick r:id="rId2"/>
+          </p:cNvPr>
+          <p:cNvSpPr/>
+          <p:nvPr/>
+        </p:nvSpPr>
+        <p:spPr>
+          <a:xfrm>
+            <a:off x="365760" y="731520"/>
+            <a:ext cx="2200046" cy="365760"/>
+          </a:xfrm>
+          <a:prstGeom prst="roundRect">
+            <a:avLst/>
+          </a:prstGeom>
+          <a:solidFill>
+            <a:srgbClr val="E8EEF7"/>
+          </a:solidFill>
+          <a:ln>
+            <a:solidFill>
+              <a:srgbClr val="1F3A5F"/>
+            </a:solidFill>
+          </a:ln>
+        </p:spPr>
+        <p:style>
+          <a:lnRef idx="1">
+            <a:schemeClr val="accent1"/>
+          </a:lnRef>
+          <a:fillRef idx="3">
+            <a:schemeClr val="accent1"/>
+          </a:fillRef>
+          <a:effectRef idx="2">
+            <a:schemeClr val="accent1"/>
+          </a:effectRef>
+          <a:fontRef idx="minor">
+            <a:schemeClr val="lt1"/>
+          </a:fontRef>
+        </p:style>
+        <p:txBody>
+          <a:bodyPr rtlCol="0" anchor="ctr" lIns="45720" rIns="45720"/>
+          <a:lstStyle/>
+          <a:p>
+            <a:pPr algn="ctr"/>
+            <a:r>
+              <a:rPr sz="900">
+                <a:solidFill>
+                  <a:srgbClr val="1F3A5F"/>
+                </a:solidFill>
+              </a:rPr>
+              <a:t>Gram 1: FR A-wing, Category 3, Hoth</a:t>
+            </a:r>
+          </a:p>
+        </p:txBody>
+      </p:sp>
+      <p:sp>
+        <p:nvSpPr>
+          <p:cNvPr id="4" name="TextBox 3"/>
           <p:cNvSpPr txBox="1"/>
           <p:nvPr/>
         </p:nvSpPr>
         <p:spPr>
           <a:xfrm>
-            <a:off x="914400" y="2377440"/>
-            <a:ext cx="10360152" cy="1280160"/>
+            <a:off x="365760" y="1115568"/>
+            <a:ext cx="2200046" cy="1447800"/>
           </a:xfrm>
           <a:prstGeom prst="rect">
             <a:avLst/>
@@ -3114,28 +3218,80 @@
           </a:bodyPr>
           <a:lstStyle/>
           <a:p>
+            <a:r>
+              <a:rPr sz="800">
+                <a:hlinkClick r:id="rId3"/>
+              </a:rPr>
+              <a:t>Lofar 1</a:t>
+            </a:r>
+          </a:p>
+        </p:txBody>
+      </p:sp>
+      <p:sp>
+        <p:nvSpPr>
+          <p:cNvPr id="5" name="Rounded Rectangle 4">
+            <a:hlinkClick r:id="rId4"/>
+          </p:cNvPr>
+          <p:cNvSpPr/>
+          <p:nvPr/>
+        </p:nvSpPr>
+        <p:spPr>
+          <a:xfrm>
+            <a:off x="2657246" y="731520"/>
+            <a:ext cx="2200046" cy="365760"/>
+          </a:xfrm>
+          <a:prstGeom prst="roundRect">
+            <a:avLst/>
+          </a:prstGeom>
+          <a:solidFill>
+            <a:srgbClr val="E8EEF7"/>
+          </a:solidFill>
+          <a:ln>
+            <a:solidFill>
+              <a:srgbClr val="1F3A5F"/>
+            </a:solidFill>
+          </a:ln>
+        </p:spPr>
+        <p:style>
+          <a:lnRef idx="1">
+            <a:schemeClr val="accent1"/>
+          </a:lnRef>
+          <a:fillRef idx="3">
+            <a:schemeClr val="accent1"/>
+          </a:fillRef>
+          <a:effectRef idx="2">
+            <a:schemeClr val="accent1"/>
+          </a:effectRef>
+          <a:fontRef idx="minor">
+            <a:schemeClr val="lt1"/>
+          </a:fontRef>
+        </p:style>
+        <p:txBody>
+          <a:bodyPr rtlCol="0" anchor="ctr" lIns="45720" rIns="45720"/>
+          <a:lstStyle/>
+          <a:p>
             <a:pPr algn="ctr"/>
             <a:r>
-              <a:rPr sz="4000" b="1">
+              <a:rPr sz="900">
                 <a:solidFill>
                   <a:srgbClr val="1F3A5F"/>
                 </a:solidFill>
               </a:rPr>
-              <a:t>Welcome to Instructor Week 4 Grams_Updated</a:t>
-            </a:r>
-          </a:p>
-        </p:txBody>
-      </p:sp>
-      <p:sp>
-        <p:nvSpPr>
-          <p:cNvPr id="3" name="TextBox 2"/>
+              <a:t>Gram 2: FR Imperial-class, Category 3, Romulus</a:t>
+            </a:r>
+          </a:p>
+        </p:txBody>
+      </p:sp>
+      <p:sp>
+        <p:nvSpPr>
+          <p:cNvPr id="6" name="TextBox 5"/>
           <p:cNvSpPr txBox="1"/>
           <p:nvPr/>
         </p:nvSpPr>
         <p:spPr>
           <a:xfrm>
-            <a:off x="914400" y="3840480"/>
-            <a:ext cx="10360152" cy="731520"/>
+            <a:off x="2657246" y="1115568"/>
+            <a:ext cx="2200046" cy="1447800"/>
           </a:xfrm>
           <a:prstGeom prst="rect">
             <a:avLst/>
@@ -3143,19 +3299,1222 @@
           <a:noFill/>
         </p:spPr>
         <p:txBody>
-          <a:bodyPr wrap="none">
+          <a:bodyPr wrap="square">
             <a:spAutoFit/>
           </a:bodyPr>
           <a:lstStyle/>
           <a:p>
+            <a:r>
+              <a:rPr sz="800">
+                <a:hlinkClick r:id="rId5"/>
+              </a:rPr>
+              <a:t>Lofar 1</a:t>
+            </a:r>
+          </a:p>
+          <a:p>
+            <a:r>
+              <a:rPr sz="800">
+                <a:hlinkClick r:id="rId6"/>
+              </a:rPr>
+              <a:t>Lofar 2</a:t>
+            </a:r>
+          </a:p>
+        </p:txBody>
+      </p:sp>
+      <p:sp>
+        <p:nvSpPr>
+          <p:cNvPr id="7" name="Rounded Rectangle 6">
+            <a:hlinkClick r:id="rId7"/>
+          </p:cNvPr>
+          <p:cNvSpPr/>
+          <p:nvPr/>
+        </p:nvSpPr>
+        <p:spPr>
+          <a:xfrm>
+            <a:off x="4948732" y="731520"/>
+            <a:ext cx="2200046" cy="365760"/>
+          </a:xfrm>
+          <a:prstGeom prst="roundRect">
+            <a:avLst/>
+          </a:prstGeom>
+          <a:solidFill>
+            <a:srgbClr val="E8EEF7"/>
+          </a:solidFill>
+          <a:ln>
+            <a:solidFill>
+              <a:srgbClr val="1F3A5F"/>
+            </a:solidFill>
+          </a:ln>
+        </p:spPr>
+        <p:style>
+          <a:lnRef idx="1">
+            <a:schemeClr val="accent1"/>
+          </a:lnRef>
+          <a:fillRef idx="3">
+            <a:schemeClr val="accent1"/>
+          </a:fillRef>
+          <a:effectRef idx="2">
+            <a:schemeClr val="accent1"/>
+          </a:effectRef>
+          <a:fontRef idx="minor">
+            <a:schemeClr val="lt1"/>
+          </a:fontRef>
+        </p:style>
+        <p:txBody>
+          <a:bodyPr rtlCol="0" anchor="ctr" lIns="45720" rIns="45720"/>
+          <a:lstStyle/>
+          <a:p>
             <a:pPr algn="ctr"/>
             <a:r>
-              <a:rPr sz="2400">
+              <a:rPr sz="900">
                 <a:solidFill>
                   <a:srgbClr val="1F3A5F"/>
                 </a:solidFill>
               </a:rPr>
-              <a:t>Instructor Version</a:t>
+              <a:t>Gram 3: FR Reliant, Category 1, Coruscant</a:t>
+            </a:r>
+          </a:p>
+        </p:txBody>
+      </p:sp>
+      <p:sp>
+        <p:nvSpPr>
+          <p:cNvPr id="8" name="TextBox 7"/>
+          <p:cNvSpPr txBox="1"/>
+          <p:nvPr/>
+        </p:nvSpPr>
+        <p:spPr>
+          <a:xfrm>
+            <a:off x="4948732" y="1115568"/>
+            <a:ext cx="2200046" cy="1447800"/>
+          </a:xfrm>
+          <a:prstGeom prst="rect">
+            <a:avLst/>
+          </a:prstGeom>
+          <a:noFill/>
+        </p:spPr>
+        <p:txBody>
+          <a:bodyPr wrap="square">
+            <a:spAutoFit/>
+          </a:bodyPr>
+          <a:lstStyle/>
+          <a:p>
+            <a:r>
+              <a:rPr sz="800">
+                <a:hlinkClick r:id="rId8"/>
+              </a:rPr>
+              <a:t>Lofar 1</a:t>
+            </a:r>
+          </a:p>
+        </p:txBody>
+      </p:sp>
+      <p:sp>
+        <p:nvSpPr>
+          <p:cNvPr id="9" name="Rounded Rectangle 8">
+            <a:hlinkClick r:id="rId9"/>
+          </p:cNvPr>
+          <p:cNvSpPr/>
+          <p:nvPr/>
+        </p:nvSpPr>
+        <p:spPr>
+          <a:xfrm>
+            <a:off x="7240219" y="731520"/>
+            <a:ext cx="2200046" cy="365760"/>
+          </a:xfrm>
+          <a:prstGeom prst="roundRect">
+            <a:avLst/>
+          </a:prstGeom>
+          <a:solidFill>
+            <a:srgbClr val="E8EEF7"/>
+          </a:solidFill>
+          <a:ln>
+            <a:solidFill>
+              <a:srgbClr val="1F3A5F"/>
+            </a:solidFill>
+          </a:ln>
+        </p:spPr>
+        <p:style>
+          <a:lnRef idx="1">
+            <a:schemeClr val="accent1"/>
+          </a:lnRef>
+          <a:fillRef idx="3">
+            <a:schemeClr val="accent1"/>
+          </a:fillRef>
+          <a:effectRef idx="2">
+            <a:schemeClr val="accent1"/>
+          </a:effectRef>
+          <a:fontRef idx="minor">
+            <a:schemeClr val="lt1"/>
+          </a:fontRef>
+        </p:style>
+        <p:txBody>
+          <a:bodyPr rtlCol="0" anchor="ctr" lIns="45720" rIns="45720"/>
+          <a:lstStyle/>
+          <a:p>
+            <a:pPr algn="ctr"/>
+            <a:r>
+              <a:rPr sz="900">
+                <a:solidFill>
+                  <a:srgbClr val="1F3A5F"/>
+                </a:solidFill>
+              </a:rPr>
+              <a:t>Gram 4: FR Y-wing, Category 4, Caprica</a:t>
+            </a:r>
+          </a:p>
+        </p:txBody>
+      </p:sp>
+      <p:sp>
+        <p:nvSpPr>
+          <p:cNvPr id="10" name="TextBox 9"/>
+          <p:cNvSpPr txBox="1"/>
+          <p:nvPr/>
+        </p:nvSpPr>
+        <p:spPr>
+          <a:xfrm>
+            <a:off x="7240219" y="1115568"/>
+            <a:ext cx="2200046" cy="1447800"/>
+          </a:xfrm>
+          <a:prstGeom prst="rect">
+            <a:avLst/>
+          </a:prstGeom>
+          <a:noFill/>
+        </p:spPr>
+        <p:txBody>
+          <a:bodyPr wrap="square">
+            <a:spAutoFit/>
+          </a:bodyPr>
+          <a:lstStyle/>
+          <a:p>
+            <a:r>
+              <a:rPr sz="800">
+                <a:hlinkClick r:id="rId10"/>
+              </a:rPr>
+              <a:t>Lofar 1</a:t>
+            </a:r>
+          </a:p>
+          <a:p>
+            <a:r>
+              <a:rPr sz="800">
+                <a:hlinkClick r:id="rId11"/>
+              </a:rPr>
+              <a:t>Lofar 2</a:t>
+            </a:r>
+          </a:p>
+        </p:txBody>
+      </p:sp>
+      <p:sp>
+        <p:nvSpPr>
+          <p:cNvPr id="11" name="Rounded Rectangle 10">
+            <a:hlinkClick r:id="rId12"/>
+          </p:cNvPr>
+          <p:cNvSpPr/>
+          <p:nvPr/>
+        </p:nvSpPr>
+        <p:spPr>
+          <a:xfrm>
+            <a:off x="9531705" y="731520"/>
+            <a:ext cx="2200046" cy="365760"/>
+          </a:xfrm>
+          <a:prstGeom prst="roundRect">
+            <a:avLst/>
+          </a:prstGeom>
+          <a:solidFill>
+            <a:srgbClr val="E8EEF7"/>
+          </a:solidFill>
+          <a:ln>
+            <a:solidFill>
+              <a:srgbClr val="1F3A5F"/>
+            </a:solidFill>
+          </a:ln>
+        </p:spPr>
+        <p:style>
+          <a:lnRef idx="1">
+            <a:schemeClr val="accent1"/>
+          </a:lnRef>
+          <a:fillRef idx="3">
+            <a:schemeClr val="accent1"/>
+          </a:fillRef>
+          <a:effectRef idx="2">
+            <a:schemeClr val="accent1"/>
+          </a:effectRef>
+          <a:fontRef idx="minor">
+            <a:schemeClr val="lt1"/>
+          </a:fontRef>
+        </p:style>
+        <p:txBody>
+          <a:bodyPr rtlCol="0" anchor="ctr" lIns="45720" rIns="45720"/>
+          <a:lstStyle/>
+          <a:p>
+            <a:pPr algn="ctr"/>
+            <a:r>
+              <a:rPr sz="900">
+                <a:solidFill>
+                  <a:srgbClr val="1F3A5F"/>
+                </a:solidFill>
+              </a:rPr>
+              <a:t>Gram 5: FR Excelsior, Category 2, Risa</a:t>
+            </a:r>
+          </a:p>
+        </p:txBody>
+      </p:sp>
+      <p:sp>
+        <p:nvSpPr>
+          <p:cNvPr id="12" name="TextBox 11"/>
+          <p:cNvSpPr txBox="1"/>
+          <p:nvPr/>
+        </p:nvSpPr>
+        <p:spPr>
+          <a:xfrm>
+            <a:off x="9531705" y="1115568"/>
+            <a:ext cx="2200046" cy="1447800"/>
+          </a:xfrm>
+          <a:prstGeom prst="rect">
+            <a:avLst/>
+          </a:prstGeom>
+          <a:noFill/>
+        </p:spPr>
+        <p:txBody>
+          <a:bodyPr wrap="square">
+            <a:spAutoFit/>
+          </a:bodyPr>
+          <a:lstStyle/>
+          <a:p>
+            <a:r>
+              <a:rPr sz="800">
+                <a:hlinkClick r:id="rId13"/>
+              </a:rPr>
+              <a:t>Lofar 1</a:t>
+            </a:r>
+          </a:p>
+        </p:txBody>
+      </p:sp>
+      <p:sp>
+        <p:nvSpPr>
+          <p:cNvPr id="13" name="Rounded Rectangle 12">
+            <a:hlinkClick r:id="rId14"/>
+          </p:cNvPr>
+          <p:cNvSpPr/>
+          <p:nvPr/>
+        </p:nvSpPr>
+        <p:spPr>
+          <a:xfrm>
+            <a:off x="365760" y="2682240"/>
+            <a:ext cx="2200046" cy="365760"/>
+          </a:xfrm>
+          <a:prstGeom prst="roundRect">
+            <a:avLst/>
+          </a:prstGeom>
+          <a:solidFill>
+            <a:srgbClr val="E8EEF7"/>
+          </a:solidFill>
+          <a:ln>
+            <a:solidFill>
+              <a:srgbClr val="1F3A5F"/>
+            </a:solidFill>
+          </a:ln>
+        </p:spPr>
+        <p:style>
+          <a:lnRef idx="1">
+            <a:schemeClr val="accent1"/>
+          </a:lnRef>
+          <a:fillRef idx="3">
+            <a:schemeClr val="accent1"/>
+          </a:fillRef>
+          <a:effectRef idx="2">
+            <a:schemeClr val="accent1"/>
+          </a:effectRef>
+          <a:fontRef idx="minor">
+            <a:schemeClr val="lt1"/>
+          </a:fontRef>
+        </p:style>
+        <p:txBody>
+          <a:bodyPr rtlCol="0" anchor="ctr" lIns="45720" rIns="45720"/>
+          <a:lstStyle/>
+          <a:p>
+            <a:pPr algn="ctr"/>
+            <a:r>
+              <a:rPr sz="900">
+                <a:solidFill>
+                  <a:srgbClr val="1F3A5F"/>
+                </a:solidFill>
+              </a:rPr>
+              <a:t>Gram 6: FR Venator-class, Category 2, Caprica</a:t>
+            </a:r>
+          </a:p>
+        </p:txBody>
+      </p:sp>
+      <p:sp>
+        <p:nvSpPr>
+          <p:cNvPr id="14" name="TextBox 13"/>
+          <p:cNvSpPr txBox="1"/>
+          <p:nvPr/>
+        </p:nvSpPr>
+        <p:spPr>
+          <a:xfrm>
+            <a:off x="365760" y="3066288"/>
+            <a:ext cx="2200046" cy="1447800"/>
+          </a:xfrm>
+          <a:prstGeom prst="rect">
+            <a:avLst/>
+          </a:prstGeom>
+          <a:noFill/>
+        </p:spPr>
+        <p:txBody>
+          <a:bodyPr wrap="square">
+            <a:spAutoFit/>
+          </a:bodyPr>
+          <a:lstStyle/>
+          <a:p>
+            <a:r>
+              <a:rPr sz="800">
+                <a:hlinkClick r:id="rId15"/>
+              </a:rPr>
+              <a:t>Lofar 1</a:t>
+            </a:r>
+          </a:p>
+        </p:txBody>
+      </p:sp>
+      <p:sp>
+        <p:nvSpPr>
+          <p:cNvPr id="15" name="Rounded Rectangle 14">
+            <a:hlinkClick r:id="rId16"/>
+          </p:cNvPr>
+          <p:cNvSpPr/>
+          <p:nvPr/>
+        </p:nvSpPr>
+        <p:spPr>
+          <a:xfrm>
+            <a:off x="2657246" y="2682240"/>
+            <a:ext cx="2200046" cy="365760"/>
+          </a:xfrm>
+          <a:prstGeom prst="roundRect">
+            <a:avLst/>
+          </a:prstGeom>
+          <a:solidFill>
+            <a:srgbClr val="E8EEF7"/>
+          </a:solidFill>
+          <a:ln>
+            <a:solidFill>
+              <a:srgbClr val="1F3A5F"/>
+            </a:solidFill>
+          </a:ln>
+        </p:spPr>
+        <p:style>
+          <a:lnRef idx="1">
+            <a:schemeClr val="accent1"/>
+          </a:lnRef>
+          <a:fillRef idx="3">
+            <a:schemeClr val="accent1"/>
+          </a:fillRef>
+          <a:effectRef idx="2">
+            <a:schemeClr val="accent1"/>
+          </a:effectRef>
+          <a:fontRef idx="minor">
+            <a:schemeClr val="lt1"/>
+          </a:fontRef>
+        </p:style>
+        <p:txBody>
+          <a:bodyPr rtlCol="0" anchor="ctr" lIns="45720" rIns="45720"/>
+          <a:lstStyle/>
+          <a:p>
+            <a:pPr algn="ctr"/>
+            <a:r>
+              <a:rPr sz="900">
+                <a:solidFill>
+                  <a:srgbClr val="1F3A5F"/>
+                </a:solidFill>
+              </a:rPr>
+              <a:t>Gram 7: FR Galaxy-class, Category 1, Kobol</a:t>
+            </a:r>
+          </a:p>
+        </p:txBody>
+      </p:sp>
+      <p:sp>
+        <p:nvSpPr>
+          <p:cNvPr id="16" name="TextBox 15"/>
+          <p:cNvSpPr txBox="1"/>
+          <p:nvPr/>
+        </p:nvSpPr>
+        <p:spPr>
+          <a:xfrm>
+            <a:off x="2657246" y="3066288"/>
+            <a:ext cx="2200046" cy="1447800"/>
+          </a:xfrm>
+          <a:prstGeom prst="rect">
+            <a:avLst/>
+          </a:prstGeom>
+          <a:noFill/>
+        </p:spPr>
+        <p:txBody>
+          <a:bodyPr wrap="square">
+            <a:spAutoFit/>
+          </a:bodyPr>
+          <a:lstStyle/>
+          <a:p>
+            <a:r>
+              <a:rPr sz="800">
+                <a:hlinkClick r:id="rId17"/>
+              </a:rPr>
+              <a:t>Lofar 1</a:t>
+            </a:r>
+          </a:p>
+        </p:txBody>
+      </p:sp>
+      <p:sp>
+        <p:nvSpPr>
+          <p:cNvPr id="17" name="Rounded Rectangle 16">
+            <a:hlinkClick r:id="rId18"/>
+          </p:cNvPr>
+          <p:cNvSpPr/>
+          <p:nvPr/>
+        </p:nvSpPr>
+        <p:spPr>
+          <a:xfrm>
+            <a:off x="4948732" y="2682240"/>
+            <a:ext cx="2200046" cy="365760"/>
+          </a:xfrm>
+          <a:prstGeom prst="roundRect">
+            <a:avLst/>
+          </a:prstGeom>
+          <a:solidFill>
+            <a:srgbClr val="E8EEF7"/>
+          </a:solidFill>
+          <a:ln>
+            <a:solidFill>
+              <a:srgbClr val="1F3A5F"/>
+            </a:solidFill>
+          </a:ln>
+        </p:spPr>
+        <p:style>
+          <a:lnRef idx="1">
+            <a:schemeClr val="accent1"/>
+          </a:lnRef>
+          <a:fillRef idx="3">
+            <a:schemeClr val="accent1"/>
+          </a:fillRef>
+          <a:effectRef idx="2">
+            <a:schemeClr val="accent1"/>
+          </a:effectRef>
+          <a:fontRef idx="minor">
+            <a:schemeClr val="lt1"/>
+          </a:fontRef>
+        </p:style>
+        <p:txBody>
+          <a:bodyPr rtlCol="0" anchor="ctr" lIns="45720" rIns="45720"/>
+          <a:lstStyle/>
+          <a:p>
+            <a:pPr algn="ctr"/>
+            <a:r>
+              <a:rPr sz="900">
+                <a:solidFill>
+                  <a:srgbClr val="1F3A5F"/>
+                </a:solidFill>
+              </a:rPr>
+              <a:t>Gram 8: FR Tantive IV, Category 2, Romulus</a:t>
+            </a:r>
+          </a:p>
+        </p:txBody>
+      </p:sp>
+      <p:sp>
+        <p:nvSpPr>
+          <p:cNvPr id="18" name="TextBox 17"/>
+          <p:cNvSpPr txBox="1"/>
+          <p:nvPr/>
+        </p:nvSpPr>
+        <p:spPr>
+          <a:xfrm>
+            <a:off x="4948732" y="3066288"/>
+            <a:ext cx="2200046" cy="1447800"/>
+          </a:xfrm>
+          <a:prstGeom prst="rect">
+            <a:avLst/>
+          </a:prstGeom>
+          <a:noFill/>
+        </p:spPr>
+        <p:txBody>
+          <a:bodyPr wrap="square">
+            <a:spAutoFit/>
+          </a:bodyPr>
+          <a:lstStyle/>
+          <a:p>
+            <a:r>
+              <a:rPr sz="800">
+                <a:hlinkClick r:id="rId19"/>
+              </a:rPr>
+              <a:t>Lofar 1</a:t>
+            </a:r>
+          </a:p>
+        </p:txBody>
+      </p:sp>
+      <p:sp>
+        <p:nvSpPr>
+          <p:cNvPr id="19" name="Rounded Rectangle 18">
+            <a:hlinkClick r:id="rId20"/>
+          </p:cNvPr>
+          <p:cNvSpPr/>
+          <p:nvPr/>
+        </p:nvSpPr>
+        <p:spPr>
+          <a:xfrm>
+            <a:off x="7240219" y="2682240"/>
+            <a:ext cx="2200046" cy="365760"/>
+          </a:xfrm>
+          <a:prstGeom prst="roundRect">
+            <a:avLst/>
+          </a:prstGeom>
+          <a:solidFill>
+            <a:srgbClr val="E8EEF7"/>
+          </a:solidFill>
+          <a:ln>
+            <a:solidFill>
+              <a:srgbClr val="1F3A5F"/>
+            </a:solidFill>
+          </a:ln>
+        </p:spPr>
+        <p:style>
+          <a:lnRef idx="1">
+            <a:schemeClr val="accent1"/>
+          </a:lnRef>
+          <a:fillRef idx="3">
+            <a:schemeClr val="accent1"/>
+          </a:fillRef>
+          <a:effectRef idx="2">
+            <a:schemeClr val="accent1"/>
+          </a:effectRef>
+          <a:fontRef idx="minor">
+            <a:schemeClr val="lt1"/>
+          </a:fontRef>
+        </p:style>
+        <p:txBody>
+          <a:bodyPr rtlCol="0" anchor="ctr" lIns="45720" rIns="45720"/>
+          <a:lstStyle/>
+          <a:p>
+            <a:pPr algn="ctr"/>
+            <a:r>
+              <a:rPr sz="900">
+                <a:solidFill>
+                  <a:srgbClr val="1F3A5F"/>
+                </a:solidFill>
+              </a:rPr>
+              <a:t>Gram 10: FR Discovery, Category 3, Naboo</a:t>
+            </a:r>
+          </a:p>
+        </p:txBody>
+      </p:sp>
+      <p:sp>
+        <p:nvSpPr>
+          <p:cNvPr id="20" name="TextBox 19"/>
+          <p:cNvSpPr txBox="1"/>
+          <p:nvPr/>
+        </p:nvSpPr>
+        <p:spPr>
+          <a:xfrm>
+            <a:off x="7240219" y="3066288"/>
+            <a:ext cx="2200046" cy="1447800"/>
+          </a:xfrm>
+          <a:prstGeom prst="rect">
+            <a:avLst/>
+          </a:prstGeom>
+          <a:noFill/>
+        </p:spPr>
+        <p:txBody>
+          <a:bodyPr wrap="square">
+            <a:spAutoFit/>
+          </a:bodyPr>
+          <a:lstStyle/>
+          <a:p>
+            <a:r>
+              <a:rPr sz="800">
+                <a:hlinkClick r:id="rId21"/>
+              </a:rPr>
+              <a:t>Lofar 1</a:t>
+            </a:r>
+          </a:p>
+          <a:p>
+            <a:r>
+              <a:rPr sz="800">
+                <a:hlinkClick r:id="rId22"/>
+              </a:rPr>
+              <a:t>Lofar 2</a:t>
+            </a:r>
+          </a:p>
+        </p:txBody>
+      </p:sp>
+      <p:sp>
+        <p:nvSpPr>
+          <p:cNvPr id="21" name="Rounded Rectangle 20">
+            <a:hlinkClick r:id="rId23"/>
+          </p:cNvPr>
+          <p:cNvSpPr/>
+          <p:nvPr/>
+        </p:nvSpPr>
+        <p:spPr>
+          <a:xfrm>
+            <a:off x="9531705" y="2682240"/>
+            <a:ext cx="2200046" cy="365760"/>
+          </a:xfrm>
+          <a:prstGeom prst="roundRect">
+            <a:avLst/>
+          </a:prstGeom>
+          <a:solidFill>
+            <a:srgbClr val="E8EEF7"/>
+          </a:solidFill>
+          <a:ln>
+            <a:solidFill>
+              <a:srgbClr val="1F3A5F"/>
+            </a:solidFill>
+          </a:ln>
+        </p:spPr>
+        <p:style>
+          <a:lnRef idx="1">
+            <a:schemeClr val="accent1"/>
+          </a:lnRef>
+          <a:fillRef idx="3">
+            <a:schemeClr val="accent1"/>
+          </a:fillRef>
+          <a:effectRef idx="2">
+            <a:schemeClr val="accent1"/>
+          </a:effectRef>
+          <a:fontRef idx="minor">
+            <a:schemeClr val="lt1"/>
+          </a:fontRef>
+        </p:style>
+        <p:txBody>
+          <a:bodyPr rtlCol="0" anchor="ctr" lIns="45720" rIns="45720"/>
+          <a:lstStyle/>
+          <a:p>
+            <a:pPr algn="ctr"/>
+            <a:r>
+              <a:rPr sz="900">
+                <a:solidFill>
+                  <a:srgbClr val="1F3A5F"/>
+                </a:solidFill>
+              </a:rPr>
+              <a:t>Gram 11: FR Constitution-class, Category 2, Dank</a:t>
+            </a:r>
+          </a:p>
+        </p:txBody>
+      </p:sp>
+      <p:sp>
+        <p:nvSpPr>
+          <p:cNvPr id="22" name="TextBox 21"/>
+          <p:cNvSpPr txBox="1"/>
+          <p:nvPr/>
+        </p:nvSpPr>
+        <p:spPr>
+          <a:xfrm>
+            <a:off x="9531705" y="3066288"/>
+            <a:ext cx="2200046" cy="1447800"/>
+          </a:xfrm>
+          <a:prstGeom prst="rect">
+            <a:avLst/>
+          </a:prstGeom>
+          <a:noFill/>
+        </p:spPr>
+        <p:txBody>
+          <a:bodyPr wrap="square">
+            <a:spAutoFit/>
+          </a:bodyPr>
+          <a:lstStyle/>
+          <a:p>
+            <a:r>
+              <a:rPr sz="800">
+                <a:hlinkClick r:id="rId24"/>
+              </a:rPr>
+              <a:t>Lofar 1</a:t>
+            </a:r>
+          </a:p>
+          <a:p>
+            <a:r>
+              <a:rPr sz="800">
+                <a:hlinkClick r:id="rId25"/>
+              </a:rPr>
+              <a:t>Lofar 2</a:t>
+            </a:r>
+          </a:p>
+          <a:p>
+            <a:r>
+              <a:rPr sz="800">
+                <a:hlinkClick r:id="rId26"/>
+              </a:rPr>
+              <a:t>Lofar 3</a:t>
+            </a:r>
+          </a:p>
+          <a:p>
+            <a:r>
+              <a:rPr sz="800">
+                <a:hlinkClick r:id="rId27"/>
+              </a:rPr>
+              <a:t>Lofar 4</a:t>
+            </a:r>
+          </a:p>
+        </p:txBody>
+      </p:sp>
+      <p:sp>
+        <p:nvSpPr>
+          <p:cNvPr id="23" name="Rounded Rectangle 22">
+            <a:hlinkClick r:id="rId28"/>
+          </p:cNvPr>
+          <p:cNvSpPr/>
+          <p:nvPr/>
+        </p:nvSpPr>
+        <p:spPr>
+          <a:xfrm>
+            <a:off x="365760" y="4632960"/>
+            <a:ext cx="2200046" cy="365760"/>
+          </a:xfrm>
+          <a:prstGeom prst="roundRect">
+            <a:avLst/>
+          </a:prstGeom>
+          <a:solidFill>
+            <a:srgbClr val="E8EEF7"/>
+          </a:solidFill>
+          <a:ln>
+            <a:solidFill>
+              <a:srgbClr val="1F3A5F"/>
+            </a:solidFill>
+          </a:ln>
+        </p:spPr>
+        <p:style>
+          <a:lnRef idx="1">
+            <a:schemeClr val="accent1"/>
+          </a:lnRef>
+          <a:fillRef idx="3">
+            <a:schemeClr val="accent1"/>
+          </a:fillRef>
+          <a:effectRef idx="2">
+            <a:schemeClr val="accent1"/>
+          </a:effectRef>
+          <a:fontRef idx="minor">
+            <a:schemeClr val="lt1"/>
+          </a:fontRef>
+        </p:style>
+        <p:txBody>
+          <a:bodyPr rtlCol="0" anchor="ctr" lIns="45720" rIns="45720"/>
+          <a:lstStyle/>
+          <a:p>
+            <a:pPr algn="ctr"/>
+            <a:r>
+              <a:rPr sz="900">
+                <a:solidFill>
+                  <a:srgbClr val="1F3A5F"/>
+                </a:solidFill>
+              </a:rPr>
+              <a:t>Gram 12: FR TIE Bomber, Category 3, Vulcan</a:t>
+            </a:r>
+          </a:p>
+        </p:txBody>
+      </p:sp>
+      <p:sp>
+        <p:nvSpPr>
+          <p:cNvPr id="24" name="TextBox 23"/>
+          <p:cNvSpPr txBox="1"/>
+          <p:nvPr/>
+        </p:nvSpPr>
+        <p:spPr>
+          <a:xfrm>
+            <a:off x="365760" y="5017008"/>
+            <a:ext cx="2200046" cy="1447800"/>
+          </a:xfrm>
+          <a:prstGeom prst="rect">
+            <a:avLst/>
+          </a:prstGeom>
+          <a:noFill/>
+        </p:spPr>
+        <p:txBody>
+          <a:bodyPr wrap="square">
+            <a:spAutoFit/>
+          </a:bodyPr>
+          <a:lstStyle/>
+          <a:p>
+            <a:r>
+              <a:rPr sz="800">
+                <a:hlinkClick r:id="rId29"/>
+              </a:rPr>
+              <a:t>Lofar 1</a:t>
+            </a:r>
+          </a:p>
+          <a:p>
+            <a:r>
+              <a:rPr sz="800">
+                <a:hlinkClick r:id="rId30"/>
+              </a:rPr>
+              <a:t>Lofar 2</a:t>
+            </a:r>
+          </a:p>
+        </p:txBody>
+      </p:sp>
+      <p:sp>
+        <p:nvSpPr>
+          <p:cNvPr id="25" name="Rounded Rectangle 24">
+            <a:hlinkClick r:id="rId31"/>
+          </p:cNvPr>
+          <p:cNvSpPr/>
+          <p:nvPr/>
+        </p:nvSpPr>
+        <p:spPr>
+          <a:xfrm>
+            <a:off x="2657246" y="4632960"/>
+            <a:ext cx="2200046" cy="365760"/>
+          </a:xfrm>
+          <a:prstGeom prst="roundRect">
+            <a:avLst/>
+          </a:prstGeom>
+          <a:solidFill>
+            <a:srgbClr val="E8EEF7"/>
+          </a:solidFill>
+          <a:ln>
+            <a:solidFill>
+              <a:srgbClr val="1F3A5F"/>
+            </a:solidFill>
+          </a:ln>
+        </p:spPr>
+        <p:style>
+          <a:lnRef idx="1">
+            <a:schemeClr val="accent1"/>
+          </a:lnRef>
+          <a:fillRef idx="3">
+            <a:schemeClr val="accent1"/>
+          </a:fillRef>
+          <a:effectRef idx="2">
+            <a:schemeClr val="accent1"/>
+          </a:effectRef>
+          <a:fontRef idx="minor">
+            <a:schemeClr val="lt1"/>
+          </a:fontRef>
+        </p:style>
+        <p:txBody>
+          <a:bodyPr rtlCol="0" anchor="ctr" lIns="45720" rIns="45720"/>
+          <a:lstStyle/>
+          <a:p>
+            <a:pPr algn="ctr"/>
+            <a:r>
+              <a:rPr sz="900">
+                <a:solidFill>
+                  <a:srgbClr val="1F3A5F"/>
+                </a:solidFill>
+              </a:rPr>
+              <a:t>Gram 13: FR B-wing, Category 4, Coruscant</a:t>
+            </a:r>
+          </a:p>
+        </p:txBody>
+      </p:sp>
+      <p:sp>
+        <p:nvSpPr>
+          <p:cNvPr id="26" name="TextBox 25"/>
+          <p:cNvSpPr txBox="1"/>
+          <p:nvPr/>
+        </p:nvSpPr>
+        <p:spPr>
+          <a:xfrm>
+            <a:off x="2657246" y="5017008"/>
+            <a:ext cx="2200046" cy="1447800"/>
+          </a:xfrm>
+          <a:prstGeom prst="rect">
+            <a:avLst/>
+          </a:prstGeom>
+          <a:noFill/>
+        </p:spPr>
+        <p:txBody>
+          <a:bodyPr wrap="square">
+            <a:spAutoFit/>
+          </a:bodyPr>
+          <a:lstStyle/>
+          <a:p>
+            <a:r>
+              <a:rPr sz="800">
+                <a:hlinkClick r:id="rId32"/>
+              </a:rPr>
+              <a:t>Lofar 1</a:t>
+            </a:r>
+          </a:p>
+          <a:p>
+            <a:r>
+              <a:rPr sz="800">
+                <a:hlinkClick r:id="rId33"/>
+              </a:rPr>
+              <a:t>Lofar 2</a:t>
+            </a:r>
+          </a:p>
+        </p:txBody>
+      </p:sp>
+      <p:sp>
+        <p:nvSpPr>
+          <p:cNvPr id="27" name="Rounded Rectangle 26">
+            <a:hlinkClick r:id="rId34"/>
+          </p:cNvPr>
+          <p:cNvSpPr/>
+          <p:nvPr/>
+        </p:nvSpPr>
+        <p:spPr>
+          <a:xfrm>
+            <a:off x="4948732" y="4632960"/>
+            <a:ext cx="2200046" cy="365760"/>
+          </a:xfrm>
+          <a:prstGeom prst="roundRect">
+            <a:avLst/>
+          </a:prstGeom>
+          <a:solidFill>
+            <a:srgbClr val="E8EEF7"/>
+          </a:solidFill>
+          <a:ln>
+            <a:solidFill>
+              <a:srgbClr val="1F3A5F"/>
+            </a:solidFill>
+          </a:ln>
+        </p:spPr>
+        <p:style>
+          <a:lnRef idx="1">
+            <a:schemeClr val="accent1"/>
+          </a:lnRef>
+          <a:fillRef idx="3">
+            <a:schemeClr val="accent1"/>
+          </a:fillRef>
+          <a:effectRef idx="2">
+            <a:schemeClr val="accent1"/>
+          </a:effectRef>
+          <a:fontRef idx="minor">
+            <a:schemeClr val="lt1"/>
+          </a:fontRef>
+        </p:style>
+        <p:txBody>
+          <a:bodyPr rtlCol="0" anchor="ctr" lIns="45720" rIns="45720"/>
+          <a:lstStyle/>
+          <a:p>
+            <a:pPr algn="ctr"/>
+            <a:r>
+              <a:rPr sz="900">
+                <a:solidFill>
+                  <a:srgbClr val="1F3A5F"/>
+                </a:solidFill>
+              </a:rPr>
+              <a:t>Gram 14: FR Tantive IV, Category 4, Kronos</a:t>
+            </a:r>
+          </a:p>
+        </p:txBody>
+      </p:sp>
+      <p:sp>
+        <p:nvSpPr>
+          <p:cNvPr id="28" name="TextBox 27"/>
+          <p:cNvSpPr txBox="1"/>
+          <p:nvPr/>
+        </p:nvSpPr>
+        <p:spPr>
+          <a:xfrm>
+            <a:off x="4948732" y="5017008"/>
+            <a:ext cx="2200046" cy="1447800"/>
+          </a:xfrm>
+          <a:prstGeom prst="rect">
+            <a:avLst/>
+          </a:prstGeom>
+          <a:noFill/>
+        </p:spPr>
+        <p:txBody>
+          <a:bodyPr wrap="square">
+            <a:spAutoFit/>
+          </a:bodyPr>
+          <a:lstStyle/>
+          <a:p>
+            <a:r>
+              <a:rPr sz="800">
+                <a:hlinkClick r:id="rId35"/>
+              </a:rPr>
+              <a:t>Lofar 1</a:t>
+            </a:r>
+          </a:p>
+          <a:p>
+            <a:r>
+              <a:rPr sz="800">
+                <a:hlinkClick r:id="rId36"/>
+              </a:rPr>
+              <a:t>Lofar 2</a:t>
+            </a:r>
+          </a:p>
+        </p:txBody>
+      </p:sp>
+      <p:sp>
+        <p:nvSpPr>
+          <p:cNvPr id="29" name="Rounded Rectangle 28">
+            <a:hlinkClick r:id="rId37"/>
+          </p:cNvPr>
+          <p:cNvSpPr/>
+          <p:nvPr/>
+        </p:nvSpPr>
+        <p:spPr>
+          <a:xfrm>
+            <a:off x="7240219" y="4632960"/>
+            <a:ext cx="2200046" cy="365760"/>
+          </a:xfrm>
+          <a:prstGeom prst="roundRect">
+            <a:avLst/>
+          </a:prstGeom>
+          <a:solidFill>
+            <a:srgbClr val="E8EEF7"/>
+          </a:solidFill>
+          <a:ln>
+            <a:solidFill>
+              <a:srgbClr val="1F3A5F"/>
+            </a:solidFill>
+          </a:ln>
+        </p:spPr>
+        <p:style>
+          <a:lnRef idx="1">
+            <a:schemeClr val="accent1"/>
+          </a:lnRef>
+          <a:fillRef idx="3">
+            <a:schemeClr val="accent1"/>
+          </a:fillRef>
+          <a:effectRef idx="2">
+            <a:schemeClr val="accent1"/>
+          </a:effectRef>
+          <a:fontRef idx="minor">
+            <a:schemeClr val="lt1"/>
+          </a:fontRef>
+        </p:style>
+        <p:txBody>
+          <a:bodyPr rtlCol="0" anchor="ctr" lIns="45720" rIns="45720"/>
+          <a:lstStyle/>
+          <a:p>
+            <a:pPr algn="ctr"/>
+            <a:r>
+              <a:rPr sz="900">
+                <a:solidFill>
+                  <a:srgbClr val="1F3A5F"/>
+                </a:solidFill>
+              </a:rPr>
+              <a:t>Gram 15: Acclamator-class contact bearing 308, codename Kronos</a:t>
+            </a:r>
+          </a:p>
+        </p:txBody>
+      </p:sp>
+      <p:sp>
+        <p:nvSpPr>
+          <p:cNvPr id="30" name="TextBox 29"/>
+          <p:cNvSpPr txBox="1"/>
+          <p:nvPr/>
+        </p:nvSpPr>
+        <p:spPr>
+          <a:xfrm>
+            <a:off x="7240219" y="5017008"/>
+            <a:ext cx="2200046" cy="1447800"/>
+          </a:xfrm>
+          <a:prstGeom prst="rect">
+            <a:avLst/>
+          </a:prstGeom>
+          <a:noFill/>
+        </p:spPr>
+        <p:txBody>
+          <a:bodyPr wrap="square">
+            <a:spAutoFit/>
+          </a:bodyPr>
+          <a:lstStyle/>
+          <a:p>
+            <a:r>
+              <a:rPr sz="800">
+                <a:hlinkClick r:id="rId38"/>
+              </a:rPr>
+              <a:t>Lofar 1</a:t>
+            </a:r>
+          </a:p>
+          <a:p>
+            <a:r>
+              <a:rPr sz="800">
+                <a:hlinkClick r:id="rId39"/>
+              </a:rPr>
+              <a:t>Lofar 2</a:t>
+            </a:r>
+          </a:p>
+        </p:txBody>
+      </p:sp>
+      <p:sp>
+        <p:nvSpPr>
+          <p:cNvPr id="31" name="Rounded Rectangle 30">
+            <a:hlinkClick r:id="rId40"/>
+          </p:cNvPr>
+          <p:cNvSpPr/>
+          <p:nvPr/>
+        </p:nvSpPr>
+        <p:spPr>
+          <a:xfrm>
+            <a:off x="9531705" y="4632960"/>
+            <a:ext cx="2200046" cy="365760"/>
+          </a:xfrm>
+          <a:prstGeom prst="roundRect">
+            <a:avLst/>
+          </a:prstGeom>
+          <a:solidFill>
+            <a:srgbClr val="E8EEF7"/>
+          </a:solidFill>
+          <a:ln>
+            <a:solidFill>
+              <a:srgbClr val="1F3A5F"/>
+            </a:solidFill>
+          </a:ln>
+        </p:spPr>
+        <p:style>
+          <a:lnRef idx="1">
+            <a:schemeClr val="accent1"/>
+          </a:lnRef>
+          <a:fillRef idx="3">
+            <a:schemeClr val="accent1"/>
+          </a:fillRef>
+          <a:effectRef idx="2">
+            <a:schemeClr val="accent1"/>
+          </a:effectRef>
+          <a:fontRef idx="minor">
+            <a:schemeClr val="lt1"/>
+          </a:fontRef>
+        </p:style>
+        <p:txBody>
+          <a:bodyPr rtlCol="0" anchor="ctr" lIns="45720" rIns="45720"/>
+          <a:lstStyle/>
+          <a:p>
+            <a:pPr algn="ctr"/>
+            <a:r>
+              <a:rPr sz="900">
+                <a:solidFill>
+                  <a:srgbClr val="1F3A5F"/>
+                </a:solidFill>
+              </a:rPr>
+              <a:t>Gram 17: FR Imperial-class, Category 3, Hoth</a:t>
+            </a:r>
+          </a:p>
+        </p:txBody>
+      </p:sp>
+      <p:sp>
+        <p:nvSpPr>
+          <p:cNvPr id="32" name="TextBox 31"/>
+          <p:cNvSpPr txBox="1"/>
+          <p:nvPr/>
+        </p:nvSpPr>
+        <p:spPr>
+          <a:xfrm>
+            <a:off x="9531705" y="5017008"/>
+            <a:ext cx="2200046" cy="1447800"/>
+          </a:xfrm>
+          <a:prstGeom prst="rect">
+            <a:avLst/>
+          </a:prstGeom>
+          <a:noFill/>
+        </p:spPr>
+        <p:txBody>
+          <a:bodyPr wrap="square">
+            <a:spAutoFit/>
+          </a:bodyPr>
+          <a:lstStyle/>
+          <a:p>
+            <a:r>
+              <a:rPr sz="800">
+                <a:hlinkClick r:id="rId41"/>
+              </a:rPr>
+              <a:t>Lofar 1</a:t>
+            </a:r>
+          </a:p>
+          <a:p>
+            <a:r>
+              <a:rPr sz="800">
+                <a:hlinkClick r:id="rId42"/>
+              </a:rPr>
+              <a:t>Lofar 2</a:t>
             </a:r>
           </a:p>
         </p:txBody>
@@ -3224,18 +4583,18 @@
                   <a:srgbClr val="FFFFFF"/>
                 </a:solidFill>
               </a:rPr>
-              <a:t>Instructor Week 4 Grams_Updated — Page 1 of 3</a:t>
-            </a:r>
-          </a:p>
-        </p:txBody>
-      </p:sp>
-      <p:sp>
-        <p:nvSpPr>
-          <p:cNvPr id="3" name="Rounded Rectangle 2"/>
+              <a:t>Instructor Week 4 Grams_Updated — Page 2 of 3</a:t>
+            </a:r>
+          </a:p>
+        </p:txBody>
+      </p:sp>
+      <p:sp>
+        <p:nvSpPr>
+          <p:cNvPr id="3" name="Rounded Rectangle 2">
+            <a:hlinkClick r:id="rId2"/>
+          </p:cNvPr>
           <p:cNvSpPr/>
-          <p:nvPr>
-            <a:hlinkClick r:id="rId2"/>
-          </p:nvPr>
+          <p:nvPr/>
         </p:nvSpPr>
         <p:spPr>
           <a:xfrm>
@@ -3279,7 +4638,7 @@
                   <a:srgbClr val="1F3A5F"/>
                 </a:solidFill>
               </a:rPr>
-              <a:t>Gram 1: FR A-wing, Category 3, Hoth</a:t>
+              <a:t>Gram 18: FR Venator-class, Category 3, Tantive</a:t>
             </a:r>
           </a:p>
         </p:txBody>
@@ -3313,15 +4672,39 @@
               <a:t>Lofar 1</a:t>
             </a:r>
           </a:p>
-        </p:txBody>
-      </p:sp>
-      <p:sp>
-        <p:nvSpPr>
-          <p:cNvPr id="5" name="Rounded Rectangle 4"/>
+          <a:p>
+            <a:r>
+              <a:rPr sz="800">
+                <a:hlinkClick r:id="rId4"/>
+              </a:rPr>
+              <a:t>Lofar 2</a:t>
+            </a:r>
+          </a:p>
+          <a:p>
+            <a:r>
+              <a:rPr sz="800">
+                <a:hlinkClick r:id="rId5"/>
+              </a:rPr>
+              <a:t>Lofar 3</a:t>
+            </a:r>
+          </a:p>
+          <a:p>
+            <a:r>
+              <a:rPr sz="800">
+                <a:hlinkClick r:id="rId6"/>
+              </a:rPr>
+              <a:t>Lofar 4</a:t>
+            </a:r>
+          </a:p>
+        </p:txBody>
+      </p:sp>
+      <p:sp>
+        <p:nvSpPr>
+          <p:cNvPr id="5" name="Rounded Rectangle 4">
+            <a:hlinkClick r:id="rId7"/>
+          </p:cNvPr>
           <p:cNvSpPr/>
-          <p:nvPr>
-            <a:hlinkClick r:id="rId4"/>
-          </p:nvPr>
+          <p:nvPr/>
         </p:nvSpPr>
         <p:spPr>
           <a:xfrm>
@@ -3365,7 +4748,7 @@
                   <a:srgbClr val="1F3A5F"/>
                 </a:solidFill>
               </a:rPr>
-              <a:t>Gram 2: FR Imperial-class, Category 3, Romulus</a:t>
+              <a:t>Gram 20: FR Discovery, Category 3, Naboo</a:t>
             </a:r>
           </a:p>
         </p:txBody>
@@ -3394,7 +4777,7 @@
           <a:p>
             <a:r>
               <a:rPr sz="800">
-                <a:hlinkClick r:id="rId5"/>
+                <a:hlinkClick r:id="rId8"/>
               </a:rPr>
               <a:t>Lofar 1</a:t>
             </a:r>
@@ -3402,20 +4785,36 @@
           <a:p>
             <a:r>
               <a:rPr sz="800">
-                <a:hlinkClick r:id="rId6"/>
+                <a:hlinkClick r:id="rId9"/>
               </a:rPr>
               <a:t>Lofar 2</a:t>
             </a:r>
           </a:p>
-        </p:txBody>
-      </p:sp>
-      <p:sp>
-        <p:nvSpPr>
-          <p:cNvPr id="7" name="Rounded Rectangle 6"/>
+          <a:p>
+            <a:r>
+              <a:rPr sz="800">
+                <a:hlinkClick r:id="rId10"/>
+              </a:rPr>
+              <a:t>Lofar 3</a:t>
+            </a:r>
+          </a:p>
+          <a:p>
+            <a:r>
+              <a:rPr sz="800">
+                <a:hlinkClick r:id="rId11"/>
+              </a:rPr>
+              <a:t>Lofar 4</a:t>
+            </a:r>
+          </a:p>
+        </p:txBody>
+      </p:sp>
+      <p:sp>
+        <p:nvSpPr>
+          <p:cNvPr id="7" name="Rounded Rectangle 6">
+            <a:hlinkClick r:id="rId12"/>
+          </p:cNvPr>
           <p:cNvSpPr/>
-          <p:nvPr>
-            <a:hlinkClick r:id="rId7"/>
-          </p:nvPr>
+          <p:nvPr/>
         </p:nvSpPr>
         <p:spPr>
           <a:xfrm>
@@ -3459,7 +4858,7 @@
                   <a:srgbClr val="1F3A5F"/>
                 </a:solidFill>
               </a:rPr>
-              <a:t>Gram 3: FR Reliant, Category 1, Coruscant</a:t>
+              <a:t>Gram 21: FR A-wing, Category 3, Betazed</a:t>
             </a:r>
           </a:p>
         </p:txBody>
@@ -3488,20 +4887,44 @@
           <a:p>
             <a:r>
               <a:rPr sz="800">
-                <a:hlinkClick r:id="rId8"/>
+                <a:hlinkClick r:id="rId13"/>
               </a:rPr>
               <a:t>Lofar 1</a:t>
             </a:r>
           </a:p>
-        </p:txBody>
-      </p:sp>
-      <p:sp>
-        <p:nvSpPr>
-          <p:cNvPr id="9" name="Rounded Rectangle 8"/>
+          <a:p>
+            <a:r>
+              <a:rPr sz="800">
+                <a:hlinkClick r:id="rId14"/>
+              </a:rPr>
+              <a:t>Lofar 2</a:t>
+            </a:r>
+          </a:p>
+          <a:p>
+            <a:r>
+              <a:rPr sz="800">
+                <a:hlinkClick r:id="rId15"/>
+              </a:rPr>
+              <a:t>Lofar 3</a:t>
+            </a:r>
+          </a:p>
+          <a:p>
+            <a:r>
+              <a:rPr sz="800">
+                <a:hlinkClick r:id="rId16"/>
+              </a:rPr>
+              <a:t>Lofar 4</a:t>
+            </a:r>
+          </a:p>
+        </p:txBody>
+      </p:sp>
+      <p:sp>
+        <p:nvSpPr>
+          <p:cNvPr id="9" name="Rounded Rectangle 8">
+            <a:hlinkClick r:id="rId17"/>
+          </p:cNvPr>
           <p:cNvSpPr/>
-          <p:nvPr>
-            <a:hlinkClick r:id="rId9"/>
-          </p:nvPr>
+          <p:nvPr/>
         </p:nvSpPr>
         <p:spPr>
           <a:xfrm>
@@ -3545,7 +4968,7 @@
                   <a:srgbClr val="1F3A5F"/>
                 </a:solidFill>
               </a:rPr>
-              <a:t>Gram 4: FR Y-wing, Category 4, Caprica</a:t>
+              <a:t>Gram 22: FR Prometheus, Category 3, Risa</a:t>
             </a:r>
           </a:p>
         </p:txBody>
@@ -3574,7 +4997,7 @@
           <a:p>
             <a:r>
               <a:rPr sz="800">
-                <a:hlinkClick r:id="rId10"/>
+                <a:hlinkClick r:id="rId18"/>
               </a:rPr>
               <a:t>Lofar 1</a:t>
             </a:r>
@@ -3582,20 +5005,36 @@
           <a:p>
             <a:r>
               <a:rPr sz="800">
-                <a:hlinkClick r:id="rId11"/>
+                <a:hlinkClick r:id="rId19"/>
               </a:rPr>
               <a:t>Lofar 2</a:t>
             </a:r>
           </a:p>
-        </p:txBody>
-      </p:sp>
-      <p:sp>
-        <p:nvSpPr>
-          <p:cNvPr id="11" name="Rounded Rectangle 10"/>
+          <a:p>
+            <a:r>
+              <a:rPr sz="800">
+                <a:hlinkClick r:id="rId20"/>
+              </a:rPr>
+              <a:t>Lofar 3</a:t>
+            </a:r>
+          </a:p>
+          <a:p>
+            <a:r>
+              <a:rPr sz="800">
+                <a:hlinkClick r:id="rId21"/>
+              </a:rPr>
+              <a:t>Lofar 4</a:t>
+            </a:r>
+          </a:p>
+        </p:txBody>
+      </p:sp>
+      <p:sp>
+        <p:nvSpPr>
+          <p:cNvPr id="11" name="Rounded Rectangle 10">
+            <a:hlinkClick r:id="rId22"/>
+          </p:cNvPr>
           <p:cNvSpPr/>
-          <p:nvPr>
-            <a:hlinkClick r:id="rId12"/>
-          </p:nvPr>
+          <p:nvPr/>
         </p:nvSpPr>
         <p:spPr>
           <a:xfrm>
@@ -3639,7 +5078,7 @@
                   <a:srgbClr val="1F3A5F"/>
                 </a:solidFill>
               </a:rPr>
-              <a:t>Gram 5: FR Excelsior, Category 2, Risa</a:t>
+              <a:t>Gram 23: FR Mon Calamari Cruiser, Category 4, Gandalf</a:t>
             </a:r>
           </a:p>
         </p:txBody>
@@ -3668,20 +5107,36 @@
           <a:p>
             <a:r>
               <a:rPr sz="800">
-                <a:hlinkClick r:id="rId13"/>
+                <a:hlinkClick r:id="rId23"/>
               </a:rPr>
               <a:t>Lofar 1</a:t>
             </a:r>
           </a:p>
-        </p:txBody>
-      </p:sp>
-      <p:sp>
-        <p:nvSpPr>
-          <p:cNvPr id="13" name="Rounded Rectangle 12"/>
+          <a:p>
+            <a:r>
+              <a:rPr sz="800">
+                <a:hlinkClick r:id="rId24"/>
+              </a:rPr>
+              <a:t>Lofar 2</a:t>
+            </a:r>
+          </a:p>
+          <a:p>
+            <a:r>
+              <a:rPr sz="800">
+                <a:hlinkClick r:id="rId25"/>
+              </a:rPr>
+              <a:t>Lofar 3</a:t>
+            </a:r>
+          </a:p>
+        </p:txBody>
+      </p:sp>
+      <p:sp>
+        <p:nvSpPr>
+          <p:cNvPr id="13" name="Rounded Rectangle 12">
+            <a:hlinkClick r:id="rId26"/>
+          </p:cNvPr>
           <p:cNvSpPr/>
-          <p:nvPr>
-            <a:hlinkClick r:id="rId14"/>
-          </p:nvPr>
+          <p:nvPr/>
         </p:nvSpPr>
         <p:spPr>
           <a:xfrm>
@@ -3725,7 +5180,7 @@
                   <a:srgbClr val="1F3A5F"/>
                 </a:solidFill>
               </a:rPr>
-              <a:t>Gram 6: FR Venator-class, Category 2, Caprica</a:t>
+              <a:t>Gram 25: Mon Calamari Cruiser contact bearing 109, codename Kronos</a:t>
             </a:r>
           </a:p>
         </p:txBody>
@@ -3754,20 +5209,36 @@
           <a:p>
             <a:r>
               <a:rPr sz="800">
-                <a:hlinkClick r:id="rId15"/>
+                <a:hlinkClick r:id="rId27"/>
               </a:rPr>
               <a:t>Lofar 1</a:t>
             </a:r>
           </a:p>
-        </p:txBody>
-      </p:sp>
-      <p:sp>
-        <p:nvSpPr>
-          <p:cNvPr id="15" name="Rounded Rectangle 14"/>
+          <a:p>
+            <a:r>
+              <a:rPr sz="800">
+                <a:hlinkClick r:id="rId28"/>
+              </a:rPr>
+              <a:t>Lofar 2</a:t>
+            </a:r>
+          </a:p>
+          <a:p>
+            <a:r>
+              <a:rPr sz="800">
+                <a:hlinkClick r:id="rId29"/>
+              </a:rPr>
+              <a:t>Lofar 3</a:t>
+            </a:r>
+          </a:p>
+        </p:txBody>
+      </p:sp>
+      <p:sp>
+        <p:nvSpPr>
+          <p:cNvPr id="15" name="Rounded Rectangle 14">
+            <a:hlinkClick r:id="rId30"/>
+          </p:cNvPr>
           <p:cNvSpPr/>
-          <p:nvPr>
-            <a:hlinkClick r:id="rId16"/>
-          </p:nvPr>
+          <p:nvPr/>
         </p:nvSpPr>
         <p:spPr>
           <a:xfrm>
@@ -3811,7 +5282,7 @@
                   <a:srgbClr val="1F3A5F"/>
                 </a:solidFill>
               </a:rPr>
-              <a:t>Gram 7: FR Galaxy-class, Category 1, Kobol</a:t>
+              <a:t>Gram 26: TIE Fighter contact bearing 031, codename Risa</a:t>
             </a:r>
           </a:p>
         </p:txBody>
@@ -3840,20 +5311,44 @@
           <a:p>
             <a:r>
               <a:rPr sz="800">
-                <a:hlinkClick r:id="rId17"/>
+                <a:hlinkClick r:id="rId31"/>
               </a:rPr>
               <a:t>Lofar 1</a:t>
             </a:r>
           </a:p>
-        </p:txBody>
-      </p:sp>
-      <p:sp>
-        <p:nvSpPr>
-          <p:cNvPr id="17" name="Rounded Rectangle 16"/>
+          <a:p>
+            <a:r>
+              <a:rPr sz="800">
+                <a:hlinkClick r:id="rId32"/>
+              </a:rPr>
+              <a:t>Lofar 2</a:t>
+            </a:r>
+          </a:p>
+          <a:p>
+            <a:r>
+              <a:rPr sz="800">
+                <a:hlinkClick r:id="rId33"/>
+              </a:rPr>
+              <a:t>Lofar 3</a:t>
+            </a:r>
+          </a:p>
+          <a:p>
+            <a:r>
+              <a:rPr sz="800">
+                <a:hlinkClick r:id="rId34"/>
+              </a:rPr>
+              <a:t>Lofar 4</a:t>
+            </a:r>
+          </a:p>
+        </p:txBody>
+      </p:sp>
+      <p:sp>
+        <p:nvSpPr>
+          <p:cNvPr id="17" name="Rounded Rectangle 16">
+            <a:hlinkClick r:id="rId35"/>
+          </p:cNvPr>
           <p:cNvSpPr/>
-          <p:nvPr>
-            <a:hlinkClick r:id="rId18"/>
-          </p:nvPr>
+          <p:nvPr/>
         </p:nvSpPr>
         <p:spPr>
           <a:xfrm>
@@ -3897,7 +5392,7 @@
                   <a:srgbClr val="1F3A5F"/>
                 </a:solidFill>
               </a:rPr>
-              <a:t>Gram 8: FR Tantive IV, Category 2, Romulus</a:t>
+              <a:t>Gram 27: FR A-wing, Category 1, Coruscant</a:t>
             </a:r>
           </a:p>
         </p:txBody>
@@ -3926,20 +5421,36 @@
           <a:p>
             <a:r>
               <a:rPr sz="800">
-                <a:hlinkClick r:id="rId19"/>
+                <a:hlinkClick r:id="rId36"/>
               </a:rPr>
               <a:t>Lofar 1</a:t>
             </a:r>
           </a:p>
-        </p:txBody>
-      </p:sp>
-      <p:sp>
-        <p:nvSpPr>
-          <p:cNvPr id="19" name="Rounded Rectangle 18"/>
+          <a:p>
+            <a:r>
+              <a:rPr sz="800">
+                <a:hlinkClick r:id="rId37"/>
+              </a:rPr>
+              <a:t>Lofar 2</a:t>
+            </a:r>
+          </a:p>
+          <a:p>
+            <a:r>
+              <a:rPr sz="800">
+                <a:hlinkClick r:id="rId38"/>
+              </a:rPr>
+              <a:t>Lofar 3</a:t>
+            </a:r>
+          </a:p>
+        </p:txBody>
+      </p:sp>
+      <p:sp>
+        <p:nvSpPr>
+          <p:cNvPr id="19" name="Rounded Rectangle 18">
+            <a:hlinkClick r:id="rId39"/>
+          </p:cNvPr>
           <p:cNvSpPr/>
-          <p:nvPr>
-            <a:hlinkClick r:id="rId20"/>
-          </p:nvPr>
+          <p:nvPr/>
         </p:nvSpPr>
         <p:spPr>
           <a:xfrm>
@@ -3983,7 +5494,7 @@
                   <a:srgbClr val="1F3A5F"/>
                 </a:solidFill>
               </a:rPr>
-              <a:t>Gram 10: FR Discovery, Category 3, Naboo</a:t>
+              <a:t>Gram 28: FR Constitution-class, Category 1, Kobol</a:t>
             </a:r>
           </a:p>
         </p:txBody>
@@ -4012,7 +5523,7 @@
           <a:p>
             <a:r>
               <a:rPr sz="800">
-                <a:hlinkClick r:id="rId21"/>
+                <a:hlinkClick r:id="rId40"/>
               </a:rPr>
               <a:t>Lofar 1</a:t>
             </a:r>
@@ -4020,20 +5531,36 @@
           <a:p>
             <a:r>
               <a:rPr sz="800">
-                <a:hlinkClick r:id="rId22"/>
+                <a:hlinkClick r:id="rId41"/>
               </a:rPr>
               <a:t>Lofar 2</a:t>
             </a:r>
           </a:p>
-        </p:txBody>
-      </p:sp>
-      <p:sp>
-        <p:nvSpPr>
-          <p:cNvPr id="21" name="Rounded Rectangle 20"/>
+          <a:p>
+            <a:r>
+              <a:rPr sz="800">
+                <a:hlinkClick r:id="rId42"/>
+              </a:rPr>
+              <a:t>Lofar 3</a:t>
+            </a:r>
+          </a:p>
+          <a:p>
+            <a:r>
+              <a:rPr sz="800">
+                <a:hlinkClick r:id="rId43"/>
+              </a:rPr>
+              <a:t>Lofar 4</a:t>
+            </a:r>
+          </a:p>
+        </p:txBody>
+      </p:sp>
+      <p:sp>
+        <p:nvSpPr>
+          <p:cNvPr id="21" name="Rounded Rectangle 20">
+            <a:hlinkClick r:id="rId44"/>
+          </p:cNvPr>
           <p:cNvSpPr/>
-          <p:nvPr>
-            <a:hlinkClick r:id="rId23"/>
-          </p:nvPr>
+          <p:nvPr/>
         </p:nvSpPr>
         <p:spPr>
           <a:xfrm>
@@ -4077,7 +5604,7 @@
                   <a:srgbClr val="1F3A5F"/>
                 </a:solidFill>
               </a:rPr>
-              <a:t>Gram 11: FR Constitution-class, Category 2, Dank</a:t>
+              <a:t>Gram 29: FR Ghost, Category 4, Coruscant</a:t>
             </a:r>
           </a:p>
         </p:txBody>
@@ -4106,7 +5633,7 @@
           <a:p>
             <a:r>
               <a:rPr sz="800">
-                <a:hlinkClick r:id="rId24"/>
+                <a:hlinkClick r:id="rId45"/>
               </a:rPr>
               <a:t>Lofar 1</a:t>
             </a:r>
@@ -4114,7 +5641,7 @@
           <a:p>
             <a:r>
               <a:rPr sz="800">
-                <a:hlinkClick r:id="rId25"/>
+                <a:hlinkClick r:id="rId46"/>
               </a:rPr>
               <a:t>Lofar 2</a:t>
             </a:r>
@@ -4122,7 +5649,7 @@
           <a:p>
             <a:r>
               <a:rPr sz="800">
-                <a:hlinkClick r:id="rId26"/>
+                <a:hlinkClick r:id="rId47"/>
               </a:rPr>
               <a:t>Lofar 3</a:t>
             </a:r>
@@ -4130,7 +5657,7 @@
           <a:p>
             <a:r>
               <a:rPr sz="800">
-                <a:hlinkClick r:id="rId27"/>
+                <a:hlinkClick r:id="rId48"/>
               </a:rPr>
               <a:t>Lofar 4</a:t>
             </a:r>
@@ -4139,11 +5666,11 @@
       </p:sp>
       <p:sp>
         <p:nvSpPr>
-          <p:cNvPr id="23" name="Rounded Rectangle 22"/>
+          <p:cNvPr id="23" name="Rounded Rectangle 22">
+            <a:hlinkClick r:id="rId49"/>
+          </p:cNvPr>
           <p:cNvSpPr/>
-          <p:nvPr>
-            <a:hlinkClick r:id="rId28"/>
-          </p:nvPr>
+          <p:nvPr/>
         </p:nvSpPr>
         <p:spPr>
           <a:xfrm>
@@ -4187,7 +5714,7 @@
                   <a:srgbClr val="1F3A5F"/>
                 </a:solidFill>
               </a:rPr>
-              <a:t>Gram 12: FR TIE Bomber, Category 3, Vulcan</a:t>
+              <a:t>Gram 30: FR Prometheus, Category 2, Tatooine</a:t>
             </a:r>
           </a:p>
         </p:txBody>
@@ -4216,7 +5743,7 @@
           <a:p>
             <a:r>
               <a:rPr sz="800">
-                <a:hlinkClick r:id="rId29"/>
+                <a:hlinkClick r:id="rId50"/>
               </a:rPr>
               <a:t>Lofar 1</a:t>
             </a:r>
@@ -4224,7 +5751,7 @@
           <a:p>
             <a:r>
               <a:rPr sz="800">
-                <a:hlinkClick r:id="rId30"/>
+                <a:hlinkClick r:id="rId51"/>
               </a:rPr>
               <a:t>Lofar 2</a:t>
             </a:r>
@@ -4233,11 +5760,11 @@
       </p:sp>
       <p:sp>
         <p:nvSpPr>
-          <p:cNvPr id="25" name="Rounded Rectangle 24"/>
+          <p:cNvPr id="25" name="Rounded Rectangle 24">
+            <a:hlinkClick r:id="rId52"/>
+          </p:cNvPr>
           <p:cNvSpPr/>
-          <p:nvPr>
-            <a:hlinkClick r:id="rId31"/>
-          </p:nvPr>
+          <p:nvPr/>
         </p:nvSpPr>
         <p:spPr>
           <a:xfrm>
@@ -4281,7 +5808,7 @@
                   <a:srgbClr val="1F3A5F"/>
                 </a:solidFill>
               </a:rPr>
-              <a:t>Gram 13: FR B-wing, Category 4, Coruscant</a:t>
+              <a:t>Gram 31: FR Devastator, Category 3, Gandalf</a:t>
             </a:r>
           </a:p>
         </p:txBody>
@@ -4310,7 +5837,7 @@
           <a:p>
             <a:r>
               <a:rPr sz="800">
-                <a:hlinkClick r:id="rId32"/>
+                <a:hlinkClick r:id="rId53"/>
               </a:rPr>
               <a:t>Lofar 1</a:t>
             </a:r>
@@ -4318,20 +5845,28 @@
           <a:p>
             <a:r>
               <a:rPr sz="800">
-                <a:hlinkClick r:id="rId33"/>
+                <a:hlinkClick r:id="rId54"/>
               </a:rPr>
               <a:t>Lofar 2</a:t>
             </a:r>
           </a:p>
-        </p:txBody>
-      </p:sp>
-      <p:sp>
-        <p:nvSpPr>
-          <p:cNvPr id="27" name="Rounded Rectangle 26"/>
+          <a:p>
+            <a:r>
+              <a:rPr sz="800">
+                <a:hlinkClick r:id="rId55"/>
+              </a:rPr>
+              <a:t>Lofar 3</a:t>
+            </a:r>
+          </a:p>
+        </p:txBody>
+      </p:sp>
+      <p:sp>
+        <p:nvSpPr>
+          <p:cNvPr id="27" name="Rounded Rectangle 26">
+            <a:hlinkClick r:id="rId56"/>
+          </p:cNvPr>
           <p:cNvSpPr/>
-          <p:nvPr>
-            <a:hlinkClick r:id="rId34"/>
-          </p:nvPr>
+          <p:nvPr/>
         </p:nvSpPr>
         <p:spPr>
           <a:xfrm>
@@ -4375,7 +5910,7 @@
                   <a:srgbClr val="1F3A5F"/>
                 </a:solidFill>
               </a:rPr>
-              <a:t>Gram 14: FR Tantive IV, Category 4, Kronos</a:t>
+              <a:t>Gram 32: FR Akira-class, Category 3, Bajor</a:t>
             </a:r>
           </a:p>
         </p:txBody>
@@ -4404,7 +5939,7 @@
           <a:p>
             <a:r>
               <a:rPr sz="800">
-                <a:hlinkClick r:id="rId35"/>
+                <a:hlinkClick r:id="rId57"/>
               </a:rPr>
               <a:t>Lofar 1</a:t>
             </a:r>
@@ -4412,7 +5947,7 @@
           <a:p>
             <a:r>
               <a:rPr sz="800">
-                <a:hlinkClick r:id="rId36"/>
+                <a:hlinkClick r:id="rId58"/>
               </a:rPr>
               <a:t>Lofar 2</a:t>
             </a:r>
@@ -4421,11 +5956,11 @@
       </p:sp>
       <p:sp>
         <p:nvSpPr>
-          <p:cNvPr id="29" name="Rounded Rectangle 28"/>
+          <p:cNvPr id="29" name="Rounded Rectangle 28">
+            <a:hlinkClick r:id="rId59"/>
+          </p:cNvPr>
           <p:cNvSpPr/>
-          <p:nvPr>
-            <a:hlinkClick r:id="rId37"/>
-          </p:nvPr>
+          <p:nvPr/>
         </p:nvSpPr>
         <p:spPr>
           <a:xfrm>
@@ -4469,7 +6004,7 @@
                   <a:srgbClr val="1F3A5F"/>
                 </a:solidFill>
               </a:rPr>
-              <a:t>Gram 15: Acclamator-class contact bearing 308, codename Kronos</a:t>
+              <a:t>Gram 33: Reliant contact bearing 201, codename Kobol</a:t>
             </a:r>
           </a:p>
         </p:txBody>
@@ -4498,7 +6033,7 @@
           <a:p>
             <a:r>
               <a:rPr sz="800">
-                <a:hlinkClick r:id="rId38"/>
+                <a:hlinkClick r:id="rId60"/>
               </a:rPr>
               <a:t>Lofar 1</a:t>
             </a:r>
@@ -4506,20 +6041,36 @@
           <a:p>
             <a:r>
               <a:rPr sz="800">
-                <a:hlinkClick r:id="rId39"/>
+                <a:hlinkClick r:id="rId61"/>
               </a:rPr>
               <a:t>Lofar 2</a:t>
             </a:r>
           </a:p>
-        </p:txBody>
-      </p:sp>
-      <p:sp>
-        <p:nvSpPr>
-          <p:cNvPr id="31" name="Rounded Rectangle 30"/>
+          <a:p>
+            <a:r>
+              <a:rPr sz="800">
+                <a:hlinkClick r:id="rId62"/>
+              </a:rPr>
+              <a:t>Lofar 3</a:t>
+            </a:r>
+          </a:p>
+          <a:p>
+            <a:r>
+              <a:rPr sz="800">
+                <a:hlinkClick r:id="rId63"/>
+              </a:rPr>
+              <a:t>Lofar 4</a:t>
+            </a:r>
+          </a:p>
+        </p:txBody>
+      </p:sp>
+      <p:sp>
+        <p:nvSpPr>
+          <p:cNvPr id="31" name="Rounded Rectangle 30">
+            <a:hlinkClick r:id="rId64"/>
+          </p:cNvPr>
           <p:cNvSpPr/>
-          <p:nvPr>
-            <a:hlinkClick r:id="rId40"/>
-          </p:nvPr>
+          <p:nvPr/>
         </p:nvSpPr>
         <p:spPr>
           <a:xfrm>
@@ -4563,7 +6114,7 @@
                   <a:srgbClr val="1F3A5F"/>
                 </a:solidFill>
               </a:rPr>
-              <a:t>Gram 17: FR Imperial-class, Category 3, Hoth</a:t>
+              <a:t>Gram 34: FR Imperial-class, Category 4, Mustafar</a:t>
             </a:r>
           </a:p>
         </p:txBody>
@@ -4592,7 +6143,7 @@
           <a:p>
             <a:r>
               <a:rPr sz="800">
-                <a:hlinkClick r:id="rId41"/>
+                <a:hlinkClick r:id="rId65"/>
               </a:rPr>
               <a:t>Lofar 1</a:t>
             </a:r>
@@ -4600,9 +6151,17 @@
           <a:p>
             <a:r>
               <a:rPr sz="800">
-                <a:hlinkClick r:id="rId42"/>
+                <a:hlinkClick r:id="rId66"/>
               </a:rPr>
               <a:t>Lofar 2</a:t>
+            </a:r>
+          </a:p>
+          <a:p>
+            <a:r>
+              <a:rPr sz="800">
+                <a:hlinkClick r:id="rId67"/>
+              </a:rPr>
+              <a:t>Lofar 3</a:t>
             </a:r>
           </a:p>
         </p:txBody>
@@ -4671,18 +6230,18 @@
                   <a:srgbClr val="FFFFFF"/>
                 </a:solidFill>
               </a:rPr>
-              <a:t>Instructor Week 4 Grams_Updated — Page 2 of 3</a:t>
-            </a:r>
-          </a:p>
-        </p:txBody>
-      </p:sp>
-      <p:sp>
-        <p:nvSpPr>
-          <p:cNvPr id="3" name="Rounded Rectangle 2"/>
+              <a:t>Instructor Week 4 Grams_Updated — Page 3 of 3</a:t>
+            </a:r>
+          </a:p>
+        </p:txBody>
+      </p:sp>
+      <p:sp>
+        <p:nvSpPr>
+          <p:cNvPr id="3" name="Rounded Rectangle 2">
+            <a:hlinkClick r:id="rId2"/>
+          </p:cNvPr>
           <p:cNvSpPr/>
-          <p:nvPr>
-            <a:hlinkClick r:id="rId2"/>
-          </p:nvPr>
+          <p:nvPr/>
         </p:nvSpPr>
         <p:spPr>
           <a:xfrm>
@@ -4726,7 +6285,7 @@
                   <a:srgbClr val="1F3A5F"/>
                 </a:solidFill>
               </a:rPr>
-              <a:t>Gram 18: FR Venator-class, Category 3, Tantive</a:t>
+              <a:t>Gram 36: FR Defiant-class, Category 2, Defiant</a:t>
             </a:r>
           </a:p>
         </p:txBody>
@@ -4788,11 +6347,11 @@
       </p:sp>
       <p:sp>
         <p:nvSpPr>
-          <p:cNvPr id="5" name="Rounded Rectangle 4"/>
+          <p:cNvPr id="5" name="Rounded Rectangle 4">
+            <a:hlinkClick r:id="rId7"/>
+          </p:cNvPr>
           <p:cNvSpPr/>
-          <p:nvPr>
-            <a:hlinkClick r:id="rId7"/>
-          </p:nvPr>
+          <p:nvPr/>
         </p:nvSpPr>
         <p:spPr>
           <a:xfrm>
@@ -4836,7 +6395,7 @@
                   <a:srgbClr val="1F3A5F"/>
                 </a:solidFill>
               </a:rPr>
-              <a:t>Gram 20: FR Discovery, Category 3, Naboo</a:t>
+              <a:t>Gram 37: B-wing contact bearing 123, codename Hoth</a:t>
             </a:r>
           </a:p>
         </p:txBody>
@@ -4898,11 +6457,11 @@
       </p:sp>
       <p:sp>
         <p:nvSpPr>
-          <p:cNvPr id="7" name="Rounded Rectangle 6"/>
+          <p:cNvPr id="7" name="Rounded Rectangle 6">
+            <a:hlinkClick r:id="rId12"/>
+          </p:cNvPr>
           <p:cNvSpPr/>
-          <p:nvPr>
-            <a:hlinkClick r:id="rId12"/>
-          </p:nvPr>
+          <p:nvPr/>
         </p:nvSpPr>
         <p:spPr>
           <a:xfrm>
@@ -4946,7 +6505,7 @@
                   <a:srgbClr val="1F3A5F"/>
                 </a:solidFill>
               </a:rPr>
-              <a:t>Gram 21: FR A-wing, Category 3, Betazed</a:t>
+              <a:t>Gram 38: FR Outrider, Category 1, Endor</a:t>
             </a:r>
           </a:p>
         </p:txBody>
@@ -4980,39 +6539,15 @@
               <a:t>Lofar 1</a:t>
             </a:r>
           </a:p>
-          <a:p>
-            <a:r>
-              <a:rPr sz="800">
-                <a:hlinkClick r:id="rId14"/>
-              </a:rPr>
-              <a:t>Lofar 2</a:t>
-            </a:r>
-          </a:p>
-          <a:p>
-            <a:r>
-              <a:rPr sz="800">
-                <a:hlinkClick r:id="rId15"/>
-              </a:rPr>
-              <a:t>Lofar 3</a:t>
-            </a:r>
-          </a:p>
-          <a:p>
-            <a:r>
-              <a:rPr sz="800">
-                <a:hlinkClick r:id="rId16"/>
-              </a:rPr>
-              <a:t>Lofar 4</a:t>
-            </a:r>
-          </a:p>
-        </p:txBody>
-      </p:sp>
-      <p:sp>
-        <p:nvSpPr>
-          <p:cNvPr id="9" name="Rounded Rectangle 8"/>
+        </p:txBody>
+      </p:sp>
+      <p:sp>
+        <p:nvSpPr>
+          <p:cNvPr id="9" name="Rounded Rectangle 8">
+            <a:hlinkClick r:id="rId14"/>
+          </p:cNvPr>
           <p:cNvSpPr/>
-          <p:nvPr>
-            <a:hlinkClick r:id="rId17"/>
-          </p:nvPr>
+          <p:nvPr/>
         </p:nvSpPr>
         <p:spPr>
           <a:xfrm>
@@ -5056,7 +6591,7 @@
                   <a:srgbClr val="1F3A5F"/>
                 </a:solidFill>
               </a:rPr>
-              <a:t>Gram 22: FR Prometheus, Category 3, Risa</a:t>
+              <a:t>Gram 41: X-wing contact bearing 106, codename Tantive</a:t>
             </a:r>
           </a:p>
         </p:txBody>
@@ -5085,32 +6620,32 @@
           <a:p>
             <a:r>
               <a:rPr sz="800">
+                <a:hlinkClick r:id="rId15"/>
+              </a:rPr>
+              <a:t>Lofar 1</a:t>
+            </a:r>
+          </a:p>
+          <a:p>
+            <a:r>
+              <a:rPr sz="800">
+                <a:hlinkClick r:id="rId16"/>
+              </a:rPr>
+              <a:t>Lofar 2</a:t>
+            </a:r>
+          </a:p>
+          <a:p>
+            <a:r>
+              <a:rPr sz="800">
+                <a:hlinkClick r:id="rId17"/>
+              </a:rPr>
+              <a:t>Lofar 3</a:t>
+            </a:r>
+          </a:p>
+          <a:p>
+            <a:r>
+              <a:rPr sz="800">
                 <a:hlinkClick r:id="rId18"/>
               </a:rPr>
-              <a:t>Lofar 1</a:t>
-            </a:r>
-          </a:p>
-          <a:p>
-            <a:r>
-              <a:rPr sz="800">
-                <a:hlinkClick r:id="rId19"/>
-              </a:rPr>
-              <a:t>Lofar 2</a:t>
-            </a:r>
-          </a:p>
-          <a:p>
-            <a:r>
-              <a:rPr sz="800">
-                <a:hlinkClick r:id="rId20"/>
-              </a:rPr>
-              <a:t>Lofar 3</a:t>
-            </a:r>
-          </a:p>
-          <a:p>
-            <a:r>
-              <a:rPr sz="800">
-                <a:hlinkClick r:id="rId21"/>
-              </a:rPr>
               <a:t>Lofar 4</a:t>
             </a:r>
           </a:p>
@@ -5118,11 +6653,11 @@
       </p:sp>
       <p:sp>
         <p:nvSpPr>
-          <p:cNvPr id="11" name="Rounded Rectangle 10"/>
+          <p:cNvPr id="11" name="Rounded Rectangle 10">
+            <a:hlinkClick r:id="rId19"/>
+          </p:cNvPr>
           <p:cNvSpPr/>
-          <p:nvPr>
-            <a:hlinkClick r:id="rId22"/>
-          </p:nvPr>
+          <p:nvPr/>
         </p:nvSpPr>
         <p:spPr>
           <a:xfrm>
@@ -5166,7 +6701,7 @@
                   <a:srgbClr val="1F3A5F"/>
                 </a:solidFill>
               </a:rPr>
-              <a:t>Gram 23: FR Mon Calamari Cruiser, Category 4, Gandalf</a:t>
+              <a:t>Gram 42: FR Prometheus, Category 2, Coruscant</a:t>
             </a:r>
           </a:p>
         </p:txBody>
@@ -5195,7 +6730,7 @@
           <a:p>
             <a:r>
               <a:rPr sz="800">
-                <a:hlinkClick r:id="rId23"/>
+                <a:hlinkClick r:id="rId20"/>
               </a:rPr>
               <a:t>Lofar 1</a:t>
             </a:r>
@@ -5203,7 +6738,7 @@
           <a:p>
             <a:r>
               <a:rPr sz="800">
-                <a:hlinkClick r:id="rId24"/>
+                <a:hlinkClick r:id="rId21"/>
               </a:rPr>
               <a:t>Lofar 2</a:t>
             </a:r>
@@ -5211,1718 +6746,9 @@
           <a:p>
             <a:r>
               <a:rPr sz="800">
-                <a:hlinkClick r:id="rId25"/>
+                <a:hlinkClick r:id="rId22"/>
               </a:rPr>
               <a:t>Lofar 3</a:t>
-            </a:r>
-          </a:p>
-        </p:txBody>
-      </p:sp>
-      <p:sp>
-        <p:nvSpPr>
-          <p:cNvPr id="13" name="Rounded Rectangle 12"/>
-          <p:cNvSpPr/>
-          <p:nvPr>
-            <a:hlinkClick r:id="rId26"/>
-          </p:nvPr>
-        </p:nvSpPr>
-        <p:spPr>
-          <a:xfrm>
-            <a:off x="365760" y="2682240"/>
-            <a:ext cx="2200046" cy="365760"/>
-          </a:xfrm>
-          <a:prstGeom prst="roundRect">
-            <a:avLst/>
-          </a:prstGeom>
-          <a:solidFill>
-            <a:srgbClr val="E8EEF7"/>
-          </a:solidFill>
-          <a:ln>
-            <a:solidFill>
-              <a:srgbClr val="1F3A5F"/>
-            </a:solidFill>
-          </a:ln>
-        </p:spPr>
-        <p:style>
-          <a:lnRef idx="1">
-            <a:schemeClr val="accent1"/>
-          </a:lnRef>
-          <a:fillRef idx="3">
-            <a:schemeClr val="accent1"/>
-          </a:fillRef>
-          <a:effectRef idx="2">
-            <a:schemeClr val="accent1"/>
-          </a:effectRef>
-          <a:fontRef idx="minor">
-            <a:schemeClr val="lt1"/>
-          </a:fontRef>
-        </p:style>
-        <p:txBody>
-          <a:bodyPr rtlCol="0" anchor="ctr" lIns="45720" rIns="45720"/>
-          <a:lstStyle/>
-          <a:p>
-            <a:pPr algn="ctr"/>
-            <a:r>
-              <a:rPr sz="900">
-                <a:solidFill>
-                  <a:srgbClr val="1F3A5F"/>
-                </a:solidFill>
-              </a:rPr>
-              <a:t>Gram 25: Mon Calamari Cruiser contact bearing 109, codename Kronos</a:t>
-            </a:r>
-          </a:p>
-        </p:txBody>
-      </p:sp>
-      <p:sp>
-        <p:nvSpPr>
-          <p:cNvPr id="14" name="TextBox 13"/>
-          <p:cNvSpPr txBox="1"/>
-          <p:nvPr/>
-        </p:nvSpPr>
-        <p:spPr>
-          <a:xfrm>
-            <a:off x="365760" y="3066288"/>
-            <a:ext cx="2200046" cy="1447800"/>
-          </a:xfrm>
-          <a:prstGeom prst="rect">
-            <a:avLst/>
-          </a:prstGeom>
-          <a:noFill/>
-        </p:spPr>
-        <p:txBody>
-          <a:bodyPr wrap="square">
-            <a:spAutoFit/>
-          </a:bodyPr>
-          <a:lstStyle/>
-          <a:p>
-            <a:r>
-              <a:rPr sz="800">
-                <a:hlinkClick r:id="rId27"/>
-              </a:rPr>
-              <a:t>Lofar 1</a:t>
-            </a:r>
-          </a:p>
-          <a:p>
-            <a:r>
-              <a:rPr sz="800">
-                <a:hlinkClick r:id="rId28"/>
-              </a:rPr>
-              <a:t>Lofar 2</a:t>
-            </a:r>
-          </a:p>
-          <a:p>
-            <a:r>
-              <a:rPr sz="800">
-                <a:hlinkClick r:id="rId29"/>
-              </a:rPr>
-              <a:t>Lofar 3</a:t>
-            </a:r>
-          </a:p>
-        </p:txBody>
-      </p:sp>
-      <p:sp>
-        <p:nvSpPr>
-          <p:cNvPr id="15" name="Rounded Rectangle 14"/>
-          <p:cNvSpPr/>
-          <p:nvPr>
-            <a:hlinkClick r:id="rId30"/>
-          </p:nvPr>
-        </p:nvSpPr>
-        <p:spPr>
-          <a:xfrm>
-            <a:off x="2657246" y="2682240"/>
-            <a:ext cx="2200046" cy="365760"/>
-          </a:xfrm>
-          <a:prstGeom prst="roundRect">
-            <a:avLst/>
-          </a:prstGeom>
-          <a:solidFill>
-            <a:srgbClr val="E8EEF7"/>
-          </a:solidFill>
-          <a:ln>
-            <a:solidFill>
-              <a:srgbClr val="1F3A5F"/>
-            </a:solidFill>
-          </a:ln>
-        </p:spPr>
-        <p:style>
-          <a:lnRef idx="1">
-            <a:schemeClr val="accent1"/>
-          </a:lnRef>
-          <a:fillRef idx="3">
-            <a:schemeClr val="accent1"/>
-          </a:fillRef>
-          <a:effectRef idx="2">
-            <a:schemeClr val="accent1"/>
-          </a:effectRef>
-          <a:fontRef idx="minor">
-            <a:schemeClr val="lt1"/>
-          </a:fontRef>
-        </p:style>
-        <p:txBody>
-          <a:bodyPr rtlCol="0" anchor="ctr" lIns="45720" rIns="45720"/>
-          <a:lstStyle/>
-          <a:p>
-            <a:pPr algn="ctr"/>
-            <a:r>
-              <a:rPr sz="900">
-                <a:solidFill>
-                  <a:srgbClr val="1F3A5F"/>
-                </a:solidFill>
-              </a:rPr>
-              <a:t>Gram 26: TIE Fighter contact bearing 031, codename Risa</a:t>
-            </a:r>
-          </a:p>
-        </p:txBody>
-      </p:sp>
-      <p:sp>
-        <p:nvSpPr>
-          <p:cNvPr id="16" name="TextBox 15"/>
-          <p:cNvSpPr txBox="1"/>
-          <p:nvPr/>
-        </p:nvSpPr>
-        <p:spPr>
-          <a:xfrm>
-            <a:off x="2657246" y="3066288"/>
-            <a:ext cx="2200046" cy="1447800"/>
-          </a:xfrm>
-          <a:prstGeom prst="rect">
-            <a:avLst/>
-          </a:prstGeom>
-          <a:noFill/>
-        </p:spPr>
-        <p:txBody>
-          <a:bodyPr wrap="square">
-            <a:spAutoFit/>
-          </a:bodyPr>
-          <a:lstStyle/>
-          <a:p>
-            <a:r>
-              <a:rPr sz="800">
-                <a:hlinkClick r:id="rId31"/>
-              </a:rPr>
-              <a:t>Lofar 1</a:t>
-            </a:r>
-          </a:p>
-          <a:p>
-            <a:r>
-              <a:rPr sz="800">
-                <a:hlinkClick r:id="rId32"/>
-              </a:rPr>
-              <a:t>Lofar 2</a:t>
-            </a:r>
-          </a:p>
-          <a:p>
-            <a:r>
-              <a:rPr sz="800">
-                <a:hlinkClick r:id="rId33"/>
-              </a:rPr>
-              <a:t>Lofar 3</a:t>
-            </a:r>
-          </a:p>
-          <a:p>
-            <a:r>
-              <a:rPr sz="800">
-                <a:hlinkClick r:id="rId34"/>
-              </a:rPr>
-              <a:t>Lofar 4</a:t>
-            </a:r>
-          </a:p>
-        </p:txBody>
-      </p:sp>
-      <p:sp>
-        <p:nvSpPr>
-          <p:cNvPr id="17" name="Rounded Rectangle 16"/>
-          <p:cNvSpPr/>
-          <p:nvPr>
-            <a:hlinkClick r:id="rId35"/>
-          </p:nvPr>
-        </p:nvSpPr>
-        <p:spPr>
-          <a:xfrm>
-            <a:off x="4948732" y="2682240"/>
-            <a:ext cx="2200046" cy="365760"/>
-          </a:xfrm>
-          <a:prstGeom prst="roundRect">
-            <a:avLst/>
-          </a:prstGeom>
-          <a:solidFill>
-            <a:srgbClr val="E8EEF7"/>
-          </a:solidFill>
-          <a:ln>
-            <a:solidFill>
-              <a:srgbClr val="1F3A5F"/>
-            </a:solidFill>
-          </a:ln>
-        </p:spPr>
-        <p:style>
-          <a:lnRef idx="1">
-            <a:schemeClr val="accent1"/>
-          </a:lnRef>
-          <a:fillRef idx="3">
-            <a:schemeClr val="accent1"/>
-          </a:fillRef>
-          <a:effectRef idx="2">
-            <a:schemeClr val="accent1"/>
-          </a:effectRef>
-          <a:fontRef idx="minor">
-            <a:schemeClr val="lt1"/>
-          </a:fontRef>
-        </p:style>
-        <p:txBody>
-          <a:bodyPr rtlCol="0" anchor="ctr" lIns="45720" rIns="45720"/>
-          <a:lstStyle/>
-          <a:p>
-            <a:pPr algn="ctr"/>
-            <a:r>
-              <a:rPr sz="900">
-                <a:solidFill>
-                  <a:srgbClr val="1F3A5F"/>
-                </a:solidFill>
-              </a:rPr>
-              <a:t>Gram 27: FR A-wing, Category 1, Coruscant</a:t>
-            </a:r>
-          </a:p>
-        </p:txBody>
-      </p:sp>
-      <p:sp>
-        <p:nvSpPr>
-          <p:cNvPr id="18" name="TextBox 17"/>
-          <p:cNvSpPr txBox="1"/>
-          <p:nvPr/>
-        </p:nvSpPr>
-        <p:spPr>
-          <a:xfrm>
-            <a:off x="4948732" y="3066288"/>
-            <a:ext cx="2200046" cy="1447800"/>
-          </a:xfrm>
-          <a:prstGeom prst="rect">
-            <a:avLst/>
-          </a:prstGeom>
-          <a:noFill/>
-        </p:spPr>
-        <p:txBody>
-          <a:bodyPr wrap="square">
-            <a:spAutoFit/>
-          </a:bodyPr>
-          <a:lstStyle/>
-          <a:p>
-            <a:r>
-              <a:rPr sz="800">
-                <a:hlinkClick r:id="rId36"/>
-              </a:rPr>
-              <a:t>Lofar 1</a:t>
-            </a:r>
-          </a:p>
-          <a:p>
-            <a:r>
-              <a:rPr sz="800">
-                <a:hlinkClick r:id="rId37"/>
-              </a:rPr>
-              <a:t>Lofar 2</a:t>
-            </a:r>
-          </a:p>
-          <a:p>
-            <a:r>
-              <a:rPr sz="800">
-                <a:hlinkClick r:id="rId38"/>
-              </a:rPr>
-              <a:t>Lofar 3</a:t>
-            </a:r>
-          </a:p>
-        </p:txBody>
-      </p:sp>
-      <p:sp>
-        <p:nvSpPr>
-          <p:cNvPr id="19" name="Rounded Rectangle 18"/>
-          <p:cNvSpPr/>
-          <p:nvPr>
-            <a:hlinkClick r:id="rId39"/>
-          </p:nvPr>
-        </p:nvSpPr>
-        <p:spPr>
-          <a:xfrm>
-            <a:off x="7240219" y="2682240"/>
-            <a:ext cx="2200046" cy="365760"/>
-          </a:xfrm>
-          <a:prstGeom prst="roundRect">
-            <a:avLst/>
-          </a:prstGeom>
-          <a:solidFill>
-            <a:srgbClr val="E8EEF7"/>
-          </a:solidFill>
-          <a:ln>
-            <a:solidFill>
-              <a:srgbClr val="1F3A5F"/>
-            </a:solidFill>
-          </a:ln>
-        </p:spPr>
-        <p:style>
-          <a:lnRef idx="1">
-            <a:schemeClr val="accent1"/>
-          </a:lnRef>
-          <a:fillRef idx="3">
-            <a:schemeClr val="accent1"/>
-          </a:fillRef>
-          <a:effectRef idx="2">
-            <a:schemeClr val="accent1"/>
-          </a:effectRef>
-          <a:fontRef idx="minor">
-            <a:schemeClr val="lt1"/>
-          </a:fontRef>
-        </p:style>
-        <p:txBody>
-          <a:bodyPr rtlCol="0" anchor="ctr" lIns="45720" rIns="45720"/>
-          <a:lstStyle/>
-          <a:p>
-            <a:pPr algn="ctr"/>
-            <a:r>
-              <a:rPr sz="900">
-                <a:solidFill>
-                  <a:srgbClr val="1F3A5F"/>
-                </a:solidFill>
-              </a:rPr>
-              <a:t>Gram 28: FR Constitution-class, Category 1, Kobol</a:t>
-            </a:r>
-          </a:p>
-        </p:txBody>
-      </p:sp>
-      <p:sp>
-        <p:nvSpPr>
-          <p:cNvPr id="20" name="TextBox 19"/>
-          <p:cNvSpPr txBox="1"/>
-          <p:nvPr/>
-        </p:nvSpPr>
-        <p:spPr>
-          <a:xfrm>
-            <a:off x="7240219" y="3066288"/>
-            <a:ext cx="2200046" cy="1447800"/>
-          </a:xfrm>
-          <a:prstGeom prst="rect">
-            <a:avLst/>
-          </a:prstGeom>
-          <a:noFill/>
-        </p:spPr>
-        <p:txBody>
-          <a:bodyPr wrap="square">
-            <a:spAutoFit/>
-          </a:bodyPr>
-          <a:lstStyle/>
-          <a:p>
-            <a:r>
-              <a:rPr sz="800">
-                <a:hlinkClick r:id="rId40"/>
-              </a:rPr>
-              <a:t>Lofar 1</a:t>
-            </a:r>
-          </a:p>
-          <a:p>
-            <a:r>
-              <a:rPr sz="800">
-                <a:hlinkClick r:id="rId41"/>
-              </a:rPr>
-              <a:t>Lofar 2</a:t>
-            </a:r>
-          </a:p>
-          <a:p>
-            <a:r>
-              <a:rPr sz="800">
-                <a:hlinkClick r:id="rId42"/>
-              </a:rPr>
-              <a:t>Lofar 3</a:t>
-            </a:r>
-          </a:p>
-          <a:p>
-            <a:r>
-              <a:rPr sz="800">
-                <a:hlinkClick r:id="rId43"/>
-              </a:rPr>
-              <a:t>Lofar 4</a:t>
-            </a:r>
-          </a:p>
-        </p:txBody>
-      </p:sp>
-      <p:sp>
-        <p:nvSpPr>
-          <p:cNvPr id="21" name="Rounded Rectangle 20"/>
-          <p:cNvSpPr/>
-          <p:nvPr>
-            <a:hlinkClick r:id="rId44"/>
-          </p:nvPr>
-        </p:nvSpPr>
-        <p:spPr>
-          <a:xfrm>
-            <a:off x="9531705" y="2682240"/>
-            <a:ext cx="2200046" cy="365760"/>
-          </a:xfrm>
-          <a:prstGeom prst="roundRect">
-            <a:avLst/>
-          </a:prstGeom>
-          <a:solidFill>
-            <a:srgbClr val="E8EEF7"/>
-          </a:solidFill>
-          <a:ln>
-            <a:solidFill>
-              <a:srgbClr val="1F3A5F"/>
-            </a:solidFill>
-          </a:ln>
-        </p:spPr>
-        <p:style>
-          <a:lnRef idx="1">
-            <a:schemeClr val="accent1"/>
-          </a:lnRef>
-          <a:fillRef idx="3">
-            <a:schemeClr val="accent1"/>
-          </a:fillRef>
-          <a:effectRef idx="2">
-            <a:schemeClr val="accent1"/>
-          </a:effectRef>
-          <a:fontRef idx="minor">
-            <a:schemeClr val="lt1"/>
-          </a:fontRef>
-        </p:style>
-        <p:txBody>
-          <a:bodyPr rtlCol="0" anchor="ctr" lIns="45720" rIns="45720"/>
-          <a:lstStyle/>
-          <a:p>
-            <a:pPr algn="ctr"/>
-            <a:r>
-              <a:rPr sz="900">
-                <a:solidFill>
-                  <a:srgbClr val="1F3A5F"/>
-                </a:solidFill>
-              </a:rPr>
-              <a:t>Gram 29: FR Ghost, Category 4, Coruscant</a:t>
-            </a:r>
-          </a:p>
-        </p:txBody>
-      </p:sp>
-      <p:sp>
-        <p:nvSpPr>
-          <p:cNvPr id="22" name="TextBox 21"/>
-          <p:cNvSpPr txBox="1"/>
-          <p:nvPr/>
-        </p:nvSpPr>
-        <p:spPr>
-          <a:xfrm>
-            <a:off x="9531705" y="3066288"/>
-            <a:ext cx="2200046" cy="1447800"/>
-          </a:xfrm>
-          <a:prstGeom prst="rect">
-            <a:avLst/>
-          </a:prstGeom>
-          <a:noFill/>
-        </p:spPr>
-        <p:txBody>
-          <a:bodyPr wrap="square">
-            <a:spAutoFit/>
-          </a:bodyPr>
-          <a:lstStyle/>
-          <a:p>
-            <a:r>
-              <a:rPr sz="800">
-                <a:hlinkClick r:id="rId45"/>
-              </a:rPr>
-              <a:t>Lofar 1</a:t>
-            </a:r>
-          </a:p>
-          <a:p>
-            <a:r>
-              <a:rPr sz="800">
-                <a:hlinkClick r:id="rId46"/>
-              </a:rPr>
-              <a:t>Lofar 2</a:t>
-            </a:r>
-          </a:p>
-          <a:p>
-            <a:r>
-              <a:rPr sz="800">
-                <a:hlinkClick r:id="rId47"/>
-              </a:rPr>
-              <a:t>Lofar 3</a:t>
-            </a:r>
-          </a:p>
-          <a:p>
-            <a:r>
-              <a:rPr sz="800">
-                <a:hlinkClick r:id="rId48"/>
-              </a:rPr>
-              <a:t>Lofar 4</a:t>
-            </a:r>
-          </a:p>
-        </p:txBody>
-      </p:sp>
-      <p:sp>
-        <p:nvSpPr>
-          <p:cNvPr id="23" name="Rounded Rectangle 22"/>
-          <p:cNvSpPr/>
-          <p:nvPr>
-            <a:hlinkClick r:id="rId49"/>
-          </p:nvPr>
-        </p:nvSpPr>
-        <p:spPr>
-          <a:xfrm>
-            <a:off x="365760" y="4632960"/>
-            <a:ext cx="2200046" cy="365760"/>
-          </a:xfrm>
-          <a:prstGeom prst="roundRect">
-            <a:avLst/>
-          </a:prstGeom>
-          <a:solidFill>
-            <a:srgbClr val="E8EEF7"/>
-          </a:solidFill>
-          <a:ln>
-            <a:solidFill>
-              <a:srgbClr val="1F3A5F"/>
-            </a:solidFill>
-          </a:ln>
-        </p:spPr>
-        <p:style>
-          <a:lnRef idx="1">
-            <a:schemeClr val="accent1"/>
-          </a:lnRef>
-          <a:fillRef idx="3">
-            <a:schemeClr val="accent1"/>
-          </a:fillRef>
-          <a:effectRef idx="2">
-            <a:schemeClr val="accent1"/>
-          </a:effectRef>
-          <a:fontRef idx="minor">
-            <a:schemeClr val="lt1"/>
-          </a:fontRef>
-        </p:style>
-        <p:txBody>
-          <a:bodyPr rtlCol="0" anchor="ctr" lIns="45720" rIns="45720"/>
-          <a:lstStyle/>
-          <a:p>
-            <a:pPr algn="ctr"/>
-            <a:r>
-              <a:rPr sz="900">
-                <a:solidFill>
-                  <a:srgbClr val="1F3A5F"/>
-                </a:solidFill>
-              </a:rPr>
-              <a:t>Gram 30: FR Prometheus, Category 2, Tatooine</a:t>
-            </a:r>
-          </a:p>
-        </p:txBody>
-      </p:sp>
-      <p:sp>
-        <p:nvSpPr>
-          <p:cNvPr id="24" name="TextBox 23"/>
-          <p:cNvSpPr txBox="1"/>
-          <p:nvPr/>
-        </p:nvSpPr>
-        <p:spPr>
-          <a:xfrm>
-            <a:off x="365760" y="5017008"/>
-            <a:ext cx="2200046" cy="1447800"/>
-          </a:xfrm>
-          <a:prstGeom prst="rect">
-            <a:avLst/>
-          </a:prstGeom>
-          <a:noFill/>
-        </p:spPr>
-        <p:txBody>
-          <a:bodyPr wrap="square">
-            <a:spAutoFit/>
-          </a:bodyPr>
-          <a:lstStyle/>
-          <a:p>
-            <a:r>
-              <a:rPr sz="800">
-                <a:hlinkClick r:id="rId50"/>
-              </a:rPr>
-              <a:t>Lofar 1</a:t>
-            </a:r>
-          </a:p>
-          <a:p>
-            <a:r>
-              <a:rPr sz="800">
-                <a:hlinkClick r:id="rId51"/>
-              </a:rPr>
-              <a:t>Lofar 2</a:t>
-            </a:r>
-          </a:p>
-        </p:txBody>
-      </p:sp>
-      <p:sp>
-        <p:nvSpPr>
-          <p:cNvPr id="25" name="Rounded Rectangle 24"/>
-          <p:cNvSpPr/>
-          <p:nvPr>
-            <a:hlinkClick r:id="rId52"/>
-          </p:nvPr>
-        </p:nvSpPr>
-        <p:spPr>
-          <a:xfrm>
-            <a:off x="2657246" y="4632960"/>
-            <a:ext cx="2200046" cy="365760"/>
-          </a:xfrm>
-          <a:prstGeom prst="roundRect">
-            <a:avLst/>
-          </a:prstGeom>
-          <a:solidFill>
-            <a:srgbClr val="E8EEF7"/>
-          </a:solidFill>
-          <a:ln>
-            <a:solidFill>
-              <a:srgbClr val="1F3A5F"/>
-            </a:solidFill>
-          </a:ln>
-        </p:spPr>
-        <p:style>
-          <a:lnRef idx="1">
-            <a:schemeClr val="accent1"/>
-          </a:lnRef>
-          <a:fillRef idx="3">
-            <a:schemeClr val="accent1"/>
-          </a:fillRef>
-          <a:effectRef idx="2">
-            <a:schemeClr val="accent1"/>
-          </a:effectRef>
-          <a:fontRef idx="minor">
-            <a:schemeClr val="lt1"/>
-          </a:fontRef>
-        </p:style>
-        <p:txBody>
-          <a:bodyPr rtlCol="0" anchor="ctr" lIns="45720" rIns="45720"/>
-          <a:lstStyle/>
-          <a:p>
-            <a:pPr algn="ctr"/>
-            <a:r>
-              <a:rPr sz="900">
-                <a:solidFill>
-                  <a:srgbClr val="1F3A5F"/>
-                </a:solidFill>
-              </a:rPr>
-              <a:t>Gram 31: FR Devastator, Category 3, Gandalf</a:t>
-            </a:r>
-          </a:p>
-        </p:txBody>
-      </p:sp>
-      <p:sp>
-        <p:nvSpPr>
-          <p:cNvPr id="26" name="TextBox 25"/>
-          <p:cNvSpPr txBox="1"/>
-          <p:nvPr/>
-        </p:nvSpPr>
-        <p:spPr>
-          <a:xfrm>
-            <a:off x="2657246" y="5017008"/>
-            <a:ext cx="2200046" cy="1447800"/>
-          </a:xfrm>
-          <a:prstGeom prst="rect">
-            <a:avLst/>
-          </a:prstGeom>
-          <a:noFill/>
-        </p:spPr>
-        <p:txBody>
-          <a:bodyPr wrap="square">
-            <a:spAutoFit/>
-          </a:bodyPr>
-          <a:lstStyle/>
-          <a:p>
-            <a:r>
-              <a:rPr sz="800">
-                <a:hlinkClick r:id="rId53"/>
-              </a:rPr>
-              <a:t>Lofar 1</a:t>
-            </a:r>
-          </a:p>
-          <a:p>
-            <a:r>
-              <a:rPr sz="800">
-                <a:hlinkClick r:id="rId54"/>
-              </a:rPr>
-              <a:t>Lofar 2</a:t>
-            </a:r>
-          </a:p>
-          <a:p>
-            <a:r>
-              <a:rPr sz="800">
-                <a:hlinkClick r:id="rId55"/>
-              </a:rPr>
-              <a:t>Lofar 3</a:t>
-            </a:r>
-          </a:p>
-        </p:txBody>
-      </p:sp>
-      <p:sp>
-        <p:nvSpPr>
-          <p:cNvPr id="27" name="Rounded Rectangle 26"/>
-          <p:cNvSpPr/>
-          <p:nvPr>
-            <a:hlinkClick r:id="rId56"/>
-          </p:nvPr>
-        </p:nvSpPr>
-        <p:spPr>
-          <a:xfrm>
-            <a:off x="4948732" y="4632960"/>
-            <a:ext cx="2200046" cy="365760"/>
-          </a:xfrm>
-          <a:prstGeom prst="roundRect">
-            <a:avLst/>
-          </a:prstGeom>
-          <a:solidFill>
-            <a:srgbClr val="E8EEF7"/>
-          </a:solidFill>
-          <a:ln>
-            <a:solidFill>
-              <a:srgbClr val="1F3A5F"/>
-            </a:solidFill>
-          </a:ln>
-        </p:spPr>
-        <p:style>
-          <a:lnRef idx="1">
-            <a:schemeClr val="accent1"/>
-          </a:lnRef>
-          <a:fillRef idx="3">
-            <a:schemeClr val="accent1"/>
-          </a:fillRef>
-          <a:effectRef idx="2">
-            <a:schemeClr val="accent1"/>
-          </a:effectRef>
-          <a:fontRef idx="minor">
-            <a:schemeClr val="lt1"/>
-          </a:fontRef>
-        </p:style>
-        <p:txBody>
-          <a:bodyPr rtlCol="0" anchor="ctr" lIns="45720" rIns="45720"/>
-          <a:lstStyle/>
-          <a:p>
-            <a:pPr algn="ctr"/>
-            <a:r>
-              <a:rPr sz="900">
-                <a:solidFill>
-                  <a:srgbClr val="1F3A5F"/>
-                </a:solidFill>
-              </a:rPr>
-              <a:t>Gram 32: FR Akira-class, Category 3, Bajor</a:t>
-            </a:r>
-          </a:p>
-        </p:txBody>
-      </p:sp>
-      <p:sp>
-        <p:nvSpPr>
-          <p:cNvPr id="28" name="TextBox 27"/>
-          <p:cNvSpPr txBox="1"/>
-          <p:nvPr/>
-        </p:nvSpPr>
-        <p:spPr>
-          <a:xfrm>
-            <a:off x="4948732" y="5017008"/>
-            <a:ext cx="2200046" cy="1447800"/>
-          </a:xfrm>
-          <a:prstGeom prst="rect">
-            <a:avLst/>
-          </a:prstGeom>
-          <a:noFill/>
-        </p:spPr>
-        <p:txBody>
-          <a:bodyPr wrap="square">
-            <a:spAutoFit/>
-          </a:bodyPr>
-          <a:lstStyle/>
-          <a:p>
-            <a:r>
-              <a:rPr sz="800">
-                <a:hlinkClick r:id="rId57"/>
-              </a:rPr>
-              <a:t>Lofar 1</a:t>
-            </a:r>
-          </a:p>
-          <a:p>
-            <a:r>
-              <a:rPr sz="800">
-                <a:hlinkClick r:id="rId58"/>
-              </a:rPr>
-              <a:t>Lofar 2</a:t>
-            </a:r>
-          </a:p>
-        </p:txBody>
-      </p:sp>
-      <p:sp>
-        <p:nvSpPr>
-          <p:cNvPr id="29" name="Rounded Rectangle 28"/>
-          <p:cNvSpPr/>
-          <p:nvPr>
-            <a:hlinkClick r:id="rId59"/>
-          </p:nvPr>
-        </p:nvSpPr>
-        <p:spPr>
-          <a:xfrm>
-            <a:off x="7240219" y="4632960"/>
-            <a:ext cx="2200046" cy="365760"/>
-          </a:xfrm>
-          <a:prstGeom prst="roundRect">
-            <a:avLst/>
-          </a:prstGeom>
-          <a:solidFill>
-            <a:srgbClr val="E8EEF7"/>
-          </a:solidFill>
-          <a:ln>
-            <a:solidFill>
-              <a:srgbClr val="1F3A5F"/>
-            </a:solidFill>
-          </a:ln>
-        </p:spPr>
-        <p:style>
-          <a:lnRef idx="1">
-            <a:schemeClr val="accent1"/>
-          </a:lnRef>
-          <a:fillRef idx="3">
-            <a:schemeClr val="accent1"/>
-          </a:fillRef>
-          <a:effectRef idx="2">
-            <a:schemeClr val="accent1"/>
-          </a:effectRef>
-          <a:fontRef idx="minor">
-            <a:schemeClr val="lt1"/>
-          </a:fontRef>
-        </p:style>
-        <p:txBody>
-          <a:bodyPr rtlCol="0" anchor="ctr" lIns="45720" rIns="45720"/>
-          <a:lstStyle/>
-          <a:p>
-            <a:pPr algn="ctr"/>
-            <a:r>
-              <a:rPr sz="900">
-                <a:solidFill>
-                  <a:srgbClr val="1F3A5F"/>
-                </a:solidFill>
-              </a:rPr>
-              <a:t>Gram 33: Reliant contact bearing 201, codename Kobol</a:t>
-            </a:r>
-          </a:p>
-        </p:txBody>
-      </p:sp>
-      <p:sp>
-        <p:nvSpPr>
-          <p:cNvPr id="30" name="TextBox 29"/>
-          <p:cNvSpPr txBox="1"/>
-          <p:nvPr/>
-        </p:nvSpPr>
-        <p:spPr>
-          <a:xfrm>
-            <a:off x="7240219" y="5017008"/>
-            <a:ext cx="2200046" cy="1447800"/>
-          </a:xfrm>
-          <a:prstGeom prst="rect">
-            <a:avLst/>
-          </a:prstGeom>
-          <a:noFill/>
-        </p:spPr>
-        <p:txBody>
-          <a:bodyPr wrap="square">
-            <a:spAutoFit/>
-          </a:bodyPr>
-          <a:lstStyle/>
-          <a:p>
-            <a:r>
-              <a:rPr sz="800">
-                <a:hlinkClick r:id="rId60"/>
-              </a:rPr>
-              <a:t>Lofar 1</a:t>
-            </a:r>
-          </a:p>
-          <a:p>
-            <a:r>
-              <a:rPr sz="800">
-                <a:hlinkClick r:id="rId61"/>
-              </a:rPr>
-              <a:t>Lofar 2</a:t>
-            </a:r>
-          </a:p>
-          <a:p>
-            <a:r>
-              <a:rPr sz="800">
-                <a:hlinkClick r:id="rId62"/>
-              </a:rPr>
-              <a:t>Lofar 3</a:t>
-            </a:r>
-          </a:p>
-          <a:p>
-            <a:r>
-              <a:rPr sz="800">
-                <a:hlinkClick r:id="rId63"/>
-              </a:rPr>
-              <a:t>Lofar 4</a:t>
-            </a:r>
-          </a:p>
-        </p:txBody>
-      </p:sp>
-      <p:sp>
-        <p:nvSpPr>
-          <p:cNvPr id="31" name="Rounded Rectangle 30"/>
-          <p:cNvSpPr/>
-          <p:nvPr>
-            <a:hlinkClick r:id="rId64"/>
-          </p:nvPr>
-        </p:nvSpPr>
-        <p:spPr>
-          <a:xfrm>
-            <a:off x="9531705" y="4632960"/>
-            <a:ext cx="2200046" cy="365760"/>
-          </a:xfrm>
-          <a:prstGeom prst="roundRect">
-            <a:avLst/>
-          </a:prstGeom>
-          <a:solidFill>
-            <a:srgbClr val="E8EEF7"/>
-          </a:solidFill>
-          <a:ln>
-            <a:solidFill>
-              <a:srgbClr val="1F3A5F"/>
-            </a:solidFill>
-          </a:ln>
-        </p:spPr>
-        <p:style>
-          <a:lnRef idx="1">
-            <a:schemeClr val="accent1"/>
-          </a:lnRef>
-          <a:fillRef idx="3">
-            <a:schemeClr val="accent1"/>
-          </a:fillRef>
-          <a:effectRef idx="2">
-            <a:schemeClr val="accent1"/>
-          </a:effectRef>
-          <a:fontRef idx="minor">
-            <a:schemeClr val="lt1"/>
-          </a:fontRef>
-        </p:style>
-        <p:txBody>
-          <a:bodyPr rtlCol="0" anchor="ctr" lIns="45720" rIns="45720"/>
-          <a:lstStyle/>
-          <a:p>
-            <a:pPr algn="ctr"/>
-            <a:r>
-              <a:rPr sz="900">
-                <a:solidFill>
-                  <a:srgbClr val="1F3A5F"/>
-                </a:solidFill>
-              </a:rPr>
-              <a:t>Gram 34: FR Imperial-class, Category 4, Mustafar</a:t>
-            </a:r>
-          </a:p>
-        </p:txBody>
-      </p:sp>
-      <p:sp>
-        <p:nvSpPr>
-          <p:cNvPr id="32" name="TextBox 31"/>
-          <p:cNvSpPr txBox="1"/>
-          <p:nvPr/>
-        </p:nvSpPr>
-        <p:spPr>
-          <a:xfrm>
-            <a:off x="9531705" y="5017008"/>
-            <a:ext cx="2200046" cy="1447800"/>
-          </a:xfrm>
-          <a:prstGeom prst="rect">
-            <a:avLst/>
-          </a:prstGeom>
-          <a:noFill/>
-        </p:spPr>
-        <p:txBody>
-          <a:bodyPr wrap="square">
-            <a:spAutoFit/>
-          </a:bodyPr>
-          <a:lstStyle/>
-          <a:p>
-            <a:r>
-              <a:rPr sz="800">
-                <a:hlinkClick r:id="rId65"/>
-              </a:rPr>
-              <a:t>Lofar 1</a:t>
-            </a:r>
-          </a:p>
-          <a:p>
-            <a:r>
-              <a:rPr sz="800">
-                <a:hlinkClick r:id="rId66"/>
-              </a:rPr>
-              <a:t>Lofar 2</a:t>
-            </a:r>
-          </a:p>
-          <a:p>
-            <a:r>
-              <a:rPr sz="800">
-                <a:hlinkClick r:id="rId67"/>
-              </a:rPr>
-              <a:t>Lofar 3</a:t>
-            </a:r>
-          </a:p>
-        </p:txBody>
-      </p:sp>
-    </p:spTree>
-  </p:cSld>
-  <p:clrMapOvr>
-    <a:masterClrMapping/>
-  </p:clrMapOvr>
-</p:sld>
-</file>
-
-<file path=ppt/slides/slide4.xml><?xml version="1.0" encoding="utf-8"?>
-<p:sld xmlns:a="http://schemas.openxmlformats.org/drawingml/2006/main" xmlns:p="http://schemas.openxmlformats.org/presentationml/2006/main" xmlns:r="http://schemas.openxmlformats.org/officeDocument/2006/relationships">
-  <p:cSld>
-    <p:spTree>
-      <p:nvGrpSpPr>
-        <p:cNvPr id="1" name=""/>
-        <p:cNvGrpSpPr/>
-        <p:nvPr/>
-      </p:nvGrpSpPr>
-      <p:grpSpPr/>
-      <p:sp>
-        <p:nvSpPr>
-          <p:cNvPr id="2" name="Rectangle 1"/>
-          <p:cNvSpPr/>
-          <p:nvPr/>
-        </p:nvSpPr>
-        <p:spPr>
-          <a:xfrm>
-            <a:off x="0" y="0"/>
-            <a:ext cx="12188952" cy="548640"/>
-          </a:xfrm>
-          <a:prstGeom prst="rect">
-            <a:avLst/>
-          </a:prstGeom>
-          <a:solidFill>
-            <a:srgbClr val="1F3A5F"/>
-          </a:solidFill>
-          <a:ln>
-            <a:noFill/>
-          </a:ln>
-        </p:spPr>
-        <p:style>
-          <a:lnRef idx="1">
-            <a:schemeClr val="accent1"/>
-          </a:lnRef>
-          <a:fillRef idx="3">
-            <a:schemeClr val="accent1"/>
-          </a:fillRef>
-          <a:effectRef idx="2">
-            <a:schemeClr val="accent1"/>
-          </a:effectRef>
-          <a:fontRef idx="minor">
-            <a:schemeClr val="lt1"/>
-          </a:fontRef>
-        </p:style>
-        <p:txBody>
-          <a:bodyPr rtlCol="0" anchor="ctr" lIns="182880" rIns="182880"/>
-          <a:lstStyle/>
-          <a:p>
-            <a:pPr algn="ctr"/>
-            <a:r>
-              <a:rPr sz="2000" b="1">
-                <a:solidFill>
-                  <a:srgbClr val="FFFFFF"/>
-                </a:solidFill>
-              </a:rPr>
-              <a:t>Instructor Week 4 Grams_Updated — Page 3 of 3</a:t>
-            </a:r>
-          </a:p>
-        </p:txBody>
-      </p:sp>
-      <p:sp>
-        <p:nvSpPr>
-          <p:cNvPr id="3" name="Rounded Rectangle 2"/>
-          <p:cNvSpPr/>
-          <p:nvPr>
-            <a:hlinkClick r:id="rId2"/>
-          </p:nvPr>
-        </p:nvSpPr>
-        <p:spPr>
-          <a:xfrm>
-            <a:off x="365760" y="731520"/>
-            <a:ext cx="2200046" cy="365760"/>
-          </a:xfrm>
-          <a:prstGeom prst="roundRect">
-            <a:avLst/>
-          </a:prstGeom>
-          <a:solidFill>
-            <a:srgbClr val="E8EEF7"/>
-          </a:solidFill>
-          <a:ln>
-            <a:solidFill>
-              <a:srgbClr val="1F3A5F"/>
-            </a:solidFill>
-          </a:ln>
-        </p:spPr>
-        <p:style>
-          <a:lnRef idx="1">
-            <a:schemeClr val="accent1"/>
-          </a:lnRef>
-          <a:fillRef idx="3">
-            <a:schemeClr val="accent1"/>
-          </a:fillRef>
-          <a:effectRef idx="2">
-            <a:schemeClr val="accent1"/>
-          </a:effectRef>
-          <a:fontRef idx="minor">
-            <a:schemeClr val="lt1"/>
-          </a:fontRef>
-        </p:style>
-        <p:txBody>
-          <a:bodyPr rtlCol="0" anchor="ctr" lIns="45720" rIns="45720"/>
-          <a:lstStyle/>
-          <a:p>
-            <a:pPr algn="ctr"/>
-            <a:r>
-              <a:rPr sz="900">
-                <a:solidFill>
-                  <a:srgbClr val="1F3A5F"/>
-                </a:solidFill>
-              </a:rPr>
-              <a:t>Gram 36: FR Defiant-class, Category 2, Defiant</a:t>
-            </a:r>
-          </a:p>
-        </p:txBody>
-      </p:sp>
-      <p:sp>
-        <p:nvSpPr>
-          <p:cNvPr id="4" name="TextBox 3"/>
-          <p:cNvSpPr txBox="1"/>
-          <p:nvPr/>
-        </p:nvSpPr>
-        <p:spPr>
-          <a:xfrm>
-            <a:off x="365760" y="1115568"/>
-            <a:ext cx="2200046" cy="1447800"/>
-          </a:xfrm>
-          <a:prstGeom prst="rect">
-            <a:avLst/>
-          </a:prstGeom>
-          <a:noFill/>
-        </p:spPr>
-        <p:txBody>
-          <a:bodyPr wrap="square">
-            <a:spAutoFit/>
-          </a:bodyPr>
-          <a:lstStyle/>
-          <a:p>
-            <a:r>
-              <a:rPr sz="800">
-                <a:hlinkClick r:id="rId3"/>
-              </a:rPr>
-              <a:t>Lofar 1</a:t>
-            </a:r>
-          </a:p>
-          <a:p>
-            <a:r>
-              <a:rPr sz="800">
-                <a:hlinkClick r:id="rId4"/>
-              </a:rPr>
-              <a:t>Lofar 2</a:t>
-            </a:r>
-          </a:p>
-          <a:p>
-            <a:r>
-              <a:rPr sz="800">
-                <a:hlinkClick r:id="rId5"/>
-              </a:rPr>
-              <a:t>Lofar 3</a:t>
-            </a:r>
-          </a:p>
-          <a:p>
-            <a:r>
-              <a:rPr sz="800">
-                <a:hlinkClick r:id="rId6"/>
-              </a:rPr>
-              <a:t>Lofar 4</a:t>
-            </a:r>
-          </a:p>
-        </p:txBody>
-      </p:sp>
-      <p:sp>
-        <p:nvSpPr>
-          <p:cNvPr id="5" name="Rounded Rectangle 4"/>
-          <p:cNvSpPr/>
-          <p:nvPr>
-            <a:hlinkClick r:id="rId7"/>
-          </p:nvPr>
-        </p:nvSpPr>
-        <p:spPr>
-          <a:xfrm>
-            <a:off x="2657246" y="731520"/>
-            <a:ext cx="2200046" cy="365760"/>
-          </a:xfrm>
-          <a:prstGeom prst="roundRect">
-            <a:avLst/>
-          </a:prstGeom>
-          <a:solidFill>
-            <a:srgbClr val="E8EEF7"/>
-          </a:solidFill>
-          <a:ln>
-            <a:solidFill>
-              <a:srgbClr val="1F3A5F"/>
-            </a:solidFill>
-          </a:ln>
-        </p:spPr>
-        <p:style>
-          <a:lnRef idx="1">
-            <a:schemeClr val="accent1"/>
-          </a:lnRef>
-          <a:fillRef idx="3">
-            <a:schemeClr val="accent1"/>
-          </a:fillRef>
-          <a:effectRef idx="2">
-            <a:schemeClr val="accent1"/>
-          </a:effectRef>
-          <a:fontRef idx="minor">
-            <a:schemeClr val="lt1"/>
-          </a:fontRef>
-        </p:style>
-        <p:txBody>
-          <a:bodyPr rtlCol="0" anchor="ctr" lIns="45720" rIns="45720"/>
-          <a:lstStyle/>
-          <a:p>
-            <a:pPr algn="ctr"/>
-            <a:r>
-              <a:rPr sz="900">
-                <a:solidFill>
-                  <a:srgbClr val="1F3A5F"/>
-                </a:solidFill>
-              </a:rPr>
-              <a:t>Gram 37: B-wing contact bearing 123, codename Hoth</a:t>
-            </a:r>
-          </a:p>
-        </p:txBody>
-      </p:sp>
-      <p:sp>
-        <p:nvSpPr>
-          <p:cNvPr id="6" name="TextBox 5"/>
-          <p:cNvSpPr txBox="1"/>
-          <p:nvPr/>
-        </p:nvSpPr>
-        <p:spPr>
-          <a:xfrm>
-            <a:off x="2657246" y="1115568"/>
-            <a:ext cx="2200046" cy="1447800"/>
-          </a:xfrm>
-          <a:prstGeom prst="rect">
-            <a:avLst/>
-          </a:prstGeom>
-          <a:noFill/>
-        </p:spPr>
-        <p:txBody>
-          <a:bodyPr wrap="square">
-            <a:spAutoFit/>
-          </a:bodyPr>
-          <a:lstStyle/>
-          <a:p>
-            <a:r>
-              <a:rPr sz="800">
-                <a:hlinkClick r:id="rId8"/>
-              </a:rPr>
-              <a:t>Lofar 1</a:t>
-            </a:r>
-          </a:p>
-          <a:p>
-            <a:r>
-              <a:rPr sz="800">
-                <a:hlinkClick r:id="rId9"/>
-              </a:rPr>
-              <a:t>Lofar 2</a:t>
-            </a:r>
-          </a:p>
-          <a:p>
-            <a:r>
-              <a:rPr sz="800">
-                <a:hlinkClick r:id="rId10"/>
-              </a:rPr>
-              <a:t>Lofar 3</a:t>
-            </a:r>
-          </a:p>
-          <a:p>
-            <a:r>
-              <a:rPr sz="800">
-                <a:hlinkClick r:id="rId11"/>
-              </a:rPr>
-              <a:t>Lofar 4</a:t>
-            </a:r>
-          </a:p>
-        </p:txBody>
-      </p:sp>
-      <p:sp>
-        <p:nvSpPr>
-          <p:cNvPr id="7" name="Rounded Rectangle 6"/>
-          <p:cNvSpPr/>
-          <p:nvPr>
-            <a:hlinkClick r:id="rId12"/>
-          </p:nvPr>
-        </p:nvSpPr>
-        <p:spPr>
-          <a:xfrm>
-            <a:off x="4948732" y="731520"/>
-            <a:ext cx="2200046" cy="365760"/>
-          </a:xfrm>
-          <a:prstGeom prst="roundRect">
-            <a:avLst/>
-          </a:prstGeom>
-          <a:solidFill>
-            <a:srgbClr val="E8EEF7"/>
-          </a:solidFill>
-          <a:ln>
-            <a:solidFill>
-              <a:srgbClr val="1F3A5F"/>
-            </a:solidFill>
-          </a:ln>
-        </p:spPr>
-        <p:style>
-          <a:lnRef idx="1">
-            <a:schemeClr val="accent1"/>
-          </a:lnRef>
-          <a:fillRef idx="3">
-            <a:schemeClr val="accent1"/>
-          </a:fillRef>
-          <a:effectRef idx="2">
-            <a:schemeClr val="accent1"/>
-          </a:effectRef>
-          <a:fontRef idx="minor">
-            <a:schemeClr val="lt1"/>
-          </a:fontRef>
-        </p:style>
-        <p:txBody>
-          <a:bodyPr rtlCol="0" anchor="ctr" lIns="45720" rIns="45720"/>
-          <a:lstStyle/>
-          <a:p>
-            <a:pPr algn="ctr"/>
-            <a:r>
-              <a:rPr sz="900">
-                <a:solidFill>
-                  <a:srgbClr val="1F3A5F"/>
-                </a:solidFill>
-              </a:rPr>
-              <a:t>Gram 38: FR Outrider, Category 1, Endor</a:t>
-            </a:r>
-          </a:p>
-        </p:txBody>
-      </p:sp>
-      <p:sp>
-        <p:nvSpPr>
-          <p:cNvPr id="8" name="TextBox 7"/>
-          <p:cNvSpPr txBox="1"/>
-          <p:nvPr/>
-        </p:nvSpPr>
-        <p:spPr>
-          <a:xfrm>
-            <a:off x="4948732" y="1115568"/>
-            <a:ext cx="2200046" cy="1447800"/>
-          </a:xfrm>
-          <a:prstGeom prst="rect">
-            <a:avLst/>
-          </a:prstGeom>
-          <a:noFill/>
-        </p:spPr>
-        <p:txBody>
-          <a:bodyPr wrap="square">
-            <a:spAutoFit/>
-          </a:bodyPr>
-          <a:lstStyle/>
-          <a:p>
-            <a:r>
-              <a:rPr sz="800">
-                <a:hlinkClick r:id="rId13"/>
-              </a:rPr>
-              <a:t>Lofar 1</a:t>
-            </a:r>
-          </a:p>
-        </p:txBody>
-      </p:sp>
-      <p:sp>
-        <p:nvSpPr>
-          <p:cNvPr id="9" name="Rounded Rectangle 8"/>
-          <p:cNvSpPr/>
-          <p:nvPr>
-            <a:hlinkClick r:id="rId14"/>
-          </p:nvPr>
-        </p:nvSpPr>
-        <p:spPr>
-          <a:xfrm>
-            <a:off x="7240219" y="731520"/>
-            <a:ext cx="2200046" cy="365760"/>
-          </a:xfrm>
-          <a:prstGeom prst="roundRect">
-            <a:avLst/>
-          </a:prstGeom>
-          <a:solidFill>
-            <a:srgbClr val="E8EEF7"/>
-          </a:solidFill>
-          <a:ln>
-            <a:solidFill>
-              <a:srgbClr val="1F3A5F"/>
-            </a:solidFill>
-          </a:ln>
-        </p:spPr>
-        <p:style>
-          <a:lnRef idx="1">
-            <a:schemeClr val="accent1"/>
-          </a:lnRef>
-          <a:fillRef idx="3">
-            <a:schemeClr val="accent1"/>
-          </a:fillRef>
-          <a:effectRef idx="2">
-            <a:schemeClr val="accent1"/>
-          </a:effectRef>
-          <a:fontRef idx="minor">
-            <a:schemeClr val="lt1"/>
-          </a:fontRef>
-        </p:style>
-        <p:txBody>
-          <a:bodyPr rtlCol="0" anchor="ctr" lIns="45720" rIns="45720"/>
-          <a:lstStyle/>
-          <a:p>
-            <a:pPr algn="ctr"/>
-            <a:r>
-              <a:rPr sz="900">
-                <a:solidFill>
-                  <a:srgbClr val="1F3A5F"/>
-                </a:solidFill>
-              </a:rPr>
-              <a:t>Gram 41: X-wing contact bearing 106, codename Tantive</a:t>
-            </a:r>
-          </a:p>
-        </p:txBody>
-      </p:sp>
-      <p:sp>
-        <p:nvSpPr>
-          <p:cNvPr id="10" name="TextBox 9"/>
-          <p:cNvSpPr txBox="1"/>
-          <p:nvPr/>
-        </p:nvSpPr>
-        <p:spPr>
-          <a:xfrm>
-            <a:off x="7240219" y="1115568"/>
-            <a:ext cx="2200046" cy="1447800"/>
-          </a:xfrm>
-          <a:prstGeom prst="rect">
-            <a:avLst/>
-          </a:prstGeom>
-          <a:noFill/>
-        </p:spPr>
-        <p:txBody>
-          <a:bodyPr wrap="square">
-            <a:spAutoFit/>
-          </a:bodyPr>
-          <a:lstStyle/>
-          <a:p>
-            <a:r>
-              <a:rPr sz="800">
-                <a:hlinkClick r:id="rId15"/>
-              </a:rPr>
-              <a:t>Lofar 1</a:t>
-            </a:r>
-          </a:p>
-          <a:p>
-            <a:r>
-              <a:rPr sz="800">
-                <a:hlinkClick r:id="rId16"/>
-              </a:rPr>
-              <a:t>Lofar 2</a:t>
-            </a:r>
-          </a:p>
-          <a:p>
-            <a:r>
-              <a:rPr sz="800">
-                <a:hlinkClick r:id="rId17"/>
-              </a:rPr>
-              <a:t>Lofar 3</a:t>
-            </a:r>
-          </a:p>
-          <a:p>
-            <a:r>
-              <a:rPr sz="800">
-                <a:hlinkClick r:id="rId18"/>
-              </a:rPr>
-              <a:t>Lofar 4</a:t>
-            </a:r>
-          </a:p>
-        </p:txBody>
-      </p:sp>
-      <p:sp>
-        <p:nvSpPr>
-          <p:cNvPr id="11" name="Rounded Rectangle 10"/>
-          <p:cNvSpPr/>
-          <p:nvPr>
-            <a:hlinkClick r:id="rId19"/>
-          </p:nvPr>
-        </p:nvSpPr>
-        <p:spPr>
-          <a:xfrm>
-            <a:off x="9531705" y="731520"/>
-            <a:ext cx="2200046" cy="365760"/>
-          </a:xfrm>
-          <a:prstGeom prst="roundRect">
-            <a:avLst/>
-          </a:prstGeom>
-          <a:solidFill>
-            <a:srgbClr val="E8EEF7"/>
-          </a:solidFill>
-          <a:ln>
-            <a:solidFill>
-              <a:srgbClr val="1F3A5F"/>
-            </a:solidFill>
-          </a:ln>
-        </p:spPr>
-        <p:style>
-          <a:lnRef idx="1">
-            <a:schemeClr val="accent1"/>
-          </a:lnRef>
-          <a:fillRef idx="3">
-            <a:schemeClr val="accent1"/>
-          </a:fillRef>
-          <a:effectRef idx="2">
-            <a:schemeClr val="accent1"/>
-          </a:effectRef>
-          <a:fontRef idx="minor">
-            <a:schemeClr val="lt1"/>
-          </a:fontRef>
-        </p:style>
-        <p:txBody>
-          <a:bodyPr rtlCol="0" anchor="ctr" lIns="45720" rIns="45720"/>
-          <a:lstStyle/>
-          <a:p>
-            <a:pPr algn="ctr"/>
-            <a:r>
-              <a:rPr sz="900">
-                <a:solidFill>
-                  <a:srgbClr val="1F3A5F"/>
-                </a:solidFill>
-              </a:rPr>
-              <a:t>Gram 42: FR Prometheus, Category 2, Coruscant</a:t>
-            </a:r>
-          </a:p>
-        </p:txBody>
-      </p:sp>
-      <p:sp>
-        <p:nvSpPr>
-          <p:cNvPr id="12" name="TextBox 11"/>
-          <p:cNvSpPr txBox="1"/>
-          <p:nvPr/>
-        </p:nvSpPr>
-        <p:spPr>
-          <a:xfrm>
-            <a:off x="9531705" y="1115568"/>
-            <a:ext cx="2200046" cy="1447800"/>
-          </a:xfrm>
-          <a:prstGeom prst="rect">
-            <a:avLst/>
-          </a:prstGeom>
-          <a:noFill/>
-        </p:spPr>
-        <p:txBody>
-          <a:bodyPr wrap="square">
-            <a:spAutoFit/>
-          </a:bodyPr>
-          <a:lstStyle/>
-          <a:p>
-            <a:r>
-              <a:rPr sz="800">
-                <a:hlinkClick r:id="rId20"/>
-              </a:rPr>
-              <a:t>Lofar 1</a:t>
-            </a:r>
-          </a:p>
-          <a:p>
-            <a:r>
-              <a:rPr sz="800">
-                <a:hlinkClick r:id="rId21"/>
-              </a:rPr>
-              <a:t>Lofar 2</a:t>
-            </a:r>
-          </a:p>
-          <a:p>
-            <a:r>
-              <a:rPr sz="800">
-                <a:hlinkClick r:id="rId22"/>
-              </a:rPr>
-              <a:t>Lofar 3</a:t>
-            </a:r>
-          </a:p>
-        </p:txBody>
-      </p:sp>
-    </p:spTree>
-  </p:cSld>
-  <p:clrMapOvr>
-    <a:masterClrMapping/>
-  </p:clrMapOvr>
-</p:sld>
-</file>
-
-<file path=ppt/slides/slide5.xml><?xml version="1.0" encoding="utf-8"?>
-<p:sld xmlns:a="http://schemas.openxmlformats.org/drawingml/2006/main" xmlns:p="http://schemas.openxmlformats.org/presentationml/2006/main" xmlns:r="http://schemas.openxmlformats.org/officeDocument/2006/relationships">
-  <p:cSld>
-    <p:spTree>
-      <p:nvGrpSpPr>
-        <p:cNvPr id="1" name=""/>
-        <p:cNvGrpSpPr/>
-        <p:nvPr/>
-      </p:nvGrpSpPr>
-      <p:grpSpPr/>
-      <p:sp>
-        <p:nvSpPr>
-          <p:cNvPr id="2" name="TextBox 1"/>
-          <p:cNvSpPr txBox="1"/>
-          <p:nvPr/>
-        </p:nvSpPr>
-        <p:spPr>
-          <a:xfrm>
-            <a:off x="914400" y="2377440"/>
-            <a:ext cx="10360152" cy="1280160"/>
-          </a:xfrm>
-          <a:prstGeom prst="rect">
-            <a:avLst/>
-          </a:prstGeom>
-          <a:noFill/>
-        </p:spPr>
-        <p:txBody>
-          <a:bodyPr wrap="square">
-            <a:spAutoFit/>
-          </a:bodyPr>
-          <a:lstStyle/>
-          <a:p>
-            <a:pPr algn="ctr"/>
-            <a:r>
-              <a:rPr sz="4000" b="1">
-                <a:solidFill>
-                  <a:srgbClr val="1F3A5F"/>
-                </a:solidFill>
-              </a:rPr>
-              <a:t>End of Instructor Week 4 Grams_Updated</a:t>
-            </a:r>
-          </a:p>
-        </p:txBody>
-      </p:sp>
-      <p:sp>
-        <p:nvSpPr>
-          <p:cNvPr id="3" name="TextBox 2"/>
-          <p:cNvSpPr txBox="1"/>
-          <p:nvPr/>
-        </p:nvSpPr>
-        <p:spPr>
-          <a:xfrm>
-            <a:off x="914400" y="3840480"/>
-            <a:ext cx="10360152" cy="731520"/>
-          </a:xfrm>
-          <a:prstGeom prst="rect">
-            <a:avLst/>
-          </a:prstGeom>
-          <a:noFill/>
-        </p:spPr>
-        <p:txBody>
-          <a:bodyPr wrap="none">
-            <a:spAutoFit/>
-          </a:bodyPr>
-          <a:lstStyle/>
-          <a:p>
-            <a:pPr algn="ctr"/>
-            <a:r>
-              <a:rPr sz="2400">
-                <a:solidFill>
-                  <a:srgbClr val="1F3A5F"/>
-                </a:solidFill>
-              </a:rPr>
-              <a:t>Instructor Version</a:t>
             </a:r>
           </a:p>
         </p:txBody>

--- a/source/Instructor Week 4 Grams_Updated/Instructor Week 4 Grams_Updated.pptx
+++ b/source/Instructor Week 4 Grams_Updated/Instructor Week 4 Grams_Updated.pptx
@@ -8,6 +8,8 @@
     <p:sldId id="256" r:id="rId7"/>
     <p:sldId id="257" r:id="rId8"/>
     <p:sldId id="258" r:id="rId9"/>
+    <p:sldId id="259" r:id="rId10"/>
+    <p:sldId id="260" r:id="rId11"/>
   </p:sldIdLst>
   <p:sldSz cx="12188952" cy="6858000" type="screen4x3"/>
   <p:notesSz cx="6858000" cy="9144000"/>
@@ -3092,120 +3094,48 @@
       <p:grpSpPr/>
       <p:sp>
         <p:nvSpPr>
-          <p:cNvPr id="2" name="Rectangle 1"/>
-          <p:cNvSpPr/>
-          <p:nvPr/>
-        </p:nvSpPr>
-        <p:spPr>
-          <a:xfrm>
-            <a:off x="0" y="0"/>
-            <a:ext cx="12188952" cy="548640"/>
+          <p:cNvPr id="2" name="TextBox 1"/>
+          <p:cNvSpPr txBox="1"/>
+          <p:nvPr/>
+        </p:nvSpPr>
+        <p:spPr>
+          <a:xfrm>
+            <a:off x="914400" y="2377440"/>
+            <a:ext cx="10360152" cy="1280160"/>
           </a:xfrm>
           <a:prstGeom prst="rect">
             <a:avLst/>
           </a:prstGeom>
-          <a:solidFill>
-            <a:srgbClr val="1F3A5F"/>
-          </a:solidFill>
-          <a:ln>
-            <a:noFill/>
-          </a:ln>
-        </p:spPr>
-        <p:style>
-          <a:lnRef idx="1">
-            <a:schemeClr val="accent1"/>
-          </a:lnRef>
-          <a:fillRef idx="3">
-            <a:schemeClr val="accent1"/>
-          </a:fillRef>
-          <a:effectRef idx="2">
-            <a:schemeClr val="accent1"/>
-          </a:effectRef>
-          <a:fontRef idx="minor">
-            <a:schemeClr val="lt1"/>
-          </a:fontRef>
-        </p:style>
-        <p:txBody>
-          <a:bodyPr rtlCol="0" anchor="ctr" lIns="182880" rIns="182880"/>
+          <a:noFill/>
+        </p:spPr>
+        <p:txBody>
+          <a:bodyPr wrap="square">
+            <a:spAutoFit/>
+          </a:bodyPr>
           <a:lstStyle/>
           <a:p>
             <a:pPr algn="ctr"/>
             <a:r>
-              <a:rPr sz="2000" b="1">
-                <a:solidFill>
-                  <a:srgbClr val="FFFFFF"/>
-                </a:solidFill>
-              </a:rPr>
-              <a:t>Instructor Week 4 Grams_Updated — Page 1 of 3</a:t>
-            </a:r>
-          </a:p>
-        </p:txBody>
-      </p:sp>
-      <p:sp>
-        <p:nvSpPr>
-          <p:cNvPr id="3" name="Rounded Rectangle 2">
-            <a:hlinkClick r:id="rId2"/>
-          </p:cNvPr>
-          <p:cNvSpPr/>
-          <p:nvPr/>
-        </p:nvSpPr>
-        <p:spPr>
-          <a:xfrm>
-            <a:off x="365760" y="731520"/>
-            <a:ext cx="2200046" cy="365760"/>
-          </a:xfrm>
-          <a:prstGeom prst="roundRect">
-            <a:avLst/>
-          </a:prstGeom>
-          <a:solidFill>
-            <a:srgbClr val="E8EEF7"/>
-          </a:solidFill>
-          <a:ln>
-            <a:solidFill>
-              <a:srgbClr val="1F3A5F"/>
-            </a:solidFill>
-          </a:ln>
-        </p:spPr>
-        <p:style>
-          <a:lnRef idx="1">
-            <a:schemeClr val="accent1"/>
-          </a:lnRef>
-          <a:fillRef idx="3">
-            <a:schemeClr val="accent1"/>
-          </a:fillRef>
-          <a:effectRef idx="2">
-            <a:schemeClr val="accent1"/>
-          </a:effectRef>
-          <a:fontRef idx="minor">
-            <a:schemeClr val="lt1"/>
-          </a:fontRef>
-        </p:style>
-        <p:txBody>
-          <a:bodyPr rtlCol="0" anchor="ctr" lIns="45720" rIns="45720"/>
-          <a:lstStyle/>
-          <a:p>
-            <a:pPr algn="ctr"/>
-            <a:r>
-              <a:rPr sz="900">
+              <a:rPr sz="4000" b="1">
                 <a:solidFill>
                   <a:srgbClr val="1F3A5F"/>
                 </a:solidFill>
               </a:rPr>
-              <a:t>Gram 1: FR A-wing, Category 3, Hoth</a:t>
-            </a:r>
-          </a:p>
-        </p:txBody>
-      </p:sp>
-      <p:sp>
-        <p:nvSpPr>
-          <p:cNvPr id="4" name="TextBox 3"/>
+              <a:t>Welcome to Instructor Week 4 Grams_Updated</a:t>
+            </a:r>
+          </a:p>
+        </p:txBody>
+      </p:sp>
+      <p:sp>
+        <p:nvSpPr>
+          <p:cNvPr id="3" name="TextBox 2"/>
           <p:cNvSpPr txBox="1"/>
           <p:nvPr/>
         </p:nvSpPr>
         <p:spPr>
           <a:xfrm>
-            <a:off x="365760" y="1115568"/>
-            <a:ext cx="2200046" cy="1447800"/>
+            <a:off x="914400" y="3840480"/>
+            <a:ext cx="10360152" cy="731520"/>
           </a:xfrm>
           <a:prstGeom prst="rect">
             <a:avLst/>
@@ -3213,1308 +3143,19 @@
           <a:noFill/>
         </p:spPr>
         <p:txBody>
-          <a:bodyPr wrap="square">
+          <a:bodyPr wrap="none">
             <a:spAutoFit/>
           </a:bodyPr>
           <a:lstStyle/>
           <a:p>
-            <a:r>
-              <a:rPr sz="800">
-                <a:hlinkClick r:id="rId3"/>
-              </a:rPr>
-              <a:t>Lofar 1</a:t>
-            </a:r>
-          </a:p>
-        </p:txBody>
-      </p:sp>
-      <p:sp>
-        <p:nvSpPr>
-          <p:cNvPr id="5" name="Rounded Rectangle 4">
-            <a:hlinkClick r:id="rId4"/>
-          </p:cNvPr>
-          <p:cNvSpPr/>
-          <p:nvPr/>
-        </p:nvSpPr>
-        <p:spPr>
-          <a:xfrm>
-            <a:off x="2657246" y="731520"/>
-            <a:ext cx="2200046" cy="365760"/>
-          </a:xfrm>
-          <a:prstGeom prst="roundRect">
-            <a:avLst/>
-          </a:prstGeom>
-          <a:solidFill>
-            <a:srgbClr val="E8EEF7"/>
-          </a:solidFill>
-          <a:ln>
-            <a:solidFill>
-              <a:srgbClr val="1F3A5F"/>
-            </a:solidFill>
-          </a:ln>
-        </p:spPr>
-        <p:style>
-          <a:lnRef idx="1">
-            <a:schemeClr val="accent1"/>
-          </a:lnRef>
-          <a:fillRef idx="3">
-            <a:schemeClr val="accent1"/>
-          </a:fillRef>
-          <a:effectRef idx="2">
-            <a:schemeClr val="accent1"/>
-          </a:effectRef>
-          <a:fontRef idx="minor">
-            <a:schemeClr val="lt1"/>
-          </a:fontRef>
-        </p:style>
-        <p:txBody>
-          <a:bodyPr rtlCol="0" anchor="ctr" lIns="45720" rIns="45720"/>
-          <a:lstStyle/>
-          <a:p>
             <a:pPr algn="ctr"/>
             <a:r>
-              <a:rPr sz="900">
+              <a:rPr sz="2400">
                 <a:solidFill>
                   <a:srgbClr val="1F3A5F"/>
                 </a:solidFill>
               </a:rPr>
-              <a:t>Gram 2: FR Imperial-class, Category 3, Romulus</a:t>
-            </a:r>
-          </a:p>
-        </p:txBody>
-      </p:sp>
-      <p:sp>
-        <p:nvSpPr>
-          <p:cNvPr id="6" name="TextBox 5"/>
-          <p:cNvSpPr txBox="1"/>
-          <p:nvPr/>
-        </p:nvSpPr>
-        <p:spPr>
-          <a:xfrm>
-            <a:off x="2657246" y="1115568"/>
-            <a:ext cx="2200046" cy="1447800"/>
-          </a:xfrm>
-          <a:prstGeom prst="rect">
-            <a:avLst/>
-          </a:prstGeom>
-          <a:noFill/>
-        </p:spPr>
-        <p:txBody>
-          <a:bodyPr wrap="square">
-            <a:spAutoFit/>
-          </a:bodyPr>
-          <a:lstStyle/>
-          <a:p>
-            <a:r>
-              <a:rPr sz="800">
-                <a:hlinkClick r:id="rId5"/>
-              </a:rPr>
-              <a:t>Lofar 1</a:t>
-            </a:r>
-          </a:p>
-          <a:p>
-            <a:r>
-              <a:rPr sz="800">
-                <a:hlinkClick r:id="rId6"/>
-              </a:rPr>
-              <a:t>Lofar 2</a:t>
-            </a:r>
-          </a:p>
-        </p:txBody>
-      </p:sp>
-      <p:sp>
-        <p:nvSpPr>
-          <p:cNvPr id="7" name="Rounded Rectangle 6">
-            <a:hlinkClick r:id="rId7"/>
-          </p:cNvPr>
-          <p:cNvSpPr/>
-          <p:nvPr/>
-        </p:nvSpPr>
-        <p:spPr>
-          <a:xfrm>
-            <a:off x="4948732" y="731520"/>
-            <a:ext cx="2200046" cy="365760"/>
-          </a:xfrm>
-          <a:prstGeom prst="roundRect">
-            <a:avLst/>
-          </a:prstGeom>
-          <a:solidFill>
-            <a:srgbClr val="E8EEF7"/>
-          </a:solidFill>
-          <a:ln>
-            <a:solidFill>
-              <a:srgbClr val="1F3A5F"/>
-            </a:solidFill>
-          </a:ln>
-        </p:spPr>
-        <p:style>
-          <a:lnRef idx="1">
-            <a:schemeClr val="accent1"/>
-          </a:lnRef>
-          <a:fillRef idx="3">
-            <a:schemeClr val="accent1"/>
-          </a:fillRef>
-          <a:effectRef idx="2">
-            <a:schemeClr val="accent1"/>
-          </a:effectRef>
-          <a:fontRef idx="minor">
-            <a:schemeClr val="lt1"/>
-          </a:fontRef>
-        </p:style>
-        <p:txBody>
-          <a:bodyPr rtlCol="0" anchor="ctr" lIns="45720" rIns="45720"/>
-          <a:lstStyle/>
-          <a:p>
-            <a:pPr algn="ctr"/>
-            <a:r>
-              <a:rPr sz="900">
-                <a:solidFill>
-                  <a:srgbClr val="1F3A5F"/>
-                </a:solidFill>
-              </a:rPr>
-              <a:t>Gram 3: FR Reliant, Category 1, Coruscant</a:t>
-            </a:r>
-          </a:p>
-        </p:txBody>
-      </p:sp>
-      <p:sp>
-        <p:nvSpPr>
-          <p:cNvPr id="8" name="TextBox 7"/>
-          <p:cNvSpPr txBox="1"/>
-          <p:nvPr/>
-        </p:nvSpPr>
-        <p:spPr>
-          <a:xfrm>
-            <a:off x="4948732" y="1115568"/>
-            <a:ext cx="2200046" cy="1447800"/>
-          </a:xfrm>
-          <a:prstGeom prst="rect">
-            <a:avLst/>
-          </a:prstGeom>
-          <a:noFill/>
-        </p:spPr>
-        <p:txBody>
-          <a:bodyPr wrap="square">
-            <a:spAutoFit/>
-          </a:bodyPr>
-          <a:lstStyle/>
-          <a:p>
-            <a:r>
-              <a:rPr sz="800">
-                <a:hlinkClick r:id="rId8"/>
-              </a:rPr>
-              <a:t>Lofar 1</a:t>
-            </a:r>
-          </a:p>
-        </p:txBody>
-      </p:sp>
-      <p:sp>
-        <p:nvSpPr>
-          <p:cNvPr id="9" name="Rounded Rectangle 8">
-            <a:hlinkClick r:id="rId9"/>
-          </p:cNvPr>
-          <p:cNvSpPr/>
-          <p:nvPr/>
-        </p:nvSpPr>
-        <p:spPr>
-          <a:xfrm>
-            <a:off x="7240219" y="731520"/>
-            <a:ext cx="2200046" cy="365760"/>
-          </a:xfrm>
-          <a:prstGeom prst="roundRect">
-            <a:avLst/>
-          </a:prstGeom>
-          <a:solidFill>
-            <a:srgbClr val="E8EEF7"/>
-          </a:solidFill>
-          <a:ln>
-            <a:solidFill>
-              <a:srgbClr val="1F3A5F"/>
-            </a:solidFill>
-          </a:ln>
-        </p:spPr>
-        <p:style>
-          <a:lnRef idx="1">
-            <a:schemeClr val="accent1"/>
-          </a:lnRef>
-          <a:fillRef idx="3">
-            <a:schemeClr val="accent1"/>
-          </a:fillRef>
-          <a:effectRef idx="2">
-            <a:schemeClr val="accent1"/>
-          </a:effectRef>
-          <a:fontRef idx="minor">
-            <a:schemeClr val="lt1"/>
-          </a:fontRef>
-        </p:style>
-        <p:txBody>
-          <a:bodyPr rtlCol="0" anchor="ctr" lIns="45720" rIns="45720"/>
-          <a:lstStyle/>
-          <a:p>
-            <a:pPr algn="ctr"/>
-            <a:r>
-              <a:rPr sz="900">
-                <a:solidFill>
-                  <a:srgbClr val="1F3A5F"/>
-                </a:solidFill>
-              </a:rPr>
-              <a:t>Gram 4: FR Y-wing, Category 4, Caprica</a:t>
-            </a:r>
-          </a:p>
-        </p:txBody>
-      </p:sp>
-      <p:sp>
-        <p:nvSpPr>
-          <p:cNvPr id="10" name="TextBox 9"/>
-          <p:cNvSpPr txBox="1"/>
-          <p:nvPr/>
-        </p:nvSpPr>
-        <p:spPr>
-          <a:xfrm>
-            <a:off x="7240219" y="1115568"/>
-            <a:ext cx="2200046" cy="1447800"/>
-          </a:xfrm>
-          <a:prstGeom prst="rect">
-            <a:avLst/>
-          </a:prstGeom>
-          <a:noFill/>
-        </p:spPr>
-        <p:txBody>
-          <a:bodyPr wrap="square">
-            <a:spAutoFit/>
-          </a:bodyPr>
-          <a:lstStyle/>
-          <a:p>
-            <a:r>
-              <a:rPr sz="800">
-                <a:hlinkClick r:id="rId10"/>
-              </a:rPr>
-              <a:t>Lofar 1</a:t>
-            </a:r>
-          </a:p>
-          <a:p>
-            <a:r>
-              <a:rPr sz="800">
-                <a:hlinkClick r:id="rId11"/>
-              </a:rPr>
-              <a:t>Lofar 2</a:t>
-            </a:r>
-          </a:p>
-        </p:txBody>
-      </p:sp>
-      <p:sp>
-        <p:nvSpPr>
-          <p:cNvPr id="11" name="Rounded Rectangle 10">
-            <a:hlinkClick r:id="rId12"/>
-          </p:cNvPr>
-          <p:cNvSpPr/>
-          <p:nvPr/>
-        </p:nvSpPr>
-        <p:spPr>
-          <a:xfrm>
-            <a:off x="9531705" y="731520"/>
-            <a:ext cx="2200046" cy="365760"/>
-          </a:xfrm>
-          <a:prstGeom prst="roundRect">
-            <a:avLst/>
-          </a:prstGeom>
-          <a:solidFill>
-            <a:srgbClr val="E8EEF7"/>
-          </a:solidFill>
-          <a:ln>
-            <a:solidFill>
-              <a:srgbClr val="1F3A5F"/>
-            </a:solidFill>
-          </a:ln>
-        </p:spPr>
-        <p:style>
-          <a:lnRef idx="1">
-            <a:schemeClr val="accent1"/>
-          </a:lnRef>
-          <a:fillRef idx="3">
-            <a:schemeClr val="accent1"/>
-          </a:fillRef>
-          <a:effectRef idx="2">
-            <a:schemeClr val="accent1"/>
-          </a:effectRef>
-          <a:fontRef idx="minor">
-            <a:schemeClr val="lt1"/>
-          </a:fontRef>
-        </p:style>
-        <p:txBody>
-          <a:bodyPr rtlCol="0" anchor="ctr" lIns="45720" rIns="45720"/>
-          <a:lstStyle/>
-          <a:p>
-            <a:pPr algn="ctr"/>
-            <a:r>
-              <a:rPr sz="900">
-                <a:solidFill>
-                  <a:srgbClr val="1F3A5F"/>
-                </a:solidFill>
-              </a:rPr>
-              <a:t>Gram 5: FR Excelsior, Category 2, Risa</a:t>
-            </a:r>
-          </a:p>
-        </p:txBody>
-      </p:sp>
-      <p:sp>
-        <p:nvSpPr>
-          <p:cNvPr id="12" name="TextBox 11"/>
-          <p:cNvSpPr txBox="1"/>
-          <p:nvPr/>
-        </p:nvSpPr>
-        <p:spPr>
-          <a:xfrm>
-            <a:off x="9531705" y="1115568"/>
-            <a:ext cx="2200046" cy="1447800"/>
-          </a:xfrm>
-          <a:prstGeom prst="rect">
-            <a:avLst/>
-          </a:prstGeom>
-          <a:noFill/>
-        </p:spPr>
-        <p:txBody>
-          <a:bodyPr wrap="square">
-            <a:spAutoFit/>
-          </a:bodyPr>
-          <a:lstStyle/>
-          <a:p>
-            <a:r>
-              <a:rPr sz="800">
-                <a:hlinkClick r:id="rId13"/>
-              </a:rPr>
-              <a:t>Lofar 1</a:t>
-            </a:r>
-          </a:p>
-        </p:txBody>
-      </p:sp>
-      <p:sp>
-        <p:nvSpPr>
-          <p:cNvPr id="13" name="Rounded Rectangle 12">
-            <a:hlinkClick r:id="rId14"/>
-          </p:cNvPr>
-          <p:cNvSpPr/>
-          <p:nvPr/>
-        </p:nvSpPr>
-        <p:spPr>
-          <a:xfrm>
-            <a:off x="365760" y="2682240"/>
-            <a:ext cx="2200046" cy="365760"/>
-          </a:xfrm>
-          <a:prstGeom prst="roundRect">
-            <a:avLst/>
-          </a:prstGeom>
-          <a:solidFill>
-            <a:srgbClr val="E8EEF7"/>
-          </a:solidFill>
-          <a:ln>
-            <a:solidFill>
-              <a:srgbClr val="1F3A5F"/>
-            </a:solidFill>
-          </a:ln>
-        </p:spPr>
-        <p:style>
-          <a:lnRef idx="1">
-            <a:schemeClr val="accent1"/>
-          </a:lnRef>
-          <a:fillRef idx="3">
-            <a:schemeClr val="accent1"/>
-          </a:fillRef>
-          <a:effectRef idx="2">
-            <a:schemeClr val="accent1"/>
-          </a:effectRef>
-          <a:fontRef idx="minor">
-            <a:schemeClr val="lt1"/>
-          </a:fontRef>
-        </p:style>
-        <p:txBody>
-          <a:bodyPr rtlCol="0" anchor="ctr" lIns="45720" rIns="45720"/>
-          <a:lstStyle/>
-          <a:p>
-            <a:pPr algn="ctr"/>
-            <a:r>
-              <a:rPr sz="900">
-                <a:solidFill>
-                  <a:srgbClr val="1F3A5F"/>
-                </a:solidFill>
-              </a:rPr>
-              <a:t>Gram 6: FR Venator-class, Category 2, Caprica</a:t>
-            </a:r>
-          </a:p>
-        </p:txBody>
-      </p:sp>
-      <p:sp>
-        <p:nvSpPr>
-          <p:cNvPr id="14" name="TextBox 13"/>
-          <p:cNvSpPr txBox="1"/>
-          <p:nvPr/>
-        </p:nvSpPr>
-        <p:spPr>
-          <a:xfrm>
-            <a:off x="365760" y="3066288"/>
-            <a:ext cx="2200046" cy="1447800"/>
-          </a:xfrm>
-          <a:prstGeom prst="rect">
-            <a:avLst/>
-          </a:prstGeom>
-          <a:noFill/>
-        </p:spPr>
-        <p:txBody>
-          <a:bodyPr wrap="square">
-            <a:spAutoFit/>
-          </a:bodyPr>
-          <a:lstStyle/>
-          <a:p>
-            <a:r>
-              <a:rPr sz="800">
-                <a:hlinkClick r:id="rId15"/>
-              </a:rPr>
-              <a:t>Lofar 1</a:t>
-            </a:r>
-          </a:p>
-        </p:txBody>
-      </p:sp>
-      <p:sp>
-        <p:nvSpPr>
-          <p:cNvPr id="15" name="Rounded Rectangle 14">
-            <a:hlinkClick r:id="rId16"/>
-          </p:cNvPr>
-          <p:cNvSpPr/>
-          <p:nvPr/>
-        </p:nvSpPr>
-        <p:spPr>
-          <a:xfrm>
-            <a:off x="2657246" y="2682240"/>
-            <a:ext cx="2200046" cy="365760"/>
-          </a:xfrm>
-          <a:prstGeom prst="roundRect">
-            <a:avLst/>
-          </a:prstGeom>
-          <a:solidFill>
-            <a:srgbClr val="E8EEF7"/>
-          </a:solidFill>
-          <a:ln>
-            <a:solidFill>
-              <a:srgbClr val="1F3A5F"/>
-            </a:solidFill>
-          </a:ln>
-        </p:spPr>
-        <p:style>
-          <a:lnRef idx="1">
-            <a:schemeClr val="accent1"/>
-          </a:lnRef>
-          <a:fillRef idx="3">
-            <a:schemeClr val="accent1"/>
-          </a:fillRef>
-          <a:effectRef idx="2">
-            <a:schemeClr val="accent1"/>
-          </a:effectRef>
-          <a:fontRef idx="minor">
-            <a:schemeClr val="lt1"/>
-          </a:fontRef>
-        </p:style>
-        <p:txBody>
-          <a:bodyPr rtlCol="0" anchor="ctr" lIns="45720" rIns="45720"/>
-          <a:lstStyle/>
-          <a:p>
-            <a:pPr algn="ctr"/>
-            <a:r>
-              <a:rPr sz="900">
-                <a:solidFill>
-                  <a:srgbClr val="1F3A5F"/>
-                </a:solidFill>
-              </a:rPr>
-              <a:t>Gram 7: FR Galaxy-class, Category 1, Kobol</a:t>
-            </a:r>
-          </a:p>
-        </p:txBody>
-      </p:sp>
-      <p:sp>
-        <p:nvSpPr>
-          <p:cNvPr id="16" name="TextBox 15"/>
-          <p:cNvSpPr txBox="1"/>
-          <p:nvPr/>
-        </p:nvSpPr>
-        <p:spPr>
-          <a:xfrm>
-            <a:off x="2657246" y="3066288"/>
-            <a:ext cx="2200046" cy="1447800"/>
-          </a:xfrm>
-          <a:prstGeom prst="rect">
-            <a:avLst/>
-          </a:prstGeom>
-          <a:noFill/>
-        </p:spPr>
-        <p:txBody>
-          <a:bodyPr wrap="square">
-            <a:spAutoFit/>
-          </a:bodyPr>
-          <a:lstStyle/>
-          <a:p>
-            <a:r>
-              <a:rPr sz="800">
-                <a:hlinkClick r:id="rId17"/>
-              </a:rPr>
-              <a:t>Lofar 1</a:t>
-            </a:r>
-          </a:p>
-        </p:txBody>
-      </p:sp>
-      <p:sp>
-        <p:nvSpPr>
-          <p:cNvPr id="17" name="Rounded Rectangle 16">
-            <a:hlinkClick r:id="rId18"/>
-          </p:cNvPr>
-          <p:cNvSpPr/>
-          <p:nvPr/>
-        </p:nvSpPr>
-        <p:spPr>
-          <a:xfrm>
-            <a:off x="4948732" y="2682240"/>
-            <a:ext cx="2200046" cy="365760"/>
-          </a:xfrm>
-          <a:prstGeom prst="roundRect">
-            <a:avLst/>
-          </a:prstGeom>
-          <a:solidFill>
-            <a:srgbClr val="E8EEF7"/>
-          </a:solidFill>
-          <a:ln>
-            <a:solidFill>
-              <a:srgbClr val="1F3A5F"/>
-            </a:solidFill>
-          </a:ln>
-        </p:spPr>
-        <p:style>
-          <a:lnRef idx="1">
-            <a:schemeClr val="accent1"/>
-          </a:lnRef>
-          <a:fillRef idx="3">
-            <a:schemeClr val="accent1"/>
-          </a:fillRef>
-          <a:effectRef idx="2">
-            <a:schemeClr val="accent1"/>
-          </a:effectRef>
-          <a:fontRef idx="minor">
-            <a:schemeClr val="lt1"/>
-          </a:fontRef>
-        </p:style>
-        <p:txBody>
-          <a:bodyPr rtlCol="0" anchor="ctr" lIns="45720" rIns="45720"/>
-          <a:lstStyle/>
-          <a:p>
-            <a:pPr algn="ctr"/>
-            <a:r>
-              <a:rPr sz="900">
-                <a:solidFill>
-                  <a:srgbClr val="1F3A5F"/>
-                </a:solidFill>
-              </a:rPr>
-              <a:t>Gram 8: FR Tantive IV, Category 2, Romulus</a:t>
-            </a:r>
-          </a:p>
-        </p:txBody>
-      </p:sp>
-      <p:sp>
-        <p:nvSpPr>
-          <p:cNvPr id="18" name="TextBox 17"/>
-          <p:cNvSpPr txBox="1"/>
-          <p:nvPr/>
-        </p:nvSpPr>
-        <p:spPr>
-          <a:xfrm>
-            <a:off x="4948732" y="3066288"/>
-            <a:ext cx="2200046" cy="1447800"/>
-          </a:xfrm>
-          <a:prstGeom prst="rect">
-            <a:avLst/>
-          </a:prstGeom>
-          <a:noFill/>
-        </p:spPr>
-        <p:txBody>
-          <a:bodyPr wrap="square">
-            <a:spAutoFit/>
-          </a:bodyPr>
-          <a:lstStyle/>
-          <a:p>
-            <a:r>
-              <a:rPr sz="800">
-                <a:hlinkClick r:id="rId19"/>
-              </a:rPr>
-              <a:t>Lofar 1</a:t>
-            </a:r>
-          </a:p>
-        </p:txBody>
-      </p:sp>
-      <p:sp>
-        <p:nvSpPr>
-          <p:cNvPr id="19" name="Rounded Rectangle 18">
-            <a:hlinkClick r:id="rId20"/>
-          </p:cNvPr>
-          <p:cNvSpPr/>
-          <p:nvPr/>
-        </p:nvSpPr>
-        <p:spPr>
-          <a:xfrm>
-            <a:off x="7240219" y="2682240"/>
-            <a:ext cx="2200046" cy="365760"/>
-          </a:xfrm>
-          <a:prstGeom prst="roundRect">
-            <a:avLst/>
-          </a:prstGeom>
-          <a:solidFill>
-            <a:srgbClr val="E8EEF7"/>
-          </a:solidFill>
-          <a:ln>
-            <a:solidFill>
-              <a:srgbClr val="1F3A5F"/>
-            </a:solidFill>
-          </a:ln>
-        </p:spPr>
-        <p:style>
-          <a:lnRef idx="1">
-            <a:schemeClr val="accent1"/>
-          </a:lnRef>
-          <a:fillRef idx="3">
-            <a:schemeClr val="accent1"/>
-          </a:fillRef>
-          <a:effectRef idx="2">
-            <a:schemeClr val="accent1"/>
-          </a:effectRef>
-          <a:fontRef idx="minor">
-            <a:schemeClr val="lt1"/>
-          </a:fontRef>
-        </p:style>
-        <p:txBody>
-          <a:bodyPr rtlCol="0" anchor="ctr" lIns="45720" rIns="45720"/>
-          <a:lstStyle/>
-          <a:p>
-            <a:pPr algn="ctr"/>
-            <a:r>
-              <a:rPr sz="900">
-                <a:solidFill>
-                  <a:srgbClr val="1F3A5F"/>
-                </a:solidFill>
-              </a:rPr>
-              <a:t>Gram 10: FR Discovery, Category 3, Naboo</a:t>
-            </a:r>
-          </a:p>
-        </p:txBody>
-      </p:sp>
-      <p:sp>
-        <p:nvSpPr>
-          <p:cNvPr id="20" name="TextBox 19"/>
-          <p:cNvSpPr txBox="1"/>
-          <p:nvPr/>
-        </p:nvSpPr>
-        <p:spPr>
-          <a:xfrm>
-            <a:off x="7240219" y="3066288"/>
-            <a:ext cx="2200046" cy="1447800"/>
-          </a:xfrm>
-          <a:prstGeom prst="rect">
-            <a:avLst/>
-          </a:prstGeom>
-          <a:noFill/>
-        </p:spPr>
-        <p:txBody>
-          <a:bodyPr wrap="square">
-            <a:spAutoFit/>
-          </a:bodyPr>
-          <a:lstStyle/>
-          <a:p>
-            <a:r>
-              <a:rPr sz="800">
-                <a:hlinkClick r:id="rId21"/>
-              </a:rPr>
-              <a:t>Lofar 1</a:t>
-            </a:r>
-          </a:p>
-          <a:p>
-            <a:r>
-              <a:rPr sz="800">
-                <a:hlinkClick r:id="rId22"/>
-              </a:rPr>
-              <a:t>Lofar 2</a:t>
-            </a:r>
-          </a:p>
-        </p:txBody>
-      </p:sp>
-      <p:sp>
-        <p:nvSpPr>
-          <p:cNvPr id="21" name="Rounded Rectangle 20">
-            <a:hlinkClick r:id="rId23"/>
-          </p:cNvPr>
-          <p:cNvSpPr/>
-          <p:nvPr/>
-        </p:nvSpPr>
-        <p:spPr>
-          <a:xfrm>
-            <a:off x="9531705" y="2682240"/>
-            <a:ext cx="2200046" cy="365760"/>
-          </a:xfrm>
-          <a:prstGeom prst="roundRect">
-            <a:avLst/>
-          </a:prstGeom>
-          <a:solidFill>
-            <a:srgbClr val="E8EEF7"/>
-          </a:solidFill>
-          <a:ln>
-            <a:solidFill>
-              <a:srgbClr val="1F3A5F"/>
-            </a:solidFill>
-          </a:ln>
-        </p:spPr>
-        <p:style>
-          <a:lnRef idx="1">
-            <a:schemeClr val="accent1"/>
-          </a:lnRef>
-          <a:fillRef idx="3">
-            <a:schemeClr val="accent1"/>
-          </a:fillRef>
-          <a:effectRef idx="2">
-            <a:schemeClr val="accent1"/>
-          </a:effectRef>
-          <a:fontRef idx="minor">
-            <a:schemeClr val="lt1"/>
-          </a:fontRef>
-        </p:style>
-        <p:txBody>
-          <a:bodyPr rtlCol="0" anchor="ctr" lIns="45720" rIns="45720"/>
-          <a:lstStyle/>
-          <a:p>
-            <a:pPr algn="ctr"/>
-            <a:r>
-              <a:rPr sz="900">
-                <a:solidFill>
-                  <a:srgbClr val="1F3A5F"/>
-                </a:solidFill>
-              </a:rPr>
-              <a:t>Gram 11: FR Constitution-class, Category 2, Dank</a:t>
-            </a:r>
-          </a:p>
-        </p:txBody>
-      </p:sp>
-      <p:sp>
-        <p:nvSpPr>
-          <p:cNvPr id="22" name="TextBox 21"/>
-          <p:cNvSpPr txBox="1"/>
-          <p:nvPr/>
-        </p:nvSpPr>
-        <p:spPr>
-          <a:xfrm>
-            <a:off x="9531705" y="3066288"/>
-            <a:ext cx="2200046" cy="1447800"/>
-          </a:xfrm>
-          <a:prstGeom prst="rect">
-            <a:avLst/>
-          </a:prstGeom>
-          <a:noFill/>
-        </p:spPr>
-        <p:txBody>
-          <a:bodyPr wrap="square">
-            <a:spAutoFit/>
-          </a:bodyPr>
-          <a:lstStyle/>
-          <a:p>
-            <a:r>
-              <a:rPr sz="800">
-                <a:hlinkClick r:id="rId24"/>
-              </a:rPr>
-              <a:t>Lofar 1</a:t>
-            </a:r>
-          </a:p>
-          <a:p>
-            <a:r>
-              <a:rPr sz="800">
-                <a:hlinkClick r:id="rId25"/>
-              </a:rPr>
-              <a:t>Lofar 2</a:t>
-            </a:r>
-          </a:p>
-          <a:p>
-            <a:r>
-              <a:rPr sz="800">
-                <a:hlinkClick r:id="rId26"/>
-              </a:rPr>
-              <a:t>Lofar 3</a:t>
-            </a:r>
-          </a:p>
-          <a:p>
-            <a:r>
-              <a:rPr sz="800">
-                <a:hlinkClick r:id="rId27"/>
-              </a:rPr>
-              <a:t>Lofar 4</a:t>
-            </a:r>
-          </a:p>
-        </p:txBody>
-      </p:sp>
-      <p:sp>
-        <p:nvSpPr>
-          <p:cNvPr id="23" name="Rounded Rectangle 22">
-            <a:hlinkClick r:id="rId28"/>
-          </p:cNvPr>
-          <p:cNvSpPr/>
-          <p:nvPr/>
-        </p:nvSpPr>
-        <p:spPr>
-          <a:xfrm>
-            <a:off x="365760" y="4632960"/>
-            <a:ext cx="2200046" cy="365760"/>
-          </a:xfrm>
-          <a:prstGeom prst="roundRect">
-            <a:avLst/>
-          </a:prstGeom>
-          <a:solidFill>
-            <a:srgbClr val="E8EEF7"/>
-          </a:solidFill>
-          <a:ln>
-            <a:solidFill>
-              <a:srgbClr val="1F3A5F"/>
-            </a:solidFill>
-          </a:ln>
-        </p:spPr>
-        <p:style>
-          <a:lnRef idx="1">
-            <a:schemeClr val="accent1"/>
-          </a:lnRef>
-          <a:fillRef idx="3">
-            <a:schemeClr val="accent1"/>
-          </a:fillRef>
-          <a:effectRef idx="2">
-            <a:schemeClr val="accent1"/>
-          </a:effectRef>
-          <a:fontRef idx="minor">
-            <a:schemeClr val="lt1"/>
-          </a:fontRef>
-        </p:style>
-        <p:txBody>
-          <a:bodyPr rtlCol="0" anchor="ctr" lIns="45720" rIns="45720"/>
-          <a:lstStyle/>
-          <a:p>
-            <a:pPr algn="ctr"/>
-            <a:r>
-              <a:rPr sz="900">
-                <a:solidFill>
-                  <a:srgbClr val="1F3A5F"/>
-                </a:solidFill>
-              </a:rPr>
-              <a:t>Gram 12: FR TIE Bomber, Category 3, Vulcan</a:t>
-            </a:r>
-          </a:p>
-        </p:txBody>
-      </p:sp>
-      <p:sp>
-        <p:nvSpPr>
-          <p:cNvPr id="24" name="TextBox 23"/>
-          <p:cNvSpPr txBox="1"/>
-          <p:nvPr/>
-        </p:nvSpPr>
-        <p:spPr>
-          <a:xfrm>
-            <a:off x="365760" y="5017008"/>
-            <a:ext cx="2200046" cy="1447800"/>
-          </a:xfrm>
-          <a:prstGeom prst="rect">
-            <a:avLst/>
-          </a:prstGeom>
-          <a:noFill/>
-        </p:spPr>
-        <p:txBody>
-          <a:bodyPr wrap="square">
-            <a:spAutoFit/>
-          </a:bodyPr>
-          <a:lstStyle/>
-          <a:p>
-            <a:r>
-              <a:rPr sz="800">
-                <a:hlinkClick r:id="rId29"/>
-              </a:rPr>
-              <a:t>Lofar 1</a:t>
-            </a:r>
-          </a:p>
-          <a:p>
-            <a:r>
-              <a:rPr sz="800">
-                <a:hlinkClick r:id="rId30"/>
-              </a:rPr>
-              <a:t>Lofar 2</a:t>
-            </a:r>
-          </a:p>
-        </p:txBody>
-      </p:sp>
-      <p:sp>
-        <p:nvSpPr>
-          <p:cNvPr id="25" name="Rounded Rectangle 24">
-            <a:hlinkClick r:id="rId31"/>
-          </p:cNvPr>
-          <p:cNvSpPr/>
-          <p:nvPr/>
-        </p:nvSpPr>
-        <p:spPr>
-          <a:xfrm>
-            <a:off x="2657246" y="4632960"/>
-            <a:ext cx="2200046" cy="365760"/>
-          </a:xfrm>
-          <a:prstGeom prst="roundRect">
-            <a:avLst/>
-          </a:prstGeom>
-          <a:solidFill>
-            <a:srgbClr val="E8EEF7"/>
-          </a:solidFill>
-          <a:ln>
-            <a:solidFill>
-              <a:srgbClr val="1F3A5F"/>
-            </a:solidFill>
-          </a:ln>
-        </p:spPr>
-        <p:style>
-          <a:lnRef idx="1">
-            <a:schemeClr val="accent1"/>
-          </a:lnRef>
-          <a:fillRef idx="3">
-            <a:schemeClr val="accent1"/>
-          </a:fillRef>
-          <a:effectRef idx="2">
-            <a:schemeClr val="accent1"/>
-          </a:effectRef>
-          <a:fontRef idx="minor">
-            <a:schemeClr val="lt1"/>
-          </a:fontRef>
-        </p:style>
-        <p:txBody>
-          <a:bodyPr rtlCol="0" anchor="ctr" lIns="45720" rIns="45720"/>
-          <a:lstStyle/>
-          <a:p>
-            <a:pPr algn="ctr"/>
-            <a:r>
-              <a:rPr sz="900">
-                <a:solidFill>
-                  <a:srgbClr val="1F3A5F"/>
-                </a:solidFill>
-              </a:rPr>
-              <a:t>Gram 13: FR B-wing, Category 4, Coruscant</a:t>
-            </a:r>
-          </a:p>
-        </p:txBody>
-      </p:sp>
-      <p:sp>
-        <p:nvSpPr>
-          <p:cNvPr id="26" name="TextBox 25"/>
-          <p:cNvSpPr txBox="1"/>
-          <p:nvPr/>
-        </p:nvSpPr>
-        <p:spPr>
-          <a:xfrm>
-            <a:off x="2657246" y="5017008"/>
-            <a:ext cx="2200046" cy="1447800"/>
-          </a:xfrm>
-          <a:prstGeom prst="rect">
-            <a:avLst/>
-          </a:prstGeom>
-          <a:noFill/>
-        </p:spPr>
-        <p:txBody>
-          <a:bodyPr wrap="square">
-            <a:spAutoFit/>
-          </a:bodyPr>
-          <a:lstStyle/>
-          <a:p>
-            <a:r>
-              <a:rPr sz="800">
-                <a:hlinkClick r:id="rId32"/>
-              </a:rPr>
-              <a:t>Lofar 1</a:t>
-            </a:r>
-          </a:p>
-          <a:p>
-            <a:r>
-              <a:rPr sz="800">
-                <a:hlinkClick r:id="rId33"/>
-              </a:rPr>
-              <a:t>Lofar 2</a:t>
-            </a:r>
-          </a:p>
-        </p:txBody>
-      </p:sp>
-      <p:sp>
-        <p:nvSpPr>
-          <p:cNvPr id="27" name="Rounded Rectangle 26">
-            <a:hlinkClick r:id="rId34"/>
-          </p:cNvPr>
-          <p:cNvSpPr/>
-          <p:nvPr/>
-        </p:nvSpPr>
-        <p:spPr>
-          <a:xfrm>
-            <a:off x="4948732" y="4632960"/>
-            <a:ext cx="2200046" cy="365760"/>
-          </a:xfrm>
-          <a:prstGeom prst="roundRect">
-            <a:avLst/>
-          </a:prstGeom>
-          <a:solidFill>
-            <a:srgbClr val="E8EEF7"/>
-          </a:solidFill>
-          <a:ln>
-            <a:solidFill>
-              <a:srgbClr val="1F3A5F"/>
-            </a:solidFill>
-          </a:ln>
-        </p:spPr>
-        <p:style>
-          <a:lnRef idx="1">
-            <a:schemeClr val="accent1"/>
-          </a:lnRef>
-          <a:fillRef idx="3">
-            <a:schemeClr val="accent1"/>
-          </a:fillRef>
-          <a:effectRef idx="2">
-            <a:schemeClr val="accent1"/>
-          </a:effectRef>
-          <a:fontRef idx="minor">
-            <a:schemeClr val="lt1"/>
-          </a:fontRef>
-        </p:style>
-        <p:txBody>
-          <a:bodyPr rtlCol="0" anchor="ctr" lIns="45720" rIns="45720"/>
-          <a:lstStyle/>
-          <a:p>
-            <a:pPr algn="ctr"/>
-            <a:r>
-              <a:rPr sz="900">
-                <a:solidFill>
-                  <a:srgbClr val="1F3A5F"/>
-                </a:solidFill>
-              </a:rPr>
-              <a:t>Gram 14: FR Tantive IV, Category 4, Kronos</a:t>
-            </a:r>
-          </a:p>
-        </p:txBody>
-      </p:sp>
-      <p:sp>
-        <p:nvSpPr>
-          <p:cNvPr id="28" name="TextBox 27"/>
-          <p:cNvSpPr txBox="1"/>
-          <p:nvPr/>
-        </p:nvSpPr>
-        <p:spPr>
-          <a:xfrm>
-            <a:off x="4948732" y="5017008"/>
-            <a:ext cx="2200046" cy="1447800"/>
-          </a:xfrm>
-          <a:prstGeom prst="rect">
-            <a:avLst/>
-          </a:prstGeom>
-          <a:noFill/>
-        </p:spPr>
-        <p:txBody>
-          <a:bodyPr wrap="square">
-            <a:spAutoFit/>
-          </a:bodyPr>
-          <a:lstStyle/>
-          <a:p>
-            <a:r>
-              <a:rPr sz="800">
-                <a:hlinkClick r:id="rId35"/>
-              </a:rPr>
-              <a:t>Lofar 1</a:t>
-            </a:r>
-          </a:p>
-          <a:p>
-            <a:r>
-              <a:rPr sz="800">
-                <a:hlinkClick r:id="rId36"/>
-              </a:rPr>
-              <a:t>Lofar 2</a:t>
-            </a:r>
-          </a:p>
-        </p:txBody>
-      </p:sp>
-      <p:sp>
-        <p:nvSpPr>
-          <p:cNvPr id="29" name="Rounded Rectangle 28">
-            <a:hlinkClick r:id="rId37"/>
-          </p:cNvPr>
-          <p:cNvSpPr/>
-          <p:nvPr/>
-        </p:nvSpPr>
-        <p:spPr>
-          <a:xfrm>
-            <a:off x="7240219" y="4632960"/>
-            <a:ext cx="2200046" cy="365760"/>
-          </a:xfrm>
-          <a:prstGeom prst="roundRect">
-            <a:avLst/>
-          </a:prstGeom>
-          <a:solidFill>
-            <a:srgbClr val="E8EEF7"/>
-          </a:solidFill>
-          <a:ln>
-            <a:solidFill>
-              <a:srgbClr val="1F3A5F"/>
-            </a:solidFill>
-          </a:ln>
-        </p:spPr>
-        <p:style>
-          <a:lnRef idx="1">
-            <a:schemeClr val="accent1"/>
-          </a:lnRef>
-          <a:fillRef idx="3">
-            <a:schemeClr val="accent1"/>
-          </a:fillRef>
-          <a:effectRef idx="2">
-            <a:schemeClr val="accent1"/>
-          </a:effectRef>
-          <a:fontRef idx="minor">
-            <a:schemeClr val="lt1"/>
-          </a:fontRef>
-        </p:style>
-        <p:txBody>
-          <a:bodyPr rtlCol="0" anchor="ctr" lIns="45720" rIns="45720"/>
-          <a:lstStyle/>
-          <a:p>
-            <a:pPr algn="ctr"/>
-            <a:r>
-              <a:rPr sz="900">
-                <a:solidFill>
-                  <a:srgbClr val="1F3A5F"/>
-                </a:solidFill>
-              </a:rPr>
-              <a:t>Gram 15: Acclamator-class contact bearing 308, codename Kronos</a:t>
-            </a:r>
-          </a:p>
-        </p:txBody>
-      </p:sp>
-      <p:sp>
-        <p:nvSpPr>
-          <p:cNvPr id="30" name="TextBox 29"/>
-          <p:cNvSpPr txBox="1"/>
-          <p:nvPr/>
-        </p:nvSpPr>
-        <p:spPr>
-          <a:xfrm>
-            <a:off x="7240219" y="5017008"/>
-            <a:ext cx="2200046" cy="1447800"/>
-          </a:xfrm>
-          <a:prstGeom prst="rect">
-            <a:avLst/>
-          </a:prstGeom>
-          <a:noFill/>
-        </p:spPr>
-        <p:txBody>
-          <a:bodyPr wrap="square">
-            <a:spAutoFit/>
-          </a:bodyPr>
-          <a:lstStyle/>
-          <a:p>
-            <a:r>
-              <a:rPr sz="800">
-                <a:hlinkClick r:id="rId38"/>
-              </a:rPr>
-              <a:t>Lofar 1</a:t>
-            </a:r>
-          </a:p>
-          <a:p>
-            <a:r>
-              <a:rPr sz="800">
-                <a:hlinkClick r:id="rId39"/>
-              </a:rPr>
-              <a:t>Lofar 2</a:t>
-            </a:r>
-          </a:p>
-        </p:txBody>
-      </p:sp>
-      <p:sp>
-        <p:nvSpPr>
-          <p:cNvPr id="31" name="Rounded Rectangle 30">
-            <a:hlinkClick r:id="rId40"/>
-          </p:cNvPr>
-          <p:cNvSpPr/>
-          <p:nvPr/>
-        </p:nvSpPr>
-        <p:spPr>
-          <a:xfrm>
-            <a:off x="9531705" y="4632960"/>
-            <a:ext cx="2200046" cy="365760"/>
-          </a:xfrm>
-          <a:prstGeom prst="roundRect">
-            <a:avLst/>
-          </a:prstGeom>
-          <a:solidFill>
-            <a:srgbClr val="E8EEF7"/>
-          </a:solidFill>
-          <a:ln>
-            <a:solidFill>
-              <a:srgbClr val="1F3A5F"/>
-            </a:solidFill>
-          </a:ln>
-        </p:spPr>
-        <p:style>
-          <a:lnRef idx="1">
-            <a:schemeClr val="accent1"/>
-          </a:lnRef>
-          <a:fillRef idx="3">
-            <a:schemeClr val="accent1"/>
-          </a:fillRef>
-          <a:effectRef idx="2">
-            <a:schemeClr val="accent1"/>
-          </a:effectRef>
-          <a:fontRef idx="minor">
-            <a:schemeClr val="lt1"/>
-          </a:fontRef>
-        </p:style>
-        <p:txBody>
-          <a:bodyPr rtlCol="0" anchor="ctr" lIns="45720" rIns="45720"/>
-          <a:lstStyle/>
-          <a:p>
-            <a:pPr algn="ctr"/>
-            <a:r>
-              <a:rPr sz="900">
-                <a:solidFill>
-                  <a:srgbClr val="1F3A5F"/>
-                </a:solidFill>
-              </a:rPr>
-              <a:t>Gram 17: FR Imperial-class, Category 3, Hoth</a:t>
-            </a:r>
-          </a:p>
-        </p:txBody>
-      </p:sp>
-      <p:sp>
-        <p:nvSpPr>
-          <p:cNvPr id="32" name="TextBox 31"/>
-          <p:cNvSpPr txBox="1"/>
-          <p:nvPr/>
-        </p:nvSpPr>
-        <p:spPr>
-          <a:xfrm>
-            <a:off x="9531705" y="5017008"/>
-            <a:ext cx="2200046" cy="1447800"/>
-          </a:xfrm>
-          <a:prstGeom prst="rect">
-            <a:avLst/>
-          </a:prstGeom>
-          <a:noFill/>
-        </p:spPr>
-        <p:txBody>
-          <a:bodyPr wrap="square">
-            <a:spAutoFit/>
-          </a:bodyPr>
-          <a:lstStyle/>
-          <a:p>
-            <a:r>
-              <a:rPr sz="800">
-                <a:hlinkClick r:id="rId41"/>
-              </a:rPr>
-              <a:t>Lofar 1</a:t>
-            </a:r>
-          </a:p>
-          <a:p>
-            <a:r>
-              <a:rPr sz="800">
-                <a:hlinkClick r:id="rId42"/>
-              </a:rPr>
-              <a:t>Lofar 2</a:t>
+              <a:t>Instructor Version</a:t>
             </a:r>
           </a:p>
         </p:txBody>
@@ -4583,7 +3224,7 @@
                   <a:srgbClr val="FFFFFF"/>
                 </a:solidFill>
               </a:rPr>
-              <a:t>Instructor Week 4 Grams_Updated — Page 2 of 3</a:t>
+              <a:t>Instructor Week 4 Grams_Updated — Page 1 of 3</a:t>
             </a:r>
           </a:p>
         </p:txBody>
@@ -4638,7 +3279,7 @@
                   <a:srgbClr val="1F3A5F"/>
                 </a:solidFill>
               </a:rPr>
-              <a:t>Gram 18: FR Venator-class, Category 3, Tantive</a:t>
+              <a:t>Gram 1: FR A-wing, Category 3, Hoth</a:t>
             </a:r>
           </a:p>
         </p:txBody>
@@ -4672,36 +3313,12 @@
               <a:t>Lofar 1</a:t>
             </a:r>
           </a:p>
-          <a:p>
-            <a:r>
-              <a:rPr sz="800">
-                <a:hlinkClick r:id="rId4"/>
-              </a:rPr>
-              <a:t>Lofar 2</a:t>
-            </a:r>
-          </a:p>
-          <a:p>
-            <a:r>
-              <a:rPr sz="800">
-                <a:hlinkClick r:id="rId5"/>
-              </a:rPr>
-              <a:t>Lofar 3</a:t>
-            </a:r>
-          </a:p>
-          <a:p>
-            <a:r>
-              <a:rPr sz="800">
-                <a:hlinkClick r:id="rId6"/>
-              </a:rPr>
-              <a:t>Lofar 4</a:t>
-            </a:r>
-          </a:p>
         </p:txBody>
       </p:sp>
       <p:sp>
         <p:nvSpPr>
           <p:cNvPr id="5" name="Rounded Rectangle 4">
-            <a:hlinkClick r:id="rId7"/>
+            <a:hlinkClick r:id="rId4"/>
           </p:cNvPr>
           <p:cNvSpPr/>
           <p:nvPr/>
@@ -4748,7 +3365,7 @@
                   <a:srgbClr val="1F3A5F"/>
                 </a:solidFill>
               </a:rPr>
-              <a:t>Gram 20: FR Discovery, Category 3, Naboo</a:t>
+              <a:t>Gram 2: FR Imperial-class, Category 3, Romulus</a:t>
             </a:r>
           </a:p>
         </p:txBody>
@@ -4777,7 +3394,7 @@
           <a:p>
             <a:r>
               <a:rPr sz="800">
-                <a:hlinkClick r:id="rId8"/>
+                <a:hlinkClick r:id="rId5"/>
               </a:rPr>
               <a:t>Lofar 1</a:t>
             </a:r>
@@ -4785,33 +3402,17 @@
           <a:p>
             <a:r>
               <a:rPr sz="800">
-                <a:hlinkClick r:id="rId9"/>
+                <a:hlinkClick r:id="rId6"/>
               </a:rPr>
               <a:t>Lofar 2</a:t>
             </a:r>
           </a:p>
-          <a:p>
-            <a:r>
-              <a:rPr sz="800">
-                <a:hlinkClick r:id="rId10"/>
-              </a:rPr>
-              <a:t>Lofar 3</a:t>
-            </a:r>
-          </a:p>
-          <a:p>
-            <a:r>
-              <a:rPr sz="800">
-                <a:hlinkClick r:id="rId11"/>
-              </a:rPr>
-              <a:t>Lofar 4</a:t>
-            </a:r>
-          </a:p>
         </p:txBody>
       </p:sp>
       <p:sp>
         <p:nvSpPr>
           <p:cNvPr id="7" name="Rounded Rectangle 6">
-            <a:hlinkClick r:id="rId12"/>
+            <a:hlinkClick r:id="rId7"/>
           </p:cNvPr>
           <p:cNvSpPr/>
           <p:nvPr/>
@@ -4858,7 +3459,7 @@
                   <a:srgbClr val="1F3A5F"/>
                 </a:solidFill>
               </a:rPr>
-              <a:t>Gram 21: FR A-wing, Category 3, Betazed</a:t>
+              <a:t>Gram 3: FR Reliant, Category 1, Coruscant</a:t>
             </a:r>
           </a:p>
         </p:txBody>
@@ -4887,41 +3488,17 @@
           <a:p>
             <a:r>
               <a:rPr sz="800">
-                <a:hlinkClick r:id="rId13"/>
+                <a:hlinkClick r:id="rId8"/>
               </a:rPr>
               <a:t>Lofar 1</a:t>
             </a:r>
           </a:p>
-          <a:p>
-            <a:r>
-              <a:rPr sz="800">
-                <a:hlinkClick r:id="rId14"/>
-              </a:rPr>
-              <a:t>Lofar 2</a:t>
-            </a:r>
-          </a:p>
-          <a:p>
-            <a:r>
-              <a:rPr sz="800">
-                <a:hlinkClick r:id="rId15"/>
-              </a:rPr>
-              <a:t>Lofar 3</a:t>
-            </a:r>
-          </a:p>
-          <a:p>
-            <a:r>
-              <a:rPr sz="800">
-                <a:hlinkClick r:id="rId16"/>
-              </a:rPr>
-              <a:t>Lofar 4</a:t>
-            </a:r>
-          </a:p>
         </p:txBody>
       </p:sp>
       <p:sp>
         <p:nvSpPr>
           <p:cNvPr id="9" name="Rounded Rectangle 8">
-            <a:hlinkClick r:id="rId17"/>
+            <a:hlinkClick r:id="rId9"/>
           </p:cNvPr>
           <p:cNvSpPr/>
           <p:nvPr/>
@@ -4968,7 +3545,7 @@
                   <a:srgbClr val="1F3A5F"/>
                 </a:solidFill>
               </a:rPr>
-              <a:t>Gram 22: FR Prometheus, Category 3, Risa</a:t>
+              <a:t>Gram 4: FR Y-wing, Category 4, Caprica</a:t>
             </a:r>
           </a:p>
         </p:txBody>
@@ -4997,7 +3574,7 @@
           <a:p>
             <a:r>
               <a:rPr sz="800">
-                <a:hlinkClick r:id="rId18"/>
+                <a:hlinkClick r:id="rId10"/>
               </a:rPr>
               <a:t>Lofar 1</a:t>
             </a:r>
@@ -5005,33 +3582,17 @@
           <a:p>
             <a:r>
               <a:rPr sz="800">
-                <a:hlinkClick r:id="rId19"/>
+                <a:hlinkClick r:id="rId11"/>
               </a:rPr>
               <a:t>Lofar 2</a:t>
             </a:r>
           </a:p>
-          <a:p>
-            <a:r>
-              <a:rPr sz="800">
-                <a:hlinkClick r:id="rId20"/>
-              </a:rPr>
-              <a:t>Lofar 3</a:t>
-            </a:r>
-          </a:p>
-          <a:p>
-            <a:r>
-              <a:rPr sz="800">
-                <a:hlinkClick r:id="rId21"/>
-              </a:rPr>
-              <a:t>Lofar 4</a:t>
-            </a:r>
-          </a:p>
         </p:txBody>
       </p:sp>
       <p:sp>
         <p:nvSpPr>
           <p:cNvPr id="11" name="Rounded Rectangle 10">
-            <a:hlinkClick r:id="rId22"/>
+            <a:hlinkClick r:id="rId12"/>
           </p:cNvPr>
           <p:cNvSpPr/>
           <p:nvPr/>
@@ -5078,7 +3639,7 @@
                   <a:srgbClr val="1F3A5F"/>
                 </a:solidFill>
               </a:rPr>
-              <a:t>Gram 23: FR Mon Calamari Cruiser, Category 4, Gandalf</a:t>
+              <a:t>Gram 5: FR Excelsior, Category 2, Risa</a:t>
             </a:r>
           </a:p>
         </p:txBody>
@@ -5107,33 +3668,17 @@
           <a:p>
             <a:r>
               <a:rPr sz="800">
-                <a:hlinkClick r:id="rId23"/>
+                <a:hlinkClick r:id="rId13"/>
               </a:rPr>
               <a:t>Lofar 1</a:t>
             </a:r>
           </a:p>
-          <a:p>
-            <a:r>
-              <a:rPr sz="800">
-                <a:hlinkClick r:id="rId24"/>
-              </a:rPr>
-              <a:t>Lofar 2</a:t>
-            </a:r>
-          </a:p>
-          <a:p>
-            <a:r>
-              <a:rPr sz="800">
-                <a:hlinkClick r:id="rId25"/>
-              </a:rPr>
-              <a:t>Lofar 3</a:t>
-            </a:r>
-          </a:p>
         </p:txBody>
       </p:sp>
       <p:sp>
         <p:nvSpPr>
           <p:cNvPr id="13" name="Rounded Rectangle 12">
-            <a:hlinkClick r:id="rId26"/>
+            <a:hlinkClick r:id="rId14"/>
           </p:cNvPr>
           <p:cNvSpPr/>
           <p:nvPr/>
@@ -5180,7 +3725,7 @@
                   <a:srgbClr val="1F3A5F"/>
                 </a:solidFill>
               </a:rPr>
-              <a:t>Gram 25: Mon Calamari Cruiser contact bearing 109, codename Kronos</a:t>
+              <a:t>Gram 6: FR Venator-class, Category 2, Caprica</a:t>
             </a:r>
           </a:p>
         </p:txBody>
@@ -5209,33 +3754,17 @@
           <a:p>
             <a:r>
               <a:rPr sz="800">
-                <a:hlinkClick r:id="rId27"/>
+                <a:hlinkClick r:id="rId15"/>
               </a:rPr>
               <a:t>Lofar 1</a:t>
             </a:r>
           </a:p>
-          <a:p>
-            <a:r>
-              <a:rPr sz="800">
-                <a:hlinkClick r:id="rId28"/>
-              </a:rPr>
-              <a:t>Lofar 2</a:t>
-            </a:r>
-          </a:p>
-          <a:p>
-            <a:r>
-              <a:rPr sz="800">
-                <a:hlinkClick r:id="rId29"/>
-              </a:rPr>
-              <a:t>Lofar 3</a:t>
-            </a:r>
-          </a:p>
         </p:txBody>
       </p:sp>
       <p:sp>
         <p:nvSpPr>
           <p:cNvPr id="15" name="Rounded Rectangle 14">
-            <a:hlinkClick r:id="rId30"/>
+            <a:hlinkClick r:id="rId16"/>
           </p:cNvPr>
           <p:cNvSpPr/>
           <p:nvPr/>
@@ -5282,7 +3811,7 @@
                   <a:srgbClr val="1F3A5F"/>
                 </a:solidFill>
               </a:rPr>
-              <a:t>Gram 26: TIE Fighter contact bearing 031, codename Risa</a:t>
+              <a:t>Gram 7: FR Galaxy-class, Category 1, Kobol</a:t>
             </a:r>
           </a:p>
         </p:txBody>
@@ -5311,41 +3840,17 @@
           <a:p>
             <a:r>
               <a:rPr sz="800">
-                <a:hlinkClick r:id="rId31"/>
+                <a:hlinkClick r:id="rId17"/>
               </a:rPr>
               <a:t>Lofar 1</a:t>
             </a:r>
           </a:p>
-          <a:p>
-            <a:r>
-              <a:rPr sz="800">
-                <a:hlinkClick r:id="rId32"/>
-              </a:rPr>
-              <a:t>Lofar 2</a:t>
-            </a:r>
-          </a:p>
-          <a:p>
-            <a:r>
-              <a:rPr sz="800">
-                <a:hlinkClick r:id="rId33"/>
-              </a:rPr>
-              <a:t>Lofar 3</a:t>
-            </a:r>
-          </a:p>
-          <a:p>
-            <a:r>
-              <a:rPr sz="800">
-                <a:hlinkClick r:id="rId34"/>
-              </a:rPr>
-              <a:t>Lofar 4</a:t>
-            </a:r>
-          </a:p>
         </p:txBody>
       </p:sp>
       <p:sp>
         <p:nvSpPr>
           <p:cNvPr id="17" name="Rounded Rectangle 16">
-            <a:hlinkClick r:id="rId35"/>
+            <a:hlinkClick r:id="rId18"/>
           </p:cNvPr>
           <p:cNvSpPr/>
           <p:nvPr/>
@@ -5392,7 +3897,7 @@
                   <a:srgbClr val="1F3A5F"/>
                 </a:solidFill>
               </a:rPr>
-              <a:t>Gram 27: FR A-wing, Category 1, Coruscant</a:t>
+              <a:t>Gram 8: FR Tantive IV, Category 2, Romulus</a:t>
             </a:r>
           </a:p>
         </p:txBody>
@@ -5421,33 +3926,17 @@
           <a:p>
             <a:r>
               <a:rPr sz="800">
-                <a:hlinkClick r:id="rId36"/>
+                <a:hlinkClick r:id="rId19"/>
               </a:rPr>
               <a:t>Lofar 1</a:t>
             </a:r>
           </a:p>
-          <a:p>
-            <a:r>
-              <a:rPr sz="800">
-                <a:hlinkClick r:id="rId37"/>
-              </a:rPr>
-              <a:t>Lofar 2</a:t>
-            </a:r>
-          </a:p>
-          <a:p>
-            <a:r>
-              <a:rPr sz="800">
-                <a:hlinkClick r:id="rId38"/>
-              </a:rPr>
-              <a:t>Lofar 3</a:t>
-            </a:r>
-          </a:p>
         </p:txBody>
       </p:sp>
       <p:sp>
         <p:nvSpPr>
           <p:cNvPr id="19" name="Rounded Rectangle 18">
-            <a:hlinkClick r:id="rId39"/>
+            <a:hlinkClick r:id="rId20"/>
           </p:cNvPr>
           <p:cNvSpPr/>
           <p:nvPr/>
@@ -5494,7 +3983,7 @@
                   <a:srgbClr val="1F3A5F"/>
                 </a:solidFill>
               </a:rPr>
-              <a:t>Gram 28: FR Constitution-class, Category 1, Kobol</a:t>
+              <a:t>Gram 10: FR Discovery, Category 3, Naboo</a:t>
             </a:r>
           </a:p>
         </p:txBody>
@@ -5523,7 +4012,7 @@
           <a:p>
             <a:r>
               <a:rPr sz="800">
-                <a:hlinkClick r:id="rId40"/>
+                <a:hlinkClick r:id="rId21"/>
               </a:rPr>
               <a:t>Lofar 1</a:t>
             </a:r>
@@ -5531,33 +4020,17 @@
           <a:p>
             <a:r>
               <a:rPr sz="800">
-                <a:hlinkClick r:id="rId41"/>
+                <a:hlinkClick r:id="rId22"/>
               </a:rPr>
               <a:t>Lofar 2</a:t>
             </a:r>
           </a:p>
-          <a:p>
-            <a:r>
-              <a:rPr sz="800">
-                <a:hlinkClick r:id="rId42"/>
-              </a:rPr>
-              <a:t>Lofar 3</a:t>
-            </a:r>
-          </a:p>
-          <a:p>
-            <a:r>
-              <a:rPr sz="800">
-                <a:hlinkClick r:id="rId43"/>
-              </a:rPr>
-              <a:t>Lofar 4</a:t>
-            </a:r>
-          </a:p>
         </p:txBody>
       </p:sp>
       <p:sp>
         <p:nvSpPr>
           <p:cNvPr id="21" name="Rounded Rectangle 20">
-            <a:hlinkClick r:id="rId44"/>
+            <a:hlinkClick r:id="rId23"/>
           </p:cNvPr>
           <p:cNvSpPr/>
           <p:nvPr/>
@@ -5604,7 +4077,7 @@
                   <a:srgbClr val="1F3A5F"/>
                 </a:solidFill>
               </a:rPr>
-              <a:t>Gram 29: FR Ghost, Category 4, Coruscant</a:t>
+              <a:t>Gram 11: FR Constitution-class, Category 2, Dank</a:t>
             </a:r>
           </a:p>
         </p:txBody>
@@ -5633,7 +4106,7 @@
           <a:p>
             <a:r>
               <a:rPr sz="800">
-                <a:hlinkClick r:id="rId45"/>
+                <a:hlinkClick r:id="rId24"/>
               </a:rPr>
               <a:t>Lofar 1</a:t>
             </a:r>
@@ -5641,7 +4114,7 @@
           <a:p>
             <a:r>
               <a:rPr sz="800">
-                <a:hlinkClick r:id="rId46"/>
+                <a:hlinkClick r:id="rId25"/>
               </a:rPr>
               <a:t>Lofar 2</a:t>
             </a:r>
@@ -5649,7 +4122,7 @@
           <a:p>
             <a:r>
               <a:rPr sz="800">
-                <a:hlinkClick r:id="rId47"/>
+                <a:hlinkClick r:id="rId26"/>
               </a:rPr>
               <a:t>Lofar 3</a:t>
             </a:r>
@@ -5657,7 +4130,7 @@
           <a:p>
             <a:r>
               <a:rPr sz="800">
-                <a:hlinkClick r:id="rId48"/>
+                <a:hlinkClick r:id="rId27"/>
               </a:rPr>
               <a:t>Lofar 4</a:t>
             </a:r>
@@ -5667,7 +4140,7 @@
       <p:sp>
         <p:nvSpPr>
           <p:cNvPr id="23" name="Rounded Rectangle 22">
-            <a:hlinkClick r:id="rId49"/>
+            <a:hlinkClick r:id="rId28"/>
           </p:cNvPr>
           <p:cNvSpPr/>
           <p:nvPr/>
@@ -5714,7 +4187,7 @@
                   <a:srgbClr val="1F3A5F"/>
                 </a:solidFill>
               </a:rPr>
-              <a:t>Gram 30: FR Prometheus, Category 2, Tatooine</a:t>
+              <a:t>Gram 12: FR TIE Bomber, Category 3, Vulcan</a:t>
             </a:r>
           </a:p>
         </p:txBody>
@@ -5743,7 +4216,7 @@
           <a:p>
             <a:r>
               <a:rPr sz="800">
-                <a:hlinkClick r:id="rId50"/>
+                <a:hlinkClick r:id="rId29"/>
               </a:rPr>
               <a:t>Lofar 1</a:t>
             </a:r>
@@ -5751,7 +4224,7 @@
           <a:p>
             <a:r>
               <a:rPr sz="800">
-                <a:hlinkClick r:id="rId51"/>
+                <a:hlinkClick r:id="rId30"/>
               </a:rPr>
               <a:t>Lofar 2</a:t>
             </a:r>
@@ -5761,7 +4234,7 @@
       <p:sp>
         <p:nvSpPr>
           <p:cNvPr id="25" name="Rounded Rectangle 24">
-            <a:hlinkClick r:id="rId52"/>
+            <a:hlinkClick r:id="rId31"/>
           </p:cNvPr>
           <p:cNvSpPr/>
           <p:nvPr/>
@@ -5808,7 +4281,7 @@
                   <a:srgbClr val="1F3A5F"/>
                 </a:solidFill>
               </a:rPr>
-              <a:t>Gram 31: FR Devastator, Category 3, Gandalf</a:t>
+              <a:t>Gram 13: FR B-wing, Category 4, Coruscant</a:t>
             </a:r>
           </a:p>
         </p:txBody>
@@ -5837,7 +4310,7 @@
           <a:p>
             <a:r>
               <a:rPr sz="800">
-                <a:hlinkClick r:id="rId53"/>
+                <a:hlinkClick r:id="rId32"/>
               </a:rPr>
               <a:t>Lofar 1</a:t>
             </a:r>
@@ -5845,25 +4318,17 @@
           <a:p>
             <a:r>
               <a:rPr sz="800">
-                <a:hlinkClick r:id="rId54"/>
+                <a:hlinkClick r:id="rId33"/>
               </a:rPr>
               <a:t>Lofar 2</a:t>
             </a:r>
           </a:p>
-          <a:p>
-            <a:r>
-              <a:rPr sz="800">
-                <a:hlinkClick r:id="rId55"/>
-              </a:rPr>
-              <a:t>Lofar 3</a:t>
-            </a:r>
-          </a:p>
         </p:txBody>
       </p:sp>
       <p:sp>
         <p:nvSpPr>
           <p:cNvPr id="27" name="Rounded Rectangle 26">
-            <a:hlinkClick r:id="rId56"/>
+            <a:hlinkClick r:id="rId34"/>
           </p:cNvPr>
           <p:cNvSpPr/>
           <p:nvPr/>
@@ -5910,7 +4375,7 @@
                   <a:srgbClr val="1F3A5F"/>
                 </a:solidFill>
               </a:rPr>
-              <a:t>Gram 32: FR Akira-class, Category 3, Bajor</a:t>
+              <a:t>Gram 14: FR Tantive IV, Category 4, Kronos</a:t>
             </a:r>
           </a:p>
         </p:txBody>
@@ -5939,7 +4404,7 @@
           <a:p>
             <a:r>
               <a:rPr sz="800">
-                <a:hlinkClick r:id="rId57"/>
+                <a:hlinkClick r:id="rId35"/>
               </a:rPr>
               <a:t>Lofar 1</a:t>
             </a:r>
@@ -5947,7 +4412,7 @@
           <a:p>
             <a:r>
               <a:rPr sz="800">
-                <a:hlinkClick r:id="rId58"/>
+                <a:hlinkClick r:id="rId36"/>
               </a:rPr>
               <a:t>Lofar 2</a:t>
             </a:r>
@@ -5957,7 +4422,7 @@
       <p:sp>
         <p:nvSpPr>
           <p:cNvPr id="29" name="Rounded Rectangle 28">
-            <a:hlinkClick r:id="rId59"/>
+            <a:hlinkClick r:id="rId37"/>
           </p:cNvPr>
           <p:cNvSpPr/>
           <p:nvPr/>
@@ -6004,7 +4469,7 @@
                   <a:srgbClr val="1F3A5F"/>
                 </a:solidFill>
               </a:rPr>
-              <a:t>Gram 33: Reliant contact bearing 201, codename Kobol</a:t>
+              <a:t>Gram 15: Acclamator-class contact bearing 308, codename Kronos</a:t>
             </a:r>
           </a:p>
         </p:txBody>
@@ -6033,7 +4498,7 @@
           <a:p>
             <a:r>
               <a:rPr sz="800">
-                <a:hlinkClick r:id="rId60"/>
+                <a:hlinkClick r:id="rId38"/>
               </a:rPr>
               <a:t>Lofar 1</a:t>
             </a:r>
@@ -6041,33 +4506,17 @@
           <a:p>
             <a:r>
               <a:rPr sz="800">
-                <a:hlinkClick r:id="rId61"/>
+                <a:hlinkClick r:id="rId39"/>
               </a:rPr>
               <a:t>Lofar 2</a:t>
             </a:r>
           </a:p>
-          <a:p>
-            <a:r>
-              <a:rPr sz="800">
-                <a:hlinkClick r:id="rId62"/>
-              </a:rPr>
-              <a:t>Lofar 3</a:t>
-            </a:r>
-          </a:p>
-          <a:p>
-            <a:r>
-              <a:rPr sz="800">
-                <a:hlinkClick r:id="rId63"/>
-              </a:rPr>
-              <a:t>Lofar 4</a:t>
-            </a:r>
-          </a:p>
         </p:txBody>
       </p:sp>
       <p:sp>
         <p:nvSpPr>
           <p:cNvPr id="31" name="Rounded Rectangle 30">
-            <a:hlinkClick r:id="rId64"/>
+            <a:hlinkClick r:id="rId40"/>
           </p:cNvPr>
           <p:cNvSpPr/>
           <p:nvPr/>
@@ -6114,7 +4563,7 @@
                   <a:srgbClr val="1F3A5F"/>
                 </a:solidFill>
               </a:rPr>
-              <a:t>Gram 34: FR Imperial-class, Category 4, Mustafar</a:t>
+              <a:t>Gram 17: FR Imperial-class, Category 3, Hoth</a:t>
             </a:r>
           </a:p>
         </p:txBody>
@@ -6143,7 +4592,7 @@
           <a:p>
             <a:r>
               <a:rPr sz="800">
-                <a:hlinkClick r:id="rId65"/>
+                <a:hlinkClick r:id="rId41"/>
               </a:rPr>
               <a:t>Lofar 1</a:t>
             </a:r>
@@ -6151,17 +4600,9 @@
           <a:p>
             <a:r>
               <a:rPr sz="800">
-                <a:hlinkClick r:id="rId66"/>
+                <a:hlinkClick r:id="rId42"/>
               </a:rPr>
               <a:t>Lofar 2</a:t>
-            </a:r>
-          </a:p>
-          <a:p>
-            <a:r>
-              <a:rPr sz="800">
-                <a:hlinkClick r:id="rId67"/>
-              </a:rPr>
-              <a:t>Lofar 3</a:t>
             </a:r>
           </a:p>
         </p:txBody>
@@ -6230,7 +4671,7 @@
                   <a:srgbClr val="FFFFFF"/>
                 </a:solidFill>
               </a:rPr>
-              <a:t>Instructor Week 4 Grams_Updated — Page 3 of 3</a:t>
+              <a:t>Instructor Week 4 Grams_Updated — Page 2 of 3</a:t>
             </a:r>
           </a:p>
         </p:txBody>
@@ -6285,7 +4726,7 @@
                   <a:srgbClr val="1F3A5F"/>
                 </a:solidFill>
               </a:rPr>
-              <a:t>Gram 36: FR Defiant-class, Category 2, Defiant</a:t>
+              <a:t>Gram 18: FR Venator-class, Category 3, Tantive</a:t>
             </a:r>
           </a:p>
         </p:txBody>
@@ -6395,7 +4836,7 @@
                   <a:srgbClr val="1F3A5F"/>
                 </a:solidFill>
               </a:rPr>
-              <a:t>Gram 37: B-wing contact bearing 123, codename Hoth</a:t>
+              <a:t>Gram 20: FR Discovery, Category 3, Naboo</a:t>
             </a:r>
           </a:p>
         </p:txBody>
@@ -6505,7 +4946,7 @@
                   <a:srgbClr val="1F3A5F"/>
                 </a:solidFill>
               </a:rPr>
-              <a:t>Gram 38: FR Outrider, Category 1, Endor</a:t>
+              <a:t>Gram 21: FR A-wing, Category 3, Betazed</a:t>
             </a:r>
           </a:p>
         </p:txBody>
@@ -6539,12 +4980,36 @@
               <a:t>Lofar 1</a:t>
             </a:r>
           </a:p>
+          <a:p>
+            <a:r>
+              <a:rPr sz="800">
+                <a:hlinkClick r:id="rId14"/>
+              </a:rPr>
+              <a:t>Lofar 2</a:t>
+            </a:r>
+          </a:p>
+          <a:p>
+            <a:r>
+              <a:rPr sz="800">
+                <a:hlinkClick r:id="rId15"/>
+              </a:rPr>
+              <a:t>Lofar 3</a:t>
+            </a:r>
+          </a:p>
+          <a:p>
+            <a:r>
+              <a:rPr sz="800">
+                <a:hlinkClick r:id="rId16"/>
+              </a:rPr>
+              <a:t>Lofar 4</a:t>
+            </a:r>
+          </a:p>
         </p:txBody>
       </p:sp>
       <p:sp>
         <p:nvSpPr>
           <p:cNvPr id="9" name="Rounded Rectangle 8">
-            <a:hlinkClick r:id="rId14"/>
+            <a:hlinkClick r:id="rId17"/>
           </p:cNvPr>
           <p:cNvSpPr/>
           <p:nvPr/>
@@ -6591,7 +5056,7 @@
                   <a:srgbClr val="1F3A5F"/>
                 </a:solidFill>
               </a:rPr>
-              <a:t>Gram 41: X-wing contact bearing 106, codename Tantive</a:t>
+              <a:t>Gram 22: FR Prometheus, Category 3, Risa</a:t>
             </a:r>
           </a:p>
         </p:txBody>
@@ -6620,7 +5085,7 @@
           <a:p>
             <a:r>
               <a:rPr sz="800">
-                <a:hlinkClick r:id="rId15"/>
+                <a:hlinkClick r:id="rId18"/>
               </a:rPr>
               <a:t>Lofar 1</a:t>
             </a:r>
@@ -6628,7 +5093,7 @@
           <a:p>
             <a:r>
               <a:rPr sz="800">
-                <a:hlinkClick r:id="rId16"/>
+                <a:hlinkClick r:id="rId19"/>
               </a:rPr>
               <a:t>Lofar 2</a:t>
             </a:r>
@@ -6636,7 +5101,7 @@
           <a:p>
             <a:r>
               <a:rPr sz="800">
-                <a:hlinkClick r:id="rId17"/>
+                <a:hlinkClick r:id="rId20"/>
               </a:rPr>
               <a:t>Lofar 3</a:t>
             </a:r>
@@ -6644,7 +5109,7 @@
           <a:p>
             <a:r>
               <a:rPr sz="800">
-                <a:hlinkClick r:id="rId18"/>
+                <a:hlinkClick r:id="rId21"/>
               </a:rPr>
               <a:t>Lofar 4</a:t>
             </a:r>
@@ -6654,7 +5119,7 @@
       <p:sp>
         <p:nvSpPr>
           <p:cNvPr id="11" name="Rounded Rectangle 10">
-            <a:hlinkClick r:id="rId19"/>
+            <a:hlinkClick r:id="rId22"/>
           </p:cNvPr>
           <p:cNvSpPr/>
           <p:nvPr/>
@@ -6701,7 +5166,7 @@
                   <a:srgbClr val="1F3A5F"/>
                 </a:solidFill>
               </a:rPr>
-              <a:t>Gram 42: FR Prometheus, Category 2, Coruscant</a:t>
+              <a:t>Gram 23: FR Mon Calamari Cruiser, Category 4, Gandalf</a:t>
             </a:r>
           </a:p>
         </p:txBody>
@@ -6730,6 +5195,1629 @@
           <a:p>
             <a:r>
               <a:rPr sz="800">
+                <a:hlinkClick r:id="rId23"/>
+              </a:rPr>
+              <a:t>Lofar 1</a:t>
+            </a:r>
+          </a:p>
+          <a:p>
+            <a:r>
+              <a:rPr sz="800">
+                <a:hlinkClick r:id="rId24"/>
+              </a:rPr>
+              <a:t>Lofar 2</a:t>
+            </a:r>
+          </a:p>
+          <a:p>
+            <a:r>
+              <a:rPr sz="800">
+                <a:hlinkClick r:id="rId25"/>
+              </a:rPr>
+              <a:t>Lofar 3</a:t>
+            </a:r>
+          </a:p>
+        </p:txBody>
+      </p:sp>
+      <p:sp>
+        <p:nvSpPr>
+          <p:cNvPr id="13" name="Rounded Rectangle 12">
+            <a:hlinkClick r:id="rId26"/>
+          </p:cNvPr>
+          <p:cNvSpPr/>
+          <p:nvPr/>
+        </p:nvSpPr>
+        <p:spPr>
+          <a:xfrm>
+            <a:off x="365760" y="2682240"/>
+            <a:ext cx="2200046" cy="365760"/>
+          </a:xfrm>
+          <a:prstGeom prst="roundRect">
+            <a:avLst/>
+          </a:prstGeom>
+          <a:solidFill>
+            <a:srgbClr val="E8EEF7"/>
+          </a:solidFill>
+          <a:ln>
+            <a:solidFill>
+              <a:srgbClr val="1F3A5F"/>
+            </a:solidFill>
+          </a:ln>
+        </p:spPr>
+        <p:style>
+          <a:lnRef idx="1">
+            <a:schemeClr val="accent1"/>
+          </a:lnRef>
+          <a:fillRef idx="3">
+            <a:schemeClr val="accent1"/>
+          </a:fillRef>
+          <a:effectRef idx="2">
+            <a:schemeClr val="accent1"/>
+          </a:effectRef>
+          <a:fontRef idx="minor">
+            <a:schemeClr val="lt1"/>
+          </a:fontRef>
+        </p:style>
+        <p:txBody>
+          <a:bodyPr rtlCol="0" anchor="ctr" lIns="45720" rIns="45720"/>
+          <a:lstStyle/>
+          <a:p>
+            <a:pPr algn="ctr"/>
+            <a:r>
+              <a:rPr sz="900">
+                <a:solidFill>
+                  <a:srgbClr val="1F3A5F"/>
+                </a:solidFill>
+              </a:rPr>
+              <a:t>Gram 25: Mon Calamari Cruiser contact bearing 109, codename Kronos</a:t>
+            </a:r>
+          </a:p>
+        </p:txBody>
+      </p:sp>
+      <p:sp>
+        <p:nvSpPr>
+          <p:cNvPr id="14" name="TextBox 13"/>
+          <p:cNvSpPr txBox="1"/>
+          <p:nvPr/>
+        </p:nvSpPr>
+        <p:spPr>
+          <a:xfrm>
+            <a:off x="365760" y="3066288"/>
+            <a:ext cx="2200046" cy="1447800"/>
+          </a:xfrm>
+          <a:prstGeom prst="rect">
+            <a:avLst/>
+          </a:prstGeom>
+          <a:noFill/>
+        </p:spPr>
+        <p:txBody>
+          <a:bodyPr wrap="square">
+            <a:spAutoFit/>
+          </a:bodyPr>
+          <a:lstStyle/>
+          <a:p>
+            <a:r>
+              <a:rPr sz="800">
+                <a:hlinkClick r:id="rId27"/>
+              </a:rPr>
+              <a:t>Lofar 1</a:t>
+            </a:r>
+          </a:p>
+          <a:p>
+            <a:r>
+              <a:rPr sz="800">
+                <a:hlinkClick r:id="rId28"/>
+              </a:rPr>
+              <a:t>Lofar 2</a:t>
+            </a:r>
+          </a:p>
+          <a:p>
+            <a:r>
+              <a:rPr sz="800">
+                <a:hlinkClick r:id="rId29"/>
+              </a:rPr>
+              <a:t>Lofar 3</a:t>
+            </a:r>
+          </a:p>
+        </p:txBody>
+      </p:sp>
+      <p:sp>
+        <p:nvSpPr>
+          <p:cNvPr id="15" name="Rounded Rectangle 14">
+            <a:hlinkClick r:id="rId30"/>
+          </p:cNvPr>
+          <p:cNvSpPr/>
+          <p:nvPr/>
+        </p:nvSpPr>
+        <p:spPr>
+          <a:xfrm>
+            <a:off x="2657246" y="2682240"/>
+            <a:ext cx="2200046" cy="365760"/>
+          </a:xfrm>
+          <a:prstGeom prst="roundRect">
+            <a:avLst/>
+          </a:prstGeom>
+          <a:solidFill>
+            <a:srgbClr val="E8EEF7"/>
+          </a:solidFill>
+          <a:ln>
+            <a:solidFill>
+              <a:srgbClr val="1F3A5F"/>
+            </a:solidFill>
+          </a:ln>
+        </p:spPr>
+        <p:style>
+          <a:lnRef idx="1">
+            <a:schemeClr val="accent1"/>
+          </a:lnRef>
+          <a:fillRef idx="3">
+            <a:schemeClr val="accent1"/>
+          </a:fillRef>
+          <a:effectRef idx="2">
+            <a:schemeClr val="accent1"/>
+          </a:effectRef>
+          <a:fontRef idx="minor">
+            <a:schemeClr val="lt1"/>
+          </a:fontRef>
+        </p:style>
+        <p:txBody>
+          <a:bodyPr rtlCol="0" anchor="ctr" lIns="45720" rIns="45720"/>
+          <a:lstStyle/>
+          <a:p>
+            <a:pPr algn="ctr"/>
+            <a:r>
+              <a:rPr sz="900">
+                <a:solidFill>
+                  <a:srgbClr val="1F3A5F"/>
+                </a:solidFill>
+              </a:rPr>
+              <a:t>Gram 26: TIE Fighter contact bearing 031, codename Risa</a:t>
+            </a:r>
+          </a:p>
+        </p:txBody>
+      </p:sp>
+      <p:sp>
+        <p:nvSpPr>
+          <p:cNvPr id="16" name="TextBox 15"/>
+          <p:cNvSpPr txBox="1"/>
+          <p:nvPr/>
+        </p:nvSpPr>
+        <p:spPr>
+          <a:xfrm>
+            <a:off x="2657246" y="3066288"/>
+            <a:ext cx="2200046" cy="1447800"/>
+          </a:xfrm>
+          <a:prstGeom prst="rect">
+            <a:avLst/>
+          </a:prstGeom>
+          <a:noFill/>
+        </p:spPr>
+        <p:txBody>
+          <a:bodyPr wrap="square">
+            <a:spAutoFit/>
+          </a:bodyPr>
+          <a:lstStyle/>
+          <a:p>
+            <a:r>
+              <a:rPr sz="800">
+                <a:hlinkClick r:id="rId31"/>
+              </a:rPr>
+              <a:t>Lofar 1</a:t>
+            </a:r>
+          </a:p>
+          <a:p>
+            <a:r>
+              <a:rPr sz="800">
+                <a:hlinkClick r:id="rId32"/>
+              </a:rPr>
+              <a:t>Lofar 2</a:t>
+            </a:r>
+          </a:p>
+          <a:p>
+            <a:r>
+              <a:rPr sz="800">
+                <a:hlinkClick r:id="rId33"/>
+              </a:rPr>
+              <a:t>Lofar 3</a:t>
+            </a:r>
+          </a:p>
+          <a:p>
+            <a:r>
+              <a:rPr sz="800">
+                <a:hlinkClick r:id="rId34"/>
+              </a:rPr>
+              <a:t>Lofar 4</a:t>
+            </a:r>
+          </a:p>
+        </p:txBody>
+      </p:sp>
+      <p:sp>
+        <p:nvSpPr>
+          <p:cNvPr id="17" name="Rounded Rectangle 16">
+            <a:hlinkClick r:id="rId35"/>
+          </p:cNvPr>
+          <p:cNvSpPr/>
+          <p:nvPr/>
+        </p:nvSpPr>
+        <p:spPr>
+          <a:xfrm>
+            <a:off x="4948732" y="2682240"/>
+            <a:ext cx="2200046" cy="365760"/>
+          </a:xfrm>
+          <a:prstGeom prst="roundRect">
+            <a:avLst/>
+          </a:prstGeom>
+          <a:solidFill>
+            <a:srgbClr val="E8EEF7"/>
+          </a:solidFill>
+          <a:ln>
+            <a:solidFill>
+              <a:srgbClr val="1F3A5F"/>
+            </a:solidFill>
+          </a:ln>
+        </p:spPr>
+        <p:style>
+          <a:lnRef idx="1">
+            <a:schemeClr val="accent1"/>
+          </a:lnRef>
+          <a:fillRef idx="3">
+            <a:schemeClr val="accent1"/>
+          </a:fillRef>
+          <a:effectRef idx="2">
+            <a:schemeClr val="accent1"/>
+          </a:effectRef>
+          <a:fontRef idx="minor">
+            <a:schemeClr val="lt1"/>
+          </a:fontRef>
+        </p:style>
+        <p:txBody>
+          <a:bodyPr rtlCol="0" anchor="ctr" lIns="45720" rIns="45720"/>
+          <a:lstStyle/>
+          <a:p>
+            <a:pPr algn="ctr"/>
+            <a:r>
+              <a:rPr sz="900">
+                <a:solidFill>
+                  <a:srgbClr val="1F3A5F"/>
+                </a:solidFill>
+              </a:rPr>
+              <a:t>Gram 27: FR A-wing, Category 1, Coruscant</a:t>
+            </a:r>
+          </a:p>
+        </p:txBody>
+      </p:sp>
+      <p:sp>
+        <p:nvSpPr>
+          <p:cNvPr id="18" name="TextBox 17"/>
+          <p:cNvSpPr txBox="1"/>
+          <p:nvPr/>
+        </p:nvSpPr>
+        <p:spPr>
+          <a:xfrm>
+            <a:off x="4948732" y="3066288"/>
+            <a:ext cx="2200046" cy="1447800"/>
+          </a:xfrm>
+          <a:prstGeom prst="rect">
+            <a:avLst/>
+          </a:prstGeom>
+          <a:noFill/>
+        </p:spPr>
+        <p:txBody>
+          <a:bodyPr wrap="square">
+            <a:spAutoFit/>
+          </a:bodyPr>
+          <a:lstStyle/>
+          <a:p>
+            <a:r>
+              <a:rPr sz="800">
+                <a:hlinkClick r:id="rId36"/>
+              </a:rPr>
+              <a:t>Lofar 1</a:t>
+            </a:r>
+          </a:p>
+          <a:p>
+            <a:r>
+              <a:rPr sz="800">
+                <a:hlinkClick r:id="rId37"/>
+              </a:rPr>
+              <a:t>Lofar 2</a:t>
+            </a:r>
+          </a:p>
+          <a:p>
+            <a:r>
+              <a:rPr sz="800">
+                <a:hlinkClick r:id="rId38"/>
+              </a:rPr>
+              <a:t>Lofar 3</a:t>
+            </a:r>
+          </a:p>
+        </p:txBody>
+      </p:sp>
+      <p:sp>
+        <p:nvSpPr>
+          <p:cNvPr id="19" name="Rounded Rectangle 18">
+            <a:hlinkClick r:id="rId39"/>
+          </p:cNvPr>
+          <p:cNvSpPr/>
+          <p:nvPr/>
+        </p:nvSpPr>
+        <p:spPr>
+          <a:xfrm>
+            <a:off x="7240219" y="2682240"/>
+            <a:ext cx="2200046" cy="365760"/>
+          </a:xfrm>
+          <a:prstGeom prst="roundRect">
+            <a:avLst/>
+          </a:prstGeom>
+          <a:solidFill>
+            <a:srgbClr val="E8EEF7"/>
+          </a:solidFill>
+          <a:ln>
+            <a:solidFill>
+              <a:srgbClr val="1F3A5F"/>
+            </a:solidFill>
+          </a:ln>
+        </p:spPr>
+        <p:style>
+          <a:lnRef idx="1">
+            <a:schemeClr val="accent1"/>
+          </a:lnRef>
+          <a:fillRef idx="3">
+            <a:schemeClr val="accent1"/>
+          </a:fillRef>
+          <a:effectRef idx="2">
+            <a:schemeClr val="accent1"/>
+          </a:effectRef>
+          <a:fontRef idx="minor">
+            <a:schemeClr val="lt1"/>
+          </a:fontRef>
+        </p:style>
+        <p:txBody>
+          <a:bodyPr rtlCol="0" anchor="ctr" lIns="45720" rIns="45720"/>
+          <a:lstStyle/>
+          <a:p>
+            <a:pPr algn="ctr"/>
+            <a:r>
+              <a:rPr sz="900">
+                <a:solidFill>
+                  <a:srgbClr val="1F3A5F"/>
+                </a:solidFill>
+              </a:rPr>
+              <a:t>Gram 28: FR Constitution-class, Category 1, Kobol</a:t>
+            </a:r>
+          </a:p>
+        </p:txBody>
+      </p:sp>
+      <p:sp>
+        <p:nvSpPr>
+          <p:cNvPr id="20" name="TextBox 19"/>
+          <p:cNvSpPr txBox="1"/>
+          <p:nvPr/>
+        </p:nvSpPr>
+        <p:spPr>
+          <a:xfrm>
+            <a:off x="7240219" y="3066288"/>
+            <a:ext cx="2200046" cy="1447800"/>
+          </a:xfrm>
+          <a:prstGeom prst="rect">
+            <a:avLst/>
+          </a:prstGeom>
+          <a:noFill/>
+        </p:spPr>
+        <p:txBody>
+          <a:bodyPr wrap="square">
+            <a:spAutoFit/>
+          </a:bodyPr>
+          <a:lstStyle/>
+          <a:p>
+            <a:r>
+              <a:rPr sz="800">
+                <a:hlinkClick r:id="rId40"/>
+              </a:rPr>
+              <a:t>Lofar 1</a:t>
+            </a:r>
+          </a:p>
+          <a:p>
+            <a:r>
+              <a:rPr sz="800">
+                <a:hlinkClick r:id="rId41"/>
+              </a:rPr>
+              <a:t>Lofar 2</a:t>
+            </a:r>
+          </a:p>
+          <a:p>
+            <a:r>
+              <a:rPr sz="800">
+                <a:hlinkClick r:id="rId42"/>
+              </a:rPr>
+              <a:t>Lofar 3</a:t>
+            </a:r>
+          </a:p>
+          <a:p>
+            <a:r>
+              <a:rPr sz="800">
+                <a:hlinkClick r:id="rId43"/>
+              </a:rPr>
+              <a:t>Lofar 4</a:t>
+            </a:r>
+          </a:p>
+        </p:txBody>
+      </p:sp>
+      <p:sp>
+        <p:nvSpPr>
+          <p:cNvPr id="21" name="Rounded Rectangle 20">
+            <a:hlinkClick r:id="rId44"/>
+          </p:cNvPr>
+          <p:cNvSpPr/>
+          <p:nvPr/>
+        </p:nvSpPr>
+        <p:spPr>
+          <a:xfrm>
+            <a:off x="9531705" y="2682240"/>
+            <a:ext cx="2200046" cy="365760"/>
+          </a:xfrm>
+          <a:prstGeom prst="roundRect">
+            <a:avLst/>
+          </a:prstGeom>
+          <a:solidFill>
+            <a:srgbClr val="E8EEF7"/>
+          </a:solidFill>
+          <a:ln>
+            <a:solidFill>
+              <a:srgbClr val="1F3A5F"/>
+            </a:solidFill>
+          </a:ln>
+        </p:spPr>
+        <p:style>
+          <a:lnRef idx="1">
+            <a:schemeClr val="accent1"/>
+          </a:lnRef>
+          <a:fillRef idx="3">
+            <a:schemeClr val="accent1"/>
+          </a:fillRef>
+          <a:effectRef idx="2">
+            <a:schemeClr val="accent1"/>
+          </a:effectRef>
+          <a:fontRef idx="minor">
+            <a:schemeClr val="lt1"/>
+          </a:fontRef>
+        </p:style>
+        <p:txBody>
+          <a:bodyPr rtlCol="0" anchor="ctr" lIns="45720" rIns="45720"/>
+          <a:lstStyle/>
+          <a:p>
+            <a:pPr algn="ctr"/>
+            <a:r>
+              <a:rPr sz="900">
+                <a:solidFill>
+                  <a:srgbClr val="1F3A5F"/>
+                </a:solidFill>
+              </a:rPr>
+              <a:t>Gram 29: FR Ghost, Category 4, Coruscant</a:t>
+            </a:r>
+          </a:p>
+        </p:txBody>
+      </p:sp>
+      <p:sp>
+        <p:nvSpPr>
+          <p:cNvPr id="22" name="TextBox 21"/>
+          <p:cNvSpPr txBox="1"/>
+          <p:nvPr/>
+        </p:nvSpPr>
+        <p:spPr>
+          <a:xfrm>
+            <a:off x="9531705" y="3066288"/>
+            <a:ext cx="2200046" cy="1447800"/>
+          </a:xfrm>
+          <a:prstGeom prst="rect">
+            <a:avLst/>
+          </a:prstGeom>
+          <a:noFill/>
+        </p:spPr>
+        <p:txBody>
+          <a:bodyPr wrap="square">
+            <a:spAutoFit/>
+          </a:bodyPr>
+          <a:lstStyle/>
+          <a:p>
+            <a:r>
+              <a:rPr sz="800">
+                <a:hlinkClick r:id="rId45"/>
+              </a:rPr>
+              <a:t>Lofar 1</a:t>
+            </a:r>
+          </a:p>
+          <a:p>
+            <a:r>
+              <a:rPr sz="800">
+                <a:hlinkClick r:id="rId46"/>
+              </a:rPr>
+              <a:t>Lofar 2</a:t>
+            </a:r>
+          </a:p>
+          <a:p>
+            <a:r>
+              <a:rPr sz="800">
+                <a:hlinkClick r:id="rId47"/>
+              </a:rPr>
+              <a:t>Lofar 3</a:t>
+            </a:r>
+          </a:p>
+          <a:p>
+            <a:r>
+              <a:rPr sz="800">
+                <a:hlinkClick r:id="rId48"/>
+              </a:rPr>
+              <a:t>Lofar 4</a:t>
+            </a:r>
+          </a:p>
+        </p:txBody>
+      </p:sp>
+      <p:sp>
+        <p:nvSpPr>
+          <p:cNvPr id="23" name="Rounded Rectangle 22">
+            <a:hlinkClick r:id="rId49"/>
+          </p:cNvPr>
+          <p:cNvSpPr/>
+          <p:nvPr/>
+        </p:nvSpPr>
+        <p:spPr>
+          <a:xfrm>
+            <a:off x="365760" y="4632960"/>
+            <a:ext cx="2200046" cy="365760"/>
+          </a:xfrm>
+          <a:prstGeom prst="roundRect">
+            <a:avLst/>
+          </a:prstGeom>
+          <a:solidFill>
+            <a:srgbClr val="E8EEF7"/>
+          </a:solidFill>
+          <a:ln>
+            <a:solidFill>
+              <a:srgbClr val="1F3A5F"/>
+            </a:solidFill>
+          </a:ln>
+        </p:spPr>
+        <p:style>
+          <a:lnRef idx="1">
+            <a:schemeClr val="accent1"/>
+          </a:lnRef>
+          <a:fillRef idx="3">
+            <a:schemeClr val="accent1"/>
+          </a:fillRef>
+          <a:effectRef idx="2">
+            <a:schemeClr val="accent1"/>
+          </a:effectRef>
+          <a:fontRef idx="minor">
+            <a:schemeClr val="lt1"/>
+          </a:fontRef>
+        </p:style>
+        <p:txBody>
+          <a:bodyPr rtlCol="0" anchor="ctr" lIns="45720" rIns="45720"/>
+          <a:lstStyle/>
+          <a:p>
+            <a:pPr algn="ctr"/>
+            <a:r>
+              <a:rPr sz="900">
+                <a:solidFill>
+                  <a:srgbClr val="1F3A5F"/>
+                </a:solidFill>
+              </a:rPr>
+              <a:t>Gram 30: FR Prometheus, Category 2, Tatooine</a:t>
+            </a:r>
+          </a:p>
+        </p:txBody>
+      </p:sp>
+      <p:sp>
+        <p:nvSpPr>
+          <p:cNvPr id="24" name="TextBox 23"/>
+          <p:cNvSpPr txBox="1"/>
+          <p:nvPr/>
+        </p:nvSpPr>
+        <p:spPr>
+          <a:xfrm>
+            <a:off x="365760" y="5017008"/>
+            <a:ext cx="2200046" cy="1447800"/>
+          </a:xfrm>
+          <a:prstGeom prst="rect">
+            <a:avLst/>
+          </a:prstGeom>
+          <a:noFill/>
+        </p:spPr>
+        <p:txBody>
+          <a:bodyPr wrap="square">
+            <a:spAutoFit/>
+          </a:bodyPr>
+          <a:lstStyle/>
+          <a:p>
+            <a:r>
+              <a:rPr sz="800">
+                <a:hlinkClick r:id="rId50"/>
+              </a:rPr>
+              <a:t>Lofar 1</a:t>
+            </a:r>
+          </a:p>
+          <a:p>
+            <a:r>
+              <a:rPr sz="800">
+                <a:hlinkClick r:id="rId51"/>
+              </a:rPr>
+              <a:t>Lofar 2</a:t>
+            </a:r>
+          </a:p>
+        </p:txBody>
+      </p:sp>
+      <p:sp>
+        <p:nvSpPr>
+          <p:cNvPr id="25" name="Rounded Rectangle 24">
+            <a:hlinkClick r:id="rId52"/>
+          </p:cNvPr>
+          <p:cNvSpPr/>
+          <p:nvPr/>
+        </p:nvSpPr>
+        <p:spPr>
+          <a:xfrm>
+            <a:off x="2657246" y="4632960"/>
+            <a:ext cx="2200046" cy="365760"/>
+          </a:xfrm>
+          <a:prstGeom prst="roundRect">
+            <a:avLst/>
+          </a:prstGeom>
+          <a:solidFill>
+            <a:srgbClr val="E8EEF7"/>
+          </a:solidFill>
+          <a:ln>
+            <a:solidFill>
+              <a:srgbClr val="1F3A5F"/>
+            </a:solidFill>
+          </a:ln>
+        </p:spPr>
+        <p:style>
+          <a:lnRef idx="1">
+            <a:schemeClr val="accent1"/>
+          </a:lnRef>
+          <a:fillRef idx="3">
+            <a:schemeClr val="accent1"/>
+          </a:fillRef>
+          <a:effectRef idx="2">
+            <a:schemeClr val="accent1"/>
+          </a:effectRef>
+          <a:fontRef idx="minor">
+            <a:schemeClr val="lt1"/>
+          </a:fontRef>
+        </p:style>
+        <p:txBody>
+          <a:bodyPr rtlCol="0" anchor="ctr" lIns="45720" rIns="45720"/>
+          <a:lstStyle/>
+          <a:p>
+            <a:pPr algn="ctr"/>
+            <a:r>
+              <a:rPr sz="900">
+                <a:solidFill>
+                  <a:srgbClr val="1F3A5F"/>
+                </a:solidFill>
+              </a:rPr>
+              <a:t>Gram 31: FR Devastator, Category 3, Gandalf</a:t>
+            </a:r>
+          </a:p>
+        </p:txBody>
+      </p:sp>
+      <p:sp>
+        <p:nvSpPr>
+          <p:cNvPr id="26" name="TextBox 25"/>
+          <p:cNvSpPr txBox="1"/>
+          <p:nvPr/>
+        </p:nvSpPr>
+        <p:spPr>
+          <a:xfrm>
+            <a:off x="2657246" y="5017008"/>
+            <a:ext cx="2200046" cy="1447800"/>
+          </a:xfrm>
+          <a:prstGeom prst="rect">
+            <a:avLst/>
+          </a:prstGeom>
+          <a:noFill/>
+        </p:spPr>
+        <p:txBody>
+          <a:bodyPr wrap="square">
+            <a:spAutoFit/>
+          </a:bodyPr>
+          <a:lstStyle/>
+          <a:p>
+            <a:r>
+              <a:rPr sz="800">
+                <a:hlinkClick r:id="rId53"/>
+              </a:rPr>
+              <a:t>Lofar 1</a:t>
+            </a:r>
+          </a:p>
+          <a:p>
+            <a:r>
+              <a:rPr sz="800">
+                <a:hlinkClick r:id="rId54"/>
+              </a:rPr>
+              <a:t>Lofar 2</a:t>
+            </a:r>
+          </a:p>
+          <a:p>
+            <a:r>
+              <a:rPr sz="800">
+                <a:hlinkClick r:id="rId55"/>
+              </a:rPr>
+              <a:t>Lofar 3</a:t>
+            </a:r>
+          </a:p>
+        </p:txBody>
+      </p:sp>
+      <p:sp>
+        <p:nvSpPr>
+          <p:cNvPr id="27" name="Rounded Rectangle 26">
+            <a:hlinkClick r:id="rId56"/>
+          </p:cNvPr>
+          <p:cNvSpPr/>
+          <p:nvPr/>
+        </p:nvSpPr>
+        <p:spPr>
+          <a:xfrm>
+            <a:off x="4948732" y="4632960"/>
+            <a:ext cx="2200046" cy="365760"/>
+          </a:xfrm>
+          <a:prstGeom prst="roundRect">
+            <a:avLst/>
+          </a:prstGeom>
+          <a:solidFill>
+            <a:srgbClr val="E8EEF7"/>
+          </a:solidFill>
+          <a:ln>
+            <a:solidFill>
+              <a:srgbClr val="1F3A5F"/>
+            </a:solidFill>
+          </a:ln>
+        </p:spPr>
+        <p:style>
+          <a:lnRef idx="1">
+            <a:schemeClr val="accent1"/>
+          </a:lnRef>
+          <a:fillRef idx="3">
+            <a:schemeClr val="accent1"/>
+          </a:fillRef>
+          <a:effectRef idx="2">
+            <a:schemeClr val="accent1"/>
+          </a:effectRef>
+          <a:fontRef idx="minor">
+            <a:schemeClr val="lt1"/>
+          </a:fontRef>
+        </p:style>
+        <p:txBody>
+          <a:bodyPr rtlCol="0" anchor="ctr" lIns="45720" rIns="45720"/>
+          <a:lstStyle/>
+          <a:p>
+            <a:pPr algn="ctr"/>
+            <a:r>
+              <a:rPr sz="900">
+                <a:solidFill>
+                  <a:srgbClr val="1F3A5F"/>
+                </a:solidFill>
+              </a:rPr>
+              <a:t>Gram 32: FR Akira-class, Category 3, Bajor</a:t>
+            </a:r>
+          </a:p>
+        </p:txBody>
+      </p:sp>
+      <p:sp>
+        <p:nvSpPr>
+          <p:cNvPr id="28" name="TextBox 27"/>
+          <p:cNvSpPr txBox="1"/>
+          <p:nvPr/>
+        </p:nvSpPr>
+        <p:spPr>
+          <a:xfrm>
+            <a:off x="4948732" y="5017008"/>
+            <a:ext cx="2200046" cy="1447800"/>
+          </a:xfrm>
+          <a:prstGeom prst="rect">
+            <a:avLst/>
+          </a:prstGeom>
+          <a:noFill/>
+        </p:spPr>
+        <p:txBody>
+          <a:bodyPr wrap="square">
+            <a:spAutoFit/>
+          </a:bodyPr>
+          <a:lstStyle/>
+          <a:p>
+            <a:r>
+              <a:rPr sz="800">
+                <a:hlinkClick r:id="rId57"/>
+              </a:rPr>
+              <a:t>Lofar 1</a:t>
+            </a:r>
+          </a:p>
+          <a:p>
+            <a:r>
+              <a:rPr sz="800">
+                <a:hlinkClick r:id="rId58"/>
+              </a:rPr>
+              <a:t>Lofar 2</a:t>
+            </a:r>
+          </a:p>
+        </p:txBody>
+      </p:sp>
+      <p:sp>
+        <p:nvSpPr>
+          <p:cNvPr id="29" name="Rounded Rectangle 28">
+            <a:hlinkClick r:id="rId59"/>
+          </p:cNvPr>
+          <p:cNvSpPr/>
+          <p:nvPr/>
+        </p:nvSpPr>
+        <p:spPr>
+          <a:xfrm>
+            <a:off x="7240219" y="4632960"/>
+            <a:ext cx="2200046" cy="365760"/>
+          </a:xfrm>
+          <a:prstGeom prst="roundRect">
+            <a:avLst/>
+          </a:prstGeom>
+          <a:solidFill>
+            <a:srgbClr val="E8EEF7"/>
+          </a:solidFill>
+          <a:ln>
+            <a:solidFill>
+              <a:srgbClr val="1F3A5F"/>
+            </a:solidFill>
+          </a:ln>
+        </p:spPr>
+        <p:style>
+          <a:lnRef idx="1">
+            <a:schemeClr val="accent1"/>
+          </a:lnRef>
+          <a:fillRef idx="3">
+            <a:schemeClr val="accent1"/>
+          </a:fillRef>
+          <a:effectRef idx="2">
+            <a:schemeClr val="accent1"/>
+          </a:effectRef>
+          <a:fontRef idx="minor">
+            <a:schemeClr val="lt1"/>
+          </a:fontRef>
+        </p:style>
+        <p:txBody>
+          <a:bodyPr rtlCol="0" anchor="ctr" lIns="45720" rIns="45720"/>
+          <a:lstStyle/>
+          <a:p>
+            <a:pPr algn="ctr"/>
+            <a:r>
+              <a:rPr sz="900">
+                <a:solidFill>
+                  <a:srgbClr val="1F3A5F"/>
+                </a:solidFill>
+              </a:rPr>
+              <a:t>Gram 33: Reliant contact bearing 201, codename Kobol</a:t>
+            </a:r>
+          </a:p>
+        </p:txBody>
+      </p:sp>
+      <p:sp>
+        <p:nvSpPr>
+          <p:cNvPr id="30" name="TextBox 29"/>
+          <p:cNvSpPr txBox="1"/>
+          <p:nvPr/>
+        </p:nvSpPr>
+        <p:spPr>
+          <a:xfrm>
+            <a:off x="7240219" y="5017008"/>
+            <a:ext cx="2200046" cy="1447800"/>
+          </a:xfrm>
+          <a:prstGeom prst="rect">
+            <a:avLst/>
+          </a:prstGeom>
+          <a:noFill/>
+        </p:spPr>
+        <p:txBody>
+          <a:bodyPr wrap="square">
+            <a:spAutoFit/>
+          </a:bodyPr>
+          <a:lstStyle/>
+          <a:p>
+            <a:r>
+              <a:rPr sz="800">
+                <a:hlinkClick r:id="rId60"/>
+              </a:rPr>
+              <a:t>Lofar 1</a:t>
+            </a:r>
+          </a:p>
+          <a:p>
+            <a:r>
+              <a:rPr sz="800">
+                <a:hlinkClick r:id="rId61"/>
+              </a:rPr>
+              <a:t>Lofar 2</a:t>
+            </a:r>
+          </a:p>
+          <a:p>
+            <a:r>
+              <a:rPr sz="800">
+                <a:hlinkClick r:id="rId62"/>
+              </a:rPr>
+              <a:t>Lofar 3</a:t>
+            </a:r>
+          </a:p>
+          <a:p>
+            <a:r>
+              <a:rPr sz="800">
+                <a:hlinkClick r:id="rId63"/>
+              </a:rPr>
+              <a:t>Lofar 4</a:t>
+            </a:r>
+          </a:p>
+        </p:txBody>
+      </p:sp>
+      <p:sp>
+        <p:nvSpPr>
+          <p:cNvPr id="31" name="Rounded Rectangle 30">
+            <a:hlinkClick r:id="rId64"/>
+          </p:cNvPr>
+          <p:cNvSpPr/>
+          <p:nvPr/>
+        </p:nvSpPr>
+        <p:spPr>
+          <a:xfrm>
+            <a:off x="9531705" y="4632960"/>
+            <a:ext cx="2200046" cy="365760"/>
+          </a:xfrm>
+          <a:prstGeom prst="roundRect">
+            <a:avLst/>
+          </a:prstGeom>
+          <a:solidFill>
+            <a:srgbClr val="E8EEF7"/>
+          </a:solidFill>
+          <a:ln>
+            <a:solidFill>
+              <a:srgbClr val="1F3A5F"/>
+            </a:solidFill>
+          </a:ln>
+        </p:spPr>
+        <p:style>
+          <a:lnRef idx="1">
+            <a:schemeClr val="accent1"/>
+          </a:lnRef>
+          <a:fillRef idx="3">
+            <a:schemeClr val="accent1"/>
+          </a:fillRef>
+          <a:effectRef idx="2">
+            <a:schemeClr val="accent1"/>
+          </a:effectRef>
+          <a:fontRef idx="minor">
+            <a:schemeClr val="lt1"/>
+          </a:fontRef>
+        </p:style>
+        <p:txBody>
+          <a:bodyPr rtlCol="0" anchor="ctr" lIns="45720" rIns="45720"/>
+          <a:lstStyle/>
+          <a:p>
+            <a:pPr algn="ctr"/>
+            <a:r>
+              <a:rPr sz="900">
+                <a:solidFill>
+                  <a:srgbClr val="1F3A5F"/>
+                </a:solidFill>
+              </a:rPr>
+              <a:t>Gram 34: FR Imperial-class, Category 4, Mustafar</a:t>
+            </a:r>
+          </a:p>
+        </p:txBody>
+      </p:sp>
+      <p:sp>
+        <p:nvSpPr>
+          <p:cNvPr id="32" name="TextBox 31"/>
+          <p:cNvSpPr txBox="1"/>
+          <p:nvPr/>
+        </p:nvSpPr>
+        <p:spPr>
+          <a:xfrm>
+            <a:off x="9531705" y="5017008"/>
+            <a:ext cx="2200046" cy="1447800"/>
+          </a:xfrm>
+          <a:prstGeom prst="rect">
+            <a:avLst/>
+          </a:prstGeom>
+          <a:noFill/>
+        </p:spPr>
+        <p:txBody>
+          <a:bodyPr wrap="square">
+            <a:spAutoFit/>
+          </a:bodyPr>
+          <a:lstStyle/>
+          <a:p>
+            <a:r>
+              <a:rPr sz="800">
+                <a:hlinkClick r:id="rId65"/>
+              </a:rPr>
+              <a:t>Lofar 1</a:t>
+            </a:r>
+          </a:p>
+          <a:p>
+            <a:r>
+              <a:rPr sz="800">
+                <a:hlinkClick r:id="rId66"/>
+              </a:rPr>
+              <a:t>Lofar 2</a:t>
+            </a:r>
+          </a:p>
+          <a:p>
+            <a:r>
+              <a:rPr sz="800">
+                <a:hlinkClick r:id="rId67"/>
+              </a:rPr>
+              <a:t>Lofar 3</a:t>
+            </a:r>
+          </a:p>
+        </p:txBody>
+      </p:sp>
+    </p:spTree>
+  </p:cSld>
+  <p:clrMapOvr>
+    <a:masterClrMapping/>
+  </p:clrMapOvr>
+</p:sld>
+</file>
+
+<file path=ppt/slides/slide4.xml><?xml version="1.0" encoding="utf-8"?>
+<p:sld xmlns:a="http://schemas.openxmlformats.org/drawingml/2006/main" xmlns:p="http://schemas.openxmlformats.org/presentationml/2006/main" xmlns:r="http://schemas.openxmlformats.org/officeDocument/2006/relationships">
+  <p:cSld>
+    <p:spTree>
+      <p:nvGrpSpPr>
+        <p:cNvPr id="1" name=""/>
+        <p:cNvGrpSpPr/>
+        <p:nvPr/>
+      </p:nvGrpSpPr>
+      <p:grpSpPr/>
+      <p:sp>
+        <p:nvSpPr>
+          <p:cNvPr id="2" name="Rectangle 1"/>
+          <p:cNvSpPr/>
+          <p:nvPr/>
+        </p:nvSpPr>
+        <p:spPr>
+          <a:xfrm>
+            <a:off x="0" y="0"/>
+            <a:ext cx="12188952" cy="548640"/>
+          </a:xfrm>
+          <a:prstGeom prst="rect">
+            <a:avLst/>
+          </a:prstGeom>
+          <a:solidFill>
+            <a:srgbClr val="1F3A5F"/>
+          </a:solidFill>
+          <a:ln>
+            <a:noFill/>
+          </a:ln>
+        </p:spPr>
+        <p:style>
+          <a:lnRef idx="1">
+            <a:schemeClr val="accent1"/>
+          </a:lnRef>
+          <a:fillRef idx="3">
+            <a:schemeClr val="accent1"/>
+          </a:fillRef>
+          <a:effectRef idx="2">
+            <a:schemeClr val="accent1"/>
+          </a:effectRef>
+          <a:fontRef idx="minor">
+            <a:schemeClr val="lt1"/>
+          </a:fontRef>
+        </p:style>
+        <p:txBody>
+          <a:bodyPr rtlCol="0" anchor="ctr" lIns="182880" rIns="182880"/>
+          <a:lstStyle/>
+          <a:p>
+            <a:pPr algn="ctr"/>
+            <a:r>
+              <a:rPr sz="2000" b="1">
+                <a:solidFill>
+                  <a:srgbClr val="FFFFFF"/>
+                </a:solidFill>
+              </a:rPr>
+              <a:t>Instructor Week 4 Grams_Updated — Page 3 of 3</a:t>
+            </a:r>
+          </a:p>
+        </p:txBody>
+      </p:sp>
+      <p:sp>
+        <p:nvSpPr>
+          <p:cNvPr id="3" name="Rounded Rectangle 2">
+            <a:hlinkClick r:id="rId2"/>
+          </p:cNvPr>
+          <p:cNvSpPr/>
+          <p:nvPr/>
+        </p:nvSpPr>
+        <p:spPr>
+          <a:xfrm>
+            <a:off x="365760" y="731520"/>
+            <a:ext cx="2200046" cy="365760"/>
+          </a:xfrm>
+          <a:prstGeom prst="roundRect">
+            <a:avLst/>
+          </a:prstGeom>
+          <a:solidFill>
+            <a:srgbClr val="E8EEF7"/>
+          </a:solidFill>
+          <a:ln>
+            <a:solidFill>
+              <a:srgbClr val="1F3A5F"/>
+            </a:solidFill>
+          </a:ln>
+        </p:spPr>
+        <p:style>
+          <a:lnRef idx="1">
+            <a:schemeClr val="accent1"/>
+          </a:lnRef>
+          <a:fillRef idx="3">
+            <a:schemeClr val="accent1"/>
+          </a:fillRef>
+          <a:effectRef idx="2">
+            <a:schemeClr val="accent1"/>
+          </a:effectRef>
+          <a:fontRef idx="minor">
+            <a:schemeClr val="lt1"/>
+          </a:fontRef>
+        </p:style>
+        <p:txBody>
+          <a:bodyPr rtlCol="0" anchor="ctr" lIns="45720" rIns="45720"/>
+          <a:lstStyle/>
+          <a:p>
+            <a:pPr algn="ctr"/>
+            <a:r>
+              <a:rPr sz="900">
+                <a:solidFill>
+                  <a:srgbClr val="1F3A5F"/>
+                </a:solidFill>
+              </a:rPr>
+              <a:t>Gram 36: FR Defiant-class, Category 2, Defiant</a:t>
+            </a:r>
+          </a:p>
+        </p:txBody>
+      </p:sp>
+      <p:sp>
+        <p:nvSpPr>
+          <p:cNvPr id="4" name="TextBox 3"/>
+          <p:cNvSpPr txBox="1"/>
+          <p:nvPr/>
+        </p:nvSpPr>
+        <p:spPr>
+          <a:xfrm>
+            <a:off x="365760" y="1115568"/>
+            <a:ext cx="2200046" cy="1447800"/>
+          </a:xfrm>
+          <a:prstGeom prst="rect">
+            <a:avLst/>
+          </a:prstGeom>
+          <a:noFill/>
+        </p:spPr>
+        <p:txBody>
+          <a:bodyPr wrap="square">
+            <a:spAutoFit/>
+          </a:bodyPr>
+          <a:lstStyle/>
+          <a:p>
+            <a:r>
+              <a:rPr sz="800">
+                <a:hlinkClick r:id="rId3"/>
+              </a:rPr>
+              <a:t>Lofar 1</a:t>
+            </a:r>
+          </a:p>
+          <a:p>
+            <a:r>
+              <a:rPr sz="800">
+                <a:hlinkClick r:id="rId4"/>
+              </a:rPr>
+              <a:t>Lofar 2</a:t>
+            </a:r>
+          </a:p>
+          <a:p>
+            <a:r>
+              <a:rPr sz="800">
+                <a:hlinkClick r:id="rId5"/>
+              </a:rPr>
+              <a:t>Lofar 3</a:t>
+            </a:r>
+          </a:p>
+          <a:p>
+            <a:r>
+              <a:rPr sz="800">
+                <a:hlinkClick r:id="rId6"/>
+              </a:rPr>
+              <a:t>Lofar 4</a:t>
+            </a:r>
+          </a:p>
+        </p:txBody>
+      </p:sp>
+      <p:sp>
+        <p:nvSpPr>
+          <p:cNvPr id="5" name="Rounded Rectangle 4">
+            <a:hlinkClick r:id="rId7"/>
+          </p:cNvPr>
+          <p:cNvSpPr/>
+          <p:nvPr/>
+        </p:nvSpPr>
+        <p:spPr>
+          <a:xfrm>
+            <a:off x="2657246" y="731520"/>
+            <a:ext cx="2200046" cy="365760"/>
+          </a:xfrm>
+          <a:prstGeom prst="roundRect">
+            <a:avLst/>
+          </a:prstGeom>
+          <a:solidFill>
+            <a:srgbClr val="E8EEF7"/>
+          </a:solidFill>
+          <a:ln>
+            <a:solidFill>
+              <a:srgbClr val="1F3A5F"/>
+            </a:solidFill>
+          </a:ln>
+        </p:spPr>
+        <p:style>
+          <a:lnRef idx="1">
+            <a:schemeClr val="accent1"/>
+          </a:lnRef>
+          <a:fillRef idx="3">
+            <a:schemeClr val="accent1"/>
+          </a:fillRef>
+          <a:effectRef idx="2">
+            <a:schemeClr val="accent1"/>
+          </a:effectRef>
+          <a:fontRef idx="minor">
+            <a:schemeClr val="lt1"/>
+          </a:fontRef>
+        </p:style>
+        <p:txBody>
+          <a:bodyPr rtlCol="0" anchor="ctr" lIns="45720" rIns="45720"/>
+          <a:lstStyle/>
+          <a:p>
+            <a:pPr algn="ctr"/>
+            <a:r>
+              <a:rPr sz="900">
+                <a:solidFill>
+                  <a:srgbClr val="1F3A5F"/>
+                </a:solidFill>
+              </a:rPr>
+              <a:t>Gram 37: B-wing contact bearing 123, codename Hoth</a:t>
+            </a:r>
+          </a:p>
+        </p:txBody>
+      </p:sp>
+      <p:sp>
+        <p:nvSpPr>
+          <p:cNvPr id="6" name="TextBox 5"/>
+          <p:cNvSpPr txBox="1"/>
+          <p:nvPr/>
+        </p:nvSpPr>
+        <p:spPr>
+          <a:xfrm>
+            <a:off x="2657246" y="1115568"/>
+            <a:ext cx="2200046" cy="1447800"/>
+          </a:xfrm>
+          <a:prstGeom prst="rect">
+            <a:avLst/>
+          </a:prstGeom>
+          <a:noFill/>
+        </p:spPr>
+        <p:txBody>
+          <a:bodyPr wrap="square">
+            <a:spAutoFit/>
+          </a:bodyPr>
+          <a:lstStyle/>
+          <a:p>
+            <a:r>
+              <a:rPr sz="800">
+                <a:hlinkClick r:id="rId8"/>
+              </a:rPr>
+              <a:t>Lofar 1</a:t>
+            </a:r>
+          </a:p>
+          <a:p>
+            <a:r>
+              <a:rPr sz="800">
+                <a:hlinkClick r:id="rId9"/>
+              </a:rPr>
+              <a:t>Lofar 2</a:t>
+            </a:r>
+          </a:p>
+          <a:p>
+            <a:r>
+              <a:rPr sz="800">
+                <a:hlinkClick r:id="rId10"/>
+              </a:rPr>
+              <a:t>Lofar 3</a:t>
+            </a:r>
+          </a:p>
+          <a:p>
+            <a:r>
+              <a:rPr sz="800">
+                <a:hlinkClick r:id="rId11"/>
+              </a:rPr>
+              <a:t>Lofar 4</a:t>
+            </a:r>
+          </a:p>
+        </p:txBody>
+      </p:sp>
+      <p:sp>
+        <p:nvSpPr>
+          <p:cNvPr id="7" name="Rounded Rectangle 6">
+            <a:hlinkClick r:id="rId12"/>
+          </p:cNvPr>
+          <p:cNvSpPr/>
+          <p:nvPr/>
+        </p:nvSpPr>
+        <p:spPr>
+          <a:xfrm>
+            <a:off x="4948732" y="731520"/>
+            <a:ext cx="2200046" cy="365760"/>
+          </a:xfrm>
+          <a:prstGeom prst="roundRect">
+            <a:avLst/>
+          </a:prstGeom>
+          <a:solidFill>
+            <a:srgbClr val="E8EEF7"/>
+          </a:solidFill>
+          <a:ln>
+            <a:solidFill>
+              <a:srgbClr val="1F3A5F"/>
+            </a:solidFill>
+          </a:ln>
+        </p:spPr>
+        <p:style>
+          <a:lnRef idx="1">
+            <a:schemeClr val="accent1"/>
+          </a:lnRef>
+          <a:fillRef idx="3">
+            <a:schemeClr val="accent1"/>
+          </a:fillRef>
+          <a:effectRef idx="2">
+            <a:schemeClr val="accent1"/>
+          </a:effectRef>
+          <a:fontRef idx="minor">
+            <a:schemeClr val="lt1"/>
+          </a:fontRef>
+        </p:style>
+        <p:txBody>
+          <a:bodyPr rtlCol="0" anchor="ctr" lIns="45720" rIns="45720"/>
+          <a:lstStyle/>
+          <a:p>
+            <a:pPr algn="ctr"/>
+            <a:r>
+              <a:rPr sz="900">
+                <a:solidFill>
+                  <a:srgbClr val="1F3A5F"/>
+                </a:solidFill>
+              </a:rPr>
+              <a:t>Gram 38: FR Outrider, Category 1, Endor</a:t>
+            </a:r>
+          </a:p>
+        </p:txBody>
+      </p:sp>
+      <p:sp>
+        <p:nvSpPr>
+          <p:cNvPr id="8" name="TextBox 7"/>
+          <p:cNvSpPr txBox="1"/>
+          <p:nvPr/>
+        </p:nvSpPr>
+        <p:spPr>
+          <a:xfrm>
+            <a:off x="4948732" y="1115568"/>
+            <a:ext cx="2200046" cy="1447800"/>
+          </a:xfrm>
+          <a:prstGeom prst="rect">
+            <a:avLst/>
+          </a:prstGeom>
+          <a:noFill/>
+        </p:spPr>
+        <p:txBody>
+          <a:bodyPr wrap="square">
+            <a:spAutoFit/>
+          </a:bodyPr>
+          <a:lstStyle/>
+          <a:p>
+            <a:r>
+              <a:rPr sz="800">
+                <a:hlinkClick r:id="rId13"/>
+              </a:rPr>
+              <a:t>Lofar 1</a:t>
+            </a:r>
+          </a:p>
+        </p:txBody>
+      </p:sp>
+      <p:sp>
+        <p:nvSpPr>
+          <p:cNvPr id="9" name="Rounded Rectangle 8">
+            <a:hlinkClick r:id="rId14"/>
+          </p:cNvPr>
+          <p:cNvSpPr/>
+          <p:nvPr/>
+        </p:nvSpPr>
+        <p:spPr>
+          <a:xfrm>
+            <a:off x="7240219" y="731520"/>
+            <a:ext cx="2200046" cy="365760"/>
+          </a:xfrm>
+          <a:prstGeom prst="roundRect">
+            <a:avLst/>
+          </a:prstGeom>
+          <a:solidFill>
+            <a:srgbClr val="E8EEF7"/>
+          </a:solidFill>
+          <a:ln>
+            <a:solidFill>
+              <a:srgbClr val="1F3A5F"/>
+            </a:solidFill>
+          </a:ln>
+        </p:spPr>
+        <p:style>
+          <a:lnRef idx="1">
+            <a:schemeClr val="accent1"/>
+          </a:lnRef>
+          <a:fillRef idx="3">
+            <a:schemeClr val="accent1"/>
+          </a:fillRef>
+          <a:effectRef idx="2">
+            <a:schemeClr val="accent1"/>
+          </a:effectRef>
+          <a:fontRef idx="minor">
+            <a:schemeClr val="lt1"/>
+          </a:fontRef>
+        </p:style>
+        <p:txBody>
+          <a:bodyPr rtlCol="0" anchor="ctr" lIns="45720" rIns="45720"/>
+          <a:lstStyle/>
+          <a:p>
+            <a:pPr algn="ctr"/>
+            <a:r>
+              <a:rPr sz="900">
+                <a:solidFill>
+                  <a:srgbClr val="1F3A5F"/>
+                </a:solidFill>
+              </a:rPr>
+              <a:t>Gram 41: X-wing contact bearing 106, codename Tantive</a:t>
+            </a:r>
+          </a:p>
+        </p:txBody>
+      </p:sp>
+      <p:sp>
+        <p:nvSpPr>
+          <p:cNvPr id="10" name="TextBox 9"/>
+          <p:cNvSpPr txBox="1"/>
+          <p:nvPr/>
+        </p:nvSpPr>
+        <p:spPr>
+          <a:xfrm>
+            <a:off x="7240219" y="1115568"/>
+            <a:ext cx="2200046" cy="1447800"/>
+          </a:xfrm>
+          <a:prstGeom prst="rect">
+            <a:avLst/>
+          </a:prstGeom>
+          <a:noFill/>
+        </p:spPr>
+        <p:txBody>
+          <a:bodyPr wrap="square">
+            <a:spAutoFit/>
+          </a:bodyPr>
+          <a:lstStyle/>
+          <a:p>
+            <a:r>
+              <a:rPr sz="800">
+                <a:hlinkClick r:id="rId15"/>
+              </a:rPr>
+              <a:t>Lofar 1</a:t>
+            </a:r>
+          </a:p>
+          <a:p>
+            <a:r>
+              <a:rPr sz="800">
+                <a:hlinkClick r:id="rId16"/>
+              </a:rPr>
+              <a:t>Lofar 2</a:t>
+            </a:r>
+          </a:p>
+          <a:p>
+            <a:r>
+              <a:rPr sz="800">
+                <a:hlinkClick r:id="rId17"/>
+              </a:rPr>
+              <a:t>Lofar 3</a:t>
+            </a:r>
+          </a:p>
+          <a:p>
+            <a:r>
+              <a:rPr sz="800">
+                <a:hlinkClick r:id="rId18"/>
+              </a:rPr>
+              <a:t>Lofar 4</a:t>
+            </a:r>
+          </a:p>
+        </p:txBody>
+      </p:sp>
+      <p:sp>
+        <p:nvSpPr>
+          <p:cNvPr id="11" name="Rounded Rectangle 10">
+            <a:hlinkClick r:id="rId19"/>
+          </p:cNvPr>
+          <p:cNvSpPr/>
+          <p:nvPr/>
+        </p:nvSpPr>
+        <p:spPr>
+          <a:xfrm>
+            <a:off x="9531705" y="731520"/>
+            <a:ext cx="2200046" cy="365760"/>
+          </a:xfrm>
+          <a:prstGeom prst="roundRect">
+            <a:avLst/>
+          </a:prstGeom>
+          <a:solidFill>
+            <a:srgbClr val="E8EEF7"/>
+          </a:solidFill>
+          <a:ln>
+            <a:solidFill>
+              <a:srgbClr val="1F3A5F"/>
+            </a:solidFill>
+          </a:ln>
+        </p:spPr>
+        <p:style>
+          <a:lnRef idx="1">
+            <a:schemeClr val="accent1"/>
+          </a:lnRef>
+          <a:fillRef idx="3">
+            <a:schemeClr val="accent1"/>
+          </a:fillRef>
+          <a:effectRef idx="2">
+            <a:schemeClr val="accent1"/>
+          </a:effectRef>
+          <a:fontRef idx="minor">
+            <a:schemeClr val="lt1"/>
+          </a:fontRef>
+        </p:style>
+        <p:txBody>
+          <a:bodyPr rtlCol="0" anchor="ctr" lIns="45720" rIns="45720"/>
+          <a:lstStyle/>
+          <a:p>
+            <a:pPr algn="ctr"/>
+            <a:r>
+              <a:rPr sz="900">
+                <a:solidFill>
+                  <a:srgbClr val="1F3A5F"/>
+                </a:solidFill>
+              </a:rPr>
+              <a:t>Gram 42: FR Prometheus, Category 2, Coruscant</a:t>
+            </a:r>
+          </a:p>
+        </p:txBody>
+      </p:sp>
+      <p:sp>
+        <p:nvSpPr>
+          <p:cNvPr id="12" name="TextBox 11"/>
+          <p:cNvSpPr txBox="1"/>
+          <p:nvPr/>
+        </p:nvSpPr>
+        <p:spPr>
+          <a:xfrm>
+            <a:off x="9531705" y="1115568"/>
+            <a:ext cx="2200046" cy="1447800"/>
+          </a:xfrm>
+          <a:prstGeom prst="rect">
+            <a:avLst/>
+          </a:prstGeom>
+          <a:noFill/>
+        </p:spPr>
+        <p:txBody>
+          <a:bodyPr wrap="square">
+            <a:spAutoFit/>
+          </a:bodyPr>
+          <a:lstStyle/>
+          <a:p>
+            <a:r>
+              <a:rPr sz="800">
                 <a:hlinkClick r:id="rId20"/>
               </a:rPr>
               <a:t>Lofar 1</a:t>
@@ -6749,6 +6837,92 @@
                 <a:hlinkClick r:id="rId22"/>
               </a:rPr>
               <a:t>Lofar 3</a:t>
+            </a:r>
+          </a:p>
+        </p:txBody>
+      </p:sp>
+    </p:spTree>
+  </p:cSld>
+  <p:clrMapOvr>
+    <a:masterClrMapping/>
+  </p:clrMapOvr>
+</p:sld>
+</file>
+
+<file path=ppt/slides/slide5.xml><?xml version="1.0" encoding="utf-8"?>
+<p:sld xmlns:a="http://schemas.openxmlformats.org/drawingml/2006/main" xmlns:p="http://schemas.openxmlformats.org/presentationml/2006/main" xmlns:r="http://schemas.openxmlformats.org/officeDocument/2006/relationships">
+  <p:cSld>
+    <p:spTree>
+      <p:nvGrpSpPr>
+        <p:cNvPr id="1" name=""/>
+        <p:cNvGrpSpPr/>
+        <p:nvPr/>
+      </p:nvGrpSpPr>
+      <p:grpSpPr/>
+      <p:sp>
+        <p:nvSpPr>
+          <p:cNvPr id="2" name="TextBox 1"/>
+          <p:cNvSpPr txBox="1"/>
+          <p:nvPr/>
+        </p:nvSpPr>
+        <p:spPr>
+          <a:xfrm>
+            <a:off x="914400" y="2377440"/>
+            <a:ext cx="10360152" cy="1280160"/>
+          </a:xfrm>
+          <a:prstGeom prst="rect">
+            <a:avLst/>
+          </a:prstGeom>
+          <a:noFill/>
+        </p:spPr>
+        <p:txBody>
+          <a:bodyPr wrap="square">
+            <a:spAutoFit/>
+          </a:bodyPr>
+          <a:lstStyle/>
+          <a:p>
+            <a:pPr algn="ctr"/>
+            <a:r>
+              <a:rPr sz="4000" b="1">
+                <a:solidFill>
+                  <a:srgbClr val="1F3A5F"/>
+                </a:solidFill>
+              </a:rPr>
+              <a:t>End of Instructor Week 4 Grams_Updated</a:t>
+            </a:r>
+          </a:p>
+        </p:txBody>
+      </p:sp>
+      <p:sp>
+        <p:nvSpPr>
+          <p:cNvPr id="3" name="TextBox 2"/>
+          <p:cNvSpPr txBox="1"/>
+          <p:nvPr/>
+        </p:nvSpPr>
+        <p:spPr>
+          <a:xfrm>
+            <a:off x="914400" y="3840480"/>
+            <a:ext cx="10360152" cy="731520"/>
+          </a:xfrm>
+          <a:prstGeom prst="rect">
+            <a:avLst/>
+          </a:prstGeom>
+          <a:noFill/>
+        </p:spPr>
+        <p:txBody>
+          <a:bodyPr wrap="none">
+            <a:spAutoFit/>
+          </a:bodyPr>
+          <a:lstStyle/>
+          <a:p>
+            <a:pPr algn="ctr"/>
+            <a:r>
+              <a:rPr sz="2400">
+                <a:solidFill>
+                  <a:srgbClr val="1F3A5F"/>
+                </a:solidFill>
+              </a:rPr>
+              <a:t>Instructor Version</a:t>
             </a:r>
           </a:p>
         </p:txBody>
